--- a/presentation/0903_14_Introduction-to-Hash-Based-Signatures.pptx
+++ b/presentation/0903_14_Introduction-to-Hash-Based-Signatures.pptx
@@ -5,28 +5,21 @@
     <p:sldMasterId id="2147483648" r:id="rId1"/>
   </p:sldMasterIdLst>
   <p:notesMasterIdLst>
-    <p:notesMasterId r:id="rId21"/>
+    <p:notesMasterId r:id="rId14"/>
   </p:notesMasterIdLst>
   <p:sldIdLst>
     <p:sldId id="256" r:id="rId2"/>
     <p:sldId id="257" r:id="rId3"/>
-    <p:sldId id="258" r:id="rId4"/>
-    <p:sldId id="259" r:id="rId5"/>
-    <p:sldId id="260" r:id="rId6"/>
-    <p:sldId id="261" r:id="rId7"/>
-    <p:sldId id="262" r:id="rId8"/>
-    <p:sldId id="263" r:id="rId9"/>
-    <p:sldId id="264" r:id="rId10"/>
-    <p:sldId id="265" r:id="rId11"/>
-    <p:sldId id="266" r:id="rId12"/>
-    <p:sldId id="267" r:id="rId13"/>
-    <p:sldId id="268" r:id="rId14"/>
-    <p:sldId id="269" r:id="rId15"/>
-    <p:sldId id="270" r:id="rId16"/>
-    <p:sldId id="271" r:id="rId17"/>
-    <p:sldId id="272" r:id="rId18"/>
-    <p:sldId id="273" r:id="rId19"/>
-    <p:sldId id="274" r:id="rId20"/>
+    <p:sldId id="259" r:id="rId4"/>
+    <p:sldId id="260" r:id="rId5"/>
+    <p:sldId id="262" r:id="rId6"/>
+    <p:sldId id="264" r:id="rId7"/>
+    <p:sldId id="265" r:id="rId8"/>
+    <p:sldId id="267" r:id="rId9"/>
+    <p:sldId id="268" r:id="rId10"/>
+    <p:sldId id="270" r:id="rId11"/>
+    <p:sldId id="271" r:id="rId12"/>
+    <p:sldId id="274" r:id="rId13"/>
   </p:sldIdLst>
   <p:sldSz cx="12192000" cy="6858000"/>
   <p:notesSz cx="6858000" cy="9144000"/>
@@ -9698,7 +9691,7 @@
           <a:p>
             <a:r>
               <a:rPr dirty="0"/>
-              <a:t>세 계열의 공통 의존성</a:t>
+              <a:t>세 가지 표준 스킴</a:t>
             </a:r>
           </a:p>
         </p:txBody>
@@ -9720,19 +9713,19 @@
           <a:p>
             <a:r>
               <a:rPr sz="1800" dirty="0"/>
-              <a:t>RSA·타원곡선·격자 기반은 각각 수론 또는 격자 난제에 기반한다</a:t>
+              <a:t>LMS = Leighton-Micali Signature scheme</a:t>
             </a:r>
           </a:p>
           <a:p>
             <a:r>
               <a:rPr sz="1800" dirty="0"/>
-              <a:t>그런데 세 계열 모두 암호학적 해시 함수의 보안 속성에도 함께 의존한다</a:t>
+              <a:t>XMSS = eXtended Merkle Signature Scheme</a:t>
             </a:r>
           </a:p>
           <a:p>
             <a:r>
               <a:rPr sz="1800" dirty="0"/>
-              <a:t>해시 함수는 이미 신뢰의 기반이므로, 해시만으로 서명을 세우는 접근이 자연스럽다</a:t>
+              <a:t>SPHINCS+ = FIPS 205에서 SLH-DSA로 표준화</a:t>
             </a:r>
           </a:p>
         </p:txBody>
@@ -9755,891 +9748,6 @@
             <a:fld id="{4438A2D4-3867-488E-A04E-7BFFCAED45A6}" type="slidenum">
               <a:rPr lang="ko-KR" altLang="en-US" smtClean="0"/>
               <a:t>10</a:t>
-            </a:fld>
-            <a:endParaRPr lang="ko-KR" altLang="en-US" dirty="0"/>
-          </a:p>
-        </p:txBody>
-      </p:sp>
-    </p:spTree>
-  </p:cSld>
-  <p:clrMapOvr>
-    <a:masterClrMapping/>
-  </p:clrMapOvr>
-</p:sld>
-</file>
-
-<file path=ppt/slides/slide11.xml><?xml version="1.0" encoding="utf-8"?>
-<p:sld xmlns:a="http://schemas.openxmlformats.org/drawingml/2006/main" xmlns:r="http://schemas.openxmlformats.org/officeDocument/2006/relationships" xmlns:p="http://schemas.openxmlformats.org/presentationml/2006/main">
-  <p:cSld>
-    <p:spTree>
-      <p:nvGrpSpPr>
-        <p:cNvPr id="1" name=""/>
-        <p:cNvGrpSpPr/>
-        <p:nvPr/>
-      </p:nvGrpSpPr>
-      <p:grpSpPr>
-        <a:xfrm>
-          <a:off x="0" y="0"/>
-          <a:ext cx="0" cy="0"/>
-          <a:chOff x="0" y="0"/>
-          <a:chExt cx="0" cy="0"/>
-        </a:xfrm>
-      </p:grpSpPr>
-      <p:sp>
-        <p:nvSpPr>
-          <p:cNvPr id="2" name="Title 1"/>
-          <p:cNvSpPr>
-            <a:spLocks noGrp="1"/>
-          </p:cNvSpPr>
-          <p:nvPr>
-            <p:ph type="title"/>
-          </p:nvPr>
-        </p:nvSpPr>
-        <p:spPr/>
-        <p:txBody>
-          <a:bodyPr/>
-          <a:lstStyle/>
-          <a:p>
-            <a:r>
-              <a:rPr dirty="0"/>
-              <a:t>해시 기반 서명 스킴</a:t>
-            </a:r>
-          </a:p>
-        </p:txBody>
-      </p:sp>
-      <p:sp>
-        <p:nvSpPr>
-          <p:cNvPr id="3" name="Text Placeholder 2"/>
-          <p:cNvSpPr>
-            <a:spLocks noGrp="1"/>
-          </p:cNvSpPr>
-          <p:nvPr>
-            <p:ph type="body" idx="1"/>
-          </p:nvPr>
-        </p:nvSpPr>
-        <p:spPr/>
-        <p:txBody>
-          <a:bodyPr/>
-          <a:lstStyle/>
-          <a:p>
-            <a:r>
-              <a:rPr dirty="0"/>
-              <a:t>Part 4</a:t>
-            </a:r>
-          </a:p>
-        </p:txBody>
-      </p:sp>
-      <p:sp>
-        <p:nvSpPr>
-          <p:cNvPr id="4" name="슬라이드 번호 개체 틀"/>
-          <p:cNvSpPr>
-            <a:spLocks noGrp="1"/>
-          </p:cNvSpPr>
-          <p:nvPr>
-            <p:ph type="sldNum" sz="quarter" idx="12"/>
-          </p:nvPr>
-        </p:nvSpPr>
-        <p:spPr/>
-        <p:txBody>
-          <a:bodyPr/>
-          <a:lstStyle/>
-          <a:p>
-            <a:fld id="{4438A2D4-3867-488E-A04E-7BFFCAED45A6}" type="slidenum">
-              <a:rPr lang="ko-KR" altLang="en-US" smtClean="0"/>
-              <a:t>11</a:t>
-            </a:fld>
-            <a:endParaRPr lang="ko-KR" altLang="en-US" dirty="0"/>
-          </a:p>
-        </p:txBody>
-      </p:sp>
-    </p:spTree>
-  </p:cSld>
-  <p:clrMapOvr>
-    <a:masterClrMapping/>
-  </p:clrMapOvr>
-</p:sld>
-</file>
-
-<file path=ppt/slides/slide12.xml><?xml version="1.0" encoding="utf-8"?>
-<p:sld xmlns:a="http://schemas.openxmlformats.org/drawingml/2006/main" xmlns:r="http://schemas.openxmlformats.org/officeDocument/2006/relationships" xmlns:p="http://schemas.openxmlformats.org/presentationml/2006/main">
-  <p:cSld>
-    <p:spTree>
-      <p:nvGrpSpPr>
-        <p:cNvPr id="1" name=""/>
-        <p:cNvGrpSpPr/>
-        <p:nvPr/>
-      </p:nvGrpSpPr>
-      <p:grpSpPr>
-        <a:xfrm>
-          <a:off x="0" y="0"/>
-          <a:ext cx="0" cy="0"/>
-          <a:chOff x="0" y="0"/>
-          <a:chExt cx="0" cy="0"/>
-        </a:xfrm>
-      </p:grpSpPr>
-      <p:sp>
-        <p:nvSpPr>
-          <p:cNvPr id="2" name="Title 1"/>
-          <p:cNvSpPr>
-            <a:spLocks noGrp="1"/>
-          </p:cNvSpPr>
-          <p:nvPr>
-            <p:ph type="title"/>
-          </p:nvPr>
-        </p:nvSpPr>
-        <p:spPr/>
-        <p:txBody>
-          <a:bodyPr/>
-          <a:lstStyle/>
-          <a:p>
-            <a:r>
-              <a:rPr dirty="0"/>
-              <a:t>기원과 유일한 primitive</a:t>
-            </a:r>
-          </a:p>
-        </p:txBody>
-      </p:sp>
-      <p:sp>
-        <p:nvSpPr>
-          <p:cNvPr id="3" name="Content Placeholder 2"/>
-          <p:cNvSpPr>
-            <a:spLocks noGrp="1"/>
-          </p:cNvSpPr>
-          <p:nvPr>
-            <p:ph idx="1"/>
-          </p:nvPr>
-        </p:nvSpPr>
-        <p:spPr/>
-        <p:txBody>
-          <a:bodyPr/>
-          <a:lstStyle/>
-          <a:p>
-            <a:r>
-              <a:rPr sz="1800" dirty="0"/>
-              <a:t>Leslie Lamport가 1976년에 처음 제안했다</a:t>
-            </a:r>
-          </a:p>
-          <a:p>
-            <a:r>
-              <a:rPr sz="1800" dirty="0"/>
-              <a:t>Robert Winternitz와 Ralph Merkle가 1979년에 핵심 개선을 더했다</a:t>
-            </a:r>
-          </a:p>
-          <a:p>
-            <a:r>
-              <a:rPr sz="1800" dirty="0"/>
-              <a:t>핵심 개념은 1970년대 것이지만 양자 저항성 덕분에 지금도 유효하다</a:t>
-            </a:r>
-          </a:p>
-          <a:p>
-            <a:r>
-              <a:rPr sz="1800" dirty="0"/>
-              <a:t>쓰이는 암호 primitive는 해시 함수 하나뿐이다</a:t>
-            </a:r>
-          </a:p>
-        </p:txBody>
-      </p:sp>
-      <p:sp>
-        <p:nvSpPr>
-          <p:cNvPr id="4" name="슬라이드 번호 개체 틀"/>
-          <p:cNvSpPr>
-            <a:spLocks noGrp="1"/>
-          </p:cNvSpPr>
-          <p:nvPr>
-            <p:ph type="sldNum" sz="quarter" idx="12"/>
-          </p:nvPr>
-        </p:nvSpPr>
-        <p:spPr/>
-        <p:txBody>
-          <a:bodyPr/>
-          <a:lstStyle/>
-          <a:p>
-            <a:fld id="{4438A2D4-3867-488E-A04E-7BFFCAED45A6}" type="slidenum">
-              <a:rPr lang="ko-KR" altLang="en-US" smtClean="0"/>
-              <a:t>12</a:t>
-            </a:fld>
-            <a:endParaRPr lang="ko-KR" altLang="en-US" dirty="0"/>
-          </a:p>
-        </p:txBody>
-      </p:sp>
-    </p:spTree>
-  </p:cSld>
-  <p:clrMapOvr>
-    <a:masterClrMapping/>
-  </p:clrMapOvr>
-</p:sld>
-</file>
-
-<file path=ppt/slides/slide13.xml><?xml version="1.0" encoding="utf-8"?>
-<p:sld xmlns:a="http://schemas.openxmlformats.org/drawingml/2006/main" xmlns:r="http://schemas.openxmlformats.org/officeDocument/2006/relationships" xmlns:p="http://schemas.openxmlformats.org/presentationml/2006/main">
-  <p:cSld>
-    <p:spTree>
-      <p:nvGrpSpPr>
-        <p:cNvPr id="1" name=""/>
-        <p:cNvGrpSpPr/>
-        <p:nvPr/>
-      </p:nvGrpSpPr>
-      <p:grpSpPr>
-        <a:xfrm>
-          <a:off x="0" y="0"/>
-          <a:ext cx="0" cy="0"/>
-          <a:chOff x="0" y="0"/>
-          <a:chExt cx="0" cy="0"/>
-        </a:xfrm>
-      </p:grpSpPr>
-      <p:sp>
-        <p:nvSpPr>
-          <p:cNvPr id="2" name="Title 1"/>
-          <p:cNvSpPr>
-            <a:spLocks noGrp="1"/>
-          </p:cNvSpPr>
-          <p:nvPr>
-            <p:ph type="title"/>
-          </p:nvPr>
-        </p:nvSpPr>
-        <p:spPr/>
-        <p:txBody>
-          <a:bodyPr/>
-          <a:lstStyle/>
-          <a:p>
-            <a:r>
-              <a:rPr dirty="0"/>
-              <a:t>장점과 단점</a:t>
-            </a:r>
-          </a:p>
-        </p:txBody>
-      </p:sp>
-      <p:sp>
-        <p:nvSpPr>
-          <p:cNvPr id="3" name="Content Placeholder 2"/>
-          <p:cNvSpPr>
-            <a:spLocks noGrp="1"/>
-          </p:cNvSpPr>
-          <p:nvPr>
-            <p:ph idx="1"/>
-          </p:nvPr>
-        </p:nvSpPr>
-        <p:spPr/>
-        <p:txBody>
-          <a:bodyPr/>
-          <a:lstStyle/>
-          <a:p>
-            <a:r>
-              <a:rPr sz="1800" dirty="0"/>
-              <a:t>격자 기반은 근거 문제가 비교적 최신이라 장기 저항성에 추가 검증이 필요하다</a:t>
-            </a:r>
-          </a:p>
-          <a:p>
-            <a:r>
-              <a:rPr sz="1800" dirty="0"/>
-              <a:t>해시 기반은 수십 년간 연구된 표준 해시 속성에만 기댄다</a:t>
-            </a:r>
-          </a:p>
-        </p:txBody>
-      </p:sp>
-      <p:sp>
-        <p:nvSpPr>
-          <p:cNvPr id="4" name="슬라이드 번호 개체 틀"/>
-          <p:cNvSpPr>
-            <a:spLocks noGrp="1"/>
-          </p:cNvSpPr>
-          <p:nvPr>
-            <p:ph type="sldNum" sz="quarter" idx="12"/>
-          </p:nvPr>
-        </p:nvSpPr>
-        <p:spPr/>
-        <p:txBody>
-          <a:bodyPr/>
-          <a:lstStyle/>
-          <a:p>
-            <a:fld id="{4438A2D4-3867-488E-A04E-7BFFCAED45A6}" type="slidenum">
-              <a:rPr lang="ko-KR" altLang="en-US" smtClean="0"/>
-              <a:t>13</a:t>
-            </a:fld>
-            <a:endParaRPr lang="ko-KR" altLang="en-US" dirty="0"/>
-          </a:p>
-        </p:txBody>
-      </p:sp>
-      <p:graphicFrame>
-        <p:nvGraphicFramePr>
-          <p:cNvPr id="5" name="Table 4"/>
-          <p:cNvGraphicFramePr>
-            <a:graphicFrameLocks noGrp="1"/>
-          </p:cNvGraphicFramePr>
-          <p:nvPr>
-            <p:extLst>
-              <p:ext uri="{D42A27DB-BD31-4B8C-83A1-F6EECF244321}">
-                <p14:modId xmlns:p14="http://schemas.microsoft.com/office/powerpoint/2010/main" val="4009101425"/>
-              </p:ext>
-            </p:extLst>
-          </p:nvPr>
-        </p:nvGraphicFramePr>
-        <p:xfrm>
-          <a:off x="841248" y="3017520"/>
-          <a:ext cx="10515600" cy="1463040"/>
-        </p:xfrm>
-        <a:graphic>
-          <a:graphicData uri="http://schemas.openxmlformats.org/drawingml/2006/table">
-            <a:tbl>
-              <a:tblPr firstRow="1" bandRow="1">
-                <a:tableStyleId>{5C22544A-7EE6-4342-B048-85BDC9FD1C3A}</a:tableStyleId>
-              </a:tblPr>
-              <a:tblGrid>
-                <a:gridCol w="1645920">
-                  <a:extLst>
-                    <a:ext uri="{9D8B030D-6E8A-4147-A177-3AD203B41FA5}">
-                      <a16:colId xmlns:a16="http://schemas.microsoft.com/office/drawing/2014/main" val="20000"/>
-                    </a:ext>
-                  </a:extLst>
-                </a:gridCol>
-                <a:gridCol w="8869680">
-                  <a:extLst>
-                    <a:ext uri="{9D8B030D-6E8A-4147-A177-3AD203B41FA5}">
-                      <a16:colId xmlns:a16="http://schemas.microsoft.com/office/drawing/2014/main" val="20001"/>
-                    </a:ext>
-                  </a:extLst>
-                </a:gridCol>
-              </a:tblGrid>
-              <a:tr h="487680">
-                <a:tc>
-                  <a:txBody>
-                    <a:bodyPr/>
-                    <a:lstStyle/>
-                    <a:p>
-                      <a:pPr algn="ctr"/>
-                      <a:r>
-                        <a:rPr sz="1800" b="1" dirty="0">
-                          <a:solidFill>
-                            <a:schemeClr val="bg1"/>
-                          </a:solidFill>
-                        </a:rPr>
-                        <a:t>구분</a:t>
-                      </a:r>
-                    </a:p>
-                  </a:txBody>
-                  <a:tcPr anchor="ctr">
-                    <a:lnL w="12700" cap="flat" cmpd="sng" algn="ctr">
-                      <a:solidFill>
-                        <a:schemeClr val="tx1"/>
-                      </a:solidFill>
-                      <a:prstDash val="solid"/>
-                      <a:round/>
-                      <a:headEnd type="none" w="med" len="med"/>
-                      <a:tailEnd type="none" w="med" len="med"/>
-                    </a:lnL>
-                    <a:lnR w="12700" cap="flat" cmpd="sng" algn="ctr">
-                      <a:solidFill>
-                        <a:schemeClr val="tx1"/>
-                      </a:solidFill>
-                      <a:prstDash val="solid"/>
-                      <a:round/>
-                      <a:headEnd type="none" w="med" len="med"/>
-                      <a:tailEnd type="none" w="med" len="med"/>
-                    </a:lnR>
-                    <a:lnT w="12700" cap="flat" cmpd="sng" algn="ctr">
-                      <a:solidFill>
-                        <a:schemeClr val="tx1"/>
-                      </a:solidFill>
-                      <a:prstDash val="solid"/>
-                      <a:round/>
-                      <a:headEnd type="none" w="med" len="med"/>
-                      <a:tailEnd type="none" w="med" len="med"/>
-                    </a:lnT>
-                    <a:lnB w="12700" cap="flat" cmpd="sng" algn="ctr">
-                      <a:solidFill>
-                        <a:schemeClr val="tx1"/>
-                      </a:solidFill>
-                      <a:prstDash val="solid"/>
-                      <a:round/>
-                      <a:headEnd type="none" w="med" len="med"/>
-                      <a:tailEnd type="none" w="med" len="med"/>
-                    </a:lnB>
-                    <a:solidFill>
-                      <a:schemeClr val="accent2"/>
-                    </a:solidFill>
-                  </a:tcPr>
-                </a:tc>
-                <a:tc>
-                  <a:txBody>
-                    <a:bodyPr/>
-                    <a:lstStyle/>
-                    <a:p>
-                      <a:pPr algn="ctr"/>
-                      <a:r>
-                        <a:rPr sz="1800" b="1" dirty="0">
-                          <a:solidFill>
-                            <a:schemeClr val="bg1"/>
-                          </a:solidFill>
-                        </a:rPr>
-                        <a:t>내용</a:t>
-                      </a:r>
-                    </a:p>
-                  </a:txBody>
-                  <a:tcPr anchor="ctr">
-                    <a:lnL w="12700" cap="flat" cmpd="sng" algn="ctr">
-                      <a:solidFill>
-                        <a:schemeClr val="tx1"/>
-                      </a:solidFill>
-                      <a:prstDash val="solid"/>
-                      <a:round/>
-                      <a:headEnd type="none" w="med" len="med"/>
-                      <a:tailEnd type="none" w="med" len="med"/>
-                    </a:lnL>
-                    <a:lnR w="12700" cap="flat" cmpd="sng" algn="ctr">
-                      <a:solidFill>
-                        <a:schemeClr val="tx1"/>
-                      </a:solidFill>
-                      <a:prstDash val="solid"/>
-                      <a:round/>
-                      <a:headEnd type="none" w="med" len="med"/>
-                      <a:tailEnd type="none" w="med" len="med"/>
-                    </a:lnR>
-                    <a:lnT w="12700" cap="flat" cmpd="sng" algn="ctr">
-                      <a:solidFill>
-                        <a:schemeClr val="tx1"/>
-                      </a:solidFill>
-                      <a:prstDash val="solid"/>
-                      <a:round/>
-                      <a:headEnd type="none" w="med" len="med"/>
-                      <a:tailEnd type="none" w="med" len="med"/>
-                    </a:lnT>
-                    <a:lnB w="12700" cap="flat" cmpd="sng" algn="ctr">
-                      <a:solidFill>
-                        <a:schemeClr val="tx1"/>
-                      </a:solidFill>
-                      <a:prstDash val="solid"/>
-                      <a:round/>
-                      <a:headEnd type="none" w="med" len="med"/>
-                      <a:tailEnd type="none" w="med" len="med"/>
-                    </a:lnB>
-                    <a:solidFill>
-                      <a:schemeClr val="accent2"/>
-                    </a:solidFill>
-                  </a:tcPr>
-                </a:tc>
-                <a:extLst>
-                  <a:ext uri="{0D108BD9-81ED-4DB2-BD59-A6C34878D82A}">
-                    <a16:rowId xmlns:a16="http://schemas.microsoft.com/office/drawing/2014/main" val="10000"/>
-                  </a:ext>
-                </a:extLst>
-              </a:tr>
-              <a:tr h="487680">
-                <a:tc>
-                  <a:txBody>
-                    <a:bodyPr/>
-                    <a:lstStyle/>
-                    <a:p>
-                      <a:pPr algn="ctr"/>
-                      <a:r>
-                        <a:rPr sz="1800" dirty="0"/>
-                        <a:t>장점</a:t>
-                      </a:r>
-                    </a:p>
-                  </a:txBody>
-                  <a:tcPr anchor="ctr">
-                    <a:lnL w="12700" cap="flat" cmpd="sng" algn="ctr">
-                      <a:solidFill>
-                        <a:schemeClr val="tx1"/>
-                      </a:solidFill>
-                      <a:prstDash val="solid"/>
-                      <a:round/>
-                      <a:headEnd type="none" w="med" len="med"/>
-                      <a:tailEnd type="none" w="med" len="med"/>
-                    </a:lnL>
-                    <a:lnR w="12700" cap="flat" cmpd="sng" algn="ctr">
-                      <a:solidFill>
-                        <a:schemeClr val="tx1"/>
-                      </a:solidFill>
-                      <a:prstDash val="solid"/>
-                      <a:round/>
-                      <a:headEnd type="none" w="med" len="med"/>
-                      <a:tailEnd type="none" w="med" len="med"/>
-                    </a:lnR>
-                    <a:lnT w="12700" cap="flat" cmpd="sng" algn="ctr">
-                      <a:solidFill>
-                        <a:schemeClr val="tx1"/>
-                      </a:solidFill>
-                      <a:prstDash val="solid"/>
-                      <a:round/>
-                      <a:headEnd type="none" w="med" len="med"/>
-                      <a:tailEnd type="none" w="med" len="med"/>
-                    </a:lnT>
-                    <a:lnB w="12700" cap="flat" cmpd="sng" algn="ctr">
-                      <a:solidFill>
-                        <a:schemeClr val="tx1"/>
-                      </a:solidFill>
-                      <a:prstDash val="solid"/>
-                      <a:round/>
-                      <a:headEnd type="none" w="med" len="med"/>
-                      <a:tailEnd type="none" w="med" len="med"/>
-                    </a:lnB>
-                    <a:noFill/>
-                  </a:tcPr>
-                </a:tc>
-                <a:tc>
-                  <a:txBody>
-                    <a:bodyPr/>
-                    <a:lstStyle/>
-                    <a:p>
-                      <a:pPr algn="ctr"/>
-                      <a:r>
-                        <a:rPr sz="1800" dirty="0"/>
-                        <a:t>고전·양자 공격 모두에 대해 보안이 잘 이해된다</a:t>
-                      </a:r>
-                    </a:p>
-                  </a:txBody>
-                  <a:tcPr anchor="ctr">
-                    <a:lnL w="12700" cap="flat" cmpd="sng" algn="ctr">
-                      <a:solidFill>
-                        <a:schemeClr val="tx1"/>
-                      </a:solidFill>
-                      <a:prstDash val="solid"/>
-                      <a:round/>
-                      <a:headEnd type="none" w="med" len="med"/>
-                      <a:tailEnd type="none" w="med" len="med"/>
-                    </a:lnL>
-                    <a:lnR w="12700" cap="flat" cmpd="sng" algn="ctr">
-                      <a:solidFill>
-                        <a:schemeClr val="tx1"/>
-                      </a:solidFill>
-                      <a:prstDash val="solid"/>
-                      <a:round/>
-                      <a:headEnd type="none" w="med" len="med"/>
-                      <a:tailEnd type="none" w="med" len="med"/>
-                    </a:lnR>
-                    <a:lnT w="12700" cap="flat" cmpd="sng" algn="ctr">
-                      <a:solidFill>
-                        <a:schemeClr val="tx1"/>
-                      </a:solidFill>
-                      <a:prstDash val="solid"/>
-                      <a:round/>
-                      <a:headEnd type="none" w="med" len="med"/>
-                      <a:tailEnd type="none" w="med" len="med"/>
-                    </a:lnT>
-                    <a:lnB w="12700" cap="flat" cmpd="sng" algn="ctr">
-                      <a:solidFill>
-                        <a:schemeClr val="tx1"/>
-                      </a:solidFill>
-                      <a:prstDash val="solid"/>
-                      <a:round/>
-                      <a:headEnd type="none" w="med" len="med"/>
-                      <a:tailEnd type="none" w="med" len="med"/>
-                    </a:lnB>
-                    <a:noFill/>
-                  </a:tcPr>
-                </a:tc>
-                <a:extLst>
-                  <a:ext uri="{0D108BD9-81ED-4DB2-BD59-A6C34878D82A}">
-                    <a16:rowId xmlns:a16="http://schemas.microsoft.com/office/drawing/2014/main" val="10001"/>
-                  </a:ext>
-                </a:extLst>
-              </a:tr>
-              <a:tr h="487680">
-                <a:tc>
-                  <a:txBody>
-                    <a:bodyPr/>
-                    <a:lstStyle/>
-                    <a:p>
-                      <a:pPr algn="ctr"/>
-                      <a:r>
-                        <a:rPr sz="1800" dirty="0"/>
-                        <a:t>단점</a:t>
-                      </a:r>
-                    </a:p>
-                  </a:txBody>
-                  <a:tcPr anchor="ctr">
-                    <a:lnL w="12700" cap="flat" cmpd="sng" algn="ctr">
-                      <a:solidFill>
-                        <a:schemeClr val="tx1"/>
-                      </a:solidFill>
-                      <a:prstDash val="solid"/>
-                      <a:round/>
-                      <a:headEnd type="none" w="med" len="med"/>
-                      <a:tailEnd type="none" w="med" len="med"/>
-                    </a:lnL>
-                    <a:lnR w="12700" cap="flat" cmpd="sng" algn="ctr">
-                      <a:solidFill>
-                        <a:schemeClr val="tx1"/>
-                      </a:solidFill>
-                      <a:prstDash val="solid"/>
-                      <a:round/>
-                      <a:headEnd type="none" w="med" len="med"/>
-                      <a:tailEnd type="none" w="med" len="med"/>
-                    </a:lnR>
-                    <a:lnT w="12700" cap="flat" cmpd="sng" algn="ctr">
-                      <a:solidFill>
-                        <a:schemeClr val="tx1"/>
-                      </a:solidFill>
-                      <a:prstDash val="solid"/>
-                      <a:round/>
-                      <a:headEnd type="none" w="med" len="med"/>
-                      <a:tailEnd type="none" w="med" len="med"/>
-                    </a:lnT>
-                    <a:lnB w="12700" cap="flat" cmpd="sng" algn="ctr">
-                      <a:solidFill>
-                        <a:schemeClr val="tx1"/>
-                      </a:solidFill>
-                      <a:prstDash val="solid"/>
-                      <a:round/>
-                      <a:headEnd type="none" w="med" len="med"/>
-                      <a:tailEnd type="none" w="med" len="med"/>
-                    </a:lnB>
-                    <a:noFill/>
-                  </a:tcPr>
-                </a:tc>
-                <a:tc>
-                  <a:txBody>
-                    <a:bodyPr/>
-                    <a:lstStyle/>
-                    <a:p>
-                      <a:pPr algn="ctr"/>
-                      <a:r>
-                        <a:rPr sz="1800" dirty="0"/>
-                        <a:t>공개키와 서명의 크기가 크다</a:t>
-                      </a:r>
-                    </a:p>
-                  </a:txBody>
-                  <a:tcPr anchor="ctr">
-                    <a:lnL w="12700" cap="flat" cmpd="sng" algn="ctr">
-                      <a:solidFill>
-                        <a:schemeClr val="tx1"/>
-                      </a:solidFill>
-                      <a:prstDash val="solid"/>
-                      <a:round/>
-                      <a:headEnd type="none" w="med" len="med"/>
-                      <a:tailEnd type="none" w="med" len="med"/>
-                    </a:lnL>
-                    <a:lnR w="12700" cap="flat" cmpd="sng" algn="ctr">
-                      <a:solidFill>
-                        <a:schemeClr val="tx1"/>
-                      </a:solidFill>
-                      <a:prstDash val="solid"/>
-                      <a:round/>
-                      <a:headEnd type="none" w="med" len="med"/>
-                      <a:tailEnd type="none" w="med" len="med"/>
-                    </a:lnR>
-                    <a:lnT w="12700" cap="flat" cmpd="sng" algn="ctr">
-                      <a:solidFill>
-                        <a:schemeClr val="tx1"/>
-                      </a:solidFill>
-                      <a:prstDash val="solid"/>
-                      <a:round/>
-                      <a:headEnd type="none" w="med" len="med"/>
-                      <a:tailEnd type="none" w="med" len="med"/>
-                    </a:lnT>
-                    <a:lnB w="12700" cap="flat" cmpd="sng" algn="ctr">
-                      <a:solidFill>
-                        <a:schemeClr val="tx1"/>
-                      </a:solidFill>
-                      <a:prstDash val="solid"/>
-                      <a:round/>
-                      <a:headEnd type="none" w="med" len="med"/>
-                      <a:tailEnd type="none" w="med" len="med"/>
-                    </a:lnB>
-                    <a:noFill/>
-                  </a:tcPr>
-                </a:tc>
-                <a:extLst>
-                  <a:ext uri="{0D108BD9-81ED-4DB2-BD59-A6C34878D82A}">
-                    <a16:rowId xmlns:a16="http://schemas.microsoft.com/office/drawing/2014/main" val="10002"/>
-                  </a:ext>
-                </a:extLst>
-              </a:tr>
-            </a:tbl>
-          </a:graphicData>
-        </a:graphic>
-      </p:graphicFrame>
-    </p:spTree>
-  </p:cSld>
-  <p:clrMapOvr>
-    <a:masterClrMapping/>
-  </p:clrMapOvr>
-</p:sld>
-</file>
-
-<file path=ppt/slides/slide14.xml><?xml version="1.0" encoding="utf-8"?>
-<p:sld xmlns:a="http://schemas.openxmlformats.org/drawingml/2006/main" xmlns:r="http://schemas.openxmlformats.org/officeDocument/2006/relationships" xmlns:p="http://schemas.openxmlformats.org/presentationml/2006/main">
-  <p:cSld>
-    <p:spTree>
-      <p:nvGrpSpPr>
-        <p:cNvPr id="1" name=""/>
-        <p:cNvGrpSpPr/>
-        <p:nvPr/>
-      </p:nvGrpSpPr>
-      <p:grpSpPr>
-        <a:xfrm>
-          <a:off x="0" y="0"/>
-          <a:ext cx="0" cy="0"/>
-          <a:chOff x="0" y="0"/>
-          <a:chExt cx="0" cy="0"/>
-        </a:xfrm>
-      </p:grpSpPr>
-      <p:sp>
-        <p:nvSpPr>
-          <p:cNvPr id="2" name="Title 1"/>
-          <p:cNvSpPr>
-            <a:spLocks noGrp="1"/>
-          </p:cNvSpPr>
-          <p:nvPr>
-            <p:ph type="title"/>
-          </p:nvPr>
-        </p:nvSpPr>
-        <p:spPr/>
-        <p:txBody>
-          <a:bodyPr/>
-          <a:lstStyle/>
-          <a:p>
-            <a:r>
-              <a:rPr dirty="0"/>
-              <a:t>표준화된 해시 기반 서명 스킴</a:t>
-            </a:r>
-          </a:p>
-        </p:txBody>
-      </p:sp>
-      <p:sp>
-        <p:nvSpPr>
-          <p:cNvPr id="3" name="Text Placeholder 2"/>
-          <p:cNvSpPr>
-            <a:spLocks noGrp="1"/>
-          </p:cNvSpPr>
-          <p:nvPr>
-            <p:ph type="body" idx="1"/>
-          </p:nvPr>
-        </p:nvSpPr>
-        <p:spPr/>
-        <p:txBody>
-          <a:bodyPr/>
-          <a:lstStyle/>
-          <a:p>
-            <a:r>
-              <a:rPr dirty="0"/>
-              <a:t>Part 5</a:t>
-            </a:r>
-          </a:p>
-        </p:txBody>
-      </p:sp>
-      <p:sp>
-        <p:nvSpPr>
-          <p:cNvPr id="4" name="슬라이드 번호 개체 틀"/>
-          <p:cNvSpPr>
-            <a:spLocks noGrp="1"/>
-          </p:cNvSpPr>
-          <p:nvPr>
-            <p:ph type="sldNum" sz="quarter" idx="12"/>
-          </p:nvPr>
-        </p:nvSpPr>
-        <p:spPr/>
-        <p:txBody>
-          <a:bodyPr/>
-          <a:lstStyle/>
-          <a:p>
-            <a:fld id="{4438A2D4-3867-488E-A04E-7BFFCAED45A6}" type="slidenum">
-              <a:rPr lang="ko-KR" altLang="en-US" smtClean="0"/>
-              <a:t>14</a:t>
-            </a:fld>
-            <a:endParaRPr lang="ko-KR" altLang="en-US" dirty="0"/>
-          </a:p>
-        </p:txBody>
-      </p:sp>
-    </p:spTree>
-  </p:cSld>
-  <p:clrMapOvr>
-    <a:masterClrMapping/>
-  </p:clrMapOvr>
-</p:sld>
-</file>
-
-<file path=ppt/slides/slide15.xml><?xml version="1.0" encoding="utf-8"?>
-<p:sld xmlns:a="http://schemas.openxmlformats.org/drawingml/2006/main" xmlns:r="http://schemas.openxmlformats.org/officeDocument/2006/relationships" xmlns:p="http://schemas.openxmlformats.org/presentationml/2006/main">
-  <p:cSld>
-    <p:spTree>
-      <p:nvGrpSpPr>
-        <p:cNvPr id="1" name=""/>
-        <p:cNvGrpSpPr/>
-        <p:nvPr/>
-      </p:nvGrpSpPr>
-      <p:grpSpPr>
-        <a:xfrm>
-          <a:off x="0" y="0"/>
-          <a:ext cx="0" cy="0"/>
-          <a:chOff x="0" y="0"/>
-          <a:chExt cx="0" cy="0"/>
-        </a:xfrm>
-      </p:grpSpPr>
-      <p:sp>
-        <p:nvSpPr>
-          <p:cNvPr id="2" name="Title 1"/>
-          <p:cNvSpPr>
-            <a:spLocks noGrp="1"/>
-          </p:cNvSpPr>
-          <p:nvPr>
-            <p:ph type="title"/>
-          </p:nvPr>
-        </p:nvSpPr>
-        <p:spPr/>
-        <p:txBody>
-          <a:bodyPr/>
-          <a:lstStyle/>
-          <a:p>
-            <a:r>
-              <a:rPr dirty="0"/>
-              <a:t>세 가지 표준 스킴</a:t>
-            </a:r>
-          </a:p>
-        </p:txBody>
-      </p:sp>
-      <p:sp>
-        <p:nvSpPr>
-          <p:cNvPr id="3" name="Content Placeholder 2"/>
-          <p:cNvSpPr>
-            <a:spLocks noGrp="1"/>
-          </p:cNvSpPr>
-          <p:nvPr>
-            <p:ph idx="1"/>
-          </p:nvPr>
-        </p:nvSpPr>
-        <p:spPr/>
-        <p:txBody>
-          <a:bodyPr/>
-          <a:lstStyle/>
-          <a:p>
-            <a:r>
-              <a:rPr sz="1800" dirty="0"/>
-              <a:t>LMS = Leighton-Micali Signature scheme</a:t>
-            </a:r>
-          </a:p>
-          <a:p>
-            <a:r>
-              <a:rPr sz="1800" dirty="0"/>
-              <a:t>XMSS = eXtended Merkle Signature Scheme</a:t>
-            </a:r>
-          </a:p>
-          <a:p>
-            <a:r>
-              <a:rPr sz="1800" dirty="0"/>
-              <a:t>SPHINCS+ = FIPS 205에서 SLH-DSA로 표준화</a:t>
-            </a:r>
-          </a:p>
-        </p:txBody>
-      </p:sp>
-      <p:sp>
-        <p:nvSpPr>
-          <p:cNvPr id="4" name="슬라이드 번호 개체 틀"/>
-          <p:cNvSpPr>
-            <a:spLocks noGrp="1"/>
-          </p:cNvSpPr>
-          <p:nvPr>
-            <p:ph type="sldNum" sz="quarter" idx="12"/>
-          </p:nvPr>
-        </p:nvSpPr>
-        <p:spPr/>
-        <p:txBody>
-          <a:bodyPr/>
-          <a:lstStyle/>
-          <a:p>
-            <a:fld id="{4438A2D4-3867-488E-A04E-7BFFCAED45A6}" type="slidenum">
-              <a:rPr lang="ko-KR" altLang="en-US" smtClean="0"/>
-              <a:t>15</a:t>
             </a:fld>
             <a:endParaRPr lang="ko-KR" altLang="en-US" dirty="0"/>
           </a:p>
@@ -11374,7 +10482,7 @@
 </p:sld>
 </file>
 
-<file path=ppt/slides/slide16.xml><?xml version="1.0" encoding="utf-8"?>
+<file path=ppt/slides/slide11.xml><?xml version="1.0" encoding="utf-8"?>
 <p:sld xmlns:a="http://schemas.openxmlformats.org/drawingml/2006/main" xmlns:r="http://schemas.openxmlformats.org/officeDocument/2006/relationships" xmlns:p="http://schemas.openxmlformats.org/presentationml/2006/main">
   <p:cSld>
     <p:spTree>
@@ -11452,7 +10560,7 @@
           <a:p>
             <a:fld id="{4438A2D4-3867-488E-A04E-7BFFCAED45A6}" type="slidenum">
               <a:rPr lang="ko-KR" altLang="en-US" smtClean="0"/>
-              <a:t>16</a:t>
+              <a:t>11</a:t>
             </a:fld>
             <a:endParaRPr lang="ko-KR" altLang="en-US" dirty="0"/>
           </a:p>
@@ -11467,13 +10575,13 @@
           <p:nvPr>
             <p:extLst>
               <p:ext uri="{D42A27DB-BD31-4B8C-83A1-F6EECF244321}">
-                <p14:modId xmlns:p14="http://schemas.microsoft.com/office/powerpoint/2010/main" val="2746336050"/>
+                <p14:modId xmlns:p14="http://schemas.microsoft.com/office/powerpoint/2010/main" val="414259285"/>
               </p:ext>
             </p:extLst>
           </p:nvPr>
         </p:nvGraphicFramePr>
         <p:xfrm>
-          <a:off x="841248" y="2377440"/>
+          <a:off x="838200" y="2914346"/>
           <a:ext cx="10515600" cy="1463040"/>
         </p:xfrm>
         <a:graphic>
@@ -12024,7 +11132,7 @@
 </p:sld>
 </file>
 
-<file path=ppt/slides/slide17.xml><?xml version="1.0" encoding="utf-8"?>
+<file path=ppt/slides/slide12.xml><?xml version="1.0" encoding="utf-8"?>
 <p:sld xmlns:a="http://schemas.openxmlformats.org/drawingml/2006/main" xmlns:r="http://schemas.openxmlformats.org/officeDocument/2006/relationships" xmlns:p="http://schemas.openxmlformats.org/presentationml/2006/main">
   <p:cSld>
     <p:spTree>
@@ -12058,19 +11166,19 @@
           <a:p>
             <a:r>
               <a:rPr dirty="0"/>
-              <a:t>로드맵</a:t>
+              <a:t>마무리</a:t>
             </a:r>
           </a:p>
         </p:txBody>
       </p:sp>
       <p:sp>
         <p:nvSpPr>
-          <p:cNvPr id="3" name="Text Placeholder 2"/>
+          <p:cNvPr id="3" name="Content Placeholder 2"/>
           <p:cNvSpPr>
             <a:spLocks noGrp="1"/>
           </p:cNvSpPr>
           <p:nvPr>
-            <p:ph type="body" idx="1"/>
+            <p:ph idx="1"/>
           </p:nvPr>
         </p:nvSpPr>
         <p:spPr/>
@@ -12079,8 +11187,32 @@
           <a:lstStyle/>
           <a:p>
             <a:r>
-              <a:rPr dirty="0"/>
-              <a:t>Part 6</a:t>
+              <a:rPr sz="1800" dirty="0"/>
+              <a:t>서명 스킴은 키 생성·서명·검증 세 알고리즘으로 인증을 제공한다</a:t>
+            </a:r>
+          </a:p>
+          <a:p>
+            <a:r>
+              <a:rPr sz="1800" dirty="0"/>
+              <a:t>보안 기준은 선택 메시지 공격 하 존재적 위조 불가능성이다</a:t>
+            </a:r>
+          </a:p>
+          <a:p>
+            <a:r>
+              <a:rPr sz="1800" dirty="0"/>
+              <a:t>RSA·타원곡선은 양자 컴퓨터에 붕괴하고, 격자 기반은 안전하나 근거 문제가 최신이다</a:t>
+            </a:r>
+          </a:p>
+          <a:p>
+            <a:r>
+              <a:rPr sz="1800" dirty="0"/>
+              <a:t>해시 기반은 해시 함수 하나에만 의존해 보안이 잘 이해되지만 키·서명이 크다</a:t>
+            </a:r>
+          </a:p>
+          <a:p>
+            <a:r>
+              <a:rPr sz="1800" dirty="0"/>
+              <a:t>표준은 LMS·XMSS(상태 유지형)와 SPHINCS+(무상태)이다</a:t>
             </a:r>
           </a:p>
         </p:txBody>
@@ -12102,1048 +11234,7 @@
           <a:p>
             <a:fld id="{4438A2D4-3867-488E-A04E-7BFFCAED45A6}" type="slidenum">
               <a:rPr lang="ko-KR" altLang="en-US" smtClean="0"/>
-              <a:t>17</a:t>
-            </a:fld>
-            <a:endParaRPr lang="ko-KR" altLang="en-US" dirty="0"/>
-          </a:p>
-        </p:txBody>
-      </p:sp>
-    </p:spTree>
-  </p:cSld>
-  <p:clrMapOvr>
-    <a:masterClrMapping/>
-  </p:clrMapOvr>
-</p:sld>
-</file>
-
-<file path=ppt/slides/slide18.xml><?xml version="1.0" encoding="utf-8"?>
-<p:sld xmlns:a="http://schemas.openxmlformats.org/drawingml/2006/main" xmlns:r="http://schemas.openxmlformats.org/officeDocument/2006/relationships" xmlns:p="http://schemas.openxmlformats.org/presentationml/2006/main">
-  <p:cSld>
-    <p:spTree>
-      <p:nvGrpSpPr>
-        <p:cNvPr id="1" name=""/>
-        <p:cNvGrpSpPr/>
-        <p:nvPr/>
-      </p:nvGrpSpPr>
-      <p:grpSpPr>
-        <a:xfrm>
-          <a:off x="0" y="0"/>
-          <a:ext cx="0" cy="0"/>
-          <a:chOff x="0" y="0"/>
-          <a:chExt cx="0" cy="0"/>
-        </a:xfrm>
-      </p:grpSpPr>
-      <p:sp>
-        <p:nvSpPr>
-          <p:cNvPr id="2" name="Title 1"/>
-          <p:cNvSpPr>
-            <a:spLocks noGrp="1"/>
-          </p:cNvSpPr>
-          <p:nvPr>
-            <p:ph type="title"/>
-          </p:nvPr>
-        </p:nvSpPr>
-        <p:spPr/>
-        <p:txBody>
-          <a:bodyPr/>
-          <a:lstStyle/>
-          <a:p>
-            <a:r>
-              <a:rPr dirty="0"/>
-              <a:t>코스 로드맵</a:t>
-            </a:r>
-          </a:p>
-        </p:txBody>
-      </p:sp>
-      <p:sp>
-        <p:nvSpPr>
-          <p:cNvPr id="3" name="Content Placeholder 2"/>
-          <p:cNvSpPr>
-            <a:spLocks noGrp="1"/>
-          </p:cNvSpPr>
-          <p:nvPr>
-            <p:ph idx="1"/>
-          </p:nvPr>
-        </p:nvSpPr>
-        <p:spPr/>
-        <p:txBody>
-          <a:bodyPr/>
-          <a:lstStyle/>
-          <a:p>
-            <a:r>
-              <a:rPr sz="1800" dirty="0"/>
-              <a:t>이 코스는 여섯 개의 영상으로 이어진다</a:t>
-            </a:r>
-          </a:p>
-        </p:txBody>
-      </p:sp>
-      <p:sp>
-        <p:nvSpPr>
-          <p:cNvPr id="4" name="슬라이드 번호 개체 틀"/>
-          <p:cNvSpPr>
-            <a:spLocks noGrp="1"/>
-          </p:cNvSpPr>
-          <p:nvPr>
-            <p:ph type="sldNum" sz="quarter" idx="12"/>
-          </p:nvPr>
-        </p:nvSpPr>
-        <p:spPr/>
-        <p:txBody>
-          <a:bodyPr/>
-          <a:lstStyle/>
-          <a:p>
-            <a:fld id="{4438A2D4-3867-488E-A04E-7BFFCAED45A6}" type="slidenum">
-              <a:rPr lang="ko-KR" altLang="en-US" smtClean="0"/>
-              <a:t>18</a:t>
-            </a:fld>
-            <a:endParaRPr lang="ko-KR" altLang="en-US" dirty="0"/>
-          </a:p>
-        </p:txBody>
-      </p:sp>
-      <p:graphicFrame>
-        <p:nvGraphicFramePr>
-          <p:cNvPr id="5" name="Table 4"/>
-          <p:cNvGraphicFramePr>
-            <a:graphicFrameLocks noGrp="1"/>
-          </p:cNvGraphicFramePr>
-          <p:nvPr>
-            <p:extLst>
-              <p:ext uri="{D42A27DB-BD31-4B8C-83A1-F6EECF244321}">
-                <p14:modId xmlns:p14="http://schemas.microsoft.com/office/powerpoint/2010/main" val="875950975"/>
-              </p:ext>
-            </p:extLst>
-          </p:nvPr>
-        </p:nvGraphicFramePr>
-        <p:xfrm>
-          <a:off x="841248" y="2103120"/>
-          <a:ext cx="10515600" cy="2743200"/>
-        </p:xfrm>
-        <a:graphic>
-          <a:graphicData uri="http://schemas.openxmlformats.org/drawingml/2006/table">
-            <a:tbl>
-              <a:tblPr firstRow="1" bandRow="1">
-                <a:tableStyleId>{5C22544A-7EE6-4342-B048-85BDC9FD1C3A}</a:tableStyleId>
-              </a:tblPr>
-              <a:tblGrid>
-                <a:gridCol w="1280160">
-                  <a:extLst>
-                    <a:ext uri="{9D8B030D-6E8A-4147-A177-3AD203B41FA5}">
-                      <a16:colId xmlns:a16="http://schemas.microsoft.com/office/drawing/2014/main" val="20000"/>
-                    </a:ext>
-                  </a:extLst>
-                </a:gridCol>
-                <a:gridCol w="9235440">
-                  <a:extLst>
-                    <a:ext uri="{9D8B030D-6E8A-4147-A177-3AD203B41FA5}">
-                      <a16:colId xmlns:a16="http://schemas.microsoft.com/office/drawing/2014/main" val="20001"/>
-                    </a:ext>
-                  </a:extLst>
-                </a:gridCol>
-              </a:tblGrid>
-              <a:tr h="391885">
-                <a:tc>
-                  <a:txBody>
-                    <a:bodyPr/>
-                    <a:lstStyle/>
-                    <a:p>
-                      <a:pPr algn="ctr"/>
-                      <a:r>
-                        <a:rPr sz="1800" b="1" dirty="0">
-                          <a:solidFill>
-                            <a:schemeClr val="bg1"/>
-                          </a:solidFill>
-                        </a:rPr>
-                        <a:t>영상</a:t>
-                      </a:r>
-                    </a:p>
-                  </a:txBody>
-                  <a:tcPr anchor="ctr">
-                    <a:lnL w="12700" cap="flat" cmpd="sng" algn="ctr">
-                      <a:solidFill>
-                        <a:schemeClr val="tx1"/>
-                      </a:solidFill>
-                      <a:prstDash val="solid"/>
-                      <a:round/>
-                      <a:headEnd type="none" w="med" len="med"/>
-                      <a:tailEnd type="none" w="med" len="med"/>
-                    </a:lnL>
-                    <a:lnR w="12700" cap="flat" cmpd="sng" algn="ctr">
-                      <a:solidFill>
-                        <a:schemeClr val="tx1"/>
-                      </a:solidFill>
-                      <a:prstDash val="solid"/>
-                      <a:round/>
-                      <a:headEnd type="none" w="med" len="med"/>
-                      <a:tailEnd type="none" w="med" len="med"/>
-                    </a:lnR>
-                    <a:lnT w="12700" cap="flat" cmpd="sng" algn="ctr">
-                      <a:solidFill>
-                        <a:schemeClr val="tx1"/>
-                      </a:solidFill>
-                      <a:prstDash val="solid"/>
-                      <a:round/>
-                      <a:headEnd type="none" w="med" len="med"/>
-                      <a:tailEnd type="none" w="med" len="med"/>
-                    </a:lnT>
-                    <a:lnB w="12700" cap="flat" cmpd="sng" algn="ctr">
-                      <a:solidFill>
-                        <a:schemeClr val="tx1"/>
-                      </a:solidFill>
-                      <a:prstDash val="solid"/>
-                      <a:round/>
-                      <a:headEnd type="none" w="med" len="med"/>
-                      <a:tailEnd type="none" w="med" len="med"/>
-                    </a:lnB>
-                    <a:solidFill>
-                      <a:schemeClr val="accent2"/>
-                    </a:solidFill>
-                  </a:tcPr>
-                </a:tc>
-                <a:tc>
-                  <a:txBody>
-                    <a:bodyPr/>
-                    <a:lstStyle/>
-                    <a:p>
-                      <a:pPr algn="ctr"/>
-                      <a:r>
-                        <a:rPr sz="1800" b="1" dirty="0">
-                          <a:solidFill>
-                            <a:schemeClr val="bg1"/>
-                          </a:solidFill>
-                        </a:rPr>
-                        <a:t>주제</a:t>
-                      </a:r>
-                    </a:p>
-                  </a:txBody>
-                  <a:tcPr anchor="ctr">
-                    <a:lnL w="12700" cap="flat" cmpd="sng" algn="ctr">
-                      <a:solidFill>
-                        <a:schemeClr val="tx1"/>
-                      </a:solidFill>
-                      <a:prstDash val="solid"/>
-                      <a:round/>
-                      <a:headEnd type="none" w="med" len="med"/>
-                      <a:tailEnd type="none" w="med" len="med"/>
-                    </a:lnL>
-                    <a:lnR w="12700" cap="flat" cmpd="sng" algn="ctr">
-                      <a:solidFill>
-                        <a:schemeClr val="tx1"/>
-                      </a:solidFill>
-                      <a:prstDash val="solid"/>
-                      <a:round/>
-                      <a:headEnd type="none" w="med" len="med"/>
-                      <a:tailEnd type="none" w="med" len="med"/>
-                    </a:lnR>
-                    <a:lnT w="12700" cap="flat" cmpd="sng" algn="ctr">
-                      <a:solidFill>
-                        <a:schemeClr val="tx1"/>
-                      </a:solidFill>
-                      <a:prstDash val="solid"/>
-                      <a:round/>
-                      <a:headEnd type="none" w="med" len="med"/>
-                      <a:tailEnd type="none" w="med" len="med"/>
-                    </a:lnT>
-                    <a:lnB w="12700" cap="flat" cmpd="sng" algn="ctr">
-                      <a:solidFill>
-                        <a:schemeClr val="tx1"/>
-                      </a:solidFill>
-                      <a:prstDash val="solid"/>
-                      <a:round/>
-                      <a:headEnd type="none" w="med" len="med"/>
-                      <a:tailEnd type="none" w="med" len="med"/>
-                    </a:lnB>
-                    <a:solidFill>
-                      <a:schemeClr val="accent2"/>
-                    </a:solidFill>
-                  </a:tcPr>
-                </a:tc>
-                <a:extLst>
-                  <a:ext uri="{0D108BD9-81ED-4DB2-BD59-A6C34878D82A}">
-                    <a16:rowId xmlns:a16="http://schemas.microsoft.com/office/drawing/2014/main" val="10000"/>
-                  </a:ext>
-                </a:extLst>
-              </a:tr>
-              <a:tr h="391885">
-                <a:tc>
-                  <a:txBody>
-                    <a:bodyPr/>
-                    <a:lstStyle/>
-                    <a:p>
-                      <a:pPr algn="ctr"/>
-                      <a:r>
-                        <a:rPr sz="1800" dirty="0"/>
-                        <a:t>V1</a:t>
-                      </a:r>
-                    </a:p>
-                  </a:txBody>
-                  <a:tcPr anchor="ctr">
-                    <a:lnL w="12700" cap="flat" cmpd="sng" algn="ctr">
-                      <a:solidFill>
-                        <a:schemeClr val="tx1"/>
-                      </a:solidFill>
-                      <a:prstDash val="solid"/>
-                      <a:round/>
-                      <a:headEnd type="none" w="med" len="med"/>
-                      <a:tailEnd type="none" w="med" len="med"/>
-                    </a:lnL>
-                    <a:lnR w="12700" cap="flat" cmpd="sng" algn="ctr">
-                      <a:solidFill>
-                        <a:schemeClr val="tx1"/>
-                      </a:solidFill>
-                      <a:prstDash val="solid"/>
-                      <a:round/>
-                      <a:headEnd type="none" w="med" len="med"/>
-                      <a:tailEnd type="none" w="med" len="med"/>
-                    </a:lnR>
-                    <a:lnT w="12700" cap="flat" cmpd="sng" algn="ctr">
-                      <a:solidFill>
-                        <a:schemeClr val="tx1"/>
-                      </a:solidFill>
-                      <a:prstDash val="solid"/>
-                      <a:round/>
-                      <a:headEnd type="none" w="med" len="med"/>
-                      <a:tailEnd type="none" w="med" len="med"/>
-                    </a:lnT>
-                    <a:lnB w="12700" cap="flat" cmpd="sng" algn="ctr">
-                      <a:solidFill>
-                        <a:schemeClr val="tx1"/>
-                      </a:solidFill>
-                      <a:prstDash val="solid"/>
-                      <a:round/>
-                      <a:headEnd type="none" w="med" len="med"/>
-                      <a:tailEnd type="none" w="med" len="med"/>
-                    </a:lnB>
-                    <a:noFill/>
-                  </a:tcPr>
-                </a:tc>
-                <a:tc>
-                  <a:txBody>
-                    <a:bodyPr/>
-                    <a:lstStyle/>
-                    <a:p>
-                      <a:pPr algn="ctr"/>
-                      <a:r>
-                        <a:rPr sz="1800" dirty="0"/>
-                        <a:t>도입 (오늘)</a:t>
-                      </a:r>
-                    </a:p>
-                  </a:txBody>
-                  <a:tcPr anchor="ctr">
-                    <a:lnL w="12700" cap="flat" cmpd="sng" algn="ctr">
-                      <a:solidFill>
-                        <a:schemeClr val="tx1"/>
-                      </a:solidFill>
-                      <a:prstDash val="solid"/>
-                      <a:round/>
-                      <a:headEnd type="none" w="med" len="med"/>
-                      <a:tailEnd type="none" w="med" len="med"/>
-                    </a:lnL>
-                    <a:lnR w="12700" cap="flat" cmpd="sng" algn="ctr">
-                      <a:solidFill>
-                        <a:schemeClr val="tx1"/>
-                      </a:solidFill>
-                      <a:prstDash val="solid"/>
-                      <a:round/>
-                      <a:headEnd type="none" w="med" len="med"/>
-                      <a:tailEnd type="none" w="med" len="med"/>
-                    </a:lnR>
-                    <a:lnT w="12700" cap="flat" cmpd="sng" algn="ctr">
-                      <a:solidFill>
-                        <a:schemeClr val="tx1"/>
-                      </a:solidFill>
-                      <a:prstDash val="solid"/>
-                      <a:round/>
-                      <a:headEnd type="none" w="med" len="med"/>
-                      <a:tailEnd type="none" w="med" len="med"/>
-                    </a:lnT>
-                    <a:lnB w="12700" cap="flat" cmpd="sng" algn="ctr">
-                      <a:solidFill>
-                        <a:schemeClr val="tx1"/>
-                      </a:solidFill>
-                      <a:prstDash val="solid"/>
-                      <a:round/>
-                      <a:headEnd type="none" w="med" len="med"/>
-                      <a:tailEnd type="none" w="med" len="med"/>
-                    </a:lnB>
-                    <a:noFill/>
-                  </a:tcPr>
-                </a:tc>
-                <a:extLst>
-                  <a:ext uri="{0D108BD9-81ED-4DB2-BD59-A6C34878D82A}">
-                    <a16:rowId xmlns:a16="http://schemas.microsoft.com/office/drawing/2014/main" val="10001"/>
-                  </a:ext>
-                </a:extLst>
-              </a:tr>
-              <a:tr h="391885">
-                <a:tc>
-                  <a:txBody>
-                    <a:bodyPr/>
-                    <a:lstStyle/>
-                    <a:p>
-                      <a:pPr algn="ctr"/>
-                      <a:r>
-                        <a:rPr sz="1800" dirty="0"/>
-                        <a:t>V2</a:t>
-                      </a:r>
-                    </a:p>
-                  </a:txBody>
-                  <a:tcPr anchor="ctr">
-                    <a:lnL w="12700" cap="flat" cmpd="sng" algn="ctr">
-                      <a:solidFill>
-                        <a:schemeClr val="tx1"/>
-                      </a:solidFill>
-                      <a:prstDash val="solid"/>
-                      <a:round/>
-                      <a:headEnd type="none" w="med" len="med"/>
-                      <a:tailEnd type="none" w="med" len="med"/>
-                    </a:lnL>
-                    <a:lnR w="12700" cap="flat" cmpd="sng" algn="ctr">
-                      <a:solidFill>
-                        <a:schemeClr val="tx1"/>
-                      </a:solidFill>
-                      <a:prstDash val="solid"/>
-                      <a:round/>
-                      <a:headEnd type="none" w="med" len="med"/>
-                      <a:tailEnd type="none" w="med" len="med"/>
-                    </a:lnR>
-                    <a:lnT w="12700" cap="flat" cmpd="sng" algn="ctr">
-                      <a:solidFill>
-                        <a:schemeClr val="tx1"/>
-                      </a:solidFill>
-                      <a:prstDash val="solid"/>
-                      <a:round/>
-                      <a:headEnd type="none" w="med" len="med"/>
-                      <a:tailEnd type="none" w="med" len="med"/>
-                    </a:lnT>
-                    <a:lnB w="12700" cap="flat" cmpd="sng" algn="ctr">
-                      <a:solidFill>
-                        <a:schemeClr val="tx1"/>
-                      </a:solidFill>
-                      <a:prstDash val="solid"/>
-                      <a:round/>
-                      <a:headEnd type="none" w="med" len="med"/>
-                      <a:tailEnd type="none" w="med" len="med"/>
-                    </a:lnB>
-                    <a:noFill/>
-                  </a:tcPr>
-                </a:tc>
-                <a:tc>
-                  <a:txBody>
-                    <a:bodyPr/>
-                    <a:lstStyle/>
-                    <a:p>
-                      <a:pPr algn="ctr"/>
-                      <a:r>
-                        <a:rPr sz="1800" dirty="0"/>
-                        <a:t>해시 함수의 보안 속성</a:t>
-                      </a:r>
-                    </a:p>
-                  </a:txBody>
-                  <a:tcPr anchor="ctr">
-                    <a:lnL w="12700" cap="flat" cmpd="sng" algn="ctr">
-                      <a:solidFill>
-                        <a:schemeClr val="tx1"/>
-                      </a:solidFill>
-                      <a:prstDash val="solid"/>
-                      <a:round/>
-                      <a:headEnd type="none" w="med" len="med"/>
-                      <a:tailEnd type="none" w="med" len="med"/>
-                    </a:lnL>
-                    <a:lnR w="12700" cap="flat" cmpd="sng" algn="ctr">
-                      <a:solidFill>
-                        <a:schemeClr val="tx1"/>
-                      </a:solidFill>
-                      <a:prstDash val="solid"/>
-                      <a:round/>
-                      <a:headEnd type="none" w="med" len="med"/>
-                      <a:tailEnd type="none" w="med" len="med"/>
-                    </a:lnR>
-                    <a:lnT w="12700" cap="flat" cmpd="sng" algn="ctr">
-                      <a:solidFill>
-                        <a:schemeClr val="tx1"/>
-                      </a:solidFill>
-                      <a:prstDash val="solid"/>
-                      <a:round/>
-                      <a:headEnd type="none" w="med" len="med"/>
-                      <a:tailEnd type="none" w="med" len="med"/>
-                    </a:lnT>
-                    <a:lnB w="12700" cap="flat" cmpd="sng" algn="ctr">
-                      <a:solidFill>
-                        <a:schemeClr val="tx1"/>
-                      </a:solidFill>
-                      <a:prstDash val="solid"/>
-                      <a:round/>
-                      <a:headEnd type="none" w="med" len="med"/>
-                      <a:tailEnd type="none" w="med" len="med"/>
-                    </a:lnB>
-                    <a:noFill/>
-                  </a:tcPr>
-                </a:tc>
-                <a:extLst>
-                  <a:ext uri="{0D108BD9-81ED-4DB2-BD59-A6C34878D82A}">
-                    <a16:rowId xmlns:a16="http://schemas.microsoft.com/office/drawing/2014/main" val="10002"/>
-                  </a:ext>
-                </a:extLst>
-              </a:tr>
-              <a:tr h="391885">
-                <a:tc>
-                  <a:txBody>
-                    <a:bodyPr/>
-                    <a:lstStyle/>
-                    <a:p>
-                      <a:pPr algn="ctr"/>
-                      <a:r>
-                        <a:rPr sz="1800" dirty="0"/>
-                        <a:t>V3</a:t>
-                      </a:r>
-                    </a:p>
-                  </a:txBody>
-                  <a:tcPr anchor="ctr">
-                    <a:lnL w="12700" cap="flat" cmpd="sng" algn="ctr">
-                      <a:solidFill>
-                        <a:schemeClr val="tx1"/>
-                      </a:solidFill>
-                      <a:prstDash val="solid"/>
-                      <a:round/>
-                      <a:headEnd type="none" w="med" len="med"/>
-                      <a:tailEnd type="none" w="med" len="med"/>
-                    </a:lnL>
-                    <a:lnR w="12700" cap="flat" cmpd="sng" algn="ctr">
-                      <a:solidFill>
-                        <a:schemeClr val="tx1"/>
-                      </a:solidFill>
-                      <a:prstDash val="solid"/>
-                      <a:round/>
-                      <a:headEnd type="none" w="med" len="med"/>
-                      <a:tailEnd type="none" w="med" len="med"/>
-                    </a:lnR>
-                    <a:lnT w="12700" cap="flat" cmpd="sng" algn="ctr">
-                      <a:solidFill>
-                        <a:schemeClr val="tx1"/>
-                      </a:solidFill>
-                      <a:prstDash val="solid"/>
-                      <a:round/>
-                      <a:headEnd type="none" w="med" len="med"/>
-                      <a:tailEnd type="none" w="med" len="med"/>
-                    </a:lnT>
-                    <a:lnB w="12700" cap="flat" cmpd="sng" algn="ctr">
-                      <a:solidFill>
-                        <a:schemeClr val="tx1"/>
-                      </a:solidFill>
-                      <a:prstDash val="solid"/>
-                      <a:round/>
-                      <a:headEnd type="none" w="med" len="med"/>
-                      <a:tailEnd type="none" w="med" len="med"/>
-                    </a:lnB>
-                    <a:noFill/>
-                  </a:tcPr>
-                </a:tc>
-                <a:tc>
-                  <a:txBody>
-                    <a:bodyPr/>
-                    <a:lstStyle/>
-                    <a:p>
-                      <a:pPr algn="ctr"/>
-                      <a:r>
-                        <a:rPr sz="1800" dirty="0"/>
-                        <a:t>Lamport 서명 스킴</a:t>
-                      </a:r>
-                    </a:p>
-                  </a:txBody>
-                  <a:tcPr anchor="ctr">
-                    <a:lnL w="12700" cap="flat" cmpd="sng" algn="ctr">
-                      <a:solidFill>
-                        <a:schemeClr val="tx1"/>
-                      </a:solidFill>
-                      <a:prstDash val="solid"/>
-                      <a:round/>
-                      <a:headEnd type="none" w="med" len="med"/>
-                      <a:tailEnd type="none" w="med" len="med"/>
-                    </a:lnL>
-                    <a:lnR w="12700" cap="flat" cmpd="sng" algn="ctr">
-                      <a:solidFill>
-                        <a:schemeClr val="tx1"/>
-                      </a:solidFill>
-                      <a:prstDash val="solid"/>
-                      <a:round/>
-                      <a:headEnd type="none" w="med" len="med"/>
-                      <a:tailEnd type="none" w="med" len="med"/>
-                    </a:lnR>
-                    <a:lnT w="12700" cap="flat" cmpd="sng" algn="ctr">
-                      <a:solidFill>
-                        <a:schemeClr val="tx1"/>
-                      </a:solidFill>
-                      <a:prstDash val="solid"/>
-                      <a:round/>
-                      <a:headEnd type="none" w="med" len="med"/>
-                      <a:tailEnd type="none" w="med" len="med"/>
-                    </a:lnT>
-                    <a:lnB w="12700" cap="flat" cmpd="sng" algn="ctr">
-                      <a:solidFill>
-                        <a:schemeClr val="tx1"/>
-                      </a:solidFill>
-                      <a:prstDash val="solid"/>
-                      <a:round/>
-                      <a:headEnd type="none" w="med" len="med"/>
-                      <a:tailEnd type="none" w="med" len="med"/>
-                    </a:lnB>
-                    <a:noFill/>
-                  </a:tcPr>
-                </a:tc>
-                <a:extLst>
-                  <a:ext uri="{0D108BD9-81ED-4DB2-BD59-A6C34878D82A}">
-                    <a16:rowId xmlns:a16="http://schemas.microsoft.com/office/drawing/2014/main" val="10003"/>
-                  </a:ext>
-                </a:extLst>
-              </a:tr>
-              <a:tr h="391885">
-                <a:tc>
-                  <a:txBody>
-                    <a:bodyPr/>
-                    <a:lstStyle/>
-                    <a:p>
-                      <a:pPr algn="ctr"/>
-                      <a:r>
-                        <a:rPr sz="1800" dirty="0"/>
-                        <a:t>V4</a:t>
-                      </a:r>
-                    </a:p>
-                  </a:txBody>
-                  <a:tcPr anchor="ctr">
-                    <a:lnL w="12700" cap="flat" cmpd="sng" algn="ctr">
-                      <a:solidFill>
-                        <a:schemeClr val="tx1"/>
-                      </a:solidFill>
-                      <a:prstDash val="solid"/>
-                      <a:round/>
-                      <a:headEnd type="none" w="med" len="med"/>
-                      <a:tailEnd type="none" w="med" len="med"/>
-                    </a:lnL>
-                    <a:lnR w="12700" cap="flat" cmpd="sng" algn="ctr">
-                      <a:solidFill>
-                        <a:schemeClr val="tx1"/>
-                      </a:solidFill>
-                      <a:prstDash val="solid"/>
-                      <a:round/>
-                      <a:headEnd type="none" w="med" len="med"/>
-                      <a:tailEnd type="none" w="med" len="med"/>
-                    </a:lnR>
-                    <a:lnT w="12700" cap="flat" cmpd="sng" algn="ctr">
-                      <a:solidFill>
-                        <a:schemeClr val="tx1"/>
-                      </a:solidFill>
-                      <a:prstDash val="solid"/>
-                      <a:round/>
-                      <a:headEnd type="none" w="med" len="med"/>
-                      <a:tailEnd type="none" w="med" len="med"/>
-                    </a:lnT>
-                    <a:lnB w="12700" cap="flat" cmpd="sng" algn="ctr">
-                      <a:solidFill>
-                        <a:schemeClr val="tx1"/>
-                      </a:solidFill>
-                      <a:prstDash val="solid"/>
-                      <a:round/>
-                      <a:headEnd type="none" w="med" len="med"/>
-                      <a:tailEnd type="none" w="med" len="med"/>
-                    </a:lnB>
-                    <a:noFill/>
-                  </a:tcPr>
-                </a:tc>
-                <a:tc>
-                  <a:txBody>
-                    <a:bodyPr/>
-                    <a:lstStyle/>
-                    <a:p>
-                      <a:pPr algn="ctr"/>
-                      <a:r>
-                        <a:rPr sz="1800" dirty="0"/>
-                        <a:t>Lamport 서명의 한계와 해결책</a:t>
-                      </a:r>
-                    </a:p>
-                  </a:txBody>
-                  <a:tcPr anchor="ctr">
-                    <a:lnL w="12700" cap="flat" cmpd="sng" algn="ctr">
-                      <a:solidFill>
-                        <a:schemeClr val="tx1"/>
-                      </a:solidFill>
-                      <a:prstDash val="solid"/>
-                      <a:round/>
-                      <a:headEnd type="none" w="med" len="med"/>
-                      <a:tailEnd type="none" w="med" len="med"/>
-                    </a:lnL>
-                    <a:lnR w="12700" cap="flat" cmpd="sng" algn="ctr">
-                      <a:solidFill>
-                        <a:schemeClr val="tx1"/>
-                      </a:solidFill>
-                      <a:prstDash val="solid"/>
-                      <a:round/>
-                      <a:headEnd type="none" w="med" len="med"/>
-                      <a:tailEnd type="none" w="med" len="med"/>
-                    </a:lnR>
-                    <a:lnT w="12700" cap="flat" cmpd="sng" algn="ctr">
-                      <a:solidFill>
-                        <a:schemeClr val="tx1"/>
-                      </a:solidFill>
-                      <a:prstDash val="solid"/>
-                      <a:round/>
-                      <a:headEnd type="none" w="med" len="med"/>
-                      <a:tailEnd type="none" w="med" len="med"/>
-                    </a:lnT>
-                    <a:lnB w="12700" cap="flat" cmpd="sng" algn="ctr">
-                      <a:solidFill>
-                        <a:schemeClr val="tx1"/>
-                      </a:solidFill>
-                      <a:prstDash val="solid"/>
-                      <a:round/>
-                      <a:headEnd type="none" w="med" len="med"/>
-                      <a:tailEnd type="none" w="med" len="med"/>
-                    </a:lnB>
-                    <a:noFill/>
-                  </a:tcPr>
-                </a:tc>
-                <a:extLst>
-                  <a:ext uri="{0D108BD9-81ED-4DB2-BD59-A6C34878D82A}">
-                    <a16:rowId xmlns:a16="http://schemas.microsoft.com/office/drawing/2014/main" val="10004"/>
-                  </a:ext>
-                </a:extLst>
-              </a:tr>
-              <a:tr h="391885">
-                <a:tc>
-                  <a:txBody>
-                    <a:bodyPr/>
-                    <a:lstStyle/>
-                    <a:p>
-                      <a:pPr algn="ctr"/>
-                      <a:r>
-                        <a:rPr sz="1800" dirty="0"/>
-                        <a:t>V5</a:t>
-                      </a:r>
-                    </a:p>
-                  </a:txBody>
-                  <a:tcPr anchor="ctr">
-                    <a:lnL w="12700" cap="flat" cmpd="sng" algn="ctr">
-                      <a:solidFill>
-                        <a:schemeClr val="tx1"/>
-                      </a:solidFill>
-                      <a:prstDash val="solid"/>
-                      <a:round/>
-                      <a:headEnd type="none" w="med" len="med"/>
-                      <a:tailEnd type="none" w="med" len="med"/>
-                    </a:lnL>
-                    <a:lnR w="12700" cap="flat" cmpd="sng" algn="ctr">
-                      <a:solidFill>
-                        <a:schemeClr val="tx1"/>
-                      </a:solidFill>
-                      <a:prstDash val="solid"/>
-                      <a:round/>
-                      <a:headEnd type="none" w="med" len="med"/>
-                      <a:tailEnd type="none" w="med" len="med"/>
-                    </a:lnR>
-                    <a:lnT w="12700" cap="flat" cmpd="sng" algn="ctr">
-                      <a:solidFill>
-                        <a:schemeClr val="tx1"/>
-                      </a:solidFill>
-                      <a:prstDash val="solid"/>
-                      <a:round/>
-                      <a:headEnd type="none" w="med" len="med"/>
-                      <a:tailEnd type="none" w="med" len="med"/>
-                    </a:lnT>
-                    <a:lnB w="12700" cap="flat" cmpd="sng" algn="ctr">
-                      <a:solidFill>
-                        <a:schemeClr val="tx1"/>
-                      </a:solidFill>
-                      <a:prstDash val="solid"/>
-                      <a:round/>
-                      <a:headEnd type="none" w="med" len="med"/>
-                      <a:tailEnd type="none" w="med" len="med"/>
-                    </a:lnB>
-                    <a:noFill/>
-                  </a:tcPr>
-                </a:tc>
-                <a:tc>
-                  <a:txBody>
-                    <a:bodyPr/>
-                    <a:lstStyle/>
-                    <a:p>
-                      <a:pPr algn="ctr"/>
-                      <a:r>
-                        <a:rPr sz="1800" dirty="0"/>
-                        <a:t>Leighton-Micali 서명 스킴 (LMS)</a:t>
-                      </a:r>
-                    </a:p>
-                  </a:txBody>
-                  <a:tcPr anchor="ctr">
-                    <a:lnL w="12700" cap="flat" cmpd="sng" algn="ctr">
-                      <a:solidFill>
-                        <a:schemeClr val="tx1"/>
-                      </a:solidFill>
-                      <a:prstDash val="solid"/>
-                      <a:round/>
-                      <a:headEnd type="none" w="med" len="med"/>
-                      <a:tailEnd type="none" w="med" len="med"/>
-                    </a:lnL>
-                    <a:lnR w="12700" cap="flat" cmpd="sng" algn="ctr">
-                      <a:solidFill>
-                        <a:schemeClr val="tx1"/>
-                      </a:solidFill>
-                      <a:prstDash val="solid"/>
-                      <a:round/>
-                      <a:headEnd type="none" w="med" len="med"/>
-                      <a:tailEnd type="none" w="med" len="med"/>
-                    </a:lnR>
-                    <a:lnT w="12700" cap="flat" cmpd="sng" algn="ctr">
-                      <a:solidFill>
-                        <a:schemeClr val="tx1"/>
-                      </a:solidFill>
-                      <a:prstDash val="solid"/>
-                      <a:round/>
-                      <a:headEnd type="none" w="med" len="med"/>
-                      <a:tailEnd type="none" w="med" len="med"/>
-                    </a:lnT>
-                    <a:lnB w="12700" cap="flat" cmpd="sng" algn="ctr">
-                      <a:solidFill>
-                        <a:schemeClr val="tx1"/>
-                      </a:solidFill>
-                      <a:prstDash val="solid"/>
-                      <a:round/>
-                      <a:headEnd type="none" w="med" len="med"/>
-                      <a:tailEnd type="none" w="med" len="med"/>
-                    </a:lnB>
-                    <a:noFill/>
-                  </a:tcPr>
-                </a:tc>
-                <a:extLst>
-                  <a:ext uri="{0D108BD9-81ED-4DB2-BD59-A6C34878D82A}">
-                    <a16:rowId xmlns:a16="http://schemas.microsoft.com/office/drawing/2014/main" val="10005"/>
-                  </a:ext>
-                </a:extLst>
-              </a:tr>
-              <a:tr h="391890">
-                <a:tc>
-                  <a:txBody>
-                    <a:bodyPr/>
-                    <a:lstStyle/>
-                    <a:p>
-                      <a:pPr algn="ctr"/>
-                      <a:r>
-                        <a:rPr sz="1800" dirty="0"/>
-                        <a:t>V6</a:t>
-                      </a:r>
-                    </a:p>
-                  </a:txBody>
-                  <a:tcPr anchor="ctr">
-                    <a:lnL w="12700" cap="flat" cmpd="sng" algn="ctr">
-                      <a:solidFill>
-                        <a:schemeClr val="tx1"/>
-                      </a:solidFill>
-                      <a:prstDash val="solid"/>
-                      <a:round/>
-                      <a:headEnd type="none" w="med" len="med"/>
-                      <a:tailEnd type="none" w="med" len="med"/>
-                    </a:lnL>
-                    <a:lnR w="12700" cap="flat" cmpd="sng" algn="ctr">
-                      <a:solidFill>
-                        <a:schemeClr val="tx1"/>
-                      </a:solidFill>
-                      <a:prstDash val="solid"/>
-                      <a:round/>
-                      <a:headEnd type="none" w="med" len="med"/>
-                      <a:tailEnd type="none" w="med" len="med"/>
-                    </a:lnR>
-                    <a:lnT w="12700" cap="flat" cmpd="sng" algn="ctr">
-                      <a:solidFill>
-                        <a:schemeClr val="tx1"/>
-                      </a:solidFill>
-                      <a:prstDash val="solid"/>
-                      <a:round/>
-                      <a:headEnd type="none" w="med" len="med"/>
-                      <a:tailEnd type="none" w="med" len="med"/>
-                    </a:lnT>
-                    <a:lnB w="12700" cap="flat" cmpd="sng" algn="ctr">
-                      <a:solidFill>
-                        <a:schemeClr val="tx1"/>
-                      </a:solidFill>
-                      <a:prstDash val="solid"/>
-                      <a:round/>
-                      <a:headEnd type="none" w="med" len="med"/>
-                      <a:tailEnd type="none" w="med" len="med"/>
-                    </a:lnB>
-                    <a:noFill/>
-                  </a:tcPr>
-                </a:tc>
-                <a:tc>
-                  <a:txBody>
-                    <a:bodyPr/>
-                    <a:lstStyle/>
-                    <a:p>
-                      <a:pPr algn="ctr"/>
-                      <a:r>
-                        <a:rPr sz="1800" dirty="0"/>
-                        <a:t>SPHINCS+</a:t>
-                      </a:r>
-                    </a:p>
-                  </a:txBody>
-                  <a:tcPr anchor="ctr">
-                    <a:lnL w="12700" cap="flat" cmpd="sng" algn="ctr">
-                      <a:solidFill>
-                        <a:schemeClr val="tx1"/>
-                      </a:solidFill>
-                      <a:prstDash val="solid"/>
-                      <a:round/>
-                      <a:headEnd type="none" w="med" len="med"/>
-                      <a:tailEnd type="none" w="med" len="med"/>
-                    </a:lnL>
-                    <a:lnR w="12700" cap="flat" cmpd="sng" algn="ctr">
-                      <a:solidFill>
-                        <a:schemeClr val="tx1"/>
-                      </a:solidFill>
-                      <a:prstDash val="solid"/>
-                      <a:round/>
-                      <a:headEnd type="none" w="med" len="med"/>
-                      <a:tailEnd type="none" w="med" len="med"/>
-                    </a:lnR>
-                    <a:lnT w="12700" cap="flat" cmpd="sng" algn="ctr">
-                      <a:solidFill>
-                        <a:schemeClr val="tx1"/>
-                      </a:solidFill>
-                      <a:prstDash val="solid"/>
-                      <a:round/>
-                      <a:headEnd type="none" w="med" len="med"/>
-                      <a:tailEnd type="none" w="med" len="med"/>
-                    </a:lnT>
-                    <a:lnB w="12700" cap="flat" cmpd="sng" algn="ctr">
-                      <a:solidFill>
-                        <a:schemeClr val="tx1"/>
-                      </a:solidFill>
-                      <a:prstDash val="solid"/>
-                      <a:round/>
-                      <a:headEnd type="none" w="med" len="med"/>
-                      <a:tailEnd type="none" w="med" len="med"/>
-                    </a:lnB>
-                    <a:noFill/>
-                  </a:tcPr>
-                </a:tc>
-                <a:extLst>
-                  <a:ext uri="{0D108BD9-81ED-4DB2-BD59-A6C34878D82A}">
-                    <a16:rowId xmlns:a16="http://schemas.microsoft.com/office/drawing/2014/main" val="10006"/>
-                  </a:ext>
-                </a:extLst>
-              </a:tr>
-            </a:tbl>
-          </a:graphicData>
-        </a:graphic>
-      </p:graphicFrame>
-    </p:spTree>
-  </p:cSld>
-  <p:clrMapOvr>
-    <a:masterClrMapping/>
-  </p:clrMapOvr>
-</p:sld>
-</file>
-
-<file path=ppt/slides/slide19.xml><?xml version="1.0" encoding="utf-8"?>
-<p:sld xmlns:a="http://schemas.openxmlformats.org/drawingml/2006/main" xmlns:r="http://schemas.openxmlformats.org/officeDocument/2006/relationships" xmlns:p="http://schemas.openxmlformats.org/presentationml/2006/main">
-  <p:cSld>
-    <p:spTree>
-      <p:nvGrpSpPr>
-        <p:cNvPr id="1" name=""/>
-        <p:cNvGrpSpPr/>
-        <p:nvPr/>
-      </p:nvGrpSpPr>
-      <p:grpSpPr>
-        <a:xfrm>
-          <a:off x="0" y="0"/>
-          <a:ext cx="0" cy="0"/>
-          <a:chOff x="0" y="0"/>
-          <a:chExt cx="0" cy="0"/>
-        </a:xfrm>
-      </p:grpSpPr>
-      <p:sp>
-        <p:nvSpPr>
-          <p:cNvPr id="2" name="Title 1"/>
-          <p:cNvSpPr>
-            <a:spLocks noGrp="1"/>
-          </p:cNvSpPr>
-          <p:nvPr>
-            <p:ph type="title"/>
-          </p:nvPr>
-        </p:nvSpPr>
-        <p:spPr/>
-        <p:txBody>
-          <a:bodyPr/>
-          <a:lstStyle/>
-          <a:p>
-            <a:r>
-              <a:rPr dirty="0"/>
-              <a:t>마무리</a:t>
-            </a:r>
-          </a:p>
-        </p:txBody>
-      </p:sp>
-      <p:sp>
-        <p:nvSpPr>
-          <p:cNvPr id="3" name="Content Placeholder 2"/>
-          <p:cNvSpPr>
-            <a:spLocks noGrp="1"/>
-          </p:cNvSpPr>
-          <p:nvPr>
-            <p:ph idx="1"/>
-          </p:nvPr>
-        </p:nvSpPr>
-        <p:spPr/>
-        <p:txBody>
-          <a:bodyPr/>
-          <a:lstStyle/>
-          <a:p>
-            <a:r>
-              <a:rPr sz="1800" dirty="0"/>
-              <a:t>서명 스킴은 키 생성·서명·검증 세 알고리즘으로 인증을 제공한다</a:t>
-            </a:r>
-          </a:p>
-          <a:p>
-            <a:r>
-              <a:rPr sz="1800" dirty="0"/>
-              <a:t>보안 기준은 선택 메시지 공격 하 존재적 위조 불가능성이다</a:t>
-            </a:r>
-          </a:p>
-          <a:p>
-            <a:r>
-              <a:rPr sz="1800" dirty="0"/>
-              <a:t>RSA·타원곡선은 양자 컴퓨터에 붕괴하고, 격자 기반은 안전하나 근거 문제가 최신이다</a:t>
-            </a:r>
-          </a:p>
-          <a:p>
-            <a:r>
-              <a:rPr sz="1800" dirty="0"/>
-              <a:t>해시 기반은 해시 함수 하나에만 의존해 보안이 잘 이해되지만 키·서명이 크다</a:t>
-            </a:r>
-          </a:p>
-          <a:p>
-            <a:r>
-              <a:rPr sz="1800" dirty="0"/>
-              <a:t>표준은 LMS·XMSS(상태 유지형)와 SPHINCS+(무상태)이다</a:t>
-            </a:r>
-          </a:p>
-        </p:txBody>
-      </p:sp>
-      <p:sp>
-        <p:nvSpPr>
-          <p:cNvPr id="4" name="슬라이드 번호 개체 틀"/>
-          <p:cNvSpPr>
-            <a:spLocks noGrp="1"/>
-          </p:cNvSpPr>
-          <p:nvPr>
-            <p:ph type="sldNum" sz="quarter" idx="12"/>
-          </p:nvPr>
-        </p:nvSpPr>
-        <p:spPr/>
-        <p:txBody>
-          <a:bodyPr/>
-          <a:lstStyle/>
-          <a:p>
-            <a:fld id="{4438A2D4-3867-488E-A04E-7BFFCAED45A6}" type="slidenum">
-              <a:rPr lang="ko-KR" altLang="en-US" smtClean="0"/>
-              <a:t>19</a:t>
+              <a:t>12</a:t>
             </a:fld>
             <a:endParaRPr lang="ko-KR" altLang="en-US" dirty="0"/>
           </a:p>
@@ -13227,8 +11318,9 @@
             </a:pPr>
             <a:r>
               <a:rPr sz="1800" dirty="0"/>
-              <a:t>보안 정의: 선택 메시지 공격 하 존재적 위조 불가능성</a:t>
+              <a:t>보안 정의</a:t>
             </a:r>
+            <a:endParaRPr lang="en-US" sz="1800" dirty="0"/>
           </a:p>
           <a:p>
             <a:pPr marL="342900" indent="-342900">
@@ -13258,16 +11350,6 @@
             <a:r>
               <a:rPr sz="1800" dirty="0"/>
               <a:t>표준화된 해시 기반 서명 스킴</a:t>
-            </a:r>
-          </a:p>
-          <a:p>
-            <a:pPr marL="342900" indent="-342900">
-              <a:buFont typeface="+mj-lt"/>
-              <a:buAutoNum type="arabicPeriod"/>
-            </a:pPr>
-            <a:r>
-              <a:rPr sz="1800" dirty="0"/>
-              <a:t>로드맵</a:t>
             </a:r>
           </a:p>
         </p:txBody>
@@ -13337,19 +11419,19 @@
           <a:p>
             <a:r>
               <a:rPr dirty="0"/>
-              <a:t>서명 스킴이란 무엇인가</a:t>
+              <a:t>서명의 목적: 인증</a:t>
             </a:r>
           </a:p>
         </p:txBody>
       </p:sp>
       <p:sp>
         <p:nvSpPr>
-          <p:cNvPr id="3" name="Text Placeholder 2"/>
+          <p:cNvPr id="3" name="Content Placeholder 2"/>
           <p:cNvSpPr>
             <a:spLocks noGrp="1"/>
           </p:cNvSpPr>
           <p:nvPr>
-            <p:ph type="body" idx="1"/>
+            <p:ph idx="1"/>
           </p:nvPr>
         </p:nvSpPr>
         <p:spPr/>
@@ -13358,8 +11440,20 @@
           <a:lstStyle/>
           <a:p>
             <a:r>
-              <a:rPr dirty="0"/>
-              <a:t>Part 1</a:t>
+              <a:rPr sz="1800" dirty="0"/>
+              <a:t>서명 스킴은 인증(authentication)을 위해 쓰인다</a:t>
+            </a:r>
+          </a:p>
+          <a:p>
+            <a:r>
+              <a:rPr sz="1800" dirty="0"/>
+              <a:t>데이터 무결성: 허가되지 않은 메시지 변조를 탐지한다</a:t>
+            </a:r>
+          </a:p>
+          <a:p>
+            <a:r>
+              <a:rPr sz="1800" dirty="0"/>
+              <a:t>데이터 출처 인증: 메시지를 보낸 주체의 신원을 검증한다</a:t>
             </a:r>
           </a:p>
         </p:txBody>
@@ -13429,7 +11523,7 @@
           <a:p>
             <a:r>
               <a:rPr dirty="0"/>
-              <a:t>서명의 목적: 인증</a:t>
+              <a:t>서명 스킴의 세 알고리즘</a:t>
             </a:r>
           </a:p>
         </p:txBody>
@@ -13451,19 +11545,13 @@
           <a:p>
             <a:r>
               <a:rPr sz="1800" dirty="0"/>
-              <a:t>서명 스킴은 인증(authentication)을 위해 쓰인다</a:t>
+              <a:t>서명 스킴은 세 개의 알고리즘으로 구성된다</a:t>
             </a:r>
           </a:p>
           <a:p>
             <a:r>
               <a:rPr sz="1800" dirty="0"/>
-              <a:t>데이터 무결성: 허가되지 않은 메시지 변조를 탐지한다</a:t>
-            </a:r>
-          </a:p>
-          <a:p>
-            <a:r>
-              <a:rPr sz="1800" dirty="0"/>
-              <a:t>데이터 출처 인증: 메시지를 보낸 주체의 신원을 검증한다</a:t>
+              <a:t>검증은 검증자가 Alice의 진짜 공개키를 가진다고 전제한다 (공개키 진위는 PKI의 몫)</a:t>
             </a:r>
           </a:p>
         </p:txBody>
@@ -13491,104 +11579,6 @@
           </a:p>
         </p:txBody>
       </p:sp>
-    </p:spTree>
-  </p:cSld>
-  <p:clrMapOvr>
-    <a:masterClrMapping/>
-  </p:clrMapOvr>
-</p:sld>
-</file>
-
-<file path=ppt/slides/slide5.xml><?xml version="1.0" encoding="utf-8"?>
-<p:sld xmlns:a="http://schemas.openxmlformats.org/drawingml/2006/main" xmlns:r="http://schemas.openxmlformats.org/officeDocument/2006/relationships" xmlns:p="http://schemas.openxmlformats.org/presentationml/2006/main">
-  <p:cSld>
-    <p:spTree>
-      <p:nvGrpSpPr>
-        <p:cNvPr id="1" name=""/>
-        <p:cNvGrpSpPr/>
-        <p:nvPr/>
-      </p:nvGrpSpPr>
-      <p:grpSpPr>
-        <a:xfrm>
-          <a:off x="0" y="0"/>
-          <a:ext cx="0" cy="0"/>
-          <a:chOff x="0" y="0"/>
-          <a:chExt cx="0" cy="0"/>
-        </a:xfrm>
-      </p:grpSpPr>
-      <p:sp>
-        <p:nvSpPr>
-          <p:cNvPr id="2" name="Title 1"/>
-          <p:cNvSpPr>
-            <a:spLocks noGrp="1"/>
-          </p:cNvSpPr>
-          <p:nvPr>
-            <p:ph type="title"/>
-          </p:nvPr>
-        </p:nvSpPr>
-        <p:spPr/>
-        <p:txBody>
-          <a:bodyPr/>
-          <a:lstStyle/>
-          <a:p>
-            <a:r>
-              <a:rPr dirty="0"/>
-              <a:t>서명 스킴의 세 알고리즘</a:t>
-            </a:r>
-          </a:p>
-        </p:txBody>
-      </p:sp>
-      <p:sp>
-        <p:nvSpPr>
-          <p:cNvPr id="3" name="Content Placeholder 2"/>
-          <p:cNvSpPr>
-            <a:spLocks noGrp="1"/>
-          </p:cNvSpPr>
-          <p:nvPr>
-            <p:ph idx="1"/>
-          </p:nvPr>
-        </p:nvSpPr>
-        <p:spPr/>
-        <p:txBody>
-          <a:bodyPr/>
-          <a:lstStyle/>
-          <a:p>
-            <a:r>
-              <a:rPr sz="1800" dirty="0"/>
-              <a:t>서명 스킴은 세 개의 알고리즘으로 구성된다</a:t>
-            </a:r>
-          </a:p>
-          <a:p>
-            <a:r>
-              <a:rPr sz="1800" dirty="0"/>
-              <a:t>검증은 검증자가 Alice의 진짜 공개키를 가진다고 전제한다 (공개키 진위는 PKI의 몫)</a:t>
-            </a:r>
-          </a:p>
-        </p:txBody>
-      </p:sp>
-      <p:sp>
-        <p:nvSpPr>
-          <p:cNvPr id="4" name="슬라이드 번호 개체 틀"/>
-          <p:cNvSpPr>
-            <a:spLocks noGrp="1"/>
-          </p:cNvSpPr>
-          <p:nvPr>
-            <p:ph type="sldNum" sz="quarter" idx="12"/>
-          </p:nvPr>
-        </p:nvSpPr>
-        <p:spPr/>
-        <p:txBody>
-          <a:bodyPr/>
-          <a:lstStyle/>
-          <a:p>
-            <a:fld id="{4438A2D4-3867-488E-A04E-7BFFCAED45A6}" type="slidenum">
-              <a:rPr lang="ko-KR" altLang="en-US" smtClean="0"/>
-              <a:t>5</a:t>
-            </a:fld>
-            <a:endParaRPr lang="ko-KR" altLang="en-US" dirty="0"/>
-          </a:p>
-        </p:txBody>
-      </p:sp>
       <p:graphicFrame>
         <p:nvGraphicFramePr>
           <p:cNvPr id="5" name="Table 4"/>
@@ -13598,13 +11588,13 @@
           <p:nvPr>
             <p:extLst>
               <p:ext uri="{D42A27DB-BD31-4B8C-83A1-F6EECF244321}">
-                <p14:modId xmlns:p14="http://schemas.microsoft.com/office/powerpoint/2010/main" val="4224994529"/>
+                <p14:modId xmlns:p14="http://schemas.microsoft.com/office/powerpoint/2010/main" val="2348586584"/>
               </p:ext>
             </p:extLst>
           </p:nvPr>
         </p:nvGraphicFramePr>
         <p:xfrm>
-          <a:off x="841248" y="2651760"/>
+          <a:off x="838200" y="2685746"/>
           <a:ext cx="10515600" cy="1920240"/>
         </p:xfrm>
         <a:graphic>
@@ -14318,6 +12308,116 @@
 </p:sld>
 </file>
 
+<file path=ppt/slides/slide5.xml><?xml version="1.0" encoding="utf-8"?>
+<p:sld xmlns:a="http://schemas.openxmlformats.org/drawingml/2006/main" xmlns:r="http://schemas.openxmlformats.org/officeDocument/2006/relationships" xmlns:p="http://schemas.openxmlformats.org/presentationml/2006/main">
+  <p:cSld>
+    <p:spTree>
+      <p:nvGrpSpPr>
+        <p:cNvPr id="1" name=""/>
+        <p:cNvGrpSpPr/>
+        <p:nvPr/>
+      </p:nvGrpSpPr>
+      <p:grpSpPr>
+        <a:xfrm>
+          <a:off x="0" y="0"/>
+          <a:ext cx="0" cy="0"/>
+          <a:chOff x="0" y="0"/>
+          <a:chExt cx="0" cy="0"/>
+        </a:xfrm>
+      </p:grpSpPr>
+      <p:sp>
+        <p:nvSpPr>
+          <p:cNvPr id="2" name="Title 1"/>
+          <p:cNvSpPr>
+            <a:spLocks noGrp="1"/>
+          </p:cNvSpPr>
+          <p:nvPr>
+            <p:ph type="title"/>
+          </p:nvPr>
+        </p:nvSpPr>
+        <p:spPr/>
+        <p:txBody>
+          <a:bodyPr/>
+          <a:lstStyle/>
+          <a:p>
+            <a:r>
+              <a:rPr dirty="0"/>
+              <a:t>존재적 위조 불가능성 (EUF-CMA)</a:t>
+            </a:r>
+          </a:p>
+        </p:txBody>
+      </p:sp>
+      <p:sp>
+        <p:nvSpPr>
+          <p:cNvPr id="3" name="Content Placeholder 2"/>
+          <p:cNvSpPr>
+            <a:spLocks noGrp="1"/>
+          </p:cNvSpPr>
+          <p:nvPr>
+            <p:ph idx="1"/>
+          </p:nvPr>
+        </p:nvSpPr>
+        <p:spPr/>
+        <p:txBody>
+          <a:bodyPr/>
+          <a:lstStyle/>
+          <a:p>
+            <a:r>
+              <a:rPr sz="1800" dirty="0"/>
+              <a:t>정의: 계산량이 제한된 공격자가 선택 메시지 공격을 하더라도 존재적으로 위조가 불가능하면 안전하다</a:t>
+            </a:r>
+          </a:p>
+          <a:p>
+            <a:r>
+              <a:rPr sz="1800" dirty="0"/>
+              <a:t>선택 메시지 공격: 공격자가 서명 오라클에 원하는 메시지의 서명을 자유롭게 얻는다</a:t>
+            </a:r>
+          </a:p>
+          <a:p>
+            <a:r>
+              <a:rPr sz="1800" dirty="0"/>
+              <a:t>존재적 위조: 오라클에 요청한 적 없는 메시지 하나에 대해 유효한 (m, σ) 쌍을 만든다</a:t>
+            </a:r>
+          </a:p>
+          <a:p>
+            <a:r>
+              <a:rPr sz="1800" dirty="0"/>
+              <a:t>많은 서명을 관찰해도 새로운 유효 서명을 만들 수 없다는 강한 보장이다</a:t>
+            </a:r>
+          </a:p>
+        </p:txBody>
+      </p:sp>
+      <p:sp>
+        <p:nvSpPr>
+          <p:cNvPr id="4" name="슬라이드 번호 개체 틀"/>
+          <p:cNvSpPr>
+            <a:spLocks noGrp="1"/>
+          </p:cNvSpPr>
+          <p:nvPr>
+            <p:ph type="sldNum" sz="quarter" idx="12"/>
+          </p:nvPr>
+        </p:nvSpPr>
+        <p:spPr/>
+        <p:txBody>
+          <a:bodyPr/>
+          <a:lstStyle/>
+          <a:p>
+            <a:fld id="{4438A2D4-3867-488E-A04E-7BFFCAED45A6}" type="slidenum">
+              <a:rPr lang="ko-KR" altLang="en-US" smtClean="0"/>
+              <a:t>5</a:t>
+            </a:fld>
+            <a:endParaRPr lang="ko-KR" altLang="en-US" dirty="0"/>
+          </a:p>
+        </p:txBody>
+      </p:sp>
+    </p:spTree>
+  </p:cSld>
+  <p:clrMapOvr>
+    <a:masterClrMapping/>
+  </p:clrMapOvr>
+</p:sld>
+</file>
+
 <file path=ppt/slides/slide6.xml><?xml version="1.0" encoding="utf-8"?>
 <p:sld xmlns:a="http://schemas.openxmlformats.org/drawingml/2006/main" xmlns:r="http://schemas.openxmlformats.org/officeDocument/2006/relationships" xmlns:p="http://schemas.openxmlformats.org/presentationml/2006/main">
   <p:cSld>
@@ -14352,19 +12452,19 @@
           <a:p>
             <a:r>
               <a:rPr dirty="0"/>
-              <a:t>보안 정의</a:t>
+              <a:t>세 계열과 양자 컴퓨터</a:t>
             </a:r>
           </a:p>
         </p:txBody>
       </p:sp>
       <p:sp>
         <p:nvSpPr>
-          <p:cNvPr id="3" name="Text Placeholder 2"/>
+          <p:cNvPr id="3" name="Content Placeholder 2"/>
           <p:cNvSpPr>
             <a:spLocks noGrp="1"/>
           </p:cNvSpPr>
           <p:nvPr>
-            <p:ph type="body" idx="1"/>
+            <p:ph idx="1"/>
           </p:nvPr>
         </p:nvSpPr>
         <p:spPr/>
@@ -14373,8 +12473,8 @@
           <a:lstStyle/>
           <a:p>
             <a:r>
-              <a:rPr dirty="0"/>
-              <a:t>Part 2</a:t>
+              <a:rPr sz="1800" dirty="0"/>
+              <a:t>오늘 가장 널리 쓰이는 서명 계열은 셋이다</a:t>
             </a:r>
           </a:p>
         </p:txBody>
@@ -14402,300 +12502,6 @@
           </a:p>
         </p:txBody>
       </p:sp>
-    </p:spTree>
-  </p:cSld>
-  <p:clrMapOvr>
-    <a:masterClrMapping/>
-  </p:clrMapOvr>
-</p:sld>
-</file>
-
-<file path=ppt/slides/slide7.xml><?xml version="1.0" encoding="utf-8"?>
-<p:sld xmlns:a="http://schemas.openxmlformats.org/drawingml/2006/main" xmlns:r="http://schemas.openxmlformats.org/officeDocument/2006/relationships" xmlns:p="http://schemas.openxmlformats.org/presentationml/2006/main">
-  <p:cSld>
-    <p:spTree>
-      <p:nvGrpSpPr>
-        <p:cNvPr id="1" name=""/>
-        <p:cNvGrpSpPr/>
-        <p:nvPr/>
-      </p:nvGrpSpPr>
-      <p:grpSpPr>
-        <a:xfrm>
-          <a:off x="0" y="0"/>
-          <a:ext cx="0" cy="0"/>
-          <a:chOff x="0" y="0"/>
-          <a:chExt cx="0" cy="0"/>
-        </a:xfrm>
-      </p:grpSpPr>
-      <p:sp>
-        <p:nvSpPr>
-          <p:cNvPr id="2" name="Title 1"/>
-          <p:cNvSpPr>
-            <a:spLocks noGrp="1"/>
-          </p:cNvSpPr>
-          <p:nvPr>
-            <p:ph type="title"/>
-          </p:nvPr>
-        </p:nvSpPr>
-        <p:spPr/>
-        <p:txBody>
-          <a:bodyPr/>
-          <a:lstStyle/>
-          <a:p>
-            <a:r>
-              <a:rPr dirty="0"/>
-              <a:t>존재적 위조 불가능성 (EUF-CMA)</a:t>
-            </a:r>
-          </a:p>
-        </p:txBody>
-      </p:sp>
-      <p:sp>
-        <p:nvSpPr>
-          <p:cNvPr id="3" name="Content Placeholder 2"/>
-          <p:cNvSpPr>
-            <a:spLocks noGrp="1"/>
-          </p:cNvSpPr>
-          <p:nvPr>
-            <p:ph idx="1"/>
-          </p:nvPr>
-        </p:nvSpPr>
-        <p:spPr/>
-        <p:txBody>
-          <a:bodyPr/>
-          <a:lstStyle/>
-          <a:p>
-            <a:r>
-              <a:rPr sz="1800" dirty="0"/>
-              <a:t>정의: 계산량이 제한된 공격자가 선택 메시지 공격을 하더라도 존재적으로 위조가 불가능하면 안전하다</a:t>
-            </a:r>
-          </a:p>
-          <a:p>
-            <a:r>
-              <a:rPr sz="1800" dirty="0"/>
-              <a:t>선택 메시지 공격: 공격자가 서명 오라클에 원하는 메시지의 서명을 자유롭게 얻는다</a:t>
-            </a:r>
-          </a:p>
-          <a:p>
-            <a:r>
-              <a:rPr sz="1800" dirty="0"/>
-              <a:t>존재적 위조: 오라클에 요청한 적 없는 메시지 하나에 대해 유효한 (m, σ) 쌍을 만든다</a:t>
-            </a:r>
-          </a:p>
-          <a:p>
-            <a:r>
-              <a:rPr sz="1800" dirty="0"/>
-              <a:t>많은 서명을 관찰해도 새로운 유효 서명을 만들 수 없다는 강한 보장이다</a:t>
-            </a:r>
-          </a:p>
-        </p:txBody>
-      </p:sp>
-      <p:sp>
-        <p:nvSpPr>
-          <p:cNvPr id="4" name="슬라이드 번호 개체 틀"/>
-          <p:cNvSpPr>
-            <a:spLocks noGrp="1"/>
-          </p:cNvSpPr>
-          <p:nvPr>
-            <p:ph type="sldNum" sz="quarter" idx="12"/>
-          </p:nvPr>
-        </p:nvSpPr>
-        <p:spPr/>
-        <p:txBody>
-          <a:bodyPr/>
-          <a:lstStyle/>
-          <a:p>
-            <a:fld id="{4438A2D4-3867-488E-A04E-7BFFCAED45A6}" type="slidenum">
-              <a:rPr lang="ko-KR" altLang="en-US" smtClean="0"/>
-              <a:t>7</a:t>
-            </a:fld>
-            <a:endParaRPr lang="ko-KR" altLang="en-US" dirty="0"/>
-          </a:p>
-        </p:txBody>
-      </p:sp>
-    </p:spTree>
-  </p:cSld>
-  <p:clrMapOvr>
-    <a:masterClrMapping/>
-  </p:clrMapOvr>
-</p:sld>
-</file>
-
-<file path=ppt/slides/slide8.xml><?xml version="1.0" encoding="utf-8"?>
-<p:sld xmlns:a="http://schemas.openxmlformats.org/drawingml/2006/main" xmlns:r="http://schemas.openxmlformats.org/officeDocument/2006/relationships" xmlns:p="http://schemas.openxmlformats.org/presentationml/2006/main">
-  <p:cSld>
-    <p:spTree>
-      <p:nvGrpSpPr>
-        <p:cNvPr id="1" name=""/>
-        <p:cNvGrpSpPr/>
-        <p:nvPr/>
-      </p:nvGrpSpPr>
-      <p:grpSpPr>
-        <a:xfrm>
-          <a:off x="0" y="0"/>
-          <a:ext cx="0" cy="0"/>
-          <a:chOff x="0" y="0"/>
-          <a:chExt cx="0" cy="0"/>
-        </a:xfrm>
-      </p:grpSpPr>
-      <p:sp>
-        <p:nvSpPr>
-          <p:cNvPr id="2" name="Title 1"/>
-          <p:cNvSpPr>
-            <a:spLocks noGrp="1"/>
-          </p:cNvSpPr>
-          <p:nvPr>
-            <p:ph type="title"/>
-          </p:nvPr>
-        </p:nvSpPr>
-        <p:spPr/>
-        <p:txBody>
-          <a:bodyPr/>
-          <a:lstStyle/>
-          <a:p>
-            <a:r>
-              <a:rPr dirty="0"/>
-              <a:t>서명 스킴의 세 계열</a:t>
-            </a:r>
-          </a:p>
-        </p:txBody>
-      </p:sp>
-      <p:sp>
-        <p:nvSpPr>
-          <p:cNvPr id="3" name="Text Placeholder 2"/>
-          <p:cNvSpPr>
-            <a:spLocks noGrp="1"/>
-          </p:cNvSpPr>
-          <p:nvPr>
-            <p:ph type="body" idx="1"/>
-          </p:nvPr>
-        </p:nvSpPr>
-        <p:spPr/>
-        <p:txBody>
-          <a:bodyPr/>
-          <a:lstStyle/>
-          <a:p>
-            <a:r>
-              <a:rPr dirty="0"/>
-              <a:t>Part 3</a:t>
-            </a:r>
-          </a:p>
-        </p:txBody>
-      </p:sp>
-      <p:sp>
-        <p:nvSpPr>
-          <p:cNvPr id="4" name="슬라이드 번호 개체 틀"/>
-          <p:cNvSpPr>
-            <a:spLocks noGrp="1"/>
-          </p:cNvSpPr>
-          <p:nvPr>
-            <p:ph type="sldNum" sz="quarter" idx="12"/>
-          </p:nvPr>
-        </p:nvSpPr>
-        <p:spPr/>
-        <p:txBody>
-          <a:bodyPr/>
-          <a:lstStyle/>
-          <a:p>
-            <a:fld id="{4438A2D4-3867-488E-A04E-7BFFCAED45A6}" type="slidenum">
-              <a:rPr lang="ko-KR" altLang="en-US" smtClean="0"/>
-              <a:t>8</a:t>
-            </a:fld>
-            <a:endParaRPr lang="ko-KR" altLang="en-US" dirty="0"/>
-          </a:p>
-        </p:txBody>
-      </p:sp>
-    </p:spTree>
-  </p:cSld>
-  <p:clrMapOvr>
-    <a:masterClrMapping/>
-  </p:clrMapOvr>
-</p:sld>
-</file>
-
-<file path=ppt/slides/slide9.xml><?xml version="1.0" encoding="utf-8"?>
-<p:sld xmlns:a="http://schemas.openxmlformats.org/drawingml/2006/main" xmlns:r="http://schemas.openxmlformats.org/officeDocument/2006/relationships" xmlns:p="http://schemas.openxmlformats.org/presentationml/2006/main">
-  <p:cSld>
-    <p:spTree>
-      <p:nvGrpSpPr>
-        <p:cNvPr id="1" name=""/>
-        <p:cNvGrpSpPr/>
-        <p:nvPr/>
-      </p:nvGrpSpPr>
-      <p:grpSpPr>
-        <a:xfrm>
-          <a:off x="0" y="0"/>
-          <a:ext cx="0" cy="0"/>
-          <a:chOff x="0" y="0"/>
-          <a:chExt cx="0" cy="0"/>
-        </a:xfrm>
-      </p:grpSpPr>
-      <p:sp>
-        <p:nvSpPr>
-          <p:cNvPr id="2" name="Title 1"/>
-          <p:cNvSpPr>
-            <a:spLocks noGrp="1"/>
-          </p:cNvSpPr>
-          <p:nvPr>
-            <p:ph type="title"/>
-          </p:nvPr>
-        </p:nvSpPr>
-        <p:spPr/>
-        <p:txBody>
-          <a:bodyPr/>
-          <a:lstStyle/>
-          <a:p>
-            <a:r>
-              <a:rPr dirty="0"/>
-              <a:t>세 계열과 양자 컴퓨터</a:t>
-            </a:r>
-          </a:p>
-        </p:txBody>
-      </p:sp>
-      <p:sp>
-        <p:nvSpPr>
-          <p:cNvPr id="3" name="Content Placeholder 2"/>
-          <p:cNvSpPr>
-            <a:spLocks noGrp="1"/>
-          </p:cNvSpPr>
-          <p:nvPr>
-            <p:ph idx="1"/>
-          </p:nvPr>
-        </p:nvSpPr>
-        <p:spPr/>
-        <p:txBody>
-          <a:bodyPr/>
-          <a:lstStyle/>
-          <a:p>
-            <a:r>
-              <a:rPr sz="1800" dirty="0"/>
-              <a:t>오늘 가장 널리 쓰이는 서명 계열은 셋이다</a:t>
-            </a:r>
-          </a:p>
-        </p:txBody>
-      </p:sp>
-      <p:sp>
-        <p:nvSpPr>
-          <p:cNvPr id="4" name="슬라이드 번호 개체 틀"/>
-          <p:cNvSpPr>
-            <a:spLocks noGrp="1"/>
-          </p:cNvSpPr>
-          <p:nvPr>
-            <p:ph type="sldNum" sz="quarter" idx="12"/>
-          </p:nvPr>
-        </p:nvSpPr>
-        <p:spPr/>
-        <p:txBody>
-          <a:bodyPr/>
-          <a:lstStyle/>
-          <a:p>
-            <a:fld id="{4438A2D4-3867-488E-A04E-7BFFCAED45A6}" type="slidenum">
-              <a:rPr lang="ko-KR" altLang="en-US" smtClean="0"/>
-              <a:t>9</a:t>
-            </a:fld>
-            <a:endParaRPr lang="ko-KR" altLang="en-US" dirty="0"/>
-          </a:p>
-        </p:txBody>
-      </p:sp>
       <p:graphicFrame>
         <p:nvGraphicFramePr>
           <p:cNvPr id="5" name="Table 4"/>
@@ -14705,13 +12511,13 @@
           <p:nvPr>
             <p:extLst>
               <p:ext uri="{D42A27DB-BD31-4B8C-83A1-F6EECF244321}">
-                <p14:modId xmlns:p14="http://schemas.microsoft.com/office/powerpoint/2010/main" val="2020908701"/>
+                <p14:modId xmlns:p14="http://schemas.microsoft.com/office/powerpoint/2010/main" val="1295754171"/>
               </p:ext>
             </p:extLst>
           </p:nvPr>
         </p:nvGraphicFramePr>
         <p:xfrm>
-          <a:off x="841248" y="2194560"/>
+          <a:off x="838200" y="2423160"/>
           <a:ext cx="10515600" cy="2011680"/>
         </p:xfrm>
         <a:graphic>
@@ -15631,6 +13437,707 @@
                 <a:extLst>
                   <a:ext uri="{0D108BD9-81ED-4DB2-BD59-A6C34878D82A}">
                     <a16:rowId xmlns:a16="http://schemas.microsoft.com/office/drawing/2014/main" val="10003"/>
+                  </a:ext>
+                </a:extLst>
+              </a:tr>
+            </a:tbl>
+          </a:graphicData>
+        </a:graphic>
+      </p:graphicFrame>
+    </p:spTree>
+  </p:cSld>
+  <p:clrMapOvr>
+    <a:masterClrMapping/>
+  </p:clrMapOvr>
+</p:sld>
+</file>
+
+<file path=ppt/slides/slide7.xml><?xml version="1.0" encoding="utf-8"?>
+<p:sld xmlns:a="http://schemas.openxmlformats.org/drawingml/2006/main" xmlns:r="http://schemas.openxmlformats.org/officeDocument/2006/relationships" xmlns:p="http://schemas.openxmlformats.org/presentationml/2006/main">
+  <p:cSld>
+    <p:spTree>
+      <p:nvGrpSpPr>
+        <p:cNvPr id="1" name=""/>
+        <p:cNvGrpSpPr/>
+        <p:nvPr/>
+      </p:nvGrpSpPr>
+      <p:grpSpPr>
+        <a:xfrm>
+          <a:off x="0" y="0"/>
+          <a:ext cx="0" cy="0"/>
+          <a:chOff x="0" y="0"/>
+          <a:chExt cx="0" cy="0"/>
+        </a:xfrm>
+      </p:grpSpPr>
+      <p:sp>
+        <p:nvSpPr>
+          <p:cNvPr id="2" name="Title 1"/>
+          <p:cNvSpPr>
+            <a:spLocks noGrp="1"/>
+          </p:cNvSpPr>
+          <p:nvPr>
+            <p:ph type="title"/>
+          </p:nvPr>
+        </p:nvSpPr>
+        <p:spPr/>
+        <p:txBody>
+          <a:bodyPr/>
+          <a:lstStyle/>
+          <a:p>
+            <a:r>
+              <a:rPr dirty="0"/>
+              <a:t>세 계열의 공통 의존성</a:t>
+            </a:r>
+          </a:p>
+        </p:txBody>
+      </p:sp>
+      <p:sp>
+        <p:nvSpPr>
+          <p:cNvPr id="3" name="Content Placeholder 2"/>
+          <p:cNvSpPr>
+            <a:spLocks noGrp="1"/>
+          </p:cNvSpPr>
+          <p:nvPr>
+            <p:ph idx="1"/>
+          </p:nvPr>
+        </p:nvSpPr>
+        <p:spPr/>
+        <p:txBody>
+          <a:bodyPr/>
+          <a:lstStyle/>
+          <a:p>
+            <a:r>
+              <a:rPr sz="1800" dirty="0"/>
+              <a:t>RSA·타원곡선·격자 기반은 각각 수론 또는 격자 난제에 기반한다</a:t>
+            </a:r>
+          </a:p>
+          <a:p>
+            <a:r>
+              <a:rPr sz="1800" dirty="0"/>
+              <a:t>그런데 세 계열 모두 암호학적 해시 함수의 보안 속성에도 함께 의존한다</a:t>
+            </a:r>
+          </a:p>
+          <a:p>
+            <a:r>
+              <a:rPr sz="1800" dirty="0"/>
+              <a:t>해시 함수는 이미 신뢰의 기반이므로, 해시만으로 서명을 세우는 접근이 자연스럽다</a:t>
+            </a:r>
+          </a:p>
+        </p:txBody>
+      </p:sp>
+      <p:sp>
+        <p:nvSpPr>
+          <p:cNvPr id="4" name="슬라이드 번호 개체 틀"/>
+          <p:cNvSpPr>
+            <a:spLocks noGrp="1"/>
+          </p:cNvSpPr>
+          <p:nvPr>
+            <p:ph type="sldNum" sz="quarter" idx="12"/>
+          </p:nvPr>
+        </p:nvSpPr>
+        <p:spPr/>
+        <p:txBody>
+          <a:bodyPr/>
+          <a:lstStyle/>
+          <a:p>
+            <a:fld id="{4438A2D4-3867-488E-A04E-7BFFCAED45A6}" type="slidenum">
+              <a:rPr lang="ko-KR" altLang="en-US" smtClean="0"/>
+              <a:t>7</a:t>
+            </a:fld>
+            <a:endParaRPr lang="ko-KR" altLang="en-US" dirty="0"/>
+          </a:p>
+        </p:txBody>
+      </p:sp>
+    </p:spTree>
+  </p:cSld>
+  <p:clrMapOvr>
+    <a:masterClrMapping/>
+  </p:clrMapOvr>
+</p:sld>
+</file>
+
+<file path=ppt/slides/slide8.xml><?xml version="1.0" encoding="utf-8"?>
+<p:sld xmlns:a="http://schemas.openxmlformats.org/drawingml/2006/main" xmlns:r="http://schemas.openxmlformats.org/officeDocument/2006/relationships" xmlns:p="http://schemas.openxmlformats.org/presentationml/2006/main">
+  <p:cSld>
+    <p:spTree>
+      <p:nvGrpSpPr>
+        <p:cNvPr id="1" name=""/>
+        <p:cNvGrpSpPr/>
+        <p:nvPr/>
+      </p:nvGrpSpPr>
+      <p:grpSpPr>
+        <a:xfrm>
+          <a:off x="0" y="0"/>
+          <a:ext cx="0" cy="0"/>
+          <a:chOff x="0" y="0"/>
+          <a:chExt cx="0" cy="0"/>
+        </a:xfrm>
+      </p:grpSpPr>
+      <p:sp>
+        <p:nvSpPr>
+          <p:cNvPr id="2" name="Title 1"/>
+          <p:cNvSpPr>
+            <a:spLocks noGrp="1"/>
+          </p:cNvSpPr>
+          <p:nvPr>
+            <p:ph type="title"/>
+          </p:nvPr>
+        </p:nvSpPr>
+        <p:spPr/>
+        <p:txBody>
+          <a:bodyPr/>
+          <a:lstStyle/>
+          <a:p>
+            <a:r>
+              <a:rPr dirty="0"/>
+              <a:t>기원과 유일한 primitive</a:t>
+            </a:r>
+          </a:p>
+        </p:txBody>
+      </p:sp>
+      <p:sp>
+        <p:nvSpPr>
+          <p:cNvPr id="3" name="Content Placeholder 2"/>
+          <p:cNvSpPr>
+            <a:spLocks noGrp="1"/>
+          </p:cNvSpPr>
+          <p:nvPr>
+            <p:ph idx="1"/>
+          </p:nvPr>
+        </p:nvSpPr>
+        <p:spPr/>
+        <p:txBody>
+          <a:bodyPr/>
+          <a:lstStyle/>
+          <a:p>
+            <a:r>
+              <a:rPr sz="1800" dirty="0"/>
+              <a:t>Leslie Lamport가 1976년에 처음 제안했다</a:t>
+            </a:r>
+          </a:p>
+          <a:p>
+            <a:r>
+              <a:rPr sz="1800" dirty="0"/>
+              <a:t>Robert Winternitz와 Ralph Merkle가 1979년에 핵심 개선을 더했다</a:t>
+            </a:r>
+          </a:p>
+          <a:p>
+            <a:r>
+              <a:rPr sz="1800" dirty="0"/>
+              <a:t>핵심 개념은 1970년대 것이지만 양자 저항성 덕분에 지금도 유효하다</a:t>
+            </a:r>
+          </a:p>
+          <a:p>
+            <a:r>
+              <a:rPr sz="1800" dirty="0"/>
+              <a:t>쓰이는 암호 primitive는 해시 함수 하나뿐이다</a:t>
+            </a:r>
+          </a:p>
+        </p:txBody>
+      </p:sp>
+      <p:sp>
+        <p:nvSpPr>
+          <p:cNvPr id="4" name="슬라이드 번호 개체 틀"/>
+          <p:cNvSpPr>
+            <a:spLocks noGrp="1"/>
+          </p:cNvSpPr>
+          <p:nvPr>
+            <p:ph type="sldNum" sz="quarter" idx="12"/>
+          </p:nvPr>
+        </p:nvSpPr>
+        <p:spPr/>
+        <p:txBody>
+          <a:bodyPr/>
+          <a:lstStyle/>
+          <a:p>
+            <a:fld id="{4438A2D4-3867-488E-A04E-7BFFCAED45A6}" type="slidenum">
+              <a:rPr lang="ko-KR" altLang="en-US" smtClean="0"/>
+              <a:t>8</a:t>
+            </a:fld>
+            <a:endParaRPr lang="ko-KR" altLang="en-US" dirty="0"/>
+          </a:p>
+        </p:txBody>
+      </p:sp>
+    </p:spTree>
+  </p:cSld>
+  <p:clrMapOvr>
+    <a:masterClrMapping/>
+  </p:clrMapOvr>
+</p:sld>
+</file>
+
+<file path=ppt/slides/slide9.xml><?xml version="1.0" encoding="utf-8"?>
+<p:sld xmlns:a="http://schemas.openxmlformats.org/drawingml/2006/main" xmlns:r="http://schemas.openxmlformats.org/officeDocument/2006/relationships" xmlns:p="http://schemas.openxmlformats.org/presentationml/2006/main">
+  <p:cSld>
+    <p:spTree>
+      <p:nvGrpSpPr>
+        <p:cNvPr id="1" name=""/>
+        <p:cNvGrpSpPr/>
+        <p:nvPr/>
+      </p:nvGrpSpPr>
+      <p:grpSpPr>
+        <a:xfrm>
+          <a:off x="0" y="0"/>
+          <a:ext cx="0" cy="0"/>
+          <a:chOff x="0" y="0"/>
+          <a:chExt cx="0" cy="0"/>
+        </a:xfrm>
+      </p:grpSpPr>
+      <p:sp>
+        <p:nvSpPr>
+          <p:cNvPr id="2" name="Title 1"/>
+          <p:cNvSpPr>
+            <a:spLocks noGrp="1"/>
+          </p:cNvSpPr>
+          <p:nvPr>
+            <p:ph type="title"/>
+          </p:nvPr>
+        </p:nvSpPr>
+        <p:spPr/>
+        <p:txBody>
+          <a:bodyPr/>
+          <a:lstStyle/>
+          <a:p>
+            <a:r>
+              <a:rPr dirty="0"/>
+              <a:t>장점과 단점</a:t>
+            </a:r>
+          </a:p>
+        </p:txBody>
+      </p:sp>
+      <p:sp>
+        <p:nvSpPr>
+          <p:cNvPr id="3" name="Content Placeholder 2"/>
+          <p:cNvSpPr>
+            <a:spLocks noGrp="1"/>
+          </p:cNvSpPr>
+          <p:nvPr>
+            <p:ph idx="1"/>
+          </p:nvPr>
+        </p:nvSpPr>
+        <p:spPr/>
+        <p:txBody>
+          <a:bodyPr/>
+          <a:lstStyle/>
+          <a:p>
+            <a:r>
+              <a:rPr sz="1800" dirty="0"/>
+              <a:t>격자 기반은 근거 문제가 비교적 최신이라 장기 저항성에 추가 검증이 필요하다</a:t>
+            </a:r>
+          </a:p>
+          <a:p>
+            <a:r>
+              <a:rPr sz="1800" dirty="0"/>
+              <a:t>해시 기반은 수십 년간 연구된 표준 해시 속성에만 기댄다</a:t>
+            </a:r>
+          </a:p>
+        </p:txBody>
+      </p:sp>
+      <p:sp>
+        <p:nvSpPr>
+          <p:cNvPr id="4" name="슬라이드 번호 개체 틀"/>
+          <p:cNvSpPr>
+            <a:spLocks noGrp="1"/>
+          </p:cNvSpPr>
+          <p:nvPr>
+            <p:ph type="sldNum" sz="quarter" idx="12"/>
+          </p:nvPr>
+        </p:nvSpPr>
+        <p:spPr/>
+        <p:txBody>
+          <a:bodyPr/>
+          <a:lstStyle/>
+          <a:p>
+            <a:fld id="{4438A2D4-3867-488E-A04E-7BFFCAED45A6}" type="slidenum">
+              <a:rPr lang="ko-KR" altLang="en-US" smtClean="0"/>
+              <a:t>9</a:t>
+            </a:fld>
+            <a:endParaRPr lang="ko-KR" altLang="en-US" dirty="0"/>
+          </a:p>
+        </p:txBody>
+      </p:sp>
+      <p:graphicFrame>
+        <p:nvGraphicFramePr>
+          <p:cNvPr id="5" name="Table 4"/>
+          <p:cNvGraphicFramePr>
+            <a:graphicFrameLocks noGrp="1"/>
+          </p:cNvGraphicFramePr>
+          <p:nvPr>
+            <p:extLst>
+              <p:ext uri="{D42A27DB-BD31-4B8C-83A1-F6EECF244321}">
+                <p14:modId xmlns:p14="http://schemas.microsoft.com/office/powerpoint/2010/main" val="3947337434"/>
+              </p:ext>
+            </p:extLst>
+          </p:nvPr>
+        </p:nvGraphicFramePr>
+        <p:xfrm>
+          <a:off x="838200" y="2914346"/>
+          <a:ext cx="10515600" cy="1463040"/>
+        </p:xfrm>
+        <a:graphic>
+          <a:graphicData uri="http://schemas.openxmlformats.org/drawingml/2006/table">
+            <a:tbl>
+              <a:tblPr firstRow="1" bandRow="1">
+                <a:tableStyleId>{5C22544A-7EE6-4342-B048-85BDC9FD1C3A}</a:tableStyleId>
+              </a:tblPr>
+              <a:tblGrid>
+                <a:gridCol w="1645920">
+                  <a:extLst>
+                    <a:ext uri="{9D8B030D-6E8A-4147-A177-3AD203B41FA5}">
+                      <a16:colId xmlns:a16="http://schemas.microsoft.com/office/drawing/2014/main" val="20000"/>
+                    </a:ext>
+                  </a:extLst>
+                </a:gridCol>
+                <a:gridCol w="8869680">
+                  <a:extLst>
+                    <a:ext uri="{9D8B030D-6E8A-4147-A177-3AD203B41FA5}">
+                      <a16:colId xmlns:a16="http://schemas.microsoft.com/office/drawing/2014/main" val="20001"/>
+                    </a:ext>
+                  </a:extLst>
+                </a:gridCol>
+              </a:tblGrid>
+              <a:tr h="487680">
+                <a:tc>
+                  <a:txBody>
+                    <a:bodyPr/>
+                    <a:lstStyle/>
+                    <a:p>
+                      <a:pPr algn="ctr"/>
+                      <a:r>
+                        <a:rPr sz="1800" b="1" dirty="0">
+                          <a:solidFill>
+                            <a:schemeClr val="bg1"/>
+                          </a:solidFill>
+                        </a:rPr>
+                        <a:t>구분</a:t>
+                      </a:r>
+                    </a:p>
+                  </a:txBody>
+                  <a:tcPr anchor="ctr">
+                    <a:lnL w="12700" cap="flat" cmpd="sng" algn="ctr">
+                      <a:solidFill>
+                        <a:schemeClr val="tx1"/>
+                      </a:solidFill>
+                      <a:prstDash val="solid"/>
+                      <a:round/>
+                      <a:headEnd type="none" w="med" len="med"/>
+                      <a:tailEnd type="none" w="med" len="med"/>
+                    </a:lnL>
+                    <a:lnR w="12700" cap="flat" cmpd="sng" algn="ctr">
+                      <a:solidFill>
+                        <a:schemeClr val="tx1"/>
+                      </a:solidFill>
+                      <a:prstDash val="solid"/>
+                      <a:round/>
+                      <a:headEnd type="none" w="med" len="med"/>
+                      <a:tailEnd type="none" w="med" len="med"/>
+                    </a:lnR>
+                    <a:lnT w="12700" cap="flat" cmpd="sng" algn="ctr">
+                      <a:solidFill>
+                        <a:schemeClr val="tx1"/>
+                      </a:solidFill>
+                      <a:prstDash val="solid"/>
+                      <a:round/>
+                      <a:headEnd type="none" w="med" len="med"/>
+                      <a:tailEnd type="none" w="med" len="med"/>
+                    </a:lnT>
+                    <a:lnB w="12700" cap="flat" cmpd="sng" algn="ctr">
+                      <a:solidFill>
+                        <a:schemeClr val="tx1"/>
+                      </a:solidFill>
+                      <a:prstDash val="solid"/>
+                      <a:round/>
+                      <a:headEnd type="none" w="med" len="med"/>
+                      <a:tailEnd type="none" w="med" len="med"/>
+                    </a:lnB>
+                    <a:solidFill>
+                      <a:schemeClr val="accent2"/>
+                    </a:solidFill>
+                  </a:tcPr>
+                </a:tc>
+                <a:tc>
+                  <a:txBody>
+                    <a:bodyPr/>
+                    <a:lstStyle/>
+                    <a:p>
+                      <a:pPr algn="ctr"/>
+                      <a:r>
+                        <a:rPr sz="1800" b="1" dirty="0">
+                          <a:solidFill>
+                            <a:schemeClr val="bg1"/>
+                          </a:solidFill>
+                        </a:rPr>
+                        <a:t>내용</a:t>
+                      </a:r>
+                    </a:p>
+                  </a:txBody>
+                  <a:tcPr anchor="ctr">
+                    <a:lnL w="12700" cap="flat" cmpd="sng" algn="ctr">
+                      <a:solidFill>
+                        <a:schemeClr val="tx1"/>
+                      </a:solidFill>
+                      <a:prstDash val="solid"/>
+                      <a:round/>
+                      <a:headEnd type="none" w="med" len="med"/>
+                      <a:tailEnd type="none" w="med" len="med"/>
+                    </a:lnL>
+                    <a:lnR w="12700" cap="flat" cmpd="sng" algn="ctr">
+                      <a:solidFill>
+                        <a:schemeClr val="tx1"/>
+                      </a:solidFill>
+                      <a:prstDash val="solid"/>
+                      <a:round/>
+                      <a:headEnd type="none" w="med" len="med"/>
+                      <a:tailEnd type="none" w="med" len="med"/>
+                    </a:lnR>
+                    <a:lnT w="12700" cap="flat" cmpd="sng" algn="ctr">
+                      <a:solidFill>
+                        <a:schemeClr val="tx1"/>
+                      </a:solidFill>
+                      <a:prstDash val="solid"/>
+                      <a:round/>
+                      <a:headEnd type="none" w="med" len="med"/>
+                      <a:tailEnd type="none" w="med" len="med"/>
+                    </a:lnT>
+                    <a:lnB w="12700" cap="flat" cmpd="sng" algn="ctr">
+                      <a:solidFill>
+                        <a:schemeClr val="tx1"/>
+                      </a:solidFill>
+                      <a:prstDash val="solid"/>
+                      <a:round/>
+                      <a:headEnd type="none" w="med" len="med"/>
+                      <a:tailEnd type="none" w="med" len="med"/>
+                    </a:lnB>
+                    <a:solidFill>
+                      <a:schemeClr val="accent2"/>
+                    </a:solidFill>
+                  </a:tcPr>
+                </a:tc>
+                <a:extLst>
+                  <a:ext uri="{0D108BD9-81ED-4DB2-BD59-A6C34878D82A}">
+                    <a16:rowId xmlns:a16="http://schemas.microsoft.com/office/drawing/2014/main" val="10000"/>
+                  </a:ext>
+                </a:extLst>
+              </a:tr>
+              <a:tr h="487680">
+                <a:tc>
+                  <a:txBody>
+                    <a:bodyPr/>
+                    <a:lstStyle/>
+                    <a:p>
+                      <a:pPr algn="ctr"/>
+                      <a:r>
+                        <a:rPr sz="1800" dirty="0"/>
+                        <a:t>장점</a:t>
+                      </a:r>
+                    </a:p>
+                  </a:txBody>
+                  <a:tcPr anchor="ctr">
+                    <a:lnL w="12700" cap="flat" cmpd="sng" algn="ctr">
+                      <a:solidFill>
+                        <a:schemeClr val="tx1"/>
+                      </a:solidFill>
+                      <a:prstDash val="solid"/>
+                      <a:round/>
+                      <a:headEnd type="none" w="med" len="med"/>
+                      <a:tailEnd type="none" w="med" len="med"/>
+                    </a:lnL>
+                    <a:lnR w="12700" cap="flat" cmpd="sng" algn="ctr">
+                      <a:solidFill>
+                        <a:schemeClr val="tx1"/>
+                      </a:solidFill>
+                      <a:prstDash val="solid"/>
+                      <a:round/>
+                      <a:headEnd type="none" w="med" len="med"/>
+                      <a:tailEnd type="none" w="med" len="med"/>
+                    </a:lnR>
+                    <a:lnT w="12700" cap="flat" cmpd="sng" algn="ctr">
+                      <a:solidFill>
+                        <a:schemeClr val="tx1"/>
+                      </a:solidFill>
+                      <a:prstDash val="solid"/>
+                      <a:round/>
+                      <a:headEnd type="none" w="med" len="med"/>
+                      <a:tailEnd type="none" w="med" len="med"/>
+                    </a:lnT>
+                    <a:lnB w="12700" cap="flat" cmpd="sng" algn="ctr">
+                      <a:solidFill>
+                        <a:schemeClr val="tx1"/>
+                      </a:solidFill>
+                      <a:prstDash val="solid"/>
+                      <a:round/>
+                      <a:headEnd type="none" w="med" len="med"/>
+                      <a:tailEnd type="none" w="med" len="med"/>
+                    </a:lnB>
+                    <a:noFill/>
+                  </a:tcPr>
+                </a:tc>
+                <a:tc>
+                  <a:txBody>
+                    <a:bodyPr/>
+                    <a:lstStyle/>
+                    <a:p>
+                      <a:pPr algn="ctr"/>
+                      <a:r>
+                        <a:rPr sz="1800" dirty="0"/>
+                        <a:t>고전·양자 공격 모두에 대해 보안이 잘 이해된다</a:t>
+                      </a:r>
+                    </a:p>
+                  </a:txBody>
+                  <a:tcPr anchor="ctr">
+                    <a:lnL w="12700" cap="flat" cmpd="sng" algn="ctr">
+                      <a:solidFill>
+                        <a:schemeClr val="tx1"/>
+                      </a:solidFill>
+                      <a:prstDash val="solid"/>
+                      <a:round/>
+                      <a:headEnd type="none" w="med" len="med"/>
+                      <a:tailEnd type="none" w="med" len="med"/>
+                    </a:lnL>
+                    <a:lnR w="12700" cap="flat" cmpd="sng" algn="ctr">
+                      <a:solidFill>
+                        <a:schemeClr val="tx1"/>
+                      </a:solidFill>
+                      <a:prstDash val="solid"/>
+                      <a:round/>
+                      <a:headEnd type="none" w="med" len="med"/>
+                      <a:tailEnd type="none" w="med" len="med"/>
+                    </a:lnR>
+                    <a:lnT w="12700" cap="flat" cmpd="sng" algn="ctr">
+                      <a:solidFill>
+                        <a:schemeClr val="tx1"/>
+                      </a:solidFill>
+                      <a:prstDash val="solid"/>
+                      <a:round/>
+                      <a:headEnd type="none" w="med" len="med"/>
+                      <a:tailEnd type="none" w="med" len="med"/>
+                    </a:lnT>
+                    <a:lnB w="12700" cap="flat" cmpd="sng" algn="ctr">
+                      <a:solidFill>
+                        <a:schemeClr val="tx1"/>
+                      </a:solidFill>
+                      <a:prstDash val="solid"/>
+                      <a:round/>
+                      <a:headEnd type="none" w="med" len="med"/>
+                      <a:tailEnd type="none" w="med" len="med"/>
+                    </a:lnB>
+                    <a:noFill/>
+                  </a:tcPr>
+                </a:tc>
+                <a:extLst>
+                  <a:ext uri="{0D108BD9-81ED-4DB2-BD59-A6C34878D82A}">
+                    <a16:rowId xmlns:a16="http://schemas.microsoft.com/office/drawing/2014/main" val="10001"/>
+                  </a:ext>
+                </a:extLst>
+              </a:tr>
+              <a:tr h="487680">
+                <a:tc>
+                  <a:txBody>
+                    <a:bodyPr/>
+                    <a:lstStyle/>
+                    <a:p>
+                      <a:pPr algn="ctr"/>
+                      <a:r>
+                        <a:rPr sz="1800" dirty="0"/>
+                        <a:t>단점</a:t>
+                      </a:r>
+                    </a:p>
+                  </a:txBody>
+                  <a:tcPr anchor="ctr">
+                    <a:lnL w="12700" cap="flat" cmpd="sng" algn="ctr">
+                      <a:solidFill>
+                        <a:schemeClr val="tx1"/>
+                      </a:solidFill>
+                      <a:prstDash val="solid"/>
+                      <a:round/>
+                      <a:headEnd type="none" w="med" len="med"/>
+                      <a:tailEnd type="none" w="med" len="med"/>
+                    </a:lnL>
+                    <a:lnR w="12700" cap="flat" cmpd="sng" algn="ctr">
+                      <a:solidFill>
+                        <a:schemeClr val="tx1"/>
+                      </a:solidFill>
+                      <a:prstDash val="solid"/>
+                      <a:round/>
+                      <a:headEnd type="none" w="med" len="med"/>
+                      <a:tailEnd type="none" w="med" len="med"/>
+                    </a:lnR>
+                    <a:lnT w="12700" cap="flat" cmpd="sng" algn="ctr">
+                      <a:solidFill>
+                        <a:schemeClr val="tx1"/>
+                      </a:solidFill>
+                      <a:prstDash val="solid"/>
+                      <a:round/>
+                      <a:headEnd type="none" w="med" len="med"/>
+                      <a:tailEnd type="none" w="med" len="med"/>
+                    </a:lnT>
+                    <a:lnB w="12700" cap="flat" cmpd="sng" algn="ctr">
+                      <a:solidFill>
+                        <a:schemeClr val="tx1"/>
+                      </a:solidFill>
+                      <a:prstDash val="solid"/>
+                      <a:round/>
+                      <a:headEnd type="none" w="med" len="med"/>
+                      <a:tailEnd type="none" w="med" len="med"/>
+                    </a:lnB>
+                    <a:noFill/>
+                  </a:tcPr>
+                </a:tc>
+                <a:tc>
+                  <a:txBody>
+                    <a:bodyPr/>
+                    <a:lstStyle/>
+                    <a:p>
+                      <a:pPr algn="ctr"/>
+                      <a:r>
+                        <a:rPr sz="1800" dirty="0"/>
+                        <a:t>공개키와 서명의 크기가 크다</a:t>
+                      </a:r>
+                    </a:p>
+                  </a:txBody>
+                  <a:tcPr anchor="ctr">
+                    <a:lnL w="12700" cap="flat" cmpd="sng" algn="ctr">
+                      <a:solidFill>
+                        <a:schemeClr val="tx1"/>
+                      </a:solidFill>
+                      <a:prstDash val="solid"/>
+                      <a:round/>
+                      <a:headEnd type="none" w="med" len="med"/>
+                      <a:tailEnd type="none" w="med" len="med"/>
+                    </a:lnL>
+                    <a:lnR w="12700" cap="flat" cmpd="sng" algn="ctr">
+                      <a:solidFill>
+                        <a:schemeClr val="tx1"/>
+                      </a:solidFill>
+                      <a:prstDash val="solid"/>
+                      <a:round/>
+                      <a:headEnd type="none" w="med" len="med"/>
+                      <a:tailEnd type="none" w="med" len="med"/>
+                    </a:lnR>
+                    <a:lnT w="12700" cap="flat" cmpd="sng" algn="ctr">
+                      <a:solidFill>
+                        <a:schemeClr val="tx1"/>
+                      </a:solidFill>
+                      <a:prstDash val="solid"/>
+                      <a:round/>
+                      <a:headEnd type="none" w="med" len="med"/>
+                      <a:tailEnd type="none" w="med" len="med"/>
+                    </a:lnT>
+                    <a:lnB w="12700" cap="flat" cmpd="sng" algn="ctr">
+                      <a:solidFill>
+                        <a:schemeClr val="tx1"/>
+                      </a:solidFill>
+                      <a:prstDash val="solid"/>
+                      <a:round/>
+                      <a:headEnd type="none" w="med" len="med"/>
+                      <a:tailEnd type="none" w="med" len="med"/>
+                    </a:lnB>
+                    <a:noFill/>
+                  </a:tcPr>
+                </a:tc>
+                <a:extLst>
+                  <a:ext uri="{0D108BD9-81ED-4DB2-BD59-A6C34878D82A}">
+                    <a16:rowId xmlns:a16="http://schemas.microsoft.com/office/drawing/2014/main" val="10002"/>
                   </a:ext>
                 </a:extLst>
               </a:tr>

--- a/presentation/0903_14_Introduction-to-Hash-Based-Signatures.pptx
+++ b/presentation/0903_14_Introduction-to-Hash-Based-Signatures.pptx
@@ -5,21 +5,26 @@
     <p:sldMasterId id="2147483648" r:id="rId1"/>
   </p:sldMasterIdLst>
   <p:notesMasterIdLst>
-    <p:notesMasterId r:id="rId14"/>
+    <p:notesMasterId r:id="rId19"/>
   </p:notesMasterIdLst>
   <p:sldIdLst>
     <p:sldId id="256" r:id="rId2"/>
     <p:sldId id="257" r:id="rId3"/>
-    <p:sldId id="259" r:id="rId4"/>
-    <p:sldId id="260" r:id="rId5"/>
-    <p:sldId id="262" r:id="rId6"/>
-    <p:sldId id="264" r:id="rId7"/>
-    <p:sldId id="265" r:id="rId8"/>
-    <p:sldId id="267" r:id="rId9"/>
-    <p:sldId id="268" r:id="rId10"/>
-    <p:sldId id="270" r:id="rId11"/>
-    <p:sldId id="271" r:id="rId12"/>
-    <p:sldId id="274" r:id="rId13"/>
+    <p:sldId id="275" r:id="rId4"/>
+    <p:sldId id="276" r:id="rId5"/>
+    <p:sldId id="277" r:id="rId6"/>
+    <p:sldId id="278" r:id="rId7"/>
+    <p:sldId id="279" r:id="rId8"/>
+    <p:sldId id="259" r:id="rId9"/>
+    <p:sldId id="260" r:id="rId10"/>
+    <p:sldId id="262" r:id="rId11"/>
+    <p:sldId id="264" r:id="rId12"/>
+    <p:sldId id="265" r:id="rId13"/>
+    <p:sldId id="267" r:id="rId14"/>
+    <p:sldId id="268" r:id="rId15"/>
+    <p:sldId id="270" r:id="rId16"/>
+    <p:sldId id="271" r:id="rId17"/>
+    <p:sldId id="274" r:id="rId18"/>
   </p:sldIdLst>
   <p:sldSz cx="12192000" cy="6858000"/>
   <p:notesSz cx="6858000" cy="9144000"/>
@@ -9691,7 +9696,7 @@
           <a:p>
             <a:r>
               <a:rPr dirty="0"/>
-              <a:t>세 가지 표준 스킴</a:t>
+              <a:t>존재적 위조 불가능성 (EUF-CMA)</a:t>
             </a:r>
           </a:p>
         </p:txBody>
@@ -9713,19 +9718,25 @@
           <a:p>
             <a:r>
               <a:rPr sz="1800" dirty="0"/>
-              <a:t>LMS = Leighton-Micali Signature scheme</a:t>
+              <a:t>정의: 계산량이 제한된 공격자가 선택 메시지 공격을 하더라도 존재적으로 위조가 불가능하면 안전하다</a:t>
             </a:r>
           </a:p>
           <a:p>
             <a:r>
               <a:rPr sz="1800" dirty="0"/>
-              <a:t>XMSS = eXtended Merkle Signature Scheme</a:t>
+              <a:t>선택 메시지 공격: 공격자가 서명 오라클에 원하는 메시지의 서명을 자유롭게 얻는다</a:t>
             </a:r>
           </a:p>
           <a:p>
             <a:r>
               <a:rPr sz="1800" dirty="0"/>
-              <a:t>SPHINCS+ = FIPS 205에서 SLH-DSA로 표준화</a:t>
+              <a:t>존재적 위조: 오라클에 요청한 적 없는 메시지 하나에 대해 유효한 (m, σ) 쌍을 만든다</a:t>
+            </a:r>
+          </a:p>
+          <a:p>
+            <a:r>
+              <a:rPr sz="1800" dirty="0"/>
+              <a:t>많은 서명을 관찰해도 새로운 유효 서명을 만들 수 없다는 강한 보장이다</a:t>
             </a:r>
           </a:p>
         </p:txBody>
@@ -9753,727 +9764,6 @@
           </a:p>
         </p:txBody>
       </p:sp>
-      <p:graphicFrame>
-        <p:nvGraphicFramePr>
-          <p:cNvPr id="5" name="Table 4"/>
-          <p:cNvGraphicFramePr>
-            <a:graphicFrameLocks noGrp="1"/>
-          </p:cNvGraphicFramePr>
-          <p:nvPr>
-            <p:extLst>
-              <p:ext uri="{D42A27DB-BD31-4B8C-83A1-F6EECF244321}">
-                <p14:modId xmlns:p14="http://schemas.microsoft.com/office/powerpoint/2010/main" val="2019616980"/>
-              </p:ext>
-            </p:extLst>
-          </p:nvPr>
-        </p:nvGraphicFramePr>
-        <p:xfrm>
-          <a:off x="841248" y="3291840"/>
-          <a:ext cx="10515600" cy="1828800"/>
-        </p:xfrm>
-        <a:graphic>
-          <a:graphicData uri="http://schemas.openxmlformats.org/drawingml/2006/table">
-            <a:tbl>
-              <a:tblPr firstRow="1" bandRow="1">
-                <a:tableStyleId>{5C22544A-7EE6-4342-B048-85BDC9FD1C3A}</a:tableStyleId>
-              </a:tblPr>
-              <a:tblGrid>
-                <a:gridCol w="2011680">
-                  <a:extLst>
-                    <a:ext uri="{9D8B030D-6E8A-4147-A177-3AD203B41FA5}">
-                      <a16:colId xmlns:a16="http://schemas.microsoft.com/office/drawing/2014/main" val="20000"/>
-                    </a:ext>
-                  </a:extLst>
-                </a:gridCol>
-                <a:gridCol w="3931920">
-                  <a:extLst>
-                    <a:ext uri="{9D8B030D-6E8A-4147-A177-3AD203B41FA5}">
-                      <a16:colId xmlns:a16="http://schemas.microsoft.com/office/drawing/2014/main" val="20001"/>
-                    </a:ext>
-                  </a:extLst>
-                </a:gridCol>
-                <a:gridCol w="4572000">
-                  <a:extLst>
-                    <a:ext uri="{9D8B030D-6E8A-4147-A177-3AD203B41FA5}">
-                      <a16:colId xmlns:a16="http://schemas.microsoft.com/office/drawing/2014/main" val="20002"/>
-                    </a:ext>
-                  </a:extLst>
-                </a:gridCol>
-              </a:tblGrid>
-              <a:tr h="457200">
-                <a:tc>
-                  <a:txBody>
-                    <a:bodyPr/>
-                    <a:lstStyle/>
-                    <a:p>
-                      <a:pPr algn="ctr"/>
-                      <a:r>
-                        <a:rPr sz="1800" b="1" dirty="0">
-                          <a:solidFill>
-                            <a:schemeClr val="bg1"/>
-                          </a:solidFill>
-                        </a:rPr>
-                        <a:t>스킴</a:t>
-                      </a:r>
-                    </a:p>
-                  </a:txBody>
-                  <a:tcPr anchor="ctr">
-                    <a:lnL w="12700" cap="flat" cmpd="sng" algn="ctr">
-                      <a:solidFill>
-                        <a:schemeClr val="tx1"/>
-                      </a:solidFill>
-                      <a:prstDash val="solid"/>
-                      <a:round/>
-                      <a:headEnd type="none" w="med" len="med"/>
-                      <a:tailEnd type="none" w="med" len="med"/>
-                    </a:lnL>
-                    <a:lnR w="12700" cap="flat" cmpd="sng" algn="ctr">
-                      <a:solidFill>
-                        <a:schemeClr val="tx1"/>
-                      </a:solidFill>
-                      <a:prstDash val="solid"/>
-                      <a:round/>
-                      <a:headEnd type="none" w="med" len="med"/>
-                      <a:tailEnd type="none" w="med" len="med"/>
-                    </a:lnR>
-                    <a:lnT w="12700" cap="flat" cmpd="sng" algn="ctr">
-                      <a:solidFill>
-                        <a:schemeClr val="tx1"/>
-                      </a:solidFill>
-                      <a:prstDash val="solid"/>
-                      <a:round/>
-                      <a:headEnd type="none" w="med" len="med"/>
-                      <a:tailEnd type="none" w="med" len="med"/>
-                    </a:lnT>
-                    <a:lnB w="12700" cap="flat" cmpd="sng" algn="ctr">
-                      <a:solidFill>
-                        <a:schemeClr val="tx1"/>
-                      </a:solidFill>
-                      <a:prstDash val="solid"/>
-                      <a:round/>
-                      <a:headEnd type="none" w="med" len="med"/>
-                      <a:tailEnd type="none" w="med" len="med"/>
-                    </a:lnB>
-                    <a:solidFill>
-                      <a:schemeClr val="accent2"/>
-                    </a:solidFill>
-                  </a:tcPr>
-                </a:tc>
-                <a:tc>
-                  <a:txBody>
-                    <a:bodyPr/>
-                    <a:lstStyle/>
-                    <a:p>
-                      <a:pPr algn="ctr"/>
-                      <a:r>
-                        <a:rPr sz="1800" b="1" dirty="0">
-                          <a:solidFill>
-                            <a:schemeClr val="bg1"/>
-                          </a:solidFill>
-                        </a:rPr>
-                        <a:t>표준 문서</a:t>
-                      </a:r>
-                    </a:p>
-                  </a:txBody>
-                  <a:tcPr anchor="ctr">
-                    <a:lnL w="12700" cap="flat" cmpd="sng" algn="ctr">
-                      <a:solidFill>
-                        <a:schemeClr val="tx1"/>
-                      </a:solidFill>
-                      <a:prstDash val="solid"/>
-                      <a:round/>
-                      <a:headEnd type="none" w="med" len="med"/>
-                      <a:tailEnd type="none" w="med" len="med"/>
-                    </a:lnL>
-                    <a:lnR w="12700" cap="flat" cmpd="sng" algn="ctr">
-                      <a:solidFill>
-                        <a:schemeClr val="tx1"/>
-                      </a:solidFill>
-                      <a:prstDash val="solid"/>
-                      <a:round/>
-                      <a:headEnd type="none" w="med" len="med"/>
-                      <a:tailEnd type="none" w="med" len="med"/>
-                    </a:lnR>
-                    <a:lnT w="12700" cap="flat" cmpd="sng" algn="ctr">
-                      <a:solidFill>
-                        <a:schemeClr val="tx1"/>
-                      </a:solidFill>
-                      <a:prstDash val="solid"/>
-                      <a:round/>
-                      <a:headEnd type="none" w="med" len="med"/>
-                      <a:tailEnd type="none" w="med" len="med"/>
-                    </a:lnT>
-                    <a:lnB w="12700" cap="flat" cmpd="sng" algn="ctr">
-                      <a:solidFill>
-                        <a:schemeClr val="tx1"/>
-                      </a:solidFill>
-                      <a:prstDash val="solid"/>
-                      <a:round/>
-                      <a:headEnd type="none" w="med" len="med"/>
-                      <a:tailEnd type="none" w="med" len="med"/>
-                    </a:lnB>
-                    <a:solidFill>
-                      <a:schemeClr val="accent2"/>
-                    </a:solidFill>
-                  </a:tcPr>
-                </a:tc>
-                <a:tc>
-                  <a:txBody>
-                    <a:bodyPr/>
-                    <a:lstStyle/>
-                    <a:p>
-                      <a:pPr algn="ctr"/>
-                      <a:r>
-                        <a:rPr sz="1800" b="1" dirty="0">
-                          <a:solidFill>
-                            <a:schemeClr val="bg1"/>
-                          </a:solidFill>
-                        </a:rPr>
-                        <a:t>세부 규격</a:t>
-                      </a:r>
-                    </a:p>
-                  </a:txBody>
-                  <a:tcPr anchor="ctr">
-                    <a:lnL w="12700" cap="flat" cmpd="sng" algn="ctr">
-                      <a:solidFill>
-                        <a:schemeClr val="tx1"/>
-                      </a:solidFill>
-                      <a:prstDash val="solid"/>
-                      <a:round/>
-                      <a:headEnd type="none" w="med" len="med"/>
-                      <a:tailEnd type="none" w="med" len="med"/>
-                    </a:lnL>
-                    <a:lnR w="12700" cap="flat" cmpd="sng" algn="ctr">
-                      <a:solidFill>
-                        <a:schemeClr val="tx1"/>
-                      </a:solidFill>
-                      <a:prstDash val="solid"/>
-                      <a:round/>
-                      <a:headEnd type="none" w="med" len="med"/>
-                      <a:tailEnd type="none" w="med" len="med"/>
-                    </a:lnR>
-                    <a:lnT w="12700" cap="flat" cmpd="sng" algn="ctr">
-                      <a:solidFill>
-                        <a:schemeClr val="tx1"/>
-                      </a:solidFill>
-                      <a:prstDash val="solid"/>
-                      <a:round/>
-                      <a:headEnd type="none" w="med" len="med"/>
-                      <a:tailEnd type="none" w="med" len="med"/>
-                    </a:lnT>
-                    <a:lnB w="12700" cap="flat" cmpd="sng" algn="ctr">
-                      <a:solidFill>
-                        <a:schemeClr val="tx1"/>
-                      </a:solidFill>
-                      <a:prstDash val="solid"/>
-                      <a:round/>
-                      <a:headEnd type="none" w="med" len="med"/>
-                      <a:tailEnd type="none" w="med" len="med"/>
-                    </a:lnB>
-                    <a:solidFill>
-                      <a:schemeClr val="accent2"/>
-                    </a:solidFill>
-                  </a:tcPr>
-                </a:tc>
-                <a:extLst>
-                  <a:ext uri="{0D108BD9-81ED-4DB2-BD59-A6C34878D82A}">
-                    <a16:rowId xmlns:a16="http://schemas.microsoft.com/office/drawing/2014/main" val="10000"/>
-                  </a:ext>
-                </a:extLst>
-              </a:tr>
-              <a:tr h="457200">
-                <a:tc>
-                  <a:txBody>
-                    <a:bodyPr/>
-                    <a:lstStyle/>
-                    <a:p>
-                      <a:pPr algn="ctr"/>
-                      <a:r>
-                        <a:rPr sz="1800" dirty="0"/>
-                        <a:t>LMS</a:t>
-                      </a:r>
-                    </a:p>
-                  </a:txBody>
-                  <a:tcPr anchor="ctr">
-                    <a:lnL w="12700" cap="flat" cmpd="sng" algn="ctr">
-                      <a:solidFill>
-                        <a:schemeClr val="tx1"/>
-                      </a:solidFill>
-                      <a:prstDash val="solid"/>
-                      <a:round/>
-                      <a:headEnd type="none" w="med" len="med"/>
-                      <a:tailEnd type="none" w="med" len="med"/>
-                    </a:lnL>
-                    <a:lnR w="12700" cap="flat" cmpd="sng" algn="ctr">
-                      <a:solidFill>
-                        <a:schemeClr val="tx1"/>
-                      </a:solidFill>
-                      <a:prstDash val="solid"/>
-                      <a:round/>
-                      <a:headEnd type="none" w="med" len="med"/>
-                      <a:tailEnd type="none" w="med" len="med"/>
-                    </a:lnR>
-                    <a:lnT w="12700" cap="flat" cmpd="sng" algn="ctr">
-                      <a:solidFill>
-                        <a:schemeClr val="tx1"/>
-                      </a:solidFill>
-                      <a:prstDash val="solid"/>
-                      <a:round/>
-                      <a:headEnd type="none" w="med" len="med"/>
-                      <a:tailEnd type="none" w="med" len="med"/>
-                    </a:lnT>
-                    <a:lnB w="12700" cap="flat" cmpd="sng" algn="ctr">
-                      <a:solidFill>
-                        <a:schemeClr val="tx1"/>
-                      </a:solidFill>
-                      <a:prstDash val="solid"/>
-                      <a:round/>
-                      <a:headEnd type="none" w="med" len="med"/>
-                      <a:tailEnd type="none" w="med" len="med"/>
-                    </a:lnB>
-                    <a:noFill/>
-                  </a:tcPr>
-                </a:tc>
-                <a:tc>
-                  <a:txBody>
-                    <a:bodyPr/>
-                    <a:lstStyle/>
-                    <a:p>
-                      <a:pPr algn="ctr"/>
-                      <a:r>
-                        <a:rPr sz="1800" dirty="0"/>
-                        <a:t>NIST SP 800-208</a:t>
-                      </a:r>
-                    </a:p>
-                  </a:txBody>
-                  <a:tcPr anchor="ctr">
-                    <a:lnL w="12700" cap="flat" cmpd="sng" algn="ctr">
-                      <a:solidFill>
-                        <a:schemeClr val="tx1"/>
-                      </a:solidFill>
-                      <a:prstDash val="solid"/>
-                      <a:round/>
-                      <a:headEnd type="none" w="med" len="med"/>
-                      <a:tailEnd type="none" w="med" len="med"/>
-                    </a:lnL>
-                    <a:lnR w="12700" cap="flat" cmpd="sng" algn="ctr">
-                      <a:solidFill>
-                        <a:schemeClr val="tx1"/>
-                      </a:solidFill>
-                      <a:prstDash val="solid"/>
-                      <a:round/>
-                      <a:headEnd type="none" w="med" len="med"/>
-                      <a:tailEnd type="none" w="med" len="med"/>
-                    </a:lnR>
-                    <a:lnT w="12700" cap="flat" cmpd="sng" algn="ctr">
-                      <a:solidFill>
-                        <a:schemeClr val="tx1"/>
-                      </a:solidFill>
-                      <a:prstDash val="solid"/>
-                      <a:round/>
-                      <a:headEnd type="none" w="med" len="med"/>
-                      <a:tailEnd type="none" w="med" len="med"/>
-                    </a:lnT>
-                    <a:lnB w="12700" cap="flat" cmpd="sng" algn="ctr">
-                      <a:solidFill>
-                        <a:schemeClr val="tx1"/>
-                      </a:solidFill>
-                      <a:prstDash val="solid"/>
-                      <a:round/>
-                      <a:headEnd type="none" w="med" len="med"/>
-                      <a:tailEnd type="none" w="med" len="med"/>
-                    </a:lnB>
-                    <a:noFill/>
-                  </a:tcPr>
-                </a:tc>
-                <a:tc>
-                  <a:txBody>
-                    <a:bodyPr/>
-                    <a:lstStyle/>
-                    <a:p>
-                      <a:pPr algn="ctr"/>
-                      <a:r>
-                        <a:rPr sz="1800" dirty="0"/>
-                        <a:t>IETF RFC 8554</a:t>
-                      </a:r>
-                    </a:p>
-                  </a:txBody>
-                  <a:tcPr anchor="ctr">
-                    <a:lnL w="12700" cap="flat" cmpd="sng" algn="ctr">
-                      <a:solidFill>
-                        <a:schemeClr val="tx1"/>
-                      </a:solidFill>
-                      <a:prstDash val="solid"/>
-                      <a:round/>
-                      <a:headEnd type="none" w="med" len="med"/>
-                      <a:tailEnd type="none" w="med" len="med"/>
-                    </a:lnL>
-                    <a:lnR w="12700" cap="flat" cmpd="sng" algn="ctr">
-                      <a:solidFill>
-                        <a:schemeClr val="tx1"/>
-                      </a:solidFill>
-                      <a:prstDash val="solid"/>
-                      <a:round/>
-                      <a:headEnd type="none" w="med" len="med"/>
-                      <a:tailEnd type="none" w="med" len="med"/>
-                    </a:lnR>
-                    <a:lnT w="12700" cap="flat" cmpd="sng" algn="ctr">
-                      <a:solidFill>
-                        <a:schemeClr val="tx1"/>
-                      </a:solidFill>
-                      <a:prstDash val="solid"/>
-                      <a:round/>
-                      <a:headEnd type="none" w="med" len="med"/>
-                      <a:tailEnd type="none" w="med" len="med"/>
-                    </a:lnT>
-                    <a:lnB w="12700" cap="flat" cmpd="sng" algn="ctr">
-                      <a:solidFill>
-                        <a:schemeClr val="tx1"/>
-                      </a:solidFill>
-                      <a:prstDash val="solid"/>
-                      <a:round/>
-                      <a:headEnd type="none" w="med" len="med"/>
-                      <a:tailEnd type="none" w="med" len="med"/>
-                    </a:lnB>
-                    <a:noFill/>
-                  </a:tcPr>
-                </a:tc>
-                <a:extLst>
-                  <a:ext uri="{0D108BD9-81ED-4DB2-BD59-A6C34878D82A}">
-                    <a16:rowId xmlns:a16="http://schemas.microsoft.com/office/drawing/2014/main" val="10001"/>
-                  </a:ext>
-                </a:extLst>
-              </a:tr>
-              <a:tr h="457200">
-                <a:tc>
-                  <a:txBody>
-                    <a:bodyPr/>
-                    <a:lstStyle/>
-                    <a:p>
-                      <a:pPr algn="ctr"/>
-                      <a:r>
-                        <a:rPr sz="1800" dirty="0"/>
-                        <a:t>XMSS</a:t>
-                      </a:r>
-                    </a:p>
-                  </a:txBody>
-                  <a:tcPr anchor="ctr">
-                    <a:lnL w="12700" cap="flat" cmpd="sng" algn="ctr">
-                      <a:solidFill>
-                        <a:schemeClr val="tx1"/>
-                      </a:solidFill>
-                      <a:prstDash val="solid"/>
-                      <a:round/>
-                      <a:headEnd type="none" w="med" len="med"/>
-                      <a:tailEnd type="none" w="med" len="med"/>
-                    </a:lnL>
-                    <a:lnR w="12700" cap="flat" cmpd="sng" algn="ctr">
-                      <a:solidFill>
-                        <a:schemeClr val="tx1"/>
-                      </a:solidFill>
-                      <a:prstDash val="solid"/>
-                      <a:round/>
-                      <a:headEnd type="none" w="med" len="med"/>
-                      <a:tailEnd type="none" w="med" len="med"/>
-                    </a:lnR>
-                    <a:lnT w="12700" cap="flat" cmpd="sng" algn="ctr">
-                      <a:solidFill>
-                        <a:schemeClr val="tx1"/>
-                      </a:solidFill>
-                      <a:prstDash val="solid"/>
-                      <a:round/>
-                      <a:headEnd type="none" w="med" len="med"/>
-                      <a:tailEnd type="none" w="med" len="med"/>
-                    </a:lnT>
-                    <a:lnB w="12700" cap="flat" cmpd="sng" algn="ctr">
-                      <a:solidFill>
-                        <a:schemeClr val="tx1"/>
-                      </a:solidFill>
-                      <a:prstDash val="solid"/>
-                      <a:round/>
-                      <a:headEnd type="none" w="med" len="med"/>
-                      <a:tailEnd type="none" w="med" len="med"/>
-                    </a:lnB>
-                    <a:noFill/>
-                  </a:tcPr>
-                </a:tc>
-                <a:tc>
-                  <a:txBody>
-                    <a:bodyPr/>
-                    <a:lstStyle/>
-                    <a:p>
-                      <a:pPr algn="ctr"/>
-                      <a:r>
-                        <a:rPr sz="1800" dirty="0"/>
-                        <a:t>NIST SP 800-208</a:t>
-                      </a:r>
-                    </a:p>
-                  </a:txBody>
-                  <a:tcPr anchor="ctr">
-                    <a:lnL w="12700" cap="flat" cmpd="sng" algn="ctr">
-                      <a:solidFill>
-                        <a:schemeClr val="tx1"/>
-                      </a:solidFill>
-                      <a:prstDash val="solid"/>
-                      <a:round/>
-                      <a:headEnd type="none" w="med" len="med"/>
-                      <a:tailEnd type="none" w="med" len="med"/>
-                    </a:lnL>
-                    <a:lnR w="12700" cap="flat" cmpd="sng" algn="ctr">
-                      <a:solidFill>
-                        <a:schemeClr val="tx1"/>
-                      </a:solidFill>
-                      <a:prstDash val="solid"/>
-                      <a:round/>
-                      <a:headEnd type="none" w="med" len="med"/>
-                      <a:tailEnd type="none" w="med" len="med"/>
-                    </a:lnR>
-                    <a:lnT w="12700" cap="flat" cmpd="sng" algn="ctr">
-                      <a:solidFill>
-                        <a:schemeClr val="tx1"/>
-                      </a:solidFill>
-                      <a:prstDash val="solid"/>
-                      <a:round/>
-                      <a:headEnd type="none" w="med" len="med"/>
-                      <a:tailEnd type="none" w="med" len="med"/>
-                    </a:lnT>
-                    <a:lnB w="12700" cap="flat" cmpd="sng" algn="ctr">
-                      <a:solidFill>
-                        <a:schemeClr val="tx1"/>
-                      </a:solidFill>
-                      <a:prstDash val="solid"/>
-                      <a:round/>
-                      <a:headEnd type="none" w="med" len="med"/>
-                      <a:tailEnd type="none" w="med" len="med"/>
-                    </a:lnB>
-                    <a:noFill/>
-                  </a:tcPr>
-                </a:tc>
-                <a:tc>
-                  <a:txBody>
-                    <a:bodyPr/>
-                    <a:lstStyle/>
-                    <a:p>
-                      <a:pPr algn="ctr"/>
-                      <a:r>
-                        <a:rPr sz="1800" dirty="0"/>
-                        <a:t>IETF RFC 8391</a:t>
-                      </a:r>
-                    </a:p>
-                  </a:txBody>
-                  <a:tcPr anchor="ctr">
-                    <a:lnL w="12700" cap="flat" cmpd="sng" algn="ctr">
-                      <a:solidFill>
-                        <a:schemeClr val="tx1"/>
-                      </a:solidFill>
-                      <a:prstDash val="solid"/>
-                      <a:round/>
-                      <a:headEnd type="none" w="med" len="med"/>
-                      <a:tailEnd type="none" w="med" len="med"/>
-                    </a:lnL>
-                    <a:lnR w="12700" cap="flat" cmpd="sng" algn="ctr">
-                      <a:solidFill>
-                        <a:schemeClr val="tx1"/>
-                      </a:solidFill>
-                      <a:prstDash val="solid"/>
-                      <a:round/>
-                      <a:headEnd type="none" w="med" len="med"/>
-                      <a:tailEnd type="none" w="med" len="med"/>
-                    </a:lnR>
-                    <a:lnT w="12700" cap="flat" cmpd="sng" algn="ctr">
-                      <a:solidFill>
-                        <a:schemeClr val="tx1"/>
-                      </a:solidFill>
-                      <a:prstDash val="solid"/>
-                      <a:round/>
-                      <a:headEnd type="none" w="med" len="med"/>
-                      <a:tailEnd type="none" w="med" len="med"/>
-                    </a:lnT>
-                    <a:lnB w="12700" cap="flat" cmpd="sng" algn="ctr">
-                      <a:solidFill>
-                        <a:schemeClr val="tx1"/>
-                      </a:solidFill>
-                      <a:prstDash val="solid"/>
-                      <a:round/>
-                      <a:headEnd type="none" w="med" len="med"/>
-                      <a:tailEnd type="none" w="med" len="med"/>
-                    </a:lnB>
-                    <a:noFill/>
-                  </a:tcPr>
-                </a:tc>
-                <a:extLst>
-                  <a:ext uri="{0D108BD9-81ED-4DB2-BD59-A6C34878D82A}">
-                    <a16:rowId xmlns:a16="http://schemas.microsoft.com/office/drawing/2014/main" val="10002"/>
-                  </a:ext>
-                </a:extLst>
-              </a:tr>
-              <a:tr h="457200">
-                <a:tc>
-                  <a:txBody>
-                    <a:bodyPr/>
-                    <a:lstStyle/>
-                    <a:p>
-                      <a:pPr algn="ctr"/>
-                      <a:r>
-                        <a:rPr sz="1800" dirty="0"/>
-                        <a:t>SPHINCS+</a:t>
-                      </a:r>
-                    </a:p>
-                  </a:txBody>
-                  <a:tcPr anchor="ctr">
-                    <a:lnL w="12700" cap="flat" cmpd="sng" algn="ctr">
-                      <a:solidFill>
-                        <a:schemeClr val="tx1"/>
-                      </a:solidFill>
-                      <a:prstDash val="solid"/>
-                      <a:round/>
-                      <a:headEnd type="none" w="med" len="med"/>
-                      <a:tailEnd type="none" w="med" len="med"/>
-                    </a:lnL>
-                    <a:lnR w="12700" cap="flat" cmpd="sng" algn="ctr">
-                      <a:solidFill>
-                        <a:schemeClr val="tx1"/>
-                      </a:solidFill>
-                      <a:prstDash val="solid"/>
-                      <a:round/>
-                      <a:headEnd type="none" w="med" len="med"/>
-                      <a:tailEnd type="none" w="med" len="med"/>
-                    </a:lnR>
-                    <a:lnT w="12700" cap="flat" cmpd="sng" algn="ctr">
-                      <a:solidFill>
-                        <a:schemeClr val="tx1"/>
-                      </a:solidFill>
-                      <a:prstDash val="solid"/>
-                      <a:round/>
-                      <a:headEnd type="none" w="med" len="med"/>
-                      <a:tailEnd type="none" w="med" len="med"/>
-                    </a:lnT>
-                    <a:lnB w="12700" cap="flat" cmpd="sng" algn="ctr">
-                      <a:solidFill>
-                        <a:schemeClr val="tx1"/>
-                      </a:solidFill>
-                      <a:prstDash val="solid"/>
-                      <a:round/>
-                      <a:headEnd type="none" w="med" len="med"/>
-                      <a:tailEnd type="none" w="med" len="med"/>
-                    </a:lnB>
-                    <a:noFill/>
-                  </a:tcPr>
-                </a:tc>
-                <a:tc>
-                  <a:txBody>
-                    <a:bodyPr/>
-                    <a:lstStyle/>
-                    <a:p>
-                      <a:pPr algn="ctr"/>
-                      <a:r>
-                        <a:rPr sz="1800" dirty="0"/>
-                        <a:t>FIPS 205</a:t>
-                      </a:r>
-                    </a:p>
-                  </a:txBody>
-                  <a:tcPr anchor="ctr">
-                    <a:lnL w="12700" cap="flat" cmpd="sng" algn="ctr">
-                      <a:solidFill>
-                        <a:schemeClr val="tx1"/>
-                      </a:solidFill>
-                      <a:prstDash val="solid"/>
-                      <a:round/>
-                      <a:headEnd type="none" w="med" len="med"/>
-                      <a:tailEnd type="none" w="med" len="med"/>
-                    </a:lnL>
-                    <a:lnR w="12700" cap="flat" cmpd="sng" algn="ctr">
-                      <a:solidFill>
-                        <a:schemeClr val="tx1"/>
-                      </a:solidFill>
-                      <a:prstDash val="solid"/>
-                      <a:round/>
-                      <a:headEnd type="none" w="med" len="med"/>
-                      <a:tailEnd type="none" w="med" len="med"/>
-                    </a:lnR>
-                    <a:lnT w="12700" cap="flat" cmpd="sng" algn="ctr">
-                      <a:solidFill>
-                        <a:schemeClr val="tx1"/>
-                      </a:solidFill>
-                      <a:prstDash val="solid"/>
-                      <a:round/>
-                      <a:headEnd type="none" w="med" len="med"/>
-                      <a:tailEnd type="none" w="med" len="med"/>
-                    </a:lnT>
-                    <a:lnB w="12700" cap="flat" cmpd="sng" algn="ctr">
-                      <a:solidFill>
-                        <a:schemeClr val="tx1"/>
-                      </a:solidFill>
-                      <a:prstDash val="solid"/>
-                      <a:round/>
-                      <a:headEnd type="none" w="med" len="med"/>
-                      <a:tailEnd type="none" w="med" len="med"/>
-                    </a:lnB>
-                    <a:noFill/>
-                  </a:tcPr>
-                </a:tc>
-                <a:tc>
-                  <a:txBody>
-                    <a:bodyPr/>
-                    <a:lstStyle/>
-                    <a:p>
-                      <a:pPr algn="ctr"/>
-                      <a:r>
-                        <a:rPr sz="1800" dirty="0"/>
-                        <a:t>—</a:t>
-                      </a:r>
-                    </a:p>
-                  </a:txBody>
-                  <a:tcPr anchor="ctr">
-                    <a:lnL w="12700" cap="flat" cmpd="sng" algn="ctr">
-                      <a:solidFill>
-                        <a:schemeClr val="tx1"/>
-                      </a:solidFill>
-                      <a:prstDash val="solid"/>
-                      <a:round/>
-                      <a:headEnd type="none" w="med" len="med"/>
-                      <a:tailEnd type="none" w="med" len="med"/>
-                    </a:lnL>
-                    <a:lnR w="12700" cap="flat" cmpd="sng" algn="ctr">
-                      <a:solidFill>
-                        <a:schemeClr val="tx1"/>
-                      </a:solidFill>
-                      <a:prstDash val="solid"/>
-                      <a:round/>
-                      <a:headEnd type="none" w="med" len="med"/>
-                      <a:tailEnd type="none" w="med" len="med"/>
-                    </a:lnR>
-                    <a:lnT w="12700" cap="flat" cmpd="sng" algn="ctr">
-                      <a:solidFill>
-                        <a:schemeClr val="tx1"/>
-                      </a:solidFill>
-                      <a:prstDash val="solid"/>
-                      <a:round/>
-                      <a:headEnd type="none" w="med" len="med"/>
-                      <a:tailEnd type="none" w="med" len="med"/>
-                    </a:lnT>
-                    <a:lnB w="12700" cap="flat" cmpd="sng" algn="ctr">
-                      <a:solidFill>
-                        <a:schemeClr val="tx1"/>
-                      </a:solidFill>
-                      <a:prstDash val="solid"/>
-                      <a:round/>
-                      <a:headEnd type="none" w="med" len="med"/>
-                      <a:tailEnd type="none" w="med" len="med"/>
-                    </a:lnB>
-                    <a:noFill/>
-                  </a:tcPr>
-                </a:tc>
-                <a:extLst>
-                  <a:ext uri="{0D108BD9-81ED-4DB2-BD59-A6C34878D82A}">
-                    <a16:rowId xmlns:a16="http://schemas.microsoft.com/office/drawing/2014/main" val="10003"/>
-                  </a:ext>
-                </a:extLst>
-              </a:tr>
-            </a:tbl>
-          </a:graphicData>
-        </a:graphic>
-      </p:graphicFrame>
     </p:spTree>
   </p:cSld>
   <p:clrMapOvr>
@@ -10516,7 +9806,7 @@
           <a:p>
             <a:r>
               <a:rPr dirty="0"/>
-              <a:t>상태 유지형 vs 무상태</a:t>
+              <a:t>세 계열과 양자 컴퓨터</a:t>
             </a:r>
           </a:p>
         </p:txBody>
@@ -10538,7 +9828,7 @@
           <a:p>
             <a:r>
               <a:rPr sz="1800" dirty="0"/>
-              <a:t>표준 스킴은 서명자가 상태(state)를 관리하는지에 따라 갈린다</a:t>
+              <a:t>오늘 가장 널리 쓰이는 서명 계열은 셋이다</a:t>
             </a:r>
           </a:p>
         </p:txBody>
@@ -10561,1942 +9851,6 @@
             <a:fld id="{4438A2D4-3867-488E-A04E-7BFFCAED45A6}" type="slidenum">
               <a:rPr lang="ko-KR" altLang="en-US" smtClean="0"/>
               <a:t>11</a:t>
-            </a:fld>
-            <a:endParaRPr lang="ko-KR" altLang="en-US" dirty="0"/>
-          </a:p>
-        </p:txBody>
-      </p:sp>
-      <p:graphicFrame>
-        <p:nvGraphicFramePr>
-          <p:cNvPr id="5" name="Table 4"/>
-          <p:cNvGraphicFramePr>
-            <a:graphicFrameLocks noGrp="1"/>
-          </p:cNvGraphicFramePr>
-          <p:nvPr>
-            <p:extLst>
-              <p:ext uri="{D42A27DB-BD31-4B8C-83A1-F6EECF244321}">
-                <p14:modId xmlns:p14="http://schemas.microsoft.com/office/powerpoint/2010/main" val="414259285"/>
-              </p:ext>
-            </p:extLst>
-          </p:nvPr>
-        </p:nvGraphicFramePr>
-        <p:xfrm>
-          <a:off x="838200" y="2914346"/>
-          <a:ext cx="10515600" cy="1463040"/>
-        </p:xfrm>
-        <a:graphic>
-          <a:graphicData uri="http://schemas.openxmlformats.org/drawingml/2006/table">
-            <a:tbl>
-              <a:tblPr firstRow="1" bandRow="1">
-                <a:tableStyleId>{5C22544A-7EE6-4342-B048-85BDC9FD1C3A}</a:tableStyleId>
-              </a:tblPr>
-              <a:tblGrid>
-                <a:gridCol w="2377440">
-                  <a:extLst>
-                    <a:ext uri="{9D8B030D-6E8A-4147-A177-3AD203B41FA5}">
-                      <a16:colId xmlns:a16="http://schemas.microsoft.com/office/drawing/2014/main" val="20000"/>
-                    </a:ext>
-                  </a:extLst>
-                </a:gridCol>
-                <a:gridCol w="2743200">
-                  <a:extLst>
-                    <a:ext uri="{9D8B030D-6E8A-4147-A177-3AD203B41FA5}">
-                      <a16:colId xmlns:a16="http://schemas.microsoft.com/office/drawing/2014/main" val="20001"/>
-                    </a:ext>
-                  </a:extLst>
-                </a:gridCol>
-                <a:gridCol w="5394960">
-                  <a:extLst>
-                    <a:ext uri="{9D8B030D-6E8A-4147-A177-3AD203B41FA5}">
-                      <a16:colId xmlns:a16="http://schemas.microsoft.com/office/drawing/2014/main" val="20002"/>
-                    </a:ext>
-                  </a:extLst>
-                </a:gridCol>
-              </a:tblGrid>
-              <a:tr h="487680">
-                <a:tc>
-                  <a:txBody>
-                    <a:bodyPr/>
-                    <a:lstStyle/>
-                    <a:p>
-                      <a:pPr algn="ctr"/>
-                      <a:r>
-                        <a:rPr sz="1800" b="1" dirty="0">
-                          <a:solidFill>
-                            <a:schemeClr val="bg1"/>
-                          </a:solidFill>
-                        </a:rPr>
-                        <a:t>구분</a:t>
-                      </a:r>
-                    </a:p>
-                  </a:txBody>
-                  <a:tcPr anchor="ctr">
-                    <a:lnL w="12700" cap="flat" cmpd="sng" algn="ctr">
-                      <a:solidFill>
-                        <a:schemeClr val="tx1"/>
-                      </a:solidFill>
-                      <a:prstDash val="solid"/>
-                      <a:round/>
-                      <a:headEnd type="none" w="med" len="med"/>
-                      <a:tailEnd type="none" w="med" len="med"/>
-                    </a:lnL>
-                    <a:lnR w="12700" cap="flat" cmpd="sng" algn="ctr">
-                      <a:solidFill>
-                        <a:schemeClr val="tx1"/>
-                      </a:solidFill>
-                      <a:prstDash val="solid"/>
-                      <a:round/>
-                      <a:headEnd type="none" w="med" len="med"/>
-                      <a:tailEnd type="none" w="med" len="med"/>
-                    </a:lnR>
-                    <a:lnT w="12700" cap="flat" cmpd="sng" algn="ctr">
-                      <a:solidFill>
-                        <a:schemeClr val="tx1"/>
-                      </a:solidFill>
-                      <a:prstDash val="solid"/>
-                      <a:round/>
-                      <a:headEnd type="none" w="med" len="med"/>
-                      <a:tailEnd type="none" w="med" len="med"/>
-                    </a:lnT>
-                    <a:lnB w="12700" cap="flat" cmpd="sng" algn="ctr">
-                      <a:solidFill>
-                        <a:schemeClr val="tx1"/>
-                      </a:solidFill>
-                      <a:prstDash val="solid"/>
-                      <a:round/>
-                      <a:headEnd type="none" w="med" len="med"/>
-                      <a:tailEnd type="none" w="med" len="med"/>
-                    </a:lnB>
-                    <a:solidFill>
-                      <a:schemeClr val="accent2"/>
-                    </a:solidFill>
-                  </a:tcPr>
-                </a:tc>
-                <a:tc>
-                  <a:txBody>
-                    <a:bodyPr/>
-                    <a:lstStyle/>
-                    <a:p>
-                      <a:pPr algn="ctr"/>
-                      <a:r>
-                        <a:rPr sz="1800" b="1" dirty="0">
-                          <a:solidFill>
-                            <a:schemeClr val="bg1"/>
-                          </a:solidFill>
-                        </a:rPr>
-                        <a:t>스킴</a:t>
-                      </a:r>
-                    </a:p>
-                  </a:txBody>
-                  <a:tcPr anchor="ctr">
-                    <a:lnL w="12700" cap="flat" cmpd="sng" algn="ctr">
-                      <a:solidFill>
-                        <a:schemeClr val="tx1"/>
-                      </a:solidFill>
-                      <a:prstDash val="solid"/>
-                      <a:round/>
-                      <a:headEnd type="none" w="med" len="med"/>
-                      <a:tailEnd type="none" w="med" len="med"/>
-                    </a:lnL>
-                    <a:lnR w="12700" cap="flat" cmpd="sng" algn="ctr">
-                      <a:solidFill>
-                        <a:schemeClr val="tx1"/>
-                      </a:solidFill>
-                      <a:prstDash val="solid"/>
-                      <a:round/>
-                      <a:headEnd type="none" w="med" len="med"/>
-                      <a:tailEnd type="none" w="med" len="med"/>
-                    </a:lnR>
-                    <a:lnT w="12700" cap="flat" cmpd="sng" algn="ctr">
-                      <a:solidFill>
-                        <a:schemeClr val="tx1"/>
-                      </a:solidFill>
-                      <a:prstDash val="solid"/>
-                      <a:round/>
-                      <a:headEnd type="none" w="med" len="med"/>
-                      <a:tailEnd type="none" w="med" len="med"/>
-                    </a:lnT>
-                    <a:lnB w="12700" cap="flat" cmpd="sng" algn="ctr">
-                      <a:solidFill>
-                        <a:schemeClr val="tx1"/>
-                      </a:solidFill>
-                      <a:prstDash val="solid"/>
-                      <a:round/>
-                      <a:headEnd type="none" w="med" len="med"/>
-                      <a:tailEnd type="none" w="med" len="med"/>
-                    </a:lnB>
-                    <a:solidFill>
-                      <a:schemeClr val="accent2"/>
-                    </a:solidFill>
-                  </a:tcPr>
-                </a:tc>
-                <a:tc>
-                  <a:txBody>
-                    <a:bodyPr/>
-                    <a:lstStyle/>
-                    <a:p>
-                      <a:pPr algn="ctr"/>
-                      <a:r>
-                        <a:rPr sz="1800" b="1" dirty="0">
-                          <a:solidFill>
-                            <a:schemeClr val="bg1"/>
-                          </a:solidFill>
-                        </a:rPr>
-                        <a:t>서명자의 state 관리</a:t>
-                      </a:r>
-                    </a:p>
-                  </a:txBody>
-                  <a:tcPr anchor="ctr">
-                    <a:lnL w="12700" cap="flat" cmpd="sng" algn="ctr">
-                      <a:solidFill>
-                        <a:schemeClr val="tx1"/>
-                      </a:solidFill>
-                      <a:prstDash val="solid"/>
-                      <a:round/>
-                      <a:headEnd type="none" w="med" len="med"/>
-                      <a:tailEnd type="none" w="med" len="med"/>
-                    </a:lnL>
-                    <a:lnR w="12700" cap="flat" cmpd="sng" algn="ctr">
-                      <a:solidFill>
-                        <a:schemeClr val="tx1"/>
-                      </a:solidFill>
-                      <a:prstDash val="solid"/>
-                      <a:round/>
-                      <a:headEnd type="none" w="med" len="med"/>
-                      <a:tailEnd type="none" w="med" len="med"/>
-                    </a:lnR>
-                    <a:lnT w="12700" cap="flat" cmpd="sng" algn="ctr">
-                      <a:solidFill>
-                        <a:schemeClr val="tx1"/>
-                      </a:solidFill>
-                      <a:prstDash val="solid"/>
-                      <a:round/>
-                      <a:headEnd type="none" w="med" len="med"/>
-                      <a:tailEnd type="none" w="med" len="med"/>
-                    </a:lnT>
-                    <a:lnB w="12700" cap="flat" cmpd="sng" algn="ctr">
-                      <a:solidFill>
-                        <a:schemeClr val="tx1"/>
-                      </a:solidFill>
-                      <a:prstDash val="solid"/>
-                      <a:round/>
-                      <a:headEnd type="none" w="med" len="med"/>
-                      <a:tailEnd type="none" w="med" len="med"/>
-                    </a:lnB>
-                    <a:solidFill>
-                      <a:schemeClr val="accent2"/>
-                    </a:solidFill>
-                  </a:tcPr>
-                </a:tc>
-                <a:extLst>
-                  <a:ext uri="{0D108BD9-81ED-4DB2-BD59-A6C34878D82A}">
-                    <a16:rowId xmlns:a16="http://schemas.microsoft.com/office/drawing/2014/main" val="10000"/>
-                  </a:ext>
-                </a:extLst>
-              </a:tr>
-              <a:tr h="487680">
-                <a:tc>
-                  <a:txBody>
-                    <a:bodyPr/>
-                    <a:lstStyle/>
-                    <a:p>
-                      <a:pPr algn="ctr"/>
-                      <a:r>
-                        <a:rPr sz="1800" dirty="0"/>
-                        <a:t>상태 유지형</a:t>
-                      </a:r>
-                    </a:p>
-                  </a:txBody>
-                  <a:tcPr anchor="ctr">
-                    <a:lnL w="12700" cap="flat" cmpd="sng" algn="ctr">
-                      <a:solidFill>
-                        <a:schemeClr val="tx1"/>
-                      </a:solidFill>
-                      <a:prstDash val="solid"/>
-                      <a:round/>
-                      <a:headEnd type="none" w="med" len="med"/>
-                      <a:tailEnd type="none" w="med" len="med"/>
-                    </a:lnL>
-                    <a:lnR w="12700" cap="flat" cmpd="sng" algn="ctr">
-                      <a:solidFill>
-                        <a:schemeClr val="tx1"/>
-                      </a:solidFill>
-                      <a:prstDash val="solid"/>
-                      <a:round/>
-                      <a:headEnd type="none" w="med" len="med"/>
-                      <a:tailEnd type="none" w="med" len="med"/>
-                    </a:lnR>
-                    <a:lnT w="12700" cap="flat" cmpd="sng" algn="ctr">
-                      <a:solidFill>
-                        <a:schemeClr val="tx1"/>
-                      </a:solidFill>
-                      <a:prstDash val="solid"/>
-                      <a:round/>
-                      <a:headEnd type="none" w="med" len="med"/>
-                      <a:tailEnd type="none" w="med" len="med"/>
-                    </a:lnT>
-                    <a:lnB w="12700" cap="flat" cmpd="sng" algn="ctr">
-                      <a:solidFill>
-                        <a:schemeClr val="tx1"/>
-                      </a:solidFill>
-                      <a:prstDash val="solid"/>
-                      <a:round/>
-                      <a:headEnd type="none" w="med" len="med"/>
-                      <a:tailEnd type="none" w="med" len="med"/>
-                    </a:lnB>
-                    <a:noFill/>
-                  </a:tcPr>
-                </a:tc>
-                <a:tc>
-                  <a:txBody>
-                    <a:bodyPr/>
-                    <a:lstStyle/>
-                    <a:p>
-                      <a:pPr algn="ctr"/>
-                      <a:r>
-                        <a:rPr sz="1800" dirty="0"/>
-                        <a:t>LMS, XMSS</a:t>
-                      </a:r>
-                    </a:p>
-                  </a:txBody>
-                  <a:tcPr anchor="ctr">
-                    <a:lnL w="12700" cap="flat" cmpd="sng" algn="ctr">
-                      <a:solidFill>
-                        <a:schemeClr val="tx1"/>
-                      </a:solidFill>
-                      <a:prstDash val="solid"/>
-                      <a:round/>
-                      <a:headEnd type="none" w="med" len="med"/>
-                      <a:tailEnd type="none" w="med" len="med"/>
-                    </a:lnL>
-                    <a:lnR w="12700" cap="flat" cmpd="sng" algn="ctr">
-                      <a:solidFill>
-                        <a:schemeClr val="tx1"/>
-                      </a:solidFill>
-                      <a:prstDash val="solid"/>
-                      <a:round/>
-                      <a:headEnd type="none" w="med" len="med"/>
-                      <a:tailEnd type="none" w="med" len="med"/>
-                    </a:lnR>
-                    <a:lnT w="12700" cap="flat" cmpd="sng" algn="ctr">
-                      <a:solidFill>
-                        <a:schemeClr val="tx1"/>
-                      </a:solidFill>
-                      <a:prstDash val="solid"/>
-                      <a:round/>
-                      <a:headEnd type="none" w="med" len="med"/>
-                      <a:tailEnd type="none" w="med" len="med"/>
-                    </a:lnT>
-                    <a:lnB w="12700" cap="flat" cmpd="sng" algn="ctr">
-                      <a:solidFill>
-                        <a:schemeClr val="tx1"/>
-                      </a:solidFill>
-                      <a:prstDash val="solid"/>
-                      <a:round/>
-                      <a:headEnd type="none" w="med" len="med"/>
-                      <a:tailEnd type="none" w="med" len="med"/>
-                    </a:lnB>
-                    <a:noFill/>
-                  </a:tcPr>
-                </a:tc>
-                <a:tc>
-                  <a:txBody>
-                    <a:bodyPr/>
-                    <a:lstStyle/>
-                    <a:p>
-                      <a:pPr algn="ctr"/>
-                      <a:r>
-                        <a:rPr sz="1800" dirty="0"/>
-                        <a:t>필요 — 저장·갱신 오류 시 보안 붕괴</a:t>
-                      </a:r>
-                    </a:p>
-                  </a:txBody>
-                  <a:tcPr anchor="ctr">
-                    <a:lnL w="12700" cap="flat" cmpd="sng" algn="ctr">
-                      <a:solidFill>
-                        <a:schemeClr val="tx1"/>
-                      </a:solidFill>
-                      <a:prstDash val="solid"/>
-                      <a:round/>
-                      <a:headEnd type="none" w="med" len="med"/>
-                      <a:tailEnd type="none" w="med" len="med"/>
-                    </a:lnL>
-                    <a:lnR w="12700" cap="flat" cmpd="sng" algn="ctr">
-                      <a:solidFill>
-                        <a:schemeClr val="tx1"/>
-                      </a:solidFill>
-                      <a:prstDash val="solid"/>
-                      <a:round/>
-                      <a:headEnd type="none" w="med" len="med"/>
-                      <a:tailEnd type="none" w="med" len="med"/>
-                    </a:lnR>
-                    <a:lnT w="12700" cap="flat" cmpd="sng" algn="ctr">
-                      <a:solidFill>
-                        <a:schemeClr val="tx1"/>
-                      </a:solidFill>
-                      <a:prstDash val="solid"/>
-                      <a:round/>
-                      <a:headEnd type="none" w="med" len="med"/>
-                      <a:tailEnd type="none" w="med" len="med"/>
-                    </a:lnT>
-                    <a:lnB w="12700" cap="flat" cmpd="sng" algn="ctr">
-                      <a:solidFill>
-                        <a:schemeClr val="tx1"/>
-                      </a:solidFill>
-                      <a:prstDash val="solid"/>
-                      <a:round/>
-                      <a:headEnd type="none" w="med" len="med"/>
-                      <a:tailEnd type="none" w="med" len="med"/>
-                    </a:lnB>
-                    <a:noFill/>
-                  </a:tcPr>
-                </a:tc>
-                <a:extLst>
-                  <a:ext uri="{0D108BD9-81ED-4DB2-BD59-A6C34878D82A}">
-                    <a16:rowId xmlns:a16="http://schemas.microsoft.com/office/drawing/2014/main" val="10001"/>
-                  </a:ext>
-                </a:extLst>
-              </a:tr>
-              <a:tr h="487680">
-                <a:tc>
-                  <a:txBody>
-                    <a:bodyPr/>
-                    <a:lstStyle/>
-                    <a:p>
-                      <a:pPr algn="ctr"/>
-                      <a:r>
-                        <a:rPr sz="1800" dirty="0"/>
-                        <a:t>무상태</a:t>
-                      </a:r>
-                    </a:p>
-                  </a:txBody>
-                  <a:tcPr anchor="ctr">
-                    <a:lnL w="12700" cap="flat" cmpd="sng" algn="ctr">
-                      <a:solidFill>
-                        <a:schemeClr val="tx1"/>
-                      </a:solidFill>
-                      <a:prstDash val="solid"/>
-                      <a:round/>
-                      <a:headEnd type="none" w="med" len="med"/>
-                      <a:tailEnd type="none" w="med" len="med"/>
-                    </a:lnL>
-                    <a:lnR w="12700" cap="flat" cmpd="sng" algn="ctr">
-                      <a:solidFill>
-                        <a:schemeClr val="tx1"/>
-                      </a:solidFill>
-                      <a:prstDash val="solid"/>
-                      <a:round/>
-                      <a:headEnd type="none" w="med" len="med"/>
-                      <a:tailEnd type="none" w="med" len="med"/>
-                    </a:lnR>
-                    <a:lnT w="12700" cap="flat" cmpd="sng" algn="ctr">
-                      <a:solidFill>
-                        <a:schemeClr val="tx1"/>
-                      </a:solidFill>
-                      <a:prstDash val="solid"/>
-                      <a:round/>
-                      <a:headEnd type="none" w="med" len="med"/>
-                      <a:tailEnd type="none" w="med" len="med"/>
-                    </a:lnT>
-                    <a:lnB w="12700" cap="flat" cmpd="sng" algn="ctr">
-                      <a:solidFill>
-                        <a:schemeClr val="tx1"/>
-                      </a:solidFill>
-                      <a:prstDash val="solid"/>
-                      <a:round/>
-                      <a:headEnd type="none" w="med" len="med"/>
-                      <a:tailEnd type="none" w="med" len="med"/>
-                    </a:lnB>
-                    <a:noFill/>
-                  </a:tcPr>
-                </a:tc>
-                <a:tc>
-                  <a:txBody>
-                    <a:bodyPr/>
-                    <a:lstStyle/>
-                    <a:p>
-                      <a:pPr algn="ctr"/>
-                      <a:r>
-                        <a:rPr sz="1800" dirty="0"/>
-                        <a:t>SPHINCS+</a:t>
-                      </a:r>
-                    </a:p>
-                  </a:txBody>
-                  <a:tcPr anchor="ctr">
-                    <a:lnL w="12700" cap="flat" cmpd="sng" algn="ctr">
-                      <a:solidFill>
-                        <a:schemeClr val="tx1"/>
-                      </a:solidFill>
-                      <a:prstDash val="solid"/>
-                      <a:round/>
-                      <a:headEnd type="none" w="med" len="med"/>
-                      <a:tailEnd type="none" w="med" len="med"/>
-                    </a:lnL>
-                    <a:lnR w="12700" cap="flat" cmpd="sng" algn="ctr">
-                      <a:solidFill>
-                        <a:schemeClr val="tx1"/>
-                      </a:solidFill>
-                      <a:prstDash val="solid"/>
-                      <a:round/>
-                      <a:headEnd type="none" w="med" len="med"/>
-                      <a:tailEnd type="none" w="med" len="med"/>
-                    </a:lnR>
-                    <a:lnT w="12700" cap="flat" cmpd="sng" algn="ctr">
-                      <a:solidFill>
-                        <a:schemeClr val="tx1"/>
-                      </a:solidFill>
-                      <a:prstDash val="solid"/>
-                      <a:round/>
-                      <a:headEnd type="none" w="med" len="med"/>
-                      <a:tailEnd type="none" w="med" len="med"/>
-                    </a:lnT>
-                    <a:lnB w="12700" cap="flat" cmpd="sng" algn="ctr">
-                      <a:solidFill>
-                        <a:schemeClr val="tx1"/>
-                      </a:solidFill>
-                      <a:prstDash val="solid"/>
-                      <a:round/>
-                      <a:headEnd type="none" w="med" len="med"/>
-                      <a:tailEnd type="none" w="med" len="med"/>
-                    </a:lnB>
-                    <a:noFill/>
-                  </a:tcPr>
-                </a:tc>
-                <a:tc>
-                  <a:txBody>
-                    <a:bodyPr/>
-                    <a:lstStyle/>
-                    <a:p>
-                      <a:pPr algn="ctr"/>
-                      <a:r>
-                        <a:rPr sz="1800" dirty="0"/>
-                        <a:t>불필요</a:t>
-                      </a:r>
-                    </a:p>
-                  </a:txBody>
-                  <a:tcPr anchor="ctr">
-                    <a:lnL w="12700" cap="flat" cmpd="sng" algn="ctr">
-                      <a:solidFill>
-                        <a:schemeClr val="tx1"/>
-                      </a:solidFill>
-                      <a:prstDash val="solid"/>
-                      <a:round/>
-                      <a:headEnd type="none" w="med" len="med"/>
-                      <a:tailEnd type="none" w="med" len="med"/>
-                    </a:lnL>
-                    <a:lnR w="12700" cap="flat" cmpd="sng" algn="ctr">
-                      <a:solidFill>
-                        <a:schemeClr val="tx1"/>
-                      </a:solidFill>
-                      <a:prstDash val="solid"/>
-                      <a:round/>
-                      <a:headEnd type="none" w="med" len="med"/>
-                      <a:tailEnd type="none" w="med" len="med"/>
-                    </a:lnR>
-                    <a:lnT w="12700" cap="flat" cmpd="sng" algn="ctr">
-                      <a:solidFill>
-                        <a:schemeClr val="tx1"/>
-                      </a:solidFill>
-                      <a:prstDash val="solid"/>
-                      <a:round/>
-                      <a:headEnd type="none" w="med" len="med"/>
-                      <a:tailEnd type="none" w="med" len="med"/>
-                    </a:lnT>
-                    <a:lnB w="12700" cap="flat" cmpd="sng" algn="ctr">
-                      <a:solidFill>
-                        <a:schemeClr val="tx1"/>
-                      </a:solidFill>
-                      <a:prstDash val="solid"/>
-                      <a:round/>
-                      <a:headEnd type="none" w="med" len="med"/>
-                      <a:tailEnd type="none" w="med" len="med"/>
-                    </a:lnB>
-                    <a:noFill/>
-                  </a:tcPr>
-                </a:tc>
-                <a:extLst>
-                  <a:ext uri="{0D108BD9-81ED-4DB2-BD59-A6C34878D82A}">
-                    <a16:rowId xmlns:a16="http://schemas.microsoft.com/office/drawing/2014/main" val="10002"/>
-                  </a:ext>
-                </a:extLst>
-              </a:tr>
-            </a:tbl>
-          </a:graphicData>
-        </a:graphic>
-      </p:graphicFrame>
-    </p:spTree>
-  </p:cSld>
-  <p:clrMapOvr>
-    <a:masterClrMapping/>
-  </p:clrMapOvr>
-</p:sld>
-</file>
-
-<file path=ppt/slides/slide12.xml><?xml version="1.0" encoding="utf-8"?>
-<p:sld xmlns:a="http://schemas.openxmlformats.org/drawingml/2006/main" xmlns:r="http://schemas.openxmlformats.org/officeDocument/2006/relationships" xmlns:p="http://schemas.openxmlformats.org/presentationml/2006/main">
-  <p:cSld>
-    <p:spTree>
-      <p:nvGrpSpPr>
-        <p:cNvPr id="1" name=""/>
-        <p:cNvGrpSpPr/>
-        <p:nvPr/>
-      </p:nvGrpSpPr>
-      <p:grpSpPr>
-        <a:xfrm>
-          <a:off x="0" y="0"/>
-          <a:ext cx="0" cy="0"/>
-          <a:chOff x="0" y="0"/>
-          <a:chExt cx="0" cy="0"/>
-        </a:xfrm>
-      </p:grpSpPr>
-      <p:sp>
-        <p:nvSpPr>
-          <p:cNvPr id="2" name="Title 1"/>
-          <p:cNvSpPr>
-            <a:spLocks noGrp="1"/>
-          </p:cNvSpPr>
-          <p:nvPr>
-            <p:ph type="title"/>
-          </p:nvPr>
-        </p:nvSpPr>
-        <p:spPr/>
-        <p:txBody>
-          <a:bodyPr/>
-          <a:lstStyle/>
-          <a:p>
-            <a:r>
-              <a:rPr dirty="0"/>
-              <a:t>마무리</a:t>
-            </a:r>
-          </a:p>
-        </p:txBody>
-      </p:sp>
-      <p:sp>
-        <p:nvSpPr>
-          <p:cNvPr id="3" name="Content Placeholder 2"/>
-          <p:cNvSpPr>
-            <a:spLocks noGrp="1"/>
-          </p:cNvSpPr>
-          <p:nvPr>
-            <p:ph idx="1"/>
-          </p:nvPr>
-        </p:nvSpPr>
-        <p:spPr/>
-        <p:txBody>
-          <a:bodyPr/>
-          <a:lstStyle/>
-          <a:p>
-            <a:r>
-              <a:rPr sz="1800" dirty="0"/>
-              <a:t>서명 스킴은 키 생성·서명·검증 세 알고리즘으로 인증을 제공한다</a:t>
-            </a:r>
-          </a:p>
-          <a:p>
-            <a:r>
-              <a:rPr sz="1800" dirty="0"/>
-              <a:t>보안 기준은 선택 메시지 공격 하 존재적 위조 불가능성이다</a:t>
-            </a:r>
-          </a:p>
-          <a:p>
-            <a:r>
-              <a:rPr sz="1800" dirty="0"/>
-              <a:t>RSA·타원곡선은 양자 컴퓨터에 붕괴하고, 격자 기반은 안전하나 근거 문제가 최신이다</a:t>
-            </a:r>
-          </a:p>
-          <a:p>
-            <a:r>
-              <a:rPr sz="1800" dirty="0"/>
-              <a:t>해시 기반은 해시 함수 하나에만 의존해 보안이 잘 이해되지만 키·서명이 크다</a:t>
-            </a:r>
-          </a:p>
-          <a:p>
-            <a:r>
-              <a:rPr sz="1800" dirty="0"/>
-              <a:t>표준은 LMS·XMSS(상태 유지형)와 SPHINCS+(무상태)이다</a:t>
-            </a:r>
-          </a:p>
-        </p:txBody>
-      </p:sp>
-      <p:sp>
-        <p:nvSpPr>
-          <p:cNvPr id="4" name="슬라이드 번호 개체 틀"/>
-          <p:cNvSpPr>
-            <a:spLocks noGrp="1"/>
-          </p:cNvSpPr>
-          <p:nvPr>
-            <p:ph type="sldNum" sz="quarter" idx="12"/>
-          </p:nvPr>
-        </p:nvSpPr>
-        <p:spPr/>
-        <p:txBody>
-          <a:bodyPr/>
-          <a:lstStyle/>
-          <a:p>
-            <a:fld id="{4438A2D4-3867-488E-A04E-7BFFCAED45A6}" type="slidenum">
-              <a:rPr lang="ko-KR" altLang="en-US" smtClean="0"/>
-              <a:t>12</a:t>
-            </a:fld>
-            <a:endParaRPr lang="ko-KR" altLang="en-US" dirty="0"/>
-          </a:p>
-        </p:txBody>
-      </p:sp>
-    </p:spTree>
-  </p:cSld>
-  <p:clrMapOvr>
-    <a:masterClrMapping/>
-  </p:clrMapOvr>
-</p:sld>
-</file>
-
-<file path=ppt/slides/slide2.xml><?xml version="1.0" encoding="utf-8"?>
-<p:sld xmlns:a="http://schemas.openxmlformats.org/drawingml/2006/main" xmlns:r="http://schemas.openxmlformats.org/officeDocument/2006/relationships" xmlns:p="http://schemas.openxmlformats.org/presentationml/2006/main">
-  <p:cSld>
-    <p:spTree>
-      <p:nvGrpSpPr>
-        <p:cNvPr id="1" name=""/>
-        <p:cNvGrpSpPr/>
-        <p:nvPr/>
-      </p:nvGrpSpPr>
-      <p:grpSpPr>
-        <a:xfrm>
-          <a:off x="0" y="0"/>
-          <a:ext cx="0" cy="0"/>
-          <a:chOff x="0" y="0"/>
-          <a:chExt cx="0" cy="0"/>
-        </a:xfrm>
-      </p:grpSpPr>
-      <p:sp>
-        <p:nvSpPr>
-          <p:cNvPr id="2" name="Title 1"/>
-          <p:cNvSpPr>
-            <a:spLocks noGrp="1"/>
-          </p:cNvSpPr>
-          <p:nvPr>
-            <p:ph type="title"/>
-          </p:nvPr>
-        </p:nvSpPr>
-        <p:spPr/>
-        <p:txBody>
-          <a:bodyPr/>
-          <a:lstStyle/>
-          <a:p>
-            <a:r>
-              <a:rPr dirty="0"/>
-              <a:t>Plan</a:t>
-            </a:r>
-          </a:p>
-        </p:txBody>
-      </p:sp>
-      <p:sp>
-        <p:nvSpPr>
-          <p:cNvPr id="3" name="Content Placeholder 2"/>
-          <p:cNvSpPr>
-            <a:spLocks noGrp="1"/>
-          </p:cNvSpPr>
-          <p:nvPr>
-            <p:ph idx="1"/>
-          </p:nvPr>
-        </p:nvSpPr>
-        <p:spPr/>
-        <p:txBody>
-          <a:bodyPr/>
-          <a:lstStyle/>
-          <a:p>
-            <a:pPr marL="342900" indent="-342900">
-              <a:buFont typeface="+mj-lt"/>
-              <a:buAutoNum type="arabicPeriod"/>
-            </a:pPr>
-            <a:r>
-              <a:rPr sz="1800" dirty="0"/>
-              <a:t>서명 스킴이란 무엇인가</a:t>
-            </a:r>
-          </a:p>
-          <a:p>
-            <a:pPr marL="342900" indent="-342900">
-              <a:buFont typeface="+mj-lt"/>
-              <a:buAutoNum type="arabicPeriod"/>
-            </a:pPr>
-            <a:r>
-              <a:rPr sz="1800" dirty="0"/>
-              <a:t>보안 정의</a:t>
-            </a:r>
-            <a:endParaRPr lang="en-US" sz="1800" dirty="0"/>
-          </a:p>
-          <a:p>
-            <a:pPr marL="342900" indent="-342900">
-              <a:buFont typeface="+mj-lt"/>
-              <a:buAutoNum type="arabicPeriod"/>
-            </a:pPr>
-            <a:r>
-              <a:rPr sz="1800" dirty="0"/>
-              <a:t>서명 스킴의 세 계열</a:t>
-            </a:r>
-          </a:p>
-          <a:p>
-            <a:pPr marL="342900" indent="-342900">
-              <a:buFont typeface="+mj-lt"/>
-              <a:buAutoNum type="arabicPeriod"/>
-            </a:pPr>
-            <a:r>
-              <a:rPr sz="1800" dirty="0"/>
-              <a:t>해시 기반 서명 스킴</a:t>
-            </a:r>
-          </a:p>
-          <a:p>
-            <a:pPr marL="342900" indent="-342900">
-              <a:buFont typeface="+mj-lt"/>
-              <a:buAutoNum type="arabicPeriod"/>
-            </a:pPr>
-            <a:r>
-              <a:rPr sz="1800" dirty="0"/>
-              <a:t>표준화된 해시 기반 서명 스킴</a:t>
-            </a:r>
-          </a:p>
-        </p:txBody>
-      </p:sp>
-      <p:sp>
-        <p:nvSpPr>
-          <p:cNvPr id="4" name="슬라이드 번호 개체 틀"/>
-          <p:cNvSpPr>
-            <a:spLocks noGrp="1"/>
-          </p:cNvSpPr>
-          <p:nvPr>
-            <p:ph type="sldNum" sz="quarter" idx="12"/>
-          </p:nvPr>
-        </p:nvSpPr>
-        <p:spPr/>
-        <p:txBody>
-          <a:bodyPr/>
-          <a:lstStyle/>
-          <a:p>
-            <a:fld id="{4438A2D4-3867-488E-A04E-7BFFCAED45A6}" type="slidenum">
-              <a:rPr lang="ko-KR" altLang="en-US" smtClean="0"/>
-              <a:t>2</a:t>
-            </a:fld>
-            <a:endParaRPr lang="ko-KR" altLang="en-US" dirty="0"/>
-          </a:p>
-        </p:txBody>
-      </p:sp>
-    </p:spTree>
-  </p:cSld>
-  <p:clrMapOvr>
-    <a:masterClrMapping/>
-  </p:clrMapOvr>
-</p:sld>
-</file>
-
-<file path=ppt/slides/slide3.xml><?xml version="1.0" encoding="utf-8"?>
-<p:sld xmlns:a="http://schemas.openxmlformats.org/drawingml/2006/main" xmlns:r="http://schemas.openxmlformats.org/officeDocument/2006/relationships" xmlns:p="http://schemas.openxmlformats.org/presentationml/2006/main">
-  <p:cSld>
-    <p:spTree>
-      <p:nvGrpSpPr>
-        <p:cNvPr id="1" name=""/>
-        <p:cNvGrpSpPr/>
-        <p:nvPr/>
-      </p:nvGrpSpPr>
-      <p:grpSpPr>
-        <a:xfrm>
-          <a:off x="0" y="0"/>
-          <a:ext cx="0" cy="0"/>
-          <a:chOff x="0" y="0"/>
-          <a:chExt cx="0" cy="0"/>
-        </a:xfrm>
-      </p:grpSpPr>
-      <p:sp>
-        <p:nvSpPr>
-          <p:cNvPr id="2" name="Title 1"/>
-          <p:cNvSpPr>
-            <a:spLocks noGrp="1"/>
-          </p:cNvSpPr>
-          <p:nvPr>
-            <p:ph type="title"/>
-          </p:nvPr>
-        </p:nvSpPr>
-        <p:spPr/>
-        <p:txBody>
-          <a:bodyPr/>
-          <a:lstStyle/>
-          <a:p>
-            <a:r>
-              <a:rPr dirty="0"/>
-              <a:t>서명의 목적: 인증</a:t>
-            </a:r>
-          </a:p>
-        </p:txBody>
-      </p:sp>
-      <p:sp>
-        <p:nvSpPr>
-          <p:cNvPr id="3" name="Content Placeholder 2"/>
-          <p:cNvSpPr>
-            <a:spLocks noGrp="1"/>
-          </p:cNvSpPr>
-          <p:nvPr>
-            <p:ph idx="1"/>
-          </p:nvPr>
-        </p:nvSpPr>
-        <p:spPr/>
-        <p:txBody>
-          <a:bodyPr/>
-          <a:lstStyle/>
-          <a:p>
-            <a:r>
-              <a:rPr sz="1800" dirty="0"/>
-              <a:t>서명 스킴은 인증(authentication)을 위해 쓰인다</a:t>
-            </a:r>
-          </a:p>
-          <a:p>
-            <a:r>
-              <a:rPr sz="1800" dirty="0"/>
-              <a:t>데이터 무결성: 허가되지 않은 메시지 변조를 탐지한다</a:t>
-            </a:r>
-          </a:p>
-          <a:p>
-            <a:r>
-              <a:rPr sz="1800" dirty="0"/>
-              <a:t>데이터 출처 인증: 메시지를 보낸 주체의 신원을 검증한다</a:t>
-            </a:r>
-          </a:p>
-        </p:txBody>
-      </p:sp>
-      <p:sp>
-        <p:nvSpPr>
-          <p:cNvPr id="4" name="슬라이드 번호 개체 틀"/>
-          <p:cNvSpPr>
-            <a:spLocks noGrp="1"/>
-          </p:cNvSpPr>
-          <p:nvPr>
-            <p:ph type="sldNum" sz="quarter" idx="12"/>
-          </p:nvPr>
-        </p:nvSpPr>
-        <p:spPr/>
-        <p:txBody>
-          <a:bodyPr/>
-          <a:lstStyle/>
-          <a:p>
-            <a:fld id="{4438A2D4-3867-488E-A04E-7BFFCAED45A6}" type="slidenum">
-              <a:rPr lang="ko-KR" altLang="en-US" smtClean="0"/>
-              <a:t>3</a:t>
-            </a:fld>
-            <a:endParaRPr lang="ko-KR" altLang="en-US" dirty="0"/>
-          </a:p>
-        </p:txBody>
-      </p:sp>
-    </p:spTree>
-  </p:cSld>
-  <p:clrMapOvr>
-    <a:masterClrMapping/>
-  </p:clrMapOvr>
-</p:sld>
-</file>
-
-<file path=ppt/slides/slide4.xml><?xml version="1.0" encoding="utf-8"?>
-<p:sld xmlns:a="http://schemas.openxmlformats.org/drawingml/2006/main" xmlns:r="http://schemas.openxmlformats.org/officeDocument/2006/relationships" xmlns:p="http://schemas.openxmlformats.org/presentationml/2006/main">
-  <p:cSld>
-    <p:spTree>
-      <p:nvGrpSpPr>
-        <p:cNvPr id="1" name=""/>
-        <p:cNvGrpSpPr/>
-        <p:nvPr/>
-      </p:nvGrpSpPr>
-      <p:grpSpPr>
-        <a:xfrm>
-          <a:off x="0" y="0"/>
-          <a:ext cx="0" cy="0"/>
-          <a:chOff x="0" y="0"/>
-          <a:chExt cx="0" cy="0"/>
-        </a:xfrm>
-      </p:grpSpPr>
-      <p:sp>
-        <p:nvSpPr>
-          <p:cNvPr id="2" name="Title 1"/>
-          <p:cNvSpPr>
-            <a:spLocks noGrp="1"/>
-          </p:cNvSpPr>
-          <p:nvPr>
-            <p:ph type="title"/>
-          </p:nvPr>
-        </p:nvSpPr>
-        <p:spPr/>
-        <p:txBody>
-          <a:bodyPr/>
-          <a:lstStyle/>
-          <a:p>
-            <a:r>
-              <a:rPr dirty="0"/>
-              <a:t>서명 스킴의 세 알고리즘</a:t>
-            </a:r>
-          </a:p>
-        </p:txBody>
-      </p:sp>
-      <p:sp>
-        <p:nvSpPr>
-          <p:cNvPr id="3" name="Content Placeholder 2"/>
-          <p:cNvSpPr>
-            <a:spLocks noGrp="1"/>
-          </p:cNvSpPr>
-          <p:nvPr>
-            <p:ph idx="1"/>
-          </p:nvPr>
-        </p:nvSpPr>
-        <p:spPr/>
-        <p:txBody>
-          <a:bodyPr/>
-          <a:lstStyle/>
-          <a:p>
-            <a:r>
-              <a:rPr sz="1800" dirty="0"/>
-              <a:t>서명 스킴은 세 개의 알고리즘으로 구성된다</a:t>
-            </a:r>
-          </a:p>
-          <a:p>
-            <a:r>
-              <a:rPr sz="1800" dirty="0"/>
-              <a:t>검증은 검증자가 Alice의 진짜 공개키를 가진다고 전제한다 (공개키 진위는 PKI의 몫)</a:t>
-            </a:r>
-          </a:p>
-        </p:txBody>
-      </p:sp>
-      <p:sp>
-        <p:nvSpPr>
-          <p:cNvPr id="4" name="슬라이드 번호 개체 틀"/>
-          <p:cNvSpPr>
-            <a:spLocks noGrp="1"/>
-          </p:cNvSpPr>
-          <p:nvPr>
-            <p:ph type="sldNum" sz="quarter" idx="12"/>
-          </p:nvPr>
-        </p:nvSpPr>
-        <p:spPr/>
-        <p:txBody>
-          <a:bodyPr/>
-          <a:lstStyle/>
-          <a:p>
-            <a:fld id="{4438A2D4-3867-488E-A04E-7BFFCAED45A6}" type="slidenum">
-              <a:rPr lang="ko-KR" altLang="en-US" smtClean="0"/>
-              <a:t>4</a:t>
-            </a:fld>
-            <a:endParaRPr lang="ko-KR" altLang="en-US" dirty="0"/>
-          </a:p>
-        </p:txBody>
-      </p:sp>
-      <p:graphicFrame>
-        <p:nvGraphicFramePr>
-          <p:cNvPr id="5" name="Table 4"/>
-          <p:cNvGraphicFramePr>
-            <a:graphicFrameLocks noGrp="1"/>
-          </p:cNvGraphicFramePr>
-          <p:nvPr>
-            <p:extLst>
-              <p:ext uri="{D42A27DB-BD31-4B8C-83A1-F6EECF244321}">
-                <p14:modId xmlns:p14="http://schemas.microsoft.com/office/powerpoint/2010/main" val="2348586584"/>
-              </p:ext>
-            </p:extLst>
-          </p:nvPr>
-        </p:nvGraphicFramePr>
-        <p:xfrm>
-          <a:off x="838200" y="2685746"/>
-          <a:ext cx="10515600" cy="1920240"/>
-        </p:xfrm>
-        <a:graphic>
-          <a:graphicData uri="http://schemas.openxmlformats.org/drawingml/2006/table">
-            <a:tbl>
-              <a:tblPr firstRow="1" bandRow="1">
-                <a:tableStyleId>{5C22544A-7EE6-4342-B048-85BDC9FD1C3A}</a:tableStyleId>
-              </a:tblPr>
-              <a:tblGrid>
-                <a:gridCol w="2377440">
-                  <a:extLst>
-                    <a:ext uri="{9D8B030D-6E8A-4147-A177-3AD203B41FA5}">
-                      <a16:colId xmlns:a16="http://schemas.microsoft.com/office/drawing/2014/main" val="20000"/>
-                    </a:ext>
-                  </a:extLst>
-                </a:gridCol>
-                <a:gridCol w="3108960">
-                  <a:extLst>
-                    <a:ext uri="{9D8B030D-6E8A-4147-A177-3AD203B41FA5}">
-                      <a16:colId xmlns:a16="http://schemas.microsoft.com/office/drawing/2014/main" val="20001"/>
-                    </a:ext>
-                  </a:extLst>
-                </a:gridCol>
-                <a:gridCol w="5029200">
-                  <a:extLst>
-                    <a:ext uri="{9D8B030D-6E8A-4147-A177-3AD203B41FA5}">
-                      <a16:colId xmlns:a16="http://schemas.microsoft.com/office/drawing/2014/main" val="20002"/>
-                    </a:ext>
-                  </a:extLst>
-                </a:gridCol>
-              </a:tblGrid>
-              <a:tr h="480060">
-                <a:tc>
-                  <a:txBody>
-                    <a:bodyPr/>
-                    <a:lstStyle/>
-                    <a:p>
-                      <a:pPr algn="ctr"/>
-                      <a:r>
-                        <a:rPr sz="1800" b="1" dirty="0">
-                          <a:solidFill>
-                            <a:schemeClr val="bg1"/>
-                          </a:solidFill>
-                        </a:rPr>
-                        <a:t>알고리즘</a:t>
-                      </a:r>
-                    </a:p>
-                  </a:txBody>
-                  <a:tcPr anchor="ctr">
-                    <a:lnL w="12700" cap="flat" cmpd="sng" algn="ctr">
-                      <a:solidFill>
-                        <a:schemeClr val="tx1"/>
-                      </a:solidFill>
-                      <a:prstDash val="solid"/>
-                      <a:round/>
-                      <a:headEnd type="none" w="med" len="med"/>
-                      <a:tailEnd type="none" w="med" len="med"/>
-                    </a:lnL>
-                    <a:lnR w="12700" cap="flat" cmpd="sng" algn="ctr">
-                      <a:solidFill>
-                        <a:schemeClr val="tx1"/>
-                      </a:solidFill>
-                      <a:prstDash val="solid"/>
-                      <a:round/>
-                      <a:headEnd type="none" w="med" len="med"/>
-                      <a:tailEnd type="none" w="med" len="med"/>
-                    </a:lnR>
-                    <a:lnT w="12700" cap="flat" cmpd="sng" algn="ctr">
-                      <a:solidFill>
-                        <a:schemeClr val="tx1"/>
-                      </a:solidFill>
-                      <a:prstDash val="solid"/>
-                      <a:round/>
-                      <a:headEnd type="none" w="med" len="med"/>
-                      <a:tailEnd type="none" w="med" len="med"/>
-                    </a:lnT>
-                    <a:lnB w="12700" cap="flat" cmpd="sng" algn="ctr">
-                      <a:solidFill>
-                        <a:schemeClr val="tx1"/>
-                      </a:solidFill>
-                      <a:prstDash val="solid"/>
-                      <a:round/>
-                      <a:headEnd type="none" w="med" len="med"/>
-                      <a:tailEnd type="none" w="med" len="med"/>
-                    </a:lnB>
-                    <a:solidFill>
-                      <a:schemeClr val="accent2"/>
-                    </a:solidFill>
-                  </a:tcPr>
-                </a:tc>
-                <a:tc>
-                  <a:txBody>
-                    <a:bodyPr/>
-                    <a:lstStyle/>
-                    <a:p>
-                      <a:pPr algn="ctr"/>
-                      <a:r>
-                        <a:rPr sz="1800" b="1" dirty="0">
-                          <a:solidFill>
-                            <a:schemeClr val="bg1"/>
-                          </a:solidFill>
-                        </a:rPr>
-                        <a:t>사용하는 키</a:t>
-                      </a:r>
-                    </a:p>
-                  </a:txBody>
-                  <a:tcPr anchor="ctr">
-                    <a:lnL w="12700" cap="flat" cmpd="sng" algn="ctr">
-                      <a:solidFill>
-                        <a:schemeClr val="tx1"/>
-                      </a:solidFill>
-                      <a:prstDash val="solid"/>
-                      <a:round/>
-                      <a:headEnd type="none" w="med" len="med"/>
-                      <a:tailEnd type="none" w="med" len="med"/>
-                    </a:lnL>
-                    <a:lnR w="12700" cap="flat" cmpd="sng" algn="ctr">
-                      <a:solidFill>
-                        <a:schemeClr val="tx1"/>
-                      </a:solidFill>
-                      <a:prstDash val="solid"/>
-                      <a:round/>
-                      <a:headEnd type="none" w="med" len="med"/>
-                      <a:tailEnd type="none" w="med" len="med"/>
-                    </a:lnR>
-                    <a:lnT w="12700" cap="flat" cmpd="sng" algn="ctr">
-                      <a:solidFill>
-                        <a:schemeClr val="tx1"/>
-                      </a:solidFill>
-                      <a:prstDash val="solid"/>
-                      <a:round/>
-                      <a:headEnd type="none" w="med" len="med"/>
-                      <a:tailEnd type="none" w="med" len="med"/>
-                    </a:lnT>
-                    <a:lnB w="12700" cap="flat" cmpd="sng" algn="ctr">
-                      <a:solidFill>
-                        <a:schemeClr val="tx1"/>
-                      </a:solidFill>
-                      <a:prstDash val="solid"/>
-                      <a:round/>
-                      <a:headEnd type="none" w="med" len="med"/>
-                      <a:tailEnd type="none" w="med" len="med"/>
-                    </a:lnB>
-                    <a:solidFill>
-                      <a:schemeClr val="accent2"/>
-                    </a:solidFill>
-                  </a:tcPr>
-                </a:tc>
-                <a:tc>
-                  <a:txBody>
-                    <a:bodyPr/>
-                    <a:lstStyle/>
-                    <a:p>
-                      <a:pPr algn="ctr"/>
-                      <a:r>
-                        <a:rPr sz="1800" b="1" dirty="0">
-                          <a:solidFill>
-                            <a:schemeClr val="bg1"/>
-                          </a:solidFill>
-                        </a:rPr>
-                        <a:t>하는 일</a:t>
-                      </a:r>
-                    </a:p>
-                  </a:txBody>
-                  <a:tcPr anchor="ctr">
-                    <a:lnL w="12700" cap="flat" cmpd="sng" algn="ctr">
-                      <a:solidFill>
-                        <a:schemeClr val="tx1"/>
-                      </a:solidFill>
-                      <a:prstDash val="solid"/>
-                      <a:round/>
-                      <a:headEnd type="none" w="med" len="med"/>
-                      <a:tailEnd type="none" w="med" len="med"/>
-                    </a:lnL>
-                    <a:lnR w="12700" cap="flat" cmpd="sng" algn="ctr">
-                      <a:solidFill>
-                        <a:schemeClr val="tx1"/>
-                      </a:solidFill>
-                      <a:prstDash val="solid"/>
-                      <a:round/>
-                      <a:headEnd type="none" w="med" len="med"/>
-                      <a:tailEnd type="none" w="med" len="med"/>
-                    </a:lnR>
-                    <a:lnT w="12700" cap="flat" cmpd="sng" algn="ctr">
-                      <a:solidFill>
-                        <a:schemeClr val="tx1"/>
-                      </a:solidFill>
-                      <a:prstDash val="solid"/>
-                      <a:round/>
-                      <a:headEnd type="none" w="med" len="med"/>
-                      <a:tailEnd type="none" w="med" len="med"/>
-                    </a:lnT>
-                    <a:lnB w="12700" cap="flat" cmpd="sng" algn="ctr">
-                      <a:solidFill>
-                        <a:schemeClr val="tx1"/>
-                      </a:solidFill>
-                      <a:prstDash val="solid"/>
-                      <a:round/>
-                      <a:headEnd type="none" w="med" len="med"/>
-                      <a:tailEnd type="none" w="med" len="med"/>
-                    </a:lnB>
-                    <a:solidFill>
-                      <a:schemeClr val="accent2"/>
-                    </a:solidFill>
-                  </a:tcPr>
-                </a:tc>
-                <a:extLst>
-                  <a:ext uri="{0D108BD9-81ED-4DB2-BD59-A6C34878D82A}">
-                    <a16:rowId xmlns:a16="http://schemas.microsoft.com/office/drawing/2014/main" val="10000"/>
-                  </a:ext>
-                </a:extLst>
-              </a:tr>
-              <a:tr h="480060">
-                <a:tc>
-                  <a:txBody>
-                    <a:bodyPr/>
-                    <a:lstStyle/>
-                    <a:p>
-                      <a:pPr algn="ctr"/>
-                      <a:r>
-                        <a:rPr sz="1800" dirty="0"/>
-                        <a:t>키 생성</a:t>
-                      </a:r>
-                    </a:p>
-                  </a:txBody>
-                  <a:tcPr anchor="ctr">
-                    <a:lnL w="12700" cap="flat" cmpd="sng" algn="ctr">
-                      <a:solidFill>
-                        <a:schemeClr val="tx1"/>
-                      </a:solidFill>
-                      <a:prstDash val="solid"/>
-                      <a:round/>
-                      <a:headEnd type="none" w="med" len="med"/>
-                      <a:tailEnd type="none" w="med" len="med"/>
-                    </a:lnL>
-                    <a:lnR w="12700" cap="flat" cmpd="sng" algn="ctr">
-                      <a:solidFill>
-                        <a:schemeClr val="tx1"/>
-                      </a:solidFill>
-                      <a:prstDash val="solid"/>
-                      <a:round/>
-                      <a:headEnd type="none" w="med" len="med"/>
-                      <a:tailEnd type="none" w="med" len="med"/>
-                    </a:lnR>
-                    <a:lnT w="12700" cap="flat" cmpd="sng" algn="ctr">
-                      <a:solidFill>
-                        <a:schemeClr val="tx1"/>
-                      </a:solidFill>
-                      <a:prstDash val="solid"/>
-                      <a:round/>
-                      <a:headEnd type="none" w="med" len="med"/>
-                      <a:tailEnd type="none" w="med" len="med"/>
-                    </a:lnT>
-                    <a:lnB w="12700" cap="flat" cmpd="sng" algn="ctr">
-                      <a:solidFill>
-                        <a:schemeClr val="tx1"/>
-                      </a:solidFill>
-                      <a:prstDash val="solid"/>
-                      <a:round/>
-                      <a:headEnd type="none" w="med" len="med"/>
-                      <a:tailEnd type="none" w="med" len="med"/>
-                    </a:lnB>
-                    <a:noFill/>
-                  </a:tcPr>
-                </a:tc>
-                <a:tc>
-                  <a:txBody>
-                    <a:bodyPr/>
-                    <a:lstStyle/>
-                    <a:p>
-                      <a:pPr algn="ctr"/>
-                      <a:r>
-                        <a:rPr sz="1800" dirty="0"/>
-                        <a:t>—</a:t>
-                      </a:r>
-                    </a:p>
-                  </a:txBody>
-                  <a:tcPr anchor="ctr">
-                    <a:lnL w="12700" cap="flat" cmpd="sng" algn="ctr">
-                      <a:solidFill>
-                        <a:schemeClr val="tx1"/>
-                      </a:solidFill>
-                      <a:prstDash val="solid"/>
-                      <a:round/>
-                      <a:headEnd type="none" w="med" len="med"/>
-                      <a:tailEnd type="none" w="med" len="med"/>
-                    </a:lnL>
-                    <a:lnR w="12700" cap="flat" cmpd="sng" algn="ctr">
-                      <a:solidFill>
-                        <a:schemeClr val="tx1"/>
-                      </a:solidFill>
-                      <a:prstDash val="solid"/>
-                      <a:round/>
-                      <a:headEnd type="none" w="med" len="med"/>
-                      <a:tailEnd type="none" w="med" len="med"/>
-                    </a:lnR>
-                    <a:lnT w="12700" cap="flat" cmpd="sng" algn="ctr">
-                      <a:solidFill>
-                        <a:schemeClr val="tx1"/>
-                      </a:solidFill>
-                      <a:prstDash val="solid"/>
-                      <a:round/>
-                      <a:headEnd type="none" w="med" len="med"/>
-                      <a:tailEnd type="none" w="med" len="med"/>
-                    </a:lnT>
-                    <a:lnB w="12700" cap="flat" cmpd="sng" algn="ctr">
-                      <a:solidFill>
-                        <a:schemeClr val="tx1"/>
-                      </a:solidFill>
-                      <a:prstDash val="solid"/>
-                      <a:round/>
-                      <a:headEnd type="none" w="med" len="med"/>
-                      <a:tailEnd type="none" w="med" len="med"/>
-                    </a:lnB>
-                    <a:noFill/>
-                  </a:tcPr>
-                </a:tc>
-                <a:tc>
-                  <a:txBody>
-                    <a:bodyPr/>
-                    <a:lstStyle/>
-                    <a:p>
-                      <a:pPr algn="ctr"/>
-                      <a:r>
-                        <a:rPr sz="1800" dirty="0"/>
-                        <a:t>공개키·개인키 쌍을 만든다</a:t>
-                      </a:r>
-                    </a:p>
-                  </a:txBody>
-                  <a:tcPr anchor="ctr">
-                    <a:lnL w="12700" cap="flat" cmpd="sng" algn="ctr">
-                      <a:solidFill>
-                        <a:schemeClr val="tx1"/>
-                      </a:solidFill>
-                      <a:prstDash val="solid"/>
-                      <a:round/>
-                      <a:headEnd type="none" w="med" len="med"/>
-                      <a:tailEnd type="none" w="med" len="med"/>
-                    </a:lnL>
-                    <a:lnR w="12700" cap="flat" cmpd="sng" algn="ctr">
-                      <a:solidFill>
-                        <a:schemeClr val="tx1"/>
-                      </a:solidFill>
-                      <a:prstDash val="solid"/>
-                      <a:round/>
-                      <a:headEnd type="none" w="med" len="med"/>
-                      <a:tailEnd type="none" w="med" len="med"/>
-                    </a:lnR>
-                    <a:lnT w="12700" cap="flat" cmpd="sng" algn="ctr">
-                      <a:solidFill>
-                        <a:schemeClr val="tx1"/>
-                      </a:solidFill>
-                      <a:prstDash val="solid"/>
-                      <a:round/>
-                      <a:headEnd type="none" w="med" len="med"/>
-                      <a:tailEnd type="none" w="med" len="med"/>
-                    </a:lnT>
-                    <a:lnB w="12700" cap="flat" cmpd="sng" algn="ctr">
-                      <a:solidFill>
-                        <a:schemeClr val="tx1"/>
-                      </a:solidFill>
-                      <a:prstDash val="solid"/>
-                      <a:round/>
-                      <a:headEnd type="none" w="med" len="med"/>
-                      <a:tailEnd type="none" w="med" len="med"/>
-                    </a:lnB>
-                    <a:noFill/>
-                  </a:tcPr>
-                </a:tc>
-                <a:extLst>
-                  <a:ext uri="{0D108BD9-81ED-4DB2-BD59-A6C34878D82A}">
-                    <a16:rowId xmlns:a16="http://schemas.microsoft.com/office/drawing/2014/main" val="10001"/>
-                  </a:ext>
-                </a:extLst>
-              </a:tr>
-              <a:tr h="480060">
-                <a:tc>
-                  <a:txBody>
-                    <a:bodyPr/>
-                    <a:lstStyle/>
-                    <a:p>
-                      <a:pPr algn="ctr"/>
-                      <a:r>
-                        <a:rPr sz="1800" dirty="0"/>
-                        <a:t>서명 생성</a:t>
-                      </a:r>
-                    </a:p>
-                  </a:txBody>
-                  <a:tcPr anchor="ctr">
-                    <a:lnL w="12700" cap="flat" cmpd="sng" algn="ctr">
-                      <a:solidFill>
-                        <a:schemeClr val="tx1"/>
-                      </a:solidFill>
-                      <a:prstDash val="solid"/>
-                      <a:round/>
-                      <a:headEnd type="none" w="med" len="med"/>
-                      <a:tailEnd type="none" w="med" len="med"/>
-                    </a:lnL>
-                    <a:lnR w="12700" cap="flat" cmpd="sng" algn="ctr">
-                      <a:solidFill>
-                        <a:schemeClr val="tx1"/>
-                      </a:solidFill>
-                      <a:prstDash val="solid"/>
-                      <a:round/>
-                      <a:headEnd type="none" w="med" len="med"/>
-                      <a:tailEnd type="none" w="med" len="med"/>
-                    </a:lnR>
-                    <a:lnT w="12700" cap="flat" cmpd="sng" algn="ctr">
-                      <a:solidFill>
-                        <a:schemeClr val="tx1"/>
-                      </a:solidFill>
-                      <a:prstDash val="solid"/>
-                      <a:round/>
-                      <a:headEnd type="none" w="med" len="med"/>
-                      <a:tailEnd type="none" w="med" len="med"/>
-                    </a:lnT>
-                    <a:lnB w="12700" cap="flat" cmpd="sng" algn="ctr">
-                      <a:solidFill>
-                        <a:schemeClr val="tx1"/>
-                      </a:solidFill>
-                      <a:prstDash val="solid"/>
-                      <a:round/>
-                      <a:headEnd type="none" w="med" len="med"/>
-                      <a:tailEnd type="none" w="med" len="med"/>
-                    </a:lnB>
-                    <a:noFill/>
-                  </a:tcPr>
-                </a:tc>
-                <a:tc>
-                  <a:txBody>
-                    <a:bodyPr/>
-                    <a:lstStyle/>
-                    <a:p>
-                      <a:pPr algn="ctr"/>
-                      <a:r>
-                        <a:rPr sz="1800" dirty="0"/>
-                        <a:t>개인키 (서명 키)</a:t>
-                      </a:r>
-                    </a:p>
-                  </a:txBody>
-                  <a:tcPr anchor="ctr">
-                    <a:lnL w="12700" cap="flat" cmpd="sng" algn="ctr">
-                      <a:solidFill>
-                        <a:schemeClr val="tx1"/>
-                      </a:solidFill>
-                      <a:prstDash val="solid"/>
-                      <a:round/>
-                      <a:headEnd type="none" w="med" len="med"/>
-                      <a:tailEnd type="none" w="med" len="med"/>
-                    </a:lnL>
-                    <a:lnR w="12700" cap="flat" cmpd="sng" algn="ctr">
-                      <a:solidFill>
-                        <a:schemeClr val="tx1"/>
-                      </a:solidFill>
-                      <a:prstDash val="solid"/>
-                      <a:round/>
-                      <a:headEnd type="none" w="med" len="med"/>
-                      <a:tailEnd type="none" w="med" len="med"/>
-                    </a:lnR>
-                    <a:lnT w="12700" cap="flat" cmpd="sng" algn="ctr">
-                      <a:solidFill>
-                        <a:schemeClr val="tx1"/>
-                      </a:solidFill>
-                      <a:prstDash val="solid"/>
-                      <a:round/>
-                      <a:headEnd type="none" w="med" len="med"/>
-                      <a:tailEnd type="none" w="med" len="med"/>
-                    </a:lnT>
-                    <a:lnB w="12700" cap="flat" cmpd="sng" algn="ctr">
-                      <a:solidFill>
-                        <a:schemeClr val="tx1"/>
-                      </a:solidFill>
-                      <a:prstDash val="solid"/>
-                      <a:round/>
-                      <a:headEnd type="none" w="med" len="med"/>
-                      <a:tailEnd type="none" w="med" len="med"/>
-                    </a:lnB>
-                    <a:noFill/>
-                  </a:tcPr>
-                </a:tc>
-                <a:tc>
-                  <a:txBody>
-                    <a:bodyPr/>
-                    <a:lstStyle/>
-                    <a:p>
-                      <a:pPr algn="ctr"/>
-                      <a:r>
-                        <a:rPr sz="1800" dirty="0"/>
-                        <a:t>메시지에 대한 서명을 만든다</a:t>
-                      </a:r>
-                    </a:p>
-                  </a:txBody>
-                  <a:tcPr anchor="ctr">
-                    <a:lnL w="12700" cap="flat" cmpd="sng" algn="ctr">
-                      <a:solidFill>
-                        <a:schemeClr val="tx1"/>
-                      </a:solidFill>
-                      <a:prstDash val="solid"/>
-                      <a:round/>
-                      <a:headEnd type="none" w="med" len="med"/>
-                      <a:tailEnd type="none" w="med" len="med"/>
-                    </a:lnL>
-                    <a:lnR w="12700" cap="flat" cmpd="sng" algn="ctr">
-                      <a:solidFill>
-                        <a:schemeClr val="tx1"/>
-                      </a:solidFill>
-                      <a:prstDash val="solid"/>
-                      <a:round/>
-                      <a:headEnd type="none" w="med" len="med"/>
-                      <a:tailEnd type="none" w="med" len="med"/>
-                    </a:lnR>
-                    <a:lnT w="12700" cap="flat" cmpd="sng" algn="ctr">
-                      <a:solidFill>
-                        <a:schemeClr val="tx1"/>
-                      </a:solidFill>
-                      <a:prstDash val="solid"/>
-                      <a:round/>
-                      <a:headEnd type="none" w="med" len="med"/>
-                      <a:tailEnd type="none" w="med" len="med"/>
-                    </a:lnT>
-                    <a:lnB w="12700" cap="flat" cmpd="sng" algn="ctr">
-                      <a:solidFill>
-                        <a:schemeClr val="tx1"/>
-                      </a:solidFill>
-                      <a:prstDash val="solid"/>
-                      <a:round/>
-                      <a:headEnd type="none" w="med" len="med"/>
-                      <a:tailEnd type="none" w="med" len="med"/>
-                    </a:lnB>
-                    <a:noFill/>
-                  </a:tcPr>
-                </a:tc>
-                <a:extLst>
-                  <a:ext uri="{0D108BD9-81ED-4DB2-BD59-A6C34878D82A}">
-                    <a16:rowId xmlns:a16="http://schemas.microsoft.com/office/drawing/2014/main" val="10002"/>
-                  </a:ext>
-                </a:extLst>
-              </a:tr>
-              <a:tr h="480060">
-                <a:tc>
-                  <a:txBody>
-                    <a:bodyPr/>
-                    <a:lstStyle/>
-                    <a:p>
-                      <a:pPr algn="ctr"/>
-                      <a:r>
-                        <a:rPr sz="1800" dirty="0"/>
-                        <a:t>서명 검증</a:t>
-                      </a:r>
-                    </a:p>
-                  </a:txBody>
-                  <a:tcPr anchor="ctr">
-                    <a:lnL w="12700" cap="flat" cmpd="sng" algn="ctr">
-                      <a:solidFill>
-                        <a:schemeClr val="tx1"/>
-                      </a:solidFill>
-                      <a:prstDash val="solid"/>
-                      <a:round/>
-                      <a:headEnd type="none" w="med" len="med"/>
-                      <a:tailEnd type="none" w="med" len="med"/>
-                    </a:lnL>
-                    <a:lnR w="12700" cap="flat" cmpd="sng" algn="ctr">
-                      <a:solidFill>
-                        <a:schemeClr val="tx1"/>
-                      </a:solidFill>
-                      <a:prstDash val="solid"/>
-                      <a:round/>
-                      <a:headEnd type="none" w="med" len="med"/>
-                      <a:tailEnd type="none" w="med" len="med"/>
-                    </a:lnR>
-                    <a:lnT w="12700" cap="flat" cmpd="sng" algn="ctr">
-                      <a:solidFill>
-                        <a:schemeClr val="tx1"/>
-                      </a:solidFill>
-                      <a:prstDash val="solid"/>
-                      <a:round/>
-                      <a:headEnd type="none" w="med" len="med"/>
-                      <a:tailEnd type="none" w="med" len="med"/>
-                    </a:lnT>
-                    <a:lnB w="12700" cap="flat" cmpd="sng" algn="ctr">
-                      <a:solidFill>
-                        <a:schemeClr val="tx1"/>
-                      </a:solidFill>
-                      <a:prstDash val="solid"/>
-                      <a:round/>
-                      <a:headEnd type="none" w="med" len="med"/>
-                      <a:tailEnd type="none" w="med" len="med"/>
-                    </a:lnB>
-                    <a:noFill/>
-                  </a:tcPr>
-                </a:tc>
-                <a:tc>
-                  <a:txBody>
-                    <a:bodyPr/>
-                    <a:lstStyle/>
-                    <a:p>
-                      <a:pPr algn="ctr"/>
-                      <a:r>
-                        <a:rPr sz="1800" dirty="0"/>
-                        <a:t>공개키 (검증 키)</a:t>
-                      </a:r>
-                    </a:p>
-                  </a:txBody>
-                  <a:tcPr anchor="ctr">
-                    <a:lnL w="12700" cap="flat" cmpd="sng" algn="ctr">
-                      <a:solidFill>
-                        <a:schemeClr val="tx1"/>
-                      </a:solidFill>
-                      <a:prstDash val="solid"/>
-                      <a:round/>
-                      <a:headEnd type="none" w="med" len="med"/>
-                      <a:tailEnd type="none" w="med" len="med"/>
-                    </a:lnL>
-                    <a:lnR w="12700" cap="flat" cmpd="sng" algn="ctr">
-                      <a:solidFill>
-                        <a:schemeClr val="tx1"/>
-                      </a:solidFill>
-                      <a:prstDash val="solid"/>
-                      <a:round/>
-                      <a:headEnd type="none" w="med" len="med"/>
-                      <a:tailEnd type="none" w="med" len="med"/>
-                    </a:lnR>
-                    <a:lnT w="12700" cap="flat" cmpd="sng" algn="ctr">
-                      <a:solidFill>
-                        <a:schemeClr val="tx1"/>
-                      </a:solidFill>
-                      <a:prstDash val="solid"/>
-                      <a:round/>
-                      <a:headEnd type="none" w="med" len="med"/>
-                      <a:tailEnd type="none" w="med" len="med"/>
-                    </a:lnT>
-                    <a:lnB w="12700" cap="flat" cmpd="sng" algn="ctr">
-                      <a:solidFill>
-                        <a:schemeClr val="tx1"/>
-                      </a:solidFill>
-                      <a:prstDash val="solid"/>
-                      <a:round/>
-                      <a:headEnd type="none" w="med" len="med"/>
-                      <a:tailEnd type="none" w="med" len="med"/>
-                    </a:lnB>
-                    <a:noFill/>
-                  </a:tcPr>
-                </a:tc>
-                <a:tc>
-                  <a:txBody>
-                    <a:bodyPr/>
-                    <a:lstStyle/>
-                    <a:p>
-                      <a:pPr algn="ctr"/>
-                      <a:r>
-                        <a:rPr sz="1800" dirty="0"/>
-                        <a:t>서명된 메시지가 진짜인지 판정한다</a:t>
-                      </a:r>
-                    </a:p>
-                  </a:txBody>
-                  <a:tcPr anchor="ctr">
-                    <a:lnL w="12700" cap="flat" cmpd="sng" algn="ctr">
-                      <a:solidFill>
-                        <a:schemeClr val="tx1"/>
-                      </a:solidFill>
-                      <a:prstDash val="solid"/>
-                      <a:round/>
-                      <a:headEnd type="none" w="med" len="med"/>
-                      <a:tailEnd type="none" w="med" len="med"/>
-                    </a:lnL>
-                    <a:lnR w="12700" cap="flat" cmpd="sng" algn="ctr">
-                      <a:solidFill>
-                        <a:schemeClr val="tx1"/>
-                      </a:solidFill>
-                      <a:prstDash val="solid"/>
-                      <a:round/>
-                      <a:headEnd type="none" w="med" len="med"/>
-                      <a:tailEnd type="none" w="med" len="med"/>
-                    </a:lnR>
-                    <a:lnT w="12700" cap="flat" cmpd="sng" algn="ctr">
-                      <a:solidFill>
-                        <a:schemeClr val="tx1"/>
-                      </a:solidFill>
-                      <a:prstDash val="solid"/>
-                      <a:round/>
-                      <a:headEnd type="none" w="med" len="med"/>
-                      <a:tailEnd type="none" w="med" len="med"/>
-                    </a:lnT>
-                    <a:lnB w="12700" cap="flat" cmpd="sng" algn="ctr">
-                      <a:solidFill>
-                        <a:schemeClr val="tx1"/>
-                      </a:solidFill>
-                      <a:prstDash val="solid"/>
-                      <a:round/>
-                      <a:headEnd type="none" w="med" len="med"/>
-                      <a:tailEnd type="none" w="med" len="med"/>
-                    </a:lnB>
-                    <a:noFill/>
-                  </a:tcPr>
-                </a:tc>
-                <a:extLst>
-                  <a:ext uri="{0D108BD9-81ED-4DB2-BD59-A6C34878D82A}">
-                    <a16:rowId xmlns:a16="http://schemas.microsoft.com/office/drawing/2014/main" val="10003"/>
-                  </a:ext>
-                </a:extLst>
-              </a:tr>
-            </a:tbl>
-          </a:graphicData>
-        </a:graphic>
-      </p:graphicFrame>
-    </p:spTree>
-  </p:cSld>
-  <p:clrMapOvr>
-    <a:masterClrMapping/>
-  </p:clrMapOvr>
-</p:sld>
-</file>
-
-<file path=ppt/slides/slide5.xml><?xml version="1.0" encoding="utf-8"?>
-<p:sld xmlns:a="http://schemas.openxmlformats.org/drawingml/2006/main" xmlns:r="http://schemas.openxmlformats.org/officeDocument/2006/relationships" xmlns:p="http://schemas.openxmlformats.org/presentationml/2006/main">
-  <p:cSld>
-    <p:spTree>
-      <p:nvGrpSpPr>
-        <p:cNvPr id="1" name=""/>
-        <p:cNvGrpSpPr/>
-        <p:nvPr/>
-      </p:nvGrpSpPr>
-      <p:grpSpPr>
-        <a:xfrm>
-          <a:off x="0" y="0"/>
-          <a:ext cx="0" cy="0"/>
-          <a:chOff x="0" y="0"/>
-          <a:chExt cx="0" cy="0"/>
-        </a:xfrm>
-      </p:grpSpPr>
-      <p:sp>
-        <p:nvSpPr>
-          <p:cNvPr id="2" name="Title 1"/>
-          <p:cNvSpPr>
-            <a:spLocks noGrp="1"/>
-          </p:cNvSpPr>
-          <p:nvPr>
-            <p:ph type="title"/>
-          </p:nvPr>
-        </p:nvSpPr>
-        <p:spPr/>
-        <p:txBody>
-          <a:bodyPr/>
-          <a:lstStyle/>
-          <a:p>
-            <a:r>
-              <a:rPr dirty="0"/>
-              <a:t>존재적 위조 불가능성 (EUF-CMA)</a:t>
-            </a:r>
-          </a:p>
-        </p:txBody>
-      </p:sp>
-      <p:sp>
-        <p:nvSpPr>
-          <p:cNvPr id="3" name="Content Placeholder 2"/>
-          <p:cNvSpPr>
-            <a:spLocks noGrp="1"/>
-          </p:cNvSpPr>
-          <p:nvPr>
-            <p:ph idx="1"/>
-          </p:nvPr>
-        </p:nvSpPr>
-        <p:spPr/>
-        <p:txBody>
-          <a:bodyPr/>
-          <a:lstStyle/>
-          <a:p>
-            <a:r>
-              <a:rPr sz="1800" dirty="0"/>
-              <a:t>정의: 계산량이 제한된 공격자가 선택 메시지 공격을 하더라도 존재적으로 위조가 불가능하면 안전하다</a:t>
-            </a:r>
-          </a:p>
-          <a:p>
-            <a:r>
-              <a:rPr sz="1800" dirty="0"/>
-              <a:t>선택 메시지 공격: 공격자가 서명 오라클에 원하는 메시지의 서명을 자유롭게 얻는다</a:t>
-            </a:r>
-          </a:p>
-          <a:p>
-            <a:r>
-              <a:rPr sz="1800" dirty="0"/>
-              <a:t>존재적 위조: 오라클에 요청한 적 없는 메시지 하나에 대해 유효한 (m, σ) 쌍을 만든다</a:t>
-            </a:r>
-          </a:p>
-          <a:p>
-            <a:r>
-              <a:rPr sz="1800" dirty="0"/>
-              <a:t>많은 서명을 관찰해도 새로운 유효 서명을 만들 수 없다는 강한 보장이다</a:t>
-            </a:r>
-          </a:p>
-        </p:txBody>
-      </p:sp>
-      <p:sp>
-        <p:nvSpPr>
-          <p:cNvPr id="4" name="슬라이드 번호 개체 틀"/>
-          <p:cNvSpPr>
-            <a:spLocks noGrp="1"/>
-          </p:cNvSpPr>
-          <p:nvPr>
-            <p:ph type="sldNum" sz="quarter" idx="12"/>
-          </p:nvPr>
-        </p:nvSpPr>
-        <p:spPr/>
-        <p:txBody>
-          <a:bodyPr/>
-          <a:lstStyle/>
-          <a:p>
-            <a:fld id="{4438A2D4-3867-488E-A04E-7BFFCAED45A6}" type="slidenum">
-              <a:rPr lang="ko-KR" altLang="en-US" smtClean="0"/>
-              <a:t>5</a:t>
-            </a:fld>
-            <a:endParaRPr lang="ko-KR" altLang="en-US" dirty="0"/>
-          </a:p>
-        </p:txBody>
-      </p:sp>
-    </p:spTree>
-  </p:cSld>
-  <p:clrMapOvr>
-    <a:masterClrMapping/>
-  </p:clrMapOvr>
-</p:sld>
-</file>
-
-<file path=ppt/slides/slide6.xml><?xml version="1.0" encoding="utf-8"?>
-<p:sld xmlns:a="http://schemas.openxmlformats.org/drawingml/2006/main" xmlns:r="http://schemas.openxmlformats.org/officeDocument/2006/relationships" xmlns:p="http://schemas.openxmlformats.org/presentationml/2006/main">
-  <p:cSld>
-    <p:spTree>
-      <p:nvGrpSpPr>
-        <p:cNvPr id="1" name=""/>
-        <p:cNvGrpSpPr/>
-        <p:nvPr/>
-      </p:nvGrpSpPr>
-      <p:grpSpPr>
-        <a:xfrm>
-          <a:off x="0" y="0"/>
-          <a:ext cx="0" cy="0"/>
-          <a:chOff x="0" y="0"/>
-          <a:chExt cx="0" cy="0"/>
-        </a:xfrm>
-      </p:grpSpPr>
-      <p:sp>
-        <p:nvSpPr>
-          <p:cNvPr id="2" name="Title 1"/>
-          <p:cNvSpPr>
-            <a:spLocks noGrp="1"/>
-          </p:cNvSpPr>
-          <p:nvPr>
-            <p:ph type="title"/>
-          </p:nvPr>
-        </p:nvSpPr>
-        <p:spPr/>
-        <p:txBody>
-          <a:bodyPr/>
-          <a:lstStyle/>
-          <a:p>
-            <a:r>
-              <a:rPr dirty="0"/>
-              <a:t>세 계열과 양자 컴퓨터</a:t>
-            </a:r>
-          </a:p>
-        </p:txBody>
-      </p:sp>
-      <p:sp>
-        <p:nvSpPr>
-          <p:cNvPr id="3" name="Content Placeholder 2"/>
-          <p:cNvSpPr>
-            <a:spLocks noGrp="1"/>
-          </p:cNvSpPr>
-          <p:nvPr>
-            <p:ph idx="1"/>
-          </p:nvPr>
-        </p:nvSpPr>
-        <p:spPr/>
-        <p:txBody>
-          <a:bodyPr/>
-          <a:lstStyle/>
-          <a:p>
-            <a:r>
-              <a:rPr sz="1800" dirty="0"/>
-              <a:t>오늘 가장 널리 쓰이는 서명 계열은 셋이다</a:t>
-            </a:r>
-          </a:p>
-        </p:txBody>
-      </p:sp>
-      <p:sp>
-        <p:nvSpPr>
-          <p:cNvPr id="4" name="슬라이드 번호 개체 틀"/>
-          <p:cNvSpPr>
-            <a:spLocks noGrp="1"/>
-          </p:cNvSpPr>
-          <p:nvPr>
-            <p:ph type="sldNum" sz="quarter" idx="12"/>
-          </p:nvPr>
-        </p:nvSpPr>
-        <p:spPr/>
-        <p:txBody>
-          <a:bodyPr/>
-          <a:lstStyle/>
-          <a:p>
-            <a:fld id="{4438A2D4-3867-488E-A04E-7BFFCAED45A6}" type="slidenum">
-              <a:rPr lang="ko-KR" altLang="en-US" smtClean="0"/>
-              <a:t>6</a:t>
             </a:fld>
             <a:endParaRPr lang="ko-KR" altLang="en-US" dirty="0"/>
           </a:p>
@@ -13452,7 +10806,7 @@
 </p:sld>
 </file>
 
-<file path=ppt/slides/slide7.xml><?xml version="1.0" encoding="utf-8"?>
+<file path=ppt/slides/slide12.xml><?xml version="1.0" encoding="utf-8"?>
 <p:sld xmlns:a="http://schemas.openxmlformats.org/drawingml/2006/main" xmlns:r="http://schemas.openxmlformats.org/officeDocument/2006/relationships" xmlns:p="http://schemas.openxmlformats.org/presentationml/2006/main">
   <p:cSld>
     <p:spTree>
@@ -13542,7 +10896,7 @@
           <a:p>
             <a:fld id="{4438A2D4-3867-488E-A04E-7BFFCAED45A6}" type="slidenum">
               <a:rPr lang="ko-KR" altLang="en-US" smtClean="0"/>
-              <a:t>7</a:t>
+              <a:t>12</a:t>
             </a:fld>
             <a:endParaRPr lang="ko-KR" altLang="en-US" dirty="0"/>
           </a:p>
@@ -13556,7 +10910,7 @@
 </p:sld>
 </file>
 
-<file path=ppt/slides/slide8.xml><?xml version="1.0" encoding="utf-8"?>
+<file path=ppt/slides/slide13.xml><?xml version="1.0" encoding="utf-8"?>
 <p:sld xmlns:a="http://schemas.openxmlformats.org/drawingml/2006/main" xmlns:r="http://schemas.openxmlformats.org/officeDocument/2006/relationships" xmlns:p="http://schemas.openxmlformats.org/presentationml/2006/main">
   <p:cSld>
     <p:spTree>
@@ -13652,7 +11006,7 @@
           <a:p>
             <a:fld id="{4438A2D4-3867-488E-A04E-7BFFCAED45A6}" type="slidenum">
               <a:rPr lang="ko-KR" altLang="en-US" smtClean="0"/>
-              <a:t>8</a:t>
+              <a:t>13</a:t>
             </a:fld>
             <a:endParaRPr lang="ko-KR" altLang="en-US" dirty="0"/>
           </a:p>
@@ -13666,7 +11020,7 @@
 </p:sld>
 </file>
 
-<file path=ppt/slides/slide9.xml><?xml version="1.0" encoding="utf-8"?>
+<file path=ppt/slides/slide14.xml><?xml version="1.0" encoding="utf-8"?>
 <p:sld xmlns:a="http://schemas.openxmlformats.org/drawingml/2006/main" xmlns:r="http://schemas.openxmlformats.org/officeDocument/2006/relationships" xmlns:p="http://schemas.openxmlformats.org/presentationml/2006/main">
   <p:cSld>
     <p:spTree>
@@ -13750,7 +11104,7 @@
           <a:p>
             <a:fld id="{4438A2D4-3867-488E-A04E-7BFFCAED45A6}" type="slidenum">
               <a:rPr lang="ko-KR" altLang="en-US" smtClean="0"/>
-              <a:t>9</a:t>
+              <a:t>14</a:t>
             </a:fld>
             <a:endParaRPr lang="ko-KR" altLang="en-US" dirty="0"/>
           </a:p>
@@ -14138,6 +11492,3351 @@
                 <a:extLst>
                   <a:ext uri="{0D108BD9-81ED-4DB2-BD59-A6C34878D82A}">
                     <a16:rowId xmlns:a16="http://schemas.microsoft.com/office/drawing/2014/main" val="10002"/>
+                  </a:ext>
+                </a:extLst>
+              </a:tr>
+            </a:tbl>
+          </a:graphicData>
+        </a:graphic>
+      </p:graphicFrame>
+    </p:spTree>
+  </p:cSld>
+  <p:clrMapOvr>
+    <a:masterClrMapping/>
+  </p:clrMapOvr>
+</p:sld>
+</file>
+
+<file path=ppt/slides/slide15.xml><?xml version="1.0" encoding="utf-8"?>
+<p:sld xmlns:a="http://schemas.openxmlformats.org/drawingml/2006/main" xmlns:r="http://schemas.openxmlformats.org/officeDocument/2006/relationships" xmlns:p="http://schemas.openxmlformats.org/presentationml/2006/main">
+  <p:cSld>
+    <p:spTree>
+      <p:nvGrpSpPr>
+        <p:cNvPr id="1" name=""/>
+        <p:cNvGrpSpPr/>
+        <p:nvPr/>
+      </p:nvGrpSpPr>
+      <p:grpSpPr>
+        <a:xfrm>
+          <a:off x="0" y="0"/>
+          <a:ext cx="0" cy="0"/>
+          <a:chOff x="0" y="0"/>
+          <a:chExt cx="0" cy="0"/>
+        </a:xfrm>
+      </p:grpSpPr>
+      <p:sp>
+        <p:nvSpPr>
+          <p:cNvPr id="2" name="Title 1"/>
+          <p:cNvSpPr>
+            <a:spLocks noGrp="1"/>
+          </p:cNvSpPr>
+          <p:nvPr>
+            <p:ph type="title"/>
+          </p:nvPr>
+        </p:nvSpPr>
+        <p:spPr/>
+        <p:txBody>
+          <a:bodyPr/>
+          <a:lstStyle/>
+          <a:p>
+            <a:r>
+              <a:rPr dirty="0"/>
+              <a:t>세 가지 표준 스킴</a:t>
+            </a:r>
+          </a:p>
+        </p:txBody>
+      </p:sp>
+      <p:sp>
+        <p:nvSpPr>
+          <p:cNvPr id="3" name="Content Placeholder 2"/>
+          <p:cNvSpPr>
+            <a:spLocks noGrp="1"/>
+          </p:cNvSpPr>
+          <p:nvPr>
+            <p:ph idx="1"/>
+          </p:nvPr>
+        </p:nvSpPr>
+        <p:spPr/>
+        <p:txBody>
+          <a:bodyPr/>
+          <a:lstStyle/>
+          <a:p>
+            <a:r>
+              <a:rPr sz="1800" dirty="0"/>
+              <a:t>LMS = Leighton-Micali Signature scheme</a:t>
+            </a:r>
+          </a:p>
+          <a:p>
+            <a:r>
+              <a:rPr sz="1800" dirty="0"/>
+              <a:t>XMSS = eXtended Merkle Signature Scheme</a:t>
+            </a:r>
+          </a:p>
+          <a:p>
+            <a:r>
+              <a:rPr sz="1800" dirty="0"/>
+              <a:t>SPHINCS+ = FIPS 205에서 SLH-DSA로 표준화</a:t>
+            </a:r>
+          </a:p>
+        </p:txBody>
+      </p:sp>
+      <p:sp>
+        <p:nvSpPr>
+          <p:cNvPr id="4" name="슬라이드 번호 개체 틀"/>
+          <p:cNvSpPr>
+            <a:spLocks noGrp="1"/>
+          </p:cNvSpPr>
+          <p:nvPr>
+            <p:ph type="sldNum" sz="quarter" idx="12"/>
+          </p:nvPr>
+        </p:nvSpPr>
+        <p:spPr/>
+        <p:txBody>
+          <a:bodyPr/>
+          <a:lstStyle/>
+          <a:p>
+            <a:fld id="{4438A2D4-3867-488E-A04E-7BFFCAED45A6}" type="slidenum">
+              <a:rPr lang="ko-KR" altLang="en-US" smtClean="0"/>
+              <a:t>15</a:t>
+            </a:fld>
+            <a:endParaRPr lang="ko-KR" altLang="en-US" dirty="0"/>
+          </a:p>
+        </p:txBody>
+      </p:sp>
+      <p:graphicFrame>
+        <p:nvGraphicFramePr>
+          <p:cNvPr id="5" name="Table 4"/>
+          <p:cNvGraphicFramePr>
+            <a:graphicFrameLocks noGrp="1"/>
+          </p:cNvGraphicFramePr>
+          <p:nvPr>
+            <p:extLst>
+              <p:ext uri="{D42A27DB-BD31-4B8C-83A1-F6EECF244321}">
+                <p14:modId xmlns:p14="http://schemas.microsoft.com/office/powerpoint/2010/main" val="2019616980"/>
+              </p:ext>
+            </p:extLst>
+          </p:nvPr>
+        </p:nvGraphicFramePr>
+        <p:xfrm>
+          <a:off x="841248" y="3291840"/>
+          <a:ext cx="10515600" cy="1828800"/>
+        </p:xfrm>
+        <a:graphic>
+          <a:graphicData uri="http://schemas.openxmlformats.org/drawingml/2006/table">
+            <a:tbl>
+              <a:tblPr firstRow="1" bandRow="1">
+                <a:tableStyleId>{5C22544A-7EE6-4342-B048-85BDC9FD1C3A}</a:tableStyleId>
+              </a:tblPr>
+              <a:tblGrid>
+                <a:gridCol w="2011680">
+                  <a:extLst>
+                    <a:ext uri="{9D8B030D-6E8A-4147-A177-3AD203B41FA5}">
+                      <a16:colId xmlns:a16="http://schemas.microsoft.com/office/drawing/2014/main" val="20000"/>
+                    </a:ext>
+                  </a:extLst>
+                </a:gridCol>
+                <a:gridCol w="3931920">
+                  <a:extLst>
+                    <a:ext uri="{9D8B030D-6E8A-4147-A177-3AD203B41FA5}">
+                      <a16:colId xmlns:a16="http://schemas.microsoft.com/office/drawing/2014/main" val="20001"/>
+                    </a:ext>
+                  </a:extLst>
+                </a:gridCol>
+                <a:gridCol w="4572000">
+                  <a:extLst>
+                    <a:ext uri="{9D8B030D-6E8A-4147-A177-3AD203B41FA5}">
+                      <a16:colId xmlns:a16="http://schemas.microsoft.com/office/drawing/2014/main" val="20002"/>
+                    </a:ext>
+                  </a:extLst>
+                </a:gridCol>
+              </a:tblGrid>
+              <a:tr h="457200">
+                <a:tc>
+                  <a:txBody>
+                    <a:bodyPr/>
+                    <a:lstStyle/>
+                    <a:p>
+                      <a:pPr algn="ctr"/>
+                      <a:r>
+                        <a:rPr sz="1800" b="1" dirty="0">
+                          <a:solidFill>
+                            <a:schemeClr val="bg1"/>
+                          </a:solidFill>
+                        </a:rPr>
+                        <a:t>스킴</a:t>
+                      </a:r>
+                    </a:p>
+                  </a:txBody>
+                  <a:tcPr anchor="ctr">
+                    <a:lnL w="12700" cap="flat" cmpd="sng" algn="ctr">
+                      <a:solidFill>
+                        <a:schemeClr val="tx1"/>
+                      </a:solidFill>
+                      <a:prstDash val="solid"/>
+                      <a:round/>
+                      <a:headEnd type="none" w="med" len="med"/>
+                      <a:tailEnd type="none" w="med" len="med"/>
+                    </a:lnL>
+                    <a:lnR w="12700" cap="flat" cmpd="sng" algn="ctr">
+                      <a:solidFill>
+                        <a:schemeClr val="tx1"/>
+                      </a:solidFill>
+                      <a:prstDash val="solid"/>
+                      <a:round/>
+                      <a:headEnd type="none" w="med" len="med"/>
+                      <a:tailEnd type="none" w="med" len="med"/>
+                    </a:lnR>
+                    <a:lnT w="12700" cap="flat" cmpd="sng" algn="ctr">
+                      <a:solidFill>
+                        <a:schemeClr val="tx1"/>
+                      </a:solidFill>
+                      <a:prstDash val="solid"/>
+                      <a:round/>
+                      <a:headEnd type="none" w="med" len="med"/>
+                      <a:tailEnd type="none" w="med" len="med"/>
+                    </a:lnT>
+                    <a:lnB w="12700" cap="flat" cmpd="sng" algn="ctr">
+                      <a:solidFill>
+                        <a:schemeClr val="tx1"/>
+                      </a:solidFill>
+                      <a:prstDash val="solid"/>
+                      <a:round/>
+                      <a:headEnd type="none" w="med" len="med"/>
+                      <a:tailEnd type="none" w="med" len="med"/>
+                    </a:lnB>
+                    <a:solidFill>
+                      <a:schemeClr val="accent2"/>
+                    </a:solidFill>
+                  </a:tcPr>
+                </a:tc>
+                <a:tc>
+                  <a:txBody>
+                    <a:bodyPr/>
+                    <a:lstStyle/>
+                    <a:p>
+                      <a:pPr algn="ctr"/>
+                      <a:r>
+                        <a:rPr sz="1800" b="1" dirty="0">
+                          <a:solidFill>
+                            <a:schemeClr val="bg1"/>
+                          </a:solidFill>
+                        </a:rPr>
+                        <a:t>표준 문서</a:t>
+                      </a:r>
+                    </a:p>
+                  </a:txBody>
+                  <a:tcPr anchor="ctr">
+                    <a:lnL w="12700" cap="flat" cmpd="sng" algn="ctr">
+                      <a:solidFill>
+                        <a:schemeClr val="tx1"/>
+                      </a:solidFill>
+                      <a:prstDash val="solid"/>
+                      <a:round/>
+                      <a:headEnd type="none" w="med" len="med"/>
+                      <a:tailEnd type="none" w="med" len="med"/>
+                    </a:lnL>
+                    <a:lnR w="12700" cap="flat" cmpd="sng" algn="ctr">
+                      <a:solidFill>
+                        <a:schemeClr val="tx1"/>
+                      </a:solidFill>
+                      <a:prstDash val="solid"/>
+                      <a:round/>
+                      <a:headEnd type="none" w="med" len="med"/>
+                      <a:tailEnd type="none" w="med" len="med"/>
+                    </a:lnR>
+                    <a:lnT w="12700" cap="flat" cmpd="sng" algn="ctr">
+                      <a:solidFill>
+                        <a:schemeClr val="tx1"/>
+                      </a:solidFill>
+                      <a:prstDash val="solid"/>
+                      <a:round/>
+                      <a:headEnd type="none" w="med" len="med"/>
+                      <a:tailEnd type="none" w="med" len="med"/>
+                    </a:lnT>
+                    <a:lnB w="12700" cap="flat" cmpd="sng" algn="ctr">
+                      <a:solidFill>
+                        <a:schemeClr val="tx1"/>
+                      </a:solidFill>
+                      <a:prstDash val="solid"/>
+                      <a:round/>
+                      <a:headEnd type="none" w="med" len="med"/>
+                      <a:tailEnd type="none" w="med" len="med"/>
+                    </a:lnB>
+                    <a:solidFill>
+                      <a:schemeClr val="accent2"/>
+                    </a:solidFill>
+                  </a:tcPr>
+                </a:tc>
+                <a:tc>
+                  <a:txBody>
+                    <a:bodyPr/>
+                    <a:lstStyle/>
+                    <a:p>
+                      <a:pPr algn="ctr"/>
+                      <a:r>
+                        <a:rPr sz="1800" b="1" dirty="0">
+                          <a:solidFill>
+                            <a:schemeClr val="bg1"/>
+                          </a:solidFill>
+                        </a:rPr>
+                        <a:t>세부 규격</a:t>
+                      </a:r>
+                    </a:p>
+                  </a:txBody>
+                  <a:tcPr anchor="ctr">
+                    <a:lnL w="12700" cap="flat" cmpd="sng" algn="ctr">
+                      <a:solidFill>
+                        <a:schemeClr val="tx1"/>
+                      </a:solidFill>
+                      <a:prstDash val="solid"/>
+                      <a:round/>
+                      <a:headEnd type="none" w="med" len="med"/>
+                      <a:tailEnd type="none" w="med" len="med"/>
+                    </a:lnL>
+                    <a:lnR w="12700" cap="flat" cmpd="sng" algn="ctr">
+                      <a:solidFill>
+                        <a:schemeClr val="tx1"/>
+                      </a:solidFill>
+                      <a:prstDash val="solid"/>
+                      <a:round/>
+                      <a:headEnd type="none" w="med" len="med"/>
+                      <a:tailEnd type="none" w="med" len="med"/>
+                    </a:lnR>
+                    <a:lnT w="12700" cap="flat" cmpd="sng" algn="ctr">
+                      <a:solidFill>
+                        <a:schemeClr val="tx1"/>
+                      </a:solidFill>
+                      <a:prstDash val="solid"/>
+                      <a:round/>
+                      <a:headEnd type="none" w="med" len="med"/>
+                      <a:tailEnd type="none" w="med" len="med"/>
+                    </a:lnT>
+                    <a:lnB w="12700" cap="flat" cmpd="sng" algn="ctr">
+                      <a:solidFill>
+                        <a:schemeClr val="tx1"/>
+                      </a:solidFill>
+                      <a:prstDash val="solid"/>
+                      <a:round/>
+                      <a:headEnd type="none" w="med" len="med"/>
+                      <a:tailEnd type="none" w="med" len="med"/>
+                    </a:lnB>
+                    <a:solidFill>
+                      <a:schemeClr val="accent2"/>
+                    </a:solidFill>
+                  </a:tcPr>
+                </a:tc>
+                <a:extLst>
+                  <a:ext uri="{0D108BD9-81ED-4DB2-BD59-A6C34878D82A}">
+                    <a16:rowId xmlns:a16="http://schemas.microsoft.com/office/drawing/2014/main" val="10000"/>
+                  </a:ext>
+                </a:extLst>
+              </a:tr>
+              <a:tr h="457200">
+                <a:tc>
+                  <a:txBody>
+                    <a:bodyPr/>
+                    <a:lstStyle/>
+                    <a:p>
+                      <a:pPr algn="ctr"/>
+                      <a:r>
+                        <a:rPr sz="1800" dirty="0"/>
+                        <a:t>LMS</a:t>
+                      </a:r>
+                    </a:p>
+                  </a:txBody>
+                  <a:tcPr anchor="ctr">
+                    <a:lnL w="12700" cap="flat" cmpd="sng" algn="ctr">
+                      <a:solidFill>
+                        <a:schemeClr val="tx1"/>
+                      </a:solidFill>
+                      <a:prstDash val="solid"/>
+                      <a:round/>
+                      <a:headEnd type="none" w="med" len="med"/>
+                      <a:tailEnd type="none" w="med" len="med"/>
+                    </a:lnL>
+                    <a:lnR w="12700" cap="flat" cmpd="sng" algn="ctr">
+                      <a:solidFill>
+                        <a:schemeClr val="tx1"/>
+                      </a:solidFill>
+                      <a:prstDash val="solid"/>
+                      <a:round/>
+                      <a:headEnd type="none" w="med" len="med"/>
+                      <a:tailEnd type="none" w="med" len="med"/>
+                    </a:lnR>
+                    <a:lnT w="12700" cap="flat" cmpd="sng" algn="ctr">
+                      <a:solidFill>
+                        <a:schemeClr val="tx1"/>
+                      </a:solidFill>
+                      <a:prstDash val="solid"/>
+                      <a:round/>
+                      <a:headEnd type="none" w="med" len="med"/>
+                      <a:tailEnd type="none" w="med" len="med"/>
+                    </a:lnT>
+                    <a:lnB w="12700" cap="flat" cmpd="sng" algn="ctr">
+                      <a:solidFill>
+                        <a:schemeClr val="tx1"/>
+                      </a:solidFill>
+                      <a:prstDash val="solid"/>
+                      <a:round/>
+                      <a:headEnd type="none" w="med" len="med"/>
+                      <a:tailEnd type="none" w="med" len="med"/>
+                    </a:lnB>
+                    <a:noFill/>
+                  </a:tcPr>
+                </a:tc>
+                <a:tc>
+                  <a:txBody>
+                    <a:bodyPr/>
+                    <a:lstStyle/>
+                    <a:p>
+                      <a:pPr algn="ctr"/>
+                      <a:r>
+                        <a:rPr sz="1800" dirty="0"/>
+                        <a:t>NIST SP 800-208</a:t>
+                      </a:r>
+                    </a:p>
+                  </a:txBody>
+                  <a:tcPr anchor="ctr">
+                    <a:lnL w="12700" cap="flat" cmpd="sng" algn="ctr">
+                      <a:solidFill>
+                        <a:schemeClr val="tx1"/>
+                      </a:solidFill>
+                      <a:prstDash val="solid"/>
+                      <a:round/>
+                      <a:headEnd type="none" w="med" len="med"/>
+                      <a:tailEnd type="none" w="med" len="med"/>
+                    </a:lnL>
+                    <a:lnR w="12700" cap="flat" cmpd="sng" algn="ctr">
+                      <a:solidFill>
+                        <a:schemeClr val="tx1"/>
+                      </a:solidFill>
+                      <a:prstDash val="solid"/>
+                      <a:round/>
+                      <a:headEnd type="none" w="med" len="med"/>
+                      <a:tailEnd type="none" w="med" len="med"/>
+                    </a:lnR>
+                    <a:lnT w="12700" cap="flat" cmpd="sng" algn="ctr">
+                      <a:solidFill>
+                        <a:schemeClr val="tx1"/>
+                      </a:solidFill>
+                      <a:prstDash val="solid"/>
+                      <a:round/>
+                      <a:headEnd type="none" w="med" len="med"/>
+                      <a:tailEnd type="none" w="med" len="med"/>
+                    </a:lnT>
+                    <a:lnB w="12700" cap="flat" cmpd="sng" algn="ctr">
+                      <a:solidFill>
+                        <a:schemeClr val="tx1"/>
+                      </a:solidFill>
+                      <a:prstDash val="solid"/>
+                      <a:round/>
+                      <a:headEnd type="none" w="med" len="med"/>
+                      <a:tailEnd type="none" w="med" len="med"/>
+                    </a:lnB>
+                    <a:noFill/>
+                  </a:tcPr>
+                </a:tc>
+                <a:tc>
+                  <a:txBody>
+                    <a:bodyPr/>
+                    <a:lstStyle/>
+                    <a:p>
+                      <a:pPr algn="ctr"/>
+                      <a:r>
+                        <a:rPr sz="1800" dirty="0"/>
+                        <a:t>IETF RFC 8554</a:t>
+                      </a:r>
+                    </a:p>
+                  </a:txBody>
+                  <a:tcPr anchor="ctr">
+                    <a:lnL w="12700" cap="flat" cmpd="sng" algn="ctr">
+                      <a:solidFill>
+                        <a:schemeClr val="tx1"/>
+                      </a:solidFill>
+                      <a:prstDash val="solid"/>
+                      <a:round/>
+                      <a:headEnd type="none" w="med" len="med"/>
+                      <a:tailEnd type="none" w="med" len="med"/>
+                    </a:lnL>
+                    <a:lnR w="12700" cap="flat" cmpd="sng" algn="ctr">
+                      <a:solidFill>
+                        <a:schemeClr val="tx1"/>
+                      </a:solidFill>
+                      <a:prstDash val="solid"/>
+                      <a:round/>
+                      <a:headEnd type="none" w="med" len="med"/>
+                      <a:tailEnd type="none" w="med" len="med"/>
+                    </a:lnR>
+                    <a:lnT w="12700" cap="flat" cmpd="sng" algn="ctr">
+                      <a:solidFill>
+                        <a:schemeClr val="tx1"/>
+                      </a:solidFill>
+                      <a:prstDash val="solid"/>
+                      <a:round/>
+                      <a:headEnd type="none" w="med" len="med"/>
+                      <a:tailEnd type="none" w="med" len="med"/>
+                    </a:lnT>
+                    <a:lnB w="12700" cap="flat" cmpd="sng" algn="ctr">
+                      <a:solidFill>
+                        <a:schemeClr val="tx1"/>
+                      </a:solidFill>
+                      <a:prstDash val="solid"/>
+                      <a:round/>
+                      <a:headEnd type="none" w="med" len="med"/>
+                      <a:tailEnd type="none" w="med" len="med"/>
+                    </a:lnB>
+                    <a:noFill/>
+                  </a:tcPr>
+                </a:tc>
+                <a:extLst>
+                  <a:ext uri="{0D108BD9-81ED-4DB2-BD59-A6C34878D82A}">
+                    <a16:rowId xmlns:a16="http://schemas.microsoft.com/office/drawing/2014/main" val="10001"/>
+                  </a:ext>
+                </a:extLst>
+              </a:tr>
+              <a:tr h="457200">
+                <a:tc>
+                  <a:txBody>
+                    <a:bodyPr/>
+                    <a:lstStyle/>
+                    <a:p>
+                      <a:pPr algn="ctr"/>
+                      <a:r>
+                        <a:rPr sz="1800" dirty="0"/>
+                        <a:t>XMSS</a:t>
+                      </a:r>
+                    </a:p>
+                  </a:txBody>
+                  <a:tcPr anchor="ctr">
+                    <a:lnL w="12700" cap="flat" cmpd="sng" algn="ctr">
+                      <a:solidFill>
+                        <a:schemeClr val="tx1"/>
+                      </a:solidFill>
+                      <a:prstDash val="solid"/>
+                      <a:round/>
+                      <a:headEnd type="none" w="med" len="med"/>
+                      <a:tailEnd type="none" w="med" len="med"/>
+                    </a:lnL>
+                    <a:lnR w="12700" cap="flat" cmpd="sng" algn="ctr">
+                      <a:solidFill>
+                        <a:schemeClr val="tx1"/>
+                      </a:solidFill>
+                      <a:prstDash val="solid"/>
+                      <a:round/>
+                      <a:headEnd type="none" w="med" len="med"/>
+                      <a:tailEnd type="none" w="med" len="med"/>
+                    </a:lnR>
+                    <a:lnT w="12700" cap="flat" cmpd="sng" algn="ctr">
+                      <a:solidFill>
+                        <a:schemeClr val="tx1"/>
+                      </a:solidFill>
+                      <a:prstDash val="solid"/>
+                      <a:round/>
+                      <a:headEnd type="none" w="med" len="med"/>
+                      <a:tailEnd type="none" w="med" len="med"/>
+                    </a:lnT>
+                    <a:lnB w="12700" cap="flat" cmpd="sng" algn="ctr">
+                      <a:solidFill>
+                        <a:schemeClr val="tx1"/>
+                      </a:solidFill>
+                      <a:prstDash val="solid"/>
+                      <a:round/>
+                      <a:headEnd type="none" w="med" len="med"/>
+                      <a:tailEnd type="none" w="med" len="med"/>
+                    </a:lnB>
+                    <a:noFill/>
+                  </a:tcPr>
+                </a:tc>
+                <a:tc>
+                  <a:txBody>
+                    <a:bodyPr/>
+                    <a:lstStyle/>
+                    <a:p>
+                      <a:pPr algn="ctr"/>
+                      <a:r>
+                        <a:rPr sz="1800" dirty="0"/>
+                        <a:t>NIST SP 800-208</a:t>
+                      </a:r>
+                    </a:p>
+                  </a:txBody>
+                  <a:tcPr anchor="ctr">
+                    <a:lnL w="12700" cap="flat" cmpd="sng" algn="ctr">
+                      <a:solidFill>
+                        <a:schemeClr val="tx1"/>
+                      </a:solidFill>
+                      <a:prstDash val="solid"/>
+                      <a:round/>
+                      <a:headEnd type="none" w="med" len="med"/>
+                      <a:tailEnd type="none" w="med" len="med"/>
+                    </a:lnL>
+                    <a:lnR w="12700" cap="flat" cmpd="sng" algn="ctr">
+                      <a:solidFill>
+                        <a:schemeClr val="tx1"/>
+                      </a:solidFill>
+                      <a:prstDash val="solid"/>
+                      <a:round/>
+                      <a:headEnd type="none" w="med" len="med"/>
+                      <a:tailEnd type="none" w="med" len="med"/>
+                    </a:lnR>
+                    <a:lnT w="12700" cap="flat" cmpd="sng" algn="ctr">
+                      <a:solidFill>
+                        <a:schemeClr val="tx1"/>
+                      </a:solidFill>
+                      <a:prstDash val="solid"/>
+                      <a:round/>
+                      <a:headEnd type="none" w="med" len="med"/>
+                      <a:tailEnd type="none" w="med" len="med"/>
+                    </a:lnT>
+                    <a:lnB w="12700" cap="flat" cmpd="sng" algn="ctr">
+                      <a:solidFill>
+                        <a:schemeClr val="tx1"/>
+                      </a:solidFill>
+                      <a:prstDash val="solid"/>
+                      <a:round/>
+                      <a:headEnd type="none" w="med" len="med"/>
+                      <a:tailEnd type="none" w="med" len="med"/>
+                    </a:lnB>
+                    <a:noFill/>
+                  </a:tcPr>
+                </a:tc>
+                <a:tc>
+                  <a:txBody>
+                    <a:bodyPr/>
+                    <a:lstStyle/>
+                    <a:p>
+                      <a:pPr algn="ctr"/>
+                      <a:r>
+                        <a:rPr sz="1800" dirty="0"/>
+                        <a:t>IETF RFC 8391</a:t>
+                      </a:r>
+                    </a:p>
+                  </a:txBody>
+                  <a:tcPr anchor="ctr">
+                    <a:lnL w="12700" cap="flat" cmpd="sng" algn="ctr">
+                      <a:solidFill>
+                        <a:schemeClr val="tx1"/>
+                      </a:solidFill>
+                      <a:prstDash val="solid"/>
+                      <a:round/>
+                      <a:headEnd type="none" w="med" len="med"/>
+                      <a:tailEnd type="none" w="med" len="med"/>
+                    </a:lnL>
+                    <a:lnR w="12700" cap="flat" cmpd="sng" algn="ctr">
+                      <a:solidFill>
+                        <a:schemeClr val="tx1"/>
+                      </a:solidFill>
+                      <a:prstDash val="solid"/>
+                      <a:round/>
+                      <a:headEnd type="none" w="med" len="med"/>
+                      <a:tailEnd type="none" w="med" len="med"/>
+                    </a:lnR>
+                    <a:lnT w="12700" cap="flat" cmpd="sng" algn="ctr">
+                      <a:solidFill>
+                        <a:schemeClr val="tx1"/>
+                      </a:solidFill>
+                      <a:prstDash val="solid"/>
+                      <a:round/>
+                      <a:headEnd type="none" w="med" len="med"/>
+                      <a:tailEnd type="none" w="med" len="med"/>
+                    </a:lnT>
+                    <a:lnB w="12700" cap="flat" cmpd="sng" algn="ctr">
+                      <a:solidFill>
+                        <a:schemeClr val="tx1"/>
+                      </a:solidFill>
+                      <a:prstDash val="solid"/>
+                      <a:round/>
+                      <a:headEnd type="none" w="med" len="med"/>
+                      <a:tailEnd type="none" w="med" len="med"/>
+                    </a:lnB>
+                    <a:noFill/>
+                  </a:tcPr>
+                </a:tc>
+                <a:extLst>
+                  <a:ext uri="{0D108BD9-81ED-4DB2-BD59-A6C34878D82A}">
+                    <a16:rowId xmlns:a16="http://schemas.microsoft.com/office/drawing/2014/main" val="10002"/>
+                  </a:ext>
+                </a:extLst>
+              </a:tr>
+              <a:tr h="457200">
+                <a:tc>
+                  <a:txBody>
+                    <a:bodyPr/>
+                    <a:lstStyle/>
+                    <a:p>
+                      <a:pPr algn="ctr"/>
+                      <a:r>
+                        <a:rPr sz="1800" dirty="0"/>
+                        <a:t>SPHINCS+</a:t>
+                      </a:r>
+                    </a:p>
+                  </a:txBody>
+                  <a:tcPr anchor="ctr">
+                    <a:lnL w="12700" cap="flat" cmpd="sng" algn="ctr">
+                      <a:solidFill>
+                        <a:schemeClr val="tx1"/>
+                      </a:solidFill>
+                      <a:prstDash val="solid"/>
+                      <a:round/>
+                      <a:headEnd type="none" w="med" len="med"/>
+                      <a:tailEnd type="none" w="med" len="med"/>
+                    </a:lnL>
+                    <a:lnR w="12700" cap="flat" cmpd="sng" algn="ctr">
+                      <a:solidFill>
+                        <a:schemeClr val="tx1"/>
+                      </a:solidFill>
+                      <a:prstDash val="solid"/>
+                      <a:round/>
+                      <a:headEnd type="none" w="med" len="med"/>
+                      <a:tailEnd type="none" w="med" len="med"/>
+                    </a:lnR>
+                    <a:lnT w="12700" cap="flat" cmpd="sng" algn="ctr">
+                      <a:solidFill>
+                        <a:schemeClr val="tx1"/>
+                      </a:solidFill>
+                      <a:prstDash val="solid"/>
+                      <a:round/>
+                      <a:headEnd type="none" w="med" len="med"/>
+                      <a:tailEnd type="none" w="med" len="med"/>
+                    </a:lnT>
+                    <a:lnB w="12700" cap="flat" cmpd="sng" algn="ctr">
+                      <a:solidFill>
+                        <a:schemeClr val="tx1"/>
+                      </a:solidFill>
+                      <a:prstDash val="solid"/>
+                      <a:round/>
+                      <a:headEnd type="none" w="med" len="med"/>
+                      <a:tailEnd type="none" w="med" len="med"/>
+                    </a:lnB>
+                    <a:noFill/>
+                  </a:tcPr>
+                </a:tc>
+                <a:tc>
+                  <a:txBody>
+                    <a:bodyPr/>
+                    <a:lstStyle/>
+                    <a:p>
+                      <a:pPr algn="ctr"/>
+                      <a:r>
+                        <a:rPr sz="1800" dirty="0"/>
+                        <a:t>FIPS 205</a:t>
+                      </a:r>
+                    </a:p>
+                  </a:txBody>
+                  <a:tcPr anchor="ctr">
+                    <a:lnL w="12700" cap="flat" cmpd="sng" algn="ctr">
+                      <a:solidFill>
+                        <a:schemeClr val="tx1"/>
+                      </a:solidFill>
+                      <a:prstDash val="solid"/>
+                      <a:round/>
+                      <a:headEnd type="none" w="med" len="med"/>
+                      <a:tailEnd type="none" w="med" len="med"/>
+                    </a:lnL>
+                    <a:lnR w="12700" cap="flat" cmpd="sng" algn="ctr">
+                      <a:solidFill>
+                        <a:schemeClr val="tx1"/>
+                      </a:solidFill>
+                      <a:prstDash val="solid"/>
+                      <a:round/>
+                      <a:headEnd type="none" w="med" len="med"/>
+                      <a:tailEnd type="none" w="med" len="med"/>
+                    </a:lnR>
+                    <a:lnT w="12700" cap="flat" cmpd="sng" algn="ctr">
+                      <a:solidFill>
+                        <a:schemeClr val="tx1"/>
+                      </a:solidFill>
+                      <a:prstDash val="solid"/>
+                      <a:round/>
+                      <a:headEnd type="none" w="med" len="med"/>
+                      <a:tailEnd type="none" w="med" len="med"/>
+                    </a:lnT>
+                    <a:lnB w="12700" cap="flat" cmpd="sng" algn="ctr">
+                      <a:solidFill>
+                        <a:schemeClr val="tx1"/>
+                      </a:solidFill>
+                      <a:prstDash val="solid"/>
+                      <a:round/>
+                      <a:headEnd type="none" w="med" len="med"/>
+                      <a:tailEnd type="none" w="med" len="med"/>
+                    </a:lnB>
+                    <a:noFill/>
+                  </a:tcPr>
+                </a:tc>
+                <a:tc>
+                  <a:txBody>
+                    <a:bodyPr/>
+                    <a:lstStyle/>
+                    <a:p>
+                      <a:pPr algn="ctr"/>
+                      <a:r>
+                        <a:rPr sz="1800" dirty="0"/>
+                        <a:t>—</a:t>
+                      </a:r>
+                    </a:p>
+                  </a:txBody>
+                  <a:tcPr anchor="ctr">
+                    <a:lnL w="12700" cap="flat" cmpd="sng" algn="ctr">
+                      <a:solidFill>
+                        <a:schemeClr val="tx1"/>
+                      </a:solidFill>
+                      <a:prstDash val="solid"/>
+                      <a:round/>
+                      <a:headEnd type="none" w="med" len="med"/>
+                      <a:tailEnd type="none" w="med" len="med"/>
+                    </a:lnL>
+                    <a:lnR w="12700" cap="flat" cmpd="sng" algn="ctr">
+                      <a:solidFill>
+                        <a:schemeClr val="tx1"/>
+                      </a:solidFill>
+                      <a:prstDash val="solid"/>
+                      <a:round/>
+                      <a:headEnd type="none" w="med" len="med"/>
+                      <a:tailEnd type="none" w="med" len="med"/>
+                    </a:lnR>
+                    <a:lnT w="12700" cap="flat" cmpd="sng" algn="ctr">
+                      <a:solidFill>
+                        <a:schemeClr val="tx1"/>
+                      </a:solidFill>
+                      <a:prstDash val="solid"/>
+                      <a:round/>
+                      <a:headEnd type="none" w="med" len="med"/>
+                      <a:tailEnd type="none" w="med" len="med"/>
+                    </a:lnT>
+                    <a:lnB w="12700" cap="flat" cmpd="sng" algn="ctr">
+                      <a:solidFill>
+                        <a:schemeClr val="tx1"/>
+                      </a:solidFill>
+                      <a:prstDash val="solid"/>
+                      <a:round/>
+                      <a:headEnd type="none" w="med" len="med"/>
+                      <a:tailEnd type="none" w="med" len="med"/>
+                    </a:lnB>
+                    <a:noFill/>
+                  </a:tcPr>
+                </a:tc>
+                <a:extLst>
+                  <a:ext uri="{0D108BD9-81ED-4DB2-BD59-A6C34878D82A}">
+                    <a16:rowId xmlns:a16="http://schemas.microsoft.com/office/drawing/2014/main" val="10003"/>
+                  </a:ext>
+                </a:extLst>
+              </a:tr>
+            </a:tbl>
+          </a:graphicData>
+        </a:graphic>
+      </p:graphicFrame>
+    </p:spTree>
+  </p:cSld>
+  <p:clrMapOvr>
+    <a:masterClrMapping/>
+  </p:clrMapOvr>
+</p:sld>
+</file>
+
+<file path=ppt/slides/slide16.xml><?xml version="1.0" encoding="utf-8"?>
+<p:sld xmlns:a="http://schemas.openxmlformats.org/drawingml/2006/main" xmlns:r="http://schemas.openxmlformats.org/officeDocument/2006/relationships" xmlns:p="http://schemas.openxmlformats.org/presentationml/2006/main">
+  <p:cSld>
+    <p:spTree>
+      <p:nvGrpSpPr>
+        <p:cNvPr id="1" name=""/>
+        <p:cNvGrpSpPr/>
+        <p:nvPr/>
+      </p:nvGrpSpPr>
+      <p:grpSpPr>
+        <a:xfrm>
+          <a:off x="0" y="0"/>
+          <a:ext cx="0" cy="0"/>
+          <a:chOff x="0" y="0"/>
+          <a:chExt cx="0" cy="0"/>
+        </a:xfrm>
+      </p:grpSpPr>
+      <p:sp>
+        <p:nvSpPr>
+          <p:cNvPr id="2" name="Title 1"/>
+          <p:cNvSpPr>
+            <a:spLocks noGrp="1"/>
+          </p:cNvSpPr>
+          <p:nvPr>
+            <p:ph type="title"/>
+          </p:nvPr>
+        </p:nvSpPr>
+        <p:spPr/>
+        <p:txBody>
+          <a:bodyPr/>
+          <a:lstStyle/>
+          <a:p>
+            <a:r>
+              <a:rPr dirty="0"/>
+              <a:t>상태 유지형 vs 무상태</a:t>
+            </a:r>
+          </a:p>
+        </p:txBody>
+      </p:sp>
+      <p:sp>
+        <p:nvSpPr>
+          <p:cNvPr id="3" name="Content Placeholder 2"/>
+          <p:cNvSpPr>
+            <a:spLocks noGrp="1"/>
+          </p:cNvSpPr>
+          <p:nvPr>
+            <p:ph idx="1"/>
+          </p:nvPr>
+        </p:nvSpPr>
+        <p:spPr/>
+        <p:txBody>
+          <a:bodyPr/>
+          <a:lstStyle/>
+          <a:p>
+            <a:r>
+              <a:rPr sz="1800" dirty="0"/>
+              <a:t>표준 스킴은 서명자가 상태(state)를 관리하는지에 따라 갈린다</a:t>
+            </a:r>
+          </a:p>
+        </p:txBody>
+      </p:sp>
+      <p:sp>
+        <p:nvSpPr>
+          <p:cNvPr id="4" name="슬라이드 번호 개체 틀"/>
+          <p:cNvSpPr>
+            <a:spLocks noGrp="1"/>
+          </p:cNvSpPr>
+          <p:nvPr>
+            <p:ph type="sldNum" sz="quarter" idx="12"/>
+          </p:nvPr>
+        </p:nvSpPr>
+        <p:spPr/>
+        <p:txBody>
+          <a:bodyPr/>
+          <a:lstStyle/>
+          <a:p>
+            <a:fld id="{4438A2D4-3867-488E-A04E-7BFFCAED45A6}" type="slidenum">
+              <a:rPr lang="ko-KR" altLang="en-US" smtClean="0"/>
+              <a:t>16</a:t>
+            </a:fld>
+            <a:endParaRPr lang="ko-KR" altLang="en-US" dirty="0"/>
+          </a:p>
+        </p:txBody>
+      </p:sp>
+      <p:graphicFrame>
+        <p:nvGraphicFramePr>
+          <p:cNvPr id="5" name="Table 4"/>
+          <p:cNvGraphicFramePr>
+            <a:graphicFrameLocks noGrp="1"/>
+          </p:cNvGraphicFramePr>
+          <p:nvPr>
+            <p:extLst>
+              <p:ext uri="{D42A27DB-BD31-4B8C-83A1-F6EECF244321}">
+                <p14:modId xmlns:p14="http://schemas.microsoft.com/office/powerpoint/2010/main" val="414259285"/>
+              </p:ext>
+            </p:extLst>
+          </p:nvPr>
+        </p:nvGraphicFramePr>
+        <p:xfrm>
+          <a:off x="838200" y="2914346"/>
+          <a:ext cx="10515600" cy="1463040"/>
+        </p:xfrm>
+        <a:graphic>
+          <a:graphicData uri="http://schemas.openxmlformats.org/drawingml/2006/table">
+            <a:tbl>
+              <a:tblPr firstRow="1" bandRow="1">
+                <a:tableStyleId>{5C22544A-7EE6-4342-B048-85BDC9FD1C3A}</a:tableStyleId>
+              </a:tblPr>
+              <a:tblGrid>
+                <a:gridCol w="2377440">
+                  <a:extLst>
+                    <a:ext uri="{9D8B030D-6E8A-4147-A177-3AD203B41FA5}">
+                      <a16:colId xmlns:a16="http://schemas.microsoft.com/office/drawing/2014/main" val="20000"/>
+                    </a:ext>
+                  </a:extLst>
+                </a:gridCol>
+                <a:gridCol w="2743200">
+                  <a:extLst>
+                    <a:ext uri="{9D8B030D-6E8A-4147-A177-3AD203B41FA5}">
+                      <a16:colId xmlns:a16="http://schemas.microsoft.com/office/drawing/2014/main" val="20001"/>
+                    </a:ext>
+                  </a:extLst>
+                </a:gridCol>
+                <a:gridCol w="5394960">
+                  <a:extLst>
+                    <a:ext uri="{9D8B030D-6E8A-4147-A177-3AD203B41FA5}">
+                      <a16:colId xmlns:a16="http://schemas.microsoft.com/office/drawing/2014/main" val="20002"/>
+                    </a:ext>
+                  </a:extLst>
+                </a:gridCol>
+              </a:tblGrid>
+              <a:tr h="487680">
+                <a:tc>
+                  <a:txBody>
+                    <a:bodyPr/>
+                    <a:lstStyle/>
+                    <a:p>
+                      <a:pPr algn="ctr"/>
+                      <a:r>
+                        <a:rPr sz="1800" b="1" dirty="0">
+                          <a:solidFill>
+                            <a:schemeClr val="bg1"/>
+                          </a:solidFill>
+                        </a:rPr>
+                        <a:t>구분</a:t>
+                      </a:r>
+                    </a:p>
+                  </a:txBody>
+                  <a:tcPr anchor="ctr">
+                    <a:lnL w="12700" cap="flat" cmpd="sng" algn="ctr">
+                      <a:solidFill>
+                        <a:schemeClr val="tx1"/>
+                      </a:solidFill>
+                      <a:prstDash val="solid"/>
+                      <a:round/>
+                      <a:headEnd type="none" w="med" len="med"/>
+                      <a:tailEnd type="none" w="med" len="med"/>
+                    </a:lnL>
+                    <a:lnR w="12700" cap="flat" cmpd="sng" algn="ctr">
+                      <a:solidFill>
+                        <a:schemeClr val="tx1"/>
+                      </a:solidFill>
+                      <a:prstDash val="solid"/>
+                      <a:round/>
+                      <a:headEnd type="none" w="med" len="med"/>
+                      <a:tailEnd type="none" w="med" len="med"/>
+                    </a:lnR>
+                    <a:lnT w="12700" cap="flat" cmpd="sng" algn="ctr">
+                      <a:solidFill>
+                        <a:schemeClr val="tx1"/>
+                      </a:solidFill>
+                      <a:prstDash val="solid"/>
+                      <a:round/>
+                      <a:headEnd type="none" w="med" len="med"/>
+                      <a:tailEnd type="none" w="med" len="med"/>
+                    </a:lnT>
+                    <a:lnB w="12700" cap="flat" cmpd="sng" algn="ctr">
+                      <a:solidFill>
+                        <a:schemeClr val="tx1"/>
+                      </a:solidFill>
+                      <a:prstDash val="solid"/>
+                      <a:round/>
+                      <a:headEnd type="none" w="med" len="med"/>
+                      <a:tailEnd type="none" w="med" len="med"/>
+                    </a:lnB>
+                    <a:solidFill>
+                      <a:schemeClr val="accent2"/>
+                    </a:solidFill>
+                  </a:tcPr>
+                </a:tc>
+                <a:tc>
+                  <a:txBody>
+                    <a:bodyPr/>
+                    <a:lstStyle/>
+                    <a:p>
+                      <a:pPr algn="ctr"/>
+                      <a:r>
+                        <a:rPr sz="1800" b="1" dirty="0">
+                          <a:solidFill>
+                            <a:schemeClr val="bg1"/>
+                          </a:solidFill>
+                        </a:rPr>
+                        <a:t>스킴</a:t>
+                      </a:r>
+                    </a:p>
+                  </a:txBody>
+                  <a:tcPr anchor="ctr">
+                    <a:lnL w="12700" cap="flat" cmpd="sng" algn="ctr">
+                      <a:solidFill>
+                        <a:schemeClr val="tx1"/>
+                      </a:solidFill>
+                      <a:prstDash val="solid"/>
+                      <a:round/>
+                      <a:headEnd type="none" w="med" len="med"/>
+                      <a:tailEnd type="none" w="med" len="med"/>
+                    </a:lnL>
+                    <a:lnR w="12700" cap="flat" cmpd="sng" algn="ctr">
+                      <a:solidFill>
+                        <a:schemeClr val="tx1"/>
+                      </a:solidFill>
+                      <a:prstDash val="solid"/>
+                      <a:round/>
+                      <a:headEnd type="none" w="med" len="med"/>
+                      <a:tailEnd type="none" w="med" len="med"/>
+                    </a:lnR>
+                    <a:lnT w="12700" cap="flat" cmpd="sng" algn="ctr">
+                      <a:solidFill>
+                        <a:schemeClr val="tx1"/>
+                      </a:solidFill>
+                      <a:prstDash val="solid"/>
+                      <a:round/>
+                      <a:headEnd type="none" w="med" len="med"/>
+                      <a:tailEnd type="none" w="med" len="med"/>
+                    </a:lnT>
+                    <a:lnB w="12700" cap="flat" cmpd="sng" algn="ctr">
+                      <a:solidFill>
+                        <a:schemeClr val="tx1"/>
+                      </a:solidFill>
+                      <a:prstDash val="solid"/>
+                      <a:round/>
+                      <a:headEnd type="none" w="med" len="med"/>
+                      <a:tailEnd type="none" w="med" len="med"/>
+                    </a:lnB>
+                    <a:solidFill>
+                      <a:schemeClr val="accent2"/>
+                    </a:solidFill>
+                  </a:tcPr>
+                </a:tc>
+                <a:tc>
+                  <a:txBody>
+                    <a:bodyPr/>
+                    <a:lstStyle/>
+                    <a:p>
+                      <a:pPr algn="ctr"/>
+                      <a:r>
+                        <a:rPr sz="1800" b="1" dirty="0">
+                          <a:solidFill>
+                            <a:schemeClr val="bg1"/>
+                          </a:solidFill>
+                        </a:rPr>
+                        <a:t>서명자의 state 관리</a:t>
+                      </a:r>
+                    </a:p>
+                  </a:txBody>
+                  <a:tcPr anchor="ctr">
+                    <a:lnL w="12700" cap="flat" cmpd="sng" algn="ctr">
+                      <a:solidFill>
+                        <a:schemeClr val="tx1"/>
+                      </a:solidFill>
+                      <a:prstDash val="solid"/>
+                      <a:round/>
+                      <a:headEnd type="none" w="med" len="med"/>
+                      <a:tailEnd type="none" w="med" len="med"/>
+                    </a:lnL>
+                    <a:lnR w="12700" cap="flat" cmpd="sng" algn="ctr">
+                      <a:solidFill>
+                        <a:schemeClr val="tx1"/>
+                      </a:solidFill>
+                      <a:prstDash val="solid"/>
+                      <a:round/>
+                      <a:headEnd type="none" w="med" len="med"/>
+                      <a:tailEnd type="none" w="med" len="med"/>
+                    </a:lnR>
+                    <a:lnT w="12700" cap="flat" cmpd="sng" algn="ctr">
+                      <a:solidFill>
+                        <a:schemeClr val="tx1"/>
+                      </a:solidFill>
+                      <a:prstDash val="solid"/>
+                      <a:round/>
+                      <a:headEnd type="none" w="med" len="med"/>
+                      <a:tailEnd type="none" w="med" len="med"/>
+                    </a:lnT>
+                    <a:lnB w="12700" cap="flat" cmpd="sng" algn="ctr">
+                      <a:solidFill>
+                        <a:schemeClr val="tx1"/>
+                      </a:solidFill>
+                      <a:prstDash val="solid"/>
+                      <a:round/>
+                      <a:headEnd type="none" w="med" len="med"/>
+                      <a:tailEnd type="none" w="med" len="med"/>
+                    </a:lnB>
+                    <a:solidFill>
+                      <a:schemeClr val="accent2"/>
+                    </a:solidFill>
+                  </a:tcPr>
+                </a:tc>
+                <a:extLst>
+                  <a:ext uri="{0D108BD9-81ED-4DB2-BD59-A6C34878D82A}">
+                    <a16:rowId xmlns:a16="http://schemas.microsoft.com/office/drawing/2014/main" val="10000"/>
+                  </a:ext>
+                </a:extLst>
+              </a:tr>
+              <a:tr h="487680">
+                <a:tc>
+                  <a:txBody>
+                    <a:bodyPr/>
+                    <a:lstStyle/>
+                    <a:p>
+                      <a:pPr algn="ctr"/>
+                      <a:r>
+                        <a:rPr sz="1800" dirty="0"/>
+                        <a:t>상태 유지형</a:t>
+                      </a:r>
+                    </a:p>
+                  </a:txBody>
+                  <a:tcPr anchor="ctr">
+                    <a:lnL w="12700" cap="flat" cmpd="sng" algn="ctr">
+                      <a:solidFill>
+                        <a:schemeClr val="tx1"/>
+                      </a:solidFill>
+                      <a:prstDash val="solid"/>
+                      <a:round/>
+                      <a:headEnd type="none" w="med" len="med"/>
+                      <a:tailEnd type="none" w="med" len="med"/>
+                    </a:lnL>
+                    <a:lnR w="12700" cap="flat" cmpd="sng" algn="ctr">
+                      <a:solidFill>
+                        <a:schemeClr val="tx1"/>
+                      </a:solidFill>
+                      <a:prstDash val="solid"/>
+                      <a:round/>
+                      <a:headEnd type="none" w="med" len="med"/>
+                      <a:tailEnd type="none" w="med" len="med"/>
+                    </a:lnR>
+                    <a:lnT w="12700" cap="flat" cmpd="sng" algn="ctr">
+                      <a:solidFill>
+                        <a:schemeClr val="tx1"/>
+                      </a:solidFill>
+                      <a:prstDash val="solid"/>
+                      <a:round/>
+                      <a:headEnd type="none" w="med" len="med"/>
+                      <a:tailEnd type="none" w="med" len="med"/>
+                    </a:lnT>
+                    <a:lnB w="12700" cap="flat" cmpd="sng" algn="ctr">
+                      <a:solidFill>
+                        <a:schemeClr val="tx1"/>
+                      </a:solidFill>
+                      <a:prstDash val="solid"/>
+                      <a:round/>
+                      <a:headEnd type="none" w="med" len="med"/>
+                      <a:tailEnd type="none" w="med" len="med"/>
+                    </a:lnB>
+                    <a:noFill/>
+                  </a:tcPr>
+                </a:tc>
+                <a:tc>
+                  <a:txBody>
+                    <a:bodyPr/>
+                    <a:lstStyle/>
+                    <a:p>
+                      <a:pPr algn="ctr"/>
+                      <a:r>
+                        <a:rPr sz="1800" dirty="0"/>
+                        <a:t>LMS, XMSS</a:t>
+                      </a:r>
+                    </a:p>
+                  </a:txBody>
+                  <a:tcPr anchor="ctr">
+                    <a:lnL w="12700" cap="flat" cmpd="sng" algn="ctr">
+                      <a:solidFill>
+                        <a:schemeClr val="tx1"/>
+                      </a:solidFill>
+                      <a:prstDash val="solid"/>
+                      <a:round/>
+                      <a:headEnd type="none" w="med" len="med"/>
+                      <a:tailEnd type="none" w="med" len="med"/>
+                    </a:lnL>
+                    <a:lnR w="12700" cap="flat" cmpd="sng" algn="ctr">
+                      <a:solidFill>
+                        <a:schemeClr val="tx1"/>
+                      </a:solidFill>
+                      <a:prstDash val="solid"/>
+                      <a:round/>
+                      <a:headEnd type="none" w="med" len="med"/>
+                      <a:tailEnd type="none" w="med" len="med"/>
+                    </a:lnR>
+                    <a:lnT w="12700" cap="flat" cmpd="sng" algn="ctr">
+                      <a:solidFill>
+                        <a:schemeClr val="tx1"/>
+                      </a:solidFill>
+                      <a:prstDash val="solid"/>
+                      <a:round/>
+                      <a:headEnd type="none" w="med" len="med"/>
+                      <a:tailEnd type="none" w="med" len="med"/>
+                    </a:lnT>
+                    <a:lnB w="12700" cap="flat" cmpd="sng" algn="ctr">
+                      <a:solidFill>
+                        <a:schemeClr val="tx1"/>
+                      </a:solidFill>
+                      <a:prstDash val="solid"/>
+                      <a:round/>
+                      <a:headEnd type="none" w="med" len="med"/>
+                      <a:tailEnd type="none" w="med" len="med"/>
+                    </a:lnB>
+                    <a:noFill/>
+                  </a:tcPr>
+                </a:tc>
+                <a:tc>
+                  <a:txBody>
+                    <a:bodyPr/>
+                    <a:lstStyle/>
+                    <a:p>
+                      <a:pPr algn="ctr"/>
+                      <a:r>
+                        <a:rPr sz="1800" dirty="0"/>
+                        <a:t>필요 — 저장·갱신 오류 시 보안 붕괴</a:t>
+                      </a:r>
+                    </a:p>
+                  </a:txBody>
+                  <a:tcPr anchor="ctr">
+                    <a:lnL w="12700" cap="flat" cmpd="sng" algn="ctr">
+                      <a:solidFill>
+                        <a:schemeClr val="tx1"/>
+                      </a:solidFill>
+                      <a:prstDash val="solid"/>
+                      <a:round/>
+                      <a:headEnd type="none" w="med" len="med"/>
+                      <a:tailEnd type="none" w="med" len="med"/>
+                    </a:lnL>
+                    <a:lnR w="12700" cap="flat" cmpd="sng" algn="ctr">
+                      <a:solidFill>
+                        <a:schemeClr val="tx1"/>
+                      </a:solidFill>
+                      <a:prstDash val="solid"/>
+                      <a:round/>
+                      <a:headEnd type="none" w="med" len="med"/>
+                      <a:tailEnd type="none" w="med" len="med"/>
+                    </a:lnR>
+                    <a:lnT w="12700" cap="flat" cmpd="sng" algn="ctr">
+                      <a:solidFill>
+                        <a:schemeClr val="tx1"/>
+                      </a:solidFill>
+                      <a:prstDash val="solid"/>
+                      <a:round/>
+                      <a:headEnd type="none" w="med" len="med"/>
+                      <a:tailEnd type="none" w="med" len="med"/>
+                    </a:lnT>
+                    <a:lnB w="12700" cap="flat" cmpd="sng" algn="ctr">
+                      <a:solidFill>
+                        <a:schemeClr val="tx1"/>
+                      </a:solidFill>
+                      <a:prstDash val="solid"/>
+                      <a:round/>
+                      <a:headEnd type="none" w="med" len="med"/>
+                      <a:tailEnd type="none" w="med" len="med"/>
+                    </a:lnB>
+                    <a:noFill/>
+                  </a:tcPr>
+                </a:tc>
+                <a:extLst>
+                  <a:ext uri="{0D108BD9-81ED-4DB2-BD59-A6C34878D82A}">
+                    <a16:rowId xmlns:a16="http://schemas.microsoft.com/office/drawing/2014/main" val="10001"/>
+                  </a:ext>
+                </a:extLst>
+              </a:tr>
+              <a:tr h="487680">
+                <a:tc>
+                  <a:txBody>
+                    <a:bodyPr/>
+                    <a:lstStyle/>
+                    <a:p>
+                      <a:pPr algn="ctr"/>
+                      <a:r>
+                        <a:rPr sz="1800" dirty="0"/>
+                        <a:t>무상태</a:t>
+                      </a:r>
+                    </a:p>
+                  </a:txBody>
+                  <a:tcPr anchor="ctr">
+                    <a:lnL w="12700" cap="flat" cmpd="sng" algn="ctr">
+                      <a:solidFill>
+                        <a:schemeClr val="tx1"/>
+                      </a:solidFill>
+                      <a:prstDash val="solid"/>
+                      <a:round/>
+                      <a:headEnd type="none" w="med" len="med"/>
+                      <a:tailEnd type="none" w="med" len="med"/>
+                    </a:lnL>
+                    <a:lnR w="12700" cap="flat" cmpd="sng" algn="ctr">
+                      <a:solidFill>
+                        <a:schemeClr val="tx1"/>
+                      </a:solidFill>
+                      <a:prstDash val="solid"/>
+                      <a:round/>
+                      <a:headEnd type="none" w="med" len="med"/>
+                      <a:tailEnd type="none" w="med" len="med"/>
+                    </a:lnR>
+                    <a:lnT w="12700" cap="flat" cmpd="sng" algn="ctr">
+                      <a:solidFill>
+                        <a:schemeClr val="tx1"/>
+                      </a:solidFill>
+                      <a:prstDash val="solid"/>
+                      <a:round/>
+                      <a:headEnd type="none" w="med" len="med"/>
+                      <a:tailEnd type="none" w="med" len="med"/>
+                    </a:lnT>
+                    <a:lnB w="12700" cap="flat" cmpd="sng" algn="ctr">
+                      <a:solidFill>
+                        <a:schemeClr val="tx1"/>
+                      </a:solidFill>
+                      <a:prstDash val="solid"/>
+                      <a:round/>
+                      <a:headEnd type="none" w="med" len="med"/>
+                      <a:tailEnd type="none" w="med" len="med"/>
+                    </a:lnB>
+                    <a:noFill/>
+                  </a:tcPr>
+                </a:tc>
+                <a:tc>
+                  <a:txBody>
+                    <a:bodyPr/>
+                    <a:lstStyle/>
+                    <a:p>
+                      <a:pPr algn="ctr"/>
+                      <a:r>
+                        <a:rPr sz="1800" dirty="0"/>
+                        <a:t>SPHINCS+</a:t>
+                      </a:r>
+                    </a:p>
+                  </a:txBody>
+                  <a:tcPr anchor="ctr">
+                    <a:lnL w="12700" cap="flat" cmpd="sng" algn="ctr">
+                      <a:solidFill>
+                        <a:schemeClr val="tx1"/>
+                      </a:solidFill>
+                      <a:prstDash val="solid"/>
+                      <a:round/>
+                      <a:headEnd type="none" w="med" len="med"/>
+                      <a:tailEnd type="none" w="med" len="med"/>
+                    </a:lnL>
+                    <a:lnR w="12700" cap="flat" cmpd="sng" algn="ctr">
+                      <a:solidFill>
+                        <a:schemeClr val="tx1"/>
+                      </a:solidFill>
+                      <a:prstDash val="solid"/>
+                      <a:round/>
+                      <a:headEnd type="none" w="med" len="med"/>
+                      <a:tailEnd type="none" w="med" len="med"/>
+                    </a:lnR>
+                    <a:lnT w="12700" cap="flat" cmpd="sng" algn="ctr">
+                      <a:solidFill>
+                        <a:schemeClr val="tx1"/>
+                      </a:solidFill>
+                      <a:prstDash val="solid"/>
+                      <a:round/>
+                      <a:headEnd type="none" w="med" len="med"/>
+                      <a:tailEnd type="none" w="med" len="med"/>
+                    </a:lnT>
+                    <a:lnB w="12700" cap="flat" cmpd="sng" algn="ctr">
+                      <a:solidFill>
+                        <a:schemeClr val="tx1"/>
+                      </a:solidFill>
+                      <a:prstDash val="solid"/>
+                      <a:round/>
+                      <a:headEnd type="none" w="med" len="med"/>
+                      <a:tailEnd type="none" w="med" len="med"/>
+                    </a:lnB>
+                    <a:noFill/>
+                  </a:tcPr>
+                </a:tc>
+                <a:tc>
+                  <a:txBody>
+                    <a:bodyPr/>
+                    <a:lstStyle/>
+                    <a:p>
+                      <a:pPr algn="ctr"/>
+                      <a:r>
+                        <a:rPr sz="1800" dirty="0"/>
+                        <a:t>불필요</a:t>
+                      </a:r>
+                    </a:p>
+                  </a:txBody>
+                  <a:tcPr anchor="ctr">
+                    <a:lnL w="12700" cap="flat" cmpd="sng" algn="ctr">
+                      <a:solidFill>
+                        <a:schemeClr val="tx1"/>
+                      </a:solidFill>
+                      <a:prstDash val="solid"/>
+                      <a:round/>
+                      <a:headEnd type="none" w="med" len="med"/>
+                      <a:tailEnd type="none" w="med" len="med"/>
+                    </a:lnL>
+                    <a:lnR w="12700" cap="flat" cmpd="sng" algn="ctr">
+                      <a:solidFill>
+                        <a:schemeClr val="tx1"/>
+                      </a:solidFill>
+                      <a:prstDash val="solid"/>
+                      <a:round/>
+                      <a:headEnd type="none" w="med" len="med"/>
+                      <a:tailEnd type="none" w="med" len="med"/>
+                    </a:lnR>
+                    <a:lnT w="12700" cap="flat" cmpd="sng" algn="ctr">
+                      <a:solidFill>
+                        <a:schemeClr val="tx1"/>
+                      </a:solidFill>
+                      <a:prstDash val="solid"/>
+                      <a:round/>
+                      <a:headEnd type="none" w="med" len="med"/>
+                      <a:tailEnd type="none" w="med" len="med"/>
+                    </a:lnT>
+                    <a:lnB w="12700" cap="flat" cmpd="sng" algn="ctr">
+                      <a:solidFill>
+                        <a:schemeClr val="tx1"/>
+                      </a:solidFill>
+                      <a:prstDash val="solid"/>
+                      <a:round/>
+                      <a:headEnd type="none" w="med" len="med"/>
+                      <a:tailEnd type="none" w="med" len="med"/>
+                    </a:lnB>
+                    <a:noFill/>
+                  </a:tcPr>
+                </a:tc>
+                <a:extLst>
+                  <a:ext uri="{0D108BD9-81ED-4DB2-BD59-A6C34878D82A}">
+                    <a16:rowId xmlns:a16="http://schemas.microsoft.com/office/drawing/2014/main" val="10002"/>
+                  </a:ext>
+                </a:extLst>
+              </a:tr>
+            </a:tbl>
+          </a:graphicData>
+        </a:graphic>
+      </p:graphicFrame>
+    </p:spTree>
+  </p:cSld>
+  <p:clrMapOvr>
+    <a:masterClrMapping/>
+  </p:clrMapOvr>
+</p:sld>
+</file>
+
+<file path=ppt/slides/slide17.xml><?xml version="1.0" encoding="utf-8"?>
+<p:sld xmlns:a="http://schemas.openxmlformats.org/drawingml/2006/main" xmlns:r="http://schemas.openxmlformats.org/officeDocument/2006/relationships" xmlns:p="http://schemas.openxmlformats.org/presentationml/2006/main">
+  <p:cSld>
+    <p:spTree>
+      <p:nvGrpSpPr>
+        <p:cNvPr id="1" name=""/>
+        <p:cNvGrpSpPr/>
+        <p:nvPr/>
+      </p:nvGrpSpPr>
+      <p:grpSpPr>
+        <a:xfrm>
+          <a:off x="0" y="0"/>
+          <a:ext cx="0" cy="0"/>
+          <a:chOff x="0" y="0"/>
+          <a:chExt cx="0" cy="0"/>
+        </a:xfrm>
+      </p:grpSpPr>
+      <p:sp>
+        <p:nvSpPr>
+          <p:cNvPr id="2" name="Title 1"/>
+          <p:cNvSpPr>
+            <a:spLocks noGrp="1"/>
+          </p:cNvSpPr>
+          <p:nvPr>
+            <p:ph type="title"/>
+          </p:nvPr>
+        </p:nvSpPr>
+        <p:spPr/>
+        <p:txBody>
+          <a:bodyPr/>
+          <a:lstStyle/>
+          <a:p>
+            <a:r>
+              <a:rPr dirty="0"/>
+              <a:t>마무리</a:t>
+            </a:r>
+          </a:p>
+        </p:txBody>
+      </p:sp>
+      <p:sp>
+        <p:nvSpPr>
+          <p:cNvPr id="3" name="Content Placeholder 2"/>
+          <p:cNvSpPr>
+            <a:spLocks noGrp="1"/>
+          </p:cNvSpPr>
+          <p:nvPr>
+            <p:ph idx="1"/>
+          </p:nvPr>
+        </p:nvSpPr>
+        <p:spPr/>
+        <p:txBody>
+          <a:bodyPr/>
+          <a:lstStyle/>
+          <a:p>
+            <a:r>
+              <a:rPr sz="1800" dirty="0"/>
+              <a:t>서명 스킴은 키 생성·서명·검증 세 알고리즘으로 인증을 제공한다</a:t>
+            </a:r>
+          </a:p>
+          <a:p>
+            <a:r>
+              <a:rPr sz="1800" dirty="0"/>
+              <a:t>보안 기준은 선택 메시지 공격 하 존재적 위조 불가능성이다</a:t>
+            </a:r>
+          </a:p>
+          <a:p>
+            <a:r>
+              <a:rPr sz="1800" dirty="0"/>
+              <a:t>RSA·타원곡선은 양자 컴퓨터에 붕괴하고, 격자 기반은 안전하나 근거 문제가 최신이다</a:t>
+            </a:r>
+          </a:p>
+          <a:p>
+            <a:r>
+              <a:rPr sz="1800" dirty="0"/>
+              <a:t>해시 기반은 해시 함수 하나에만 의존해 보안이 잘 이해되지만 키·서명이 크다</a:t>
+            </a:r>
+          </a:p>
+          <a:p>
+            <a:r>
+              <a:rPr sz="1800" dirty="0"/>
+              <a:t>표준은 LMS·XMSS(상태 유지형)와 SPHINCS+(무상태)이다</a:t>
+            </a:r>
+          </a:p>
+        </p:txBody>
+      </p:sp>
+      <p:sp>
+        <p:nvSpPr>
+          <p:cNvPr id="4" name="슬라이드 번호 개체 틀"/>
+          <p:cNvSpPr>
+            <a:spLocks noGrp="1"/>
+          </p:cNvSpPr>
+          <p:nvPr>
+            <p:ph type="sldNum" sz="quarter" idx="12"/>
+          </p:nvPr>
+        </p:nvSpPr>
+        <p:spPr/>
+        <p:txBody>
+          <a:bodyPr/>
+          <a:lstStyle/>
+          <a:p>
+            <a:fld id="{4438A2D4-3867-488E-A04E-7BFFCAED45A6}" type="slidenum">
+              <a:rPr lang="ko-KR" altLang="en-US" smtClean="0"/>
+              <a:t>17</a:t>
+            </a:fld>
+            <a:endParaRPr lang="ko-KR" altLang="en-US" dirty="0"/>
+          </a:p>
+        </p:txBody>
+      </p:sp>
+    </p:spTree>
+  </p:cSld>
+  <p:clrMapOvr>
+    <a:masterClrMapping/>
+  </p:clrMapOvr>
+</p:sld>
+</file>
+
+<file path=ppt/slides/slide2.xml><?xml version="1.0" encoding="utf-8"?>
+<p:sld xmlns:a="http://schemas.openxmlformats.org/drawingml/2006/main" xmlns:r="http://schemas.openxmlformats.org/officeDocument/2006/relationships" xmlns:p="http://schemas.openxmlformats.org/presentationml/2006/main">
+  <p:cSld>
+    <p:spTree>
+      <p:nvGrpSpPr>
+        <p:cNvPr id="1" name=""/>
+        <p:cNvGrpSpPr/>
+        <p:nvPr/>
+      </p:nvGrpSpPr>
+      <p:grpSpPr>
+        <a:xfrm>
+          <a:off x="0" y="0"/>
+          <a:ext cx="0" cy="0"/>
+          <a:chOff x="0" y="0"/>
+          <a:chExt cx="0" cy="0"/>
+        </a:xfrm>
+      </p:grpSpPr>
+      <p:sp>
+        <p:nvSpPr>
+          <p:cNvPr id="2" name="Title 1"/>
+          <p:cNvSpPr>
+            <a:spLocks noGrp="1"/>
+          </p:cNvSpPr>
+          <p:nvPr>
+            <p:ph type="title"/>
+          </p:nvPr>
+        </p:nvSpPr>
+        <p:spPr/>
+        <p:txBody>
+          <a:bodyPr/>
+          <a:lstStyle/>
+          <a:p>
+            <a:r>
+              <a:rPr dirty="0"/>
+              <a:t>Plan</a:t>
+            </a:r>
+          </a:p>
+        </p:txBody>
+      </p:sp>
+      <p:sp>
+        <p:nvSpPr>
+          <p:cNvPr id="3" name="Content Placeholder 2"/>
+          <p:cNvSpPr>
+            <a:spLocks noGrp="1"/>
+          </p:cNvSpPr>
+          <p:nvPr>
+            <p:ph idx="1"/>
+          </p:nvPr>
+        </p:nvSpPr>
+        <p:spPr/>
+        <p:txBody>
+          <a:bodyPr/>
+          <a:lstStyle/>
+          <a:p>
+            <a:pPr marL="342900" indent="-342900">
+              <a:buFont typeface="+mj-lt"/>
+              <a:buAutoNum type="arabicPeriod"/>
+            </a:pPr>
+            <a:r>
+              <a:rPr lang="en-US" sz="1800" dirty="0"/>
+              <a:t>NTT </a:t>
+            </a:r>
+            <a:r>
+              <a:rPr lang="ko-KR" altLang="en-US" sz="1800" dirty="0"/>
+              <a:t>정리</a:t>
+            </a:r>
+            <a:endParaRPr lang="en-US" sz="1800" dirty="0"/>
+          </a:p>
+          <a:p>
+            <a:pPr marL="342900" indent="-342900">
+              <a:buFont typeface="+mj-lt"/>
+              <a:buAutoNum type="arabicPeriod"/>
+            </a:pPr>
+            <a:r>
+              <a:rPr sz="1800" dirty="0"/>
+              <a:t>서명 스킴이란 무엇인가</a:t>
+            </a:r>
+          </a:p>
+          <a:p>
+            <a:pPr marL="342900" indent="-342900">
+              <a:buFont typeface="+mj-lt"/>
+              <a:buAutoNum type="arabicPeriod"/>
+            </a:pPr>
+            <a:r>
+              <a:rPr sz="1800" dirty="0"/>
+              <a:t>보안 정의</a:t>
+            </a:r>
+            <a:endParaRPr lang="en-US" sz="1800" dirty="0"/>
+          </a:p>
+          <a:p>
+            <a:pPr marL="342900" indent="-342900">
+              <a:buFont typeface="+mj-lt"/>
+              <a:buAutoNum type="arabicPeriod"/>
+            </a:pPr>
+            <a:r>
+              <a:rPr sz="1800" dirty="0"/>
+              <a:t>서명 스킴의 세 계열</a:t>
+            </a:r>
+          </a:p>
+          <a:p>
+            <a:pPr marL="342900" indent="-342900">
+              <a:buFont typeface="+mj-lt"/>
+              <a:buAutoNum type="arabicPeriod"/>
+            </a:pPr>
+            <a:r>
+              <a:rPr sz="1800" dirty="0"/>
+              <a:t>해시 기반 서명 스킴</a:t>
+            </a:r>
+          </a:p>
+          <a:p>
+            <a:pPr marL="342900" indent="-342900">
+              <a:buFont typeface="+mj-lt"/>
+              <a:buAutoNum type="arabicPeriod"/>
+            </a:pPr>
+            <a:r>
+              <a:rPr sz="1800" dirty="0"/>
+              <a:t>표준화된 해시 기반 서명 스킴</a:t>
+            </a:r>
+          </a:p>
+        </p:txBody>
+      </p:sp>
+      <p:sp>
+        <p:nvSpPr>
+          <p:cNvPr id="4" name="슬라이드 번호 개체 틀"/>
+          <p:cNvSpPr>
+            <a:spLocks noGrp="1"/>
+          </p:cNvSpPr>
+          <p:nvPr>
+            <p:ph type="sldNum" sz="quarter" idx="12"/>
+          </p:nvPr>
+        </p:nvSpPr>
+        <p:spPr/>
+        <p:txBody>
+          <a:bodyPr/>
+          <a:lstStyle/>
+          <a:p>
+            <a:fld id="{4438A2D4-3867-488E-A04E-7BFFCAED45A6}" type="slidenum">
+              <a:rPr lang="ko-KR" altLang="en-US" smtClean="0"/>
+              <a:t>2</a:t>
+            </a:fld>
+            <a:endParaRPr lang="ko-KR" altLang="en-US" dirty="0"/>
+          </a:p>
+        </p:txBody>
+      </p:sp>
+    </p:spTree>
+  </p:cSld>
+  <p:clrMapOvr>
+    <a:masterClrMapping/>
+  </p:clrMapOvr>
+</p:sld>
+</file>
+
+<file path=ppt/slides/slide3.xml><?xml version="1.0" encoding="utf-8"?>
+<p:sld xmlns:a="http://schemas.openxmlformats.org/drawingml/2006/main" xmlns:r="http://schemas.openxmlformats.org/officeDocument/2006/relationships" xmlns:p="http://schemas.openxmlformats.org/presentationml/2006/main">
+  <p:cSld>
+    <p:spTree>
+      <p:nvGrpSpPr>
+        <p:cNvPr id="1" name=""/>
+        <p:cNvGrpSpPr/>
+        <p:nvPr/>
+      </p:nvGrpSpPr>
+      <p:grpSpPr>
+        <a:xfrm>
+          <a:off x="0" y="0"/>
+          <a:ext cx="0" cy="0"/>
+          <a:chOff x="0" y="0"/>
+          <a:chExt cx="0" cy="0"/>
+        </a:xfrm>
+      </p:grpSpPr>
+      <p:sp>
+        <p:nvSpPr>
+          <p:cNvPr id="2" name="Title 1"/>
+          <p:cNvSpPr>
+            <a:spLocks noGrp="1"/>
+          </p:cNvSpPr>
+          <p:nvPr>
+            <p:ph type="ctrTitle"/>
+          </p:nvPr>
+        </p:nvSpPr>
+        <p:spPr/>
+        <p:txBody>
+          <a:bodyPr/>
+          <a:lstStyle/>
+          <a:p>
+            <a:r>
+              <a:rPr lang="en-US" dirty="0"/>
+              <a:t>NTT </a:t>
+            </a:r>
+            <a:r>
+              <a:rPr lang="ko-KR" altLang="en-US" dirty="0"/>
+              <a:t>정리</a:t>
+            </a:r>
+            <a:endParaRPr dirty="0"/>
+          </a:p>
+        </p:txBody>
+      </p:sp>
+      <p:sp>
+        <p:nvSpPr>
+          <p:cNvPr id="3" name="Subtitle 2"/>
+          <p:cNvSpPr>
+            <a:spLocks noGrp="1"/>
+          </p:cNvSpPr>
+          <p:nvPr>
+            <p:ph type="subTitle" idx="1"/>
+          </p:nvPr>
+        </p:nvSpPr>
+        <p:spPr/>
+        <p:txBody>
+          <a:bodyPr/>
+          <a:lstStyle/>
+          <a:p>
+            <a:r>
+              <a:rPr dirty="0"/>
+              <a:t>The Number-Theoretic Transform (NTT</a:t>
+            </a:r>
+            <a:r>
+              <a:rPr lang="en-US" dirty="0"/>
+              <a:t>)</a:t>
+            </a:r>
+            <a:endParaRPr dirty="0"/>
+          </a:p>
+        </p:txBody>
+      </p:sp>
+      <p:sp>
+        <p:nvSpPr>
+          <p:cNvPr id="4" name="슬라이드 번호 개체 틀"/>
+          <p:cNvSpPr>
+            <a:spLocks noGrp="1"/>
+          </p:cNvSpPr>
+          <p:nvPr>
+            <p:ph type="sldNum" sz="quarter" idx="12"/>
+          </p:nvPr>
+        </p:nvSpPr>
+        <p:spPr/>
+        <p:txBody>
+          <a:bodyPr/>
+          <a:lstStyle/>
+          <a:p>
+            <a:fld id="{4438A2D4-3867-488E-A04E-7BFFCAED45A6}" type="slidenum">
+              <a:rPr lang="ko-KR" altLang="en-US" smtClean="0"/>
+              <a:t>3</a:t>
+            </a:fld>
+            <a:endParaRPr lang="ko-KR" altLang="en-US" dirty="0"/>
+          </a:p>
+        </p:txBody>
+      </p:sp>
+    </p:spTree>
+  </p:cSld>
+  <p:clrMapOvr>
+    <a:masterClrMapping/>
+  </p:clrMapOvr>
+</p:sld>
+</file>
+
+<file path=ppt/slides/slide4.xml><?xml version="1.0" encoding="utf-8"?>
+<p:sld xmlns:a="http://schemas.openxmlformats.org/drawingml/2006/main" xmlns:r="http://schemas.openxmlformats.org/officeDocument/2006/relationships" xmlns:p="http://schemas.openxmlformats.org/presentationml/2006/main">
+  <p:cSld>
+    <p:spTree>
+      <p:nvGrpSpPr>
+        <p:cNvPr id="1" name=""/>
+        <p:cNvGrpSpPr/>
+        <p:nvPr/>
+      </p:nvGrpSpPr>
+      <p:grpSpPr>
+        <a:xfrm>
+          <a:off x="0" y="0"/>
+          <a:ext cx="0" cy="0"/>
+          <a:chOff x="0" y="0"/>
+          <a:chExt cx="0" cy="0"/>
+        </a:xfrm>
+      </p:grpSpPr>
+      <p:sp>
+        <p:nvSpPr>
+          <p:cNvPr id="2" name="Title 1"/>
+          <p:cNvSpPr>
+            <a:spLocks noGrp="1"/>
+          </p:cNvSpPr>
+          <p:nvPr>
+            <p:ph type="title"/>
+          </p:nvPr>
+        </p:nvSpPr>
+        <p:spPr/>
+        <p:txBody>
+          <a:bodyPr/>
+          <a:lstStyle/>
+          <a:p>
+            <a:r>
+              <a:rPr dirty="0"/>
+              <a:t>왜 NTT인가: 다항식 곱셈이라는 병목</a:t>
+            </a:r>
+          </a:p>
+        </p:txBody>
+      </p:sp>
+      <p:sp>
+        <p:nvSpPr>
+          <p:cNvPr id="3" name="Content Placeholder 2"/>
+          <p:cNvSpPr>
+            <a:spLocks noGrp="1"/>
+          </p:cNvSpPr>
+          <p:nvPr>
+            <p:ph idx="1"/>
+          </p:nvPr>
+        </p:nvSpPr>
+        <p:spPr/>
+        <p:txBody>
+          <a:bodyPr/>
+          <a:lstStyle/>
+          <a:p>
+            <a:r>
+              <a:rPr sz="1800" dirty="0"/>
+              <a:t>Kyber·Dilithium의 연산은 모두 다항식 링 위에서 이뤄진다</a:t>
+            </a:r>
+          </a:p>
+          <a:p>
+            <a:r>
+              <a:rPr sz="1800" dirty="0"/>
+              <a:t>무거운 부분은 전부 "행렬 × 벡터", 그 기본 단위는 다항식 곱 하나</a:t>
+            </a:r>
+          </a:p>
+          <a:p>
+            <a:r>
+              <a:rPr sz="1800" dirty="0"/>
+              <a:t>다항식 덧셈은 계수별 덧셈이라 싸다</a:t>
+            </a:r>
+          </a:p>
+          <a:p>
+            <a:r>
+              <a:rPr sz="1800" dirty="0"/>
+              <a:t>곱셈은 모든 항끼리 곱해야 해서 비용이 항 개수의 제곱에 비례한다</a:t>
+            </a:r>
+          </a:p>
+          <a:p>
+            <a:r>
+              <a:rPr sz="1800" dirty="0"/>
+              <a:t>항 256개 → 곱셈 한 번에 약 6만 5천 번의 수 곱셈, 스킴 전체 속도를 지배</a:t>
+            </a:r>
+          </a:p>
+        </p:txBody>
+      </p:sp>
+      <p:sp>
+        <p:nvSpPr>
+          <p:cNvPr id="4" name="슬라이드 번호 개체 틀"/>
+          <p:cNvSpPr>
+            <a:spLocks noGrp="1"/>
+          </p:cNvSpPr>
+          <p:nvPr>
+            <p:ph type="sldNum" sz="quarter" idx="12"/>
+          </p:nvPr>
+        </p:nvSpPr>
+        <p:spPr/>
+        <p:txBody>
+          <a:bodyPr/>
+          <a:lstStyle/>
+          <a:p>
+            <a:fld id="{4438A2D4-3867-488E-A04E-7BFFCAED45A6}" type="slidenum">
+              <a:rPr lang="ko-KR" altLang="en-US" smtClean="0"/>
+              <a:t>4</a:t>
+            </a:fld>
+            <a:endParaRPr lang="ko-KR" altLang="en-US" dirty="0"/>
+          </a:p>
+        </p:txBody>
+      </p:sp>
+      <p:pic>
+        <p:nvPicPr>
+          <p:cNvPr id="7" name="그림 6">
+            <a:extLst>
+              <a:ext uri="{FF2B5EF4-FFF2-40B4-BE49-F238E27FC236}">
+                <a16:creationId xmlns:a16="http://schemas.microsoft.com/office/drawing/2014/main" id="{9A46F72F-96D3-B281-C381-858B6C6D42C1}"/>
+              </a:ext>
+            </a:extLst>
+          </p:cNvPr>
+          <p:cNvPicPr>
+            <a:picLocks noChangeAspect="1"/>
+          </p:cNvPicPr>
+          <p:nvPr/>
+        </p:nvPicPr>
+        <p:blipFill>
+          <a:blip r:embed="rId2"/>
+          <a:stretch>
+            <a:fillRect/>
+          </a:stretch>
+        </p:blipFill>
+        <p:spPr>
+          <a:xfrm>
+            <a:off x="1295400" y="4152753"/>
+            <a:ext cx="8177463" cy="2542372"/>
+          </a:xfrm>
+          <a:prstGeom prst="rect">
+            <a:avLst/>
+          </a:prstGeom>
+        </p:spPr>
+      </p:pic>
+    </p:spTree>
+  </p:cSld>
+  <p:clrMapOvr>
+    <a:masterClrMapping/>
+  </p:clrMapOvr>
+</p:sld>
+</file>
+
+<file path=ppt/slides/slide5.xml><?xml version="1.0" encoding="utf-8"?>
+<p:sld xmlns:a="http://schemas.openxmlformats.org/drawingml/2006/main" xmlns:r="http://schemas.openxmlformats.org/officeDocument/2006/relationships" xmlns:p="http://schemas.openxmlformats.org/presentationml/2006/main">
+  <p:cSld>
+    <p:spTree>
+      <p:nvGrpSpPr>
+        <p:cNvPr id="1" name=""/>
+        <p:cNvGrpSpPr/>
+        <p:nvPr/>
+      </p:nvGrpSpPr>
+      <p:grpSpPr>
+        <a:xfrm>
+          <a:off x="0" y="0"/>
+          <a:ext cx="0" cy="0"/>
+          <a:chOff x="0" y="0"/>
+          <a:chExt cx="0" cy="0"/>
+        </a:xfrm>
+      </p:grpSpPr>
+      <p:sp>
+        <p:nvSpPr>
+          <p:cNvPr id="2" name="Title 1"/>
+          <p:cNvSpPr>
+            <a:spLocks noGrp="1"/>
+          </p:cNvSpPr>
+          <p:nvPr>
+            <p:ph type="title"/>
+          </p:nvPr>
+        </p:nvSpPr>
+        <p:spPr/>
+        <p:txBody>
+          <a:bodyPr/>
+          <a:lstStyle/>
+          <a:p>
+            <a:r>
+              <a:rPr dirty="0"/>
+              <a:t>핵심 아이디어: </a:t>
+            </a:r>
+            <a:r>
+              <a:rPr lang="ko-KR" altLang="en-US" dirty="0"/>
+              <a:t>표현을 바꾸면 곱셈이 쉬워진다</a:t>
+            </a:r>
+            <a:endParaRPr dirty="0"/>
+          </a:p>
+        </p:txBody>
+      </p:sp>
+      <p:sp>
+        <p:nvSpPr>
+          <p:cNvPr id="3" name="Content Placeholder 2"/>
+          <p:cNvSpPr>
+            <a:spLocks noGrp="1"/>
+          </p:cNvSpPr>
+          <p:nvPr>
+            <p:ph idx="1"/>
+          </p:nvPr>
+        </p:nvSpPr>
+        <p:spPr/>
+        <p:txBody>
+          <a:bodyPr/>
+          <a:lstStyle/>
+          <a:p>
+            <a:r>
+              <a:rPr sz="1800" dirty="0"/>
+              <a:t>다항식을 "계수 목록" 대신 "여러 점에서의 함숫값 목록"으로 본다</a:t>
+            </a:r>
+          </a:p>
+          <a:p>
+            <a:r>
+              <a:rPr sz="1800" dirty="0"/>
+              <a:t>함숫값 표현에서는 곱셈이 같은 위치끼리의 곱(점별 곱)이 된다</a:t>
+            </a:r>
+          </a:p>
+          <a:p>
+            <a:r>
+              <a:rPr sz="1800" dirty="0"/>
+              <a:t>절차: NTT로 옮긴다 → 점별로 곱한다 → 역NTT(역변환)로 되돌린다</a:t>
+            </a:r>
+          </a:p>
+          <a:p>
+            <a:r>
+              <a:rPr sz="1800" dirty="0"/>
+              <a:t>복소수 FFT를 "소수로 나눈 나머지" 위에서 한 것 → 이름이 "수론적 변환"</a:t>
+            </a:r>
+          </a:p>
+          <a:p>
+            <a:r>
+              <a:rPr sz="1800" dirty="0"/>
+              <a:t>변환 자체도 분할정복으로 빠르게 계산된다</a:t>
+            </a:r>
+          </a:p>
+        </p:txBody>
+      </p:sp>
+      <p:sp>
+        <p:nvSpPr>
+          <p:cNvPr id="4" name="슬라이드 번호 개체 틀"/>
+          <p:cNvSpPr>
+            <a:spLocks noGrp="1"/>
+          </p:cNvSpPr>
+          <p:nvPr>
+            <p:ph type="sldNum" sz="quarter" idx="12"/>
+          </p:nvPr>
+        </p:nvSpPr>
+        <p:spPr/>
+        <p:txBody>
+          <a:bodyPr/>
+          <a:lstStyle/>
+          <a:p>
+            <a:fld id="{4438A2D4-3867-488E-A04E-7BFFCAED45A6}" type="slidenum">
+              <a:rPr lang="ko-KR" altLang="en-US" smtClean="0"/>
+              <a:t>5</a:t>
+            </a:fld>
+            <a:endParaRPr lang="ko-KR" altLang="en-US" dirty="0"/>
+          </a:p>
+        </p:txBody>
+      </p:sp>
+      <p:pic>
+        <p:nvPicPr>
+          <p:cNvPr id="7" name="그림 6">
+            <a:extLst>
+              <a:ext uri="{FF2B5EF4-FFF2-40B4-BE49-F238E27FC236}">
+                <a16:creationId xmlns:a16="http://schemas.microsoft.com/office/drawing/2014/main" id="{17B7D7DA-35E2-AAA7-5A38-8BE14BC27A0E}"/>
+              </a:ext>
+            </a:extLst>
+          </p:cNvPr>
+          <p:cNvPicPr>
+            <a:picLocks noChangeAspect="1"/>
+          </p:cNvPicPr>
+          <p:nvPr/>
+        </p:nvPicPr>
+        <p:blipFill>
+          <a:blip r:embed="rId2"/>
+          <a:stretch>
+            <a:fillRect/>
+          </a:stretch>
+        </p:blipFill>
+        <p:spPr>
+          <a:xfrm>
+            <a:off x="1295400" y="4340112"/>
+            <a:ext cx="8334864" cy="1989888"/>
+          </a:xfrm>
+          <a:prstGeom prst="rect">
+            <a:avLst/>
+          </a:prstGeom>
+        </p:spPr>
+      </p:pic>
+    </p:spTree>
+  </p:cSld>
+  <p:clrMapOvr>
+    <a:masterClrMapping/>
+  </p:clrMapOvr>
+</p:sld>
+</file>
+
+<file path=ppt/slides/slide6.xml><?xml version="1.0" encoding="utf-8"?>
+<p:sld xmlns:a="http://schemas.openxmlformats.org/drawingml/2006/main" xmlns:r="http://schemas.openxmlformats.org/officeDocument/2006/relationships" xmlns:p="http://schemas.openxmlformats.org/presentationml/2006/main">
+  <p:cSld>
+    <p:spTree>
+      <p:nvGrpSpPr>
+        <p:cNvPr id="1" name=""/>
+        <p:cNvGrpSpPr/>
+        <p:nvPr/>
+      </p:nvGrpSpPr>
+      <p:grpSpPr>
+        <a:xfrm>
+          <a:off x="0" y="0"/>
+          <a:ext cx="0" cy="0"/>
+          <a:chOff x="0" y="0"/>
+          <a:chExt cx="0" cy="0"/>
+        </a:xfrm>
+      </p:grpSpPr>
+      <p:sp>
+        <p:nvSpPr>
+          <p:cNvPr id="2" name="Title 1"/>
+          <p:cNvSpPr>
+            <a:spLocks noGrp="1"/>
+          </p:cNvSpPr>
+          <p:nvPr>
+            <p:ph type="title"/>
+          </p:nvPr>
+        </p:nvSpPr>
+        <p:spPr/>
+        <p:txBody>
+          <a:bodyPr/>
+          <a:lstStyle/>
+          <a:p>
+            <a:r>
+              <a:rPr dirty="0"/>
+              <a:t>결과</a:t>
+            </a:r>
+            <a:r>
+              <a:rPr lang="en-US" altLang="ko-KR" dirty="0"/>
+              <a:t>:</a:t>
+            </a:r>
+            <a:r>
+              <a:rPr lang="ko-KR" altLang="en-US" dirty="0"/>
+              <a:t> 얼마나 빨라지고</a:t>
+            </a:r>
+            <a:r>
+              <a:rPr lang="en-US" altLang="ko-KR" dirty="0"/>
+              <a:t>,</a:t>
+            </a:r>
+            <a:r>
+              <a:rPr lang="ko-KR" altLang="en-US" dirty="0"/>
+              <a:t> 무엇이 그대로인가</a:t>
+            </a:r>
+            <a:endParaRPr dirty="0"/>
+          </a:p>
+        </p:txBody>
+      </p:sp>
+      <p:sp>
+        <p:nvSpPr>
+          <p:cNvPr id="3" name="Content Placeholder 2"/>
+          <p:cNvSpPr>
+            <a:spLocks noGrp="1"/>
+          </p:cNvSpPr>
+          <p:nvPr>
+            <p:ph idx="1"/>
+          </p:nvPr>
+        </p:nvSpPr>
+        <p:spPr/>
+        <p:txBody>
+          <a:bodyPr/>
+          <a:lstStyle/>
+          <a:p>
+            <a:r>
+              <a:rPr sz="1800" dirty="0"/>
+              <a:t>곱셈 비용이 "항 개수의 제곱"에서 "항 개수 × 로그" 수준으로 내려간다</a:t>
+            </a:r>
+          </a:p>
+          <a:p>
+            <a:r>
+              <a:rPr sz="1800" dirty="0"/>
+              <a:t>항 256개에서 실측 약 100배 이상 (Dilithium 서명 기준 약 120배)</a:t>
+            </a:r>
+          </a:p>
+          <a:p>
+            <a:r>
+              <a:rPr sz="1800" dirty="0"/>
+              <a:t>추가 메모리도 거의 없다(제자리 계산) → 하드웨어·임베디드에 유리</a:t>
+            </a:r>
+          </a:p>
+          <a:p>
+            <a:r>
+              <a:rPr sz="1800" dirty="0"/>
+              <a:t>NTT는 순수한 구현 최적화 — 계산 값도 안전성 논리도 그대로, 더 빠를 뿐</a:t>
+            </a:r>
+          </a:p>
+          <a:p>
+            <a:r>
+              <a:rPr sz="1800" dirty="0"/>
+              <a:t>Kyber·Dilithium 구현에서 NTT는 필수 (Kyber는 변형 NTT² 사용, 아이디어는 동일)</a:t>
+            </a:r>
+          </a:p>
+        </p:txBody>
+      </p:sp>
+      <p:sp>
+        <p:nvSpPr>
+          <p:cNvPr id="4" name="슬라이드 번호 개체 틀"/>
+          <p:cNvSpPr>
+            <a:spLocks noGrp="1"/>
+          </p:cNvSpPr>
+          <p:nvPr>
+            <p:ph type="sldNum" sz="quarter" idx="12"/>
+          </p:nvPr>
+        </p:nvSpPr>
+        <p:spPr/>
+        <p:txBody>
+          <a:bodyPr/>
+          <a:lstStyle/>
+          <a:p>
+            <a:fld id="{4438A2D4-3867-488E-A04E-7BFFCAED45A6}" type="slidenum">
+              <a:rPr lang="ko-KR" altLang="en-US" smtClean="0"/>
+              <a:t>6</a:t>
+            </a:fld>
+            <a:endParaRPr lang="ko-KR" altLang="en-US" dirty="0"/>
+          </a:p>
+        </p:txBody>
+      </p:sp>
+      <p:pic>
+        <p:nvPicPr>
+          <p:cNvPr id="6" name="Picture 4">
+            <a:extLst>
+              <a:ext uri="{FF2B5EF4-FFF2-40B4-BE49-F238E27FC236}">
+                <a16:creationId xmlns:a16="http://schemas.microsoft.com/office/drawing/2014/main" id="{720AB3D1-0773-4ABB-35A9-F453584520C3}"/>
+              </a:ext>
+            </a:extLst>
+          </p:cNvPr>
+          <p:cNvPicPr>
+            <a:picLocks noChangeAspect="1" noChangeArrowheads="1"/>
+          </p:cNvPicPr>
+          <p:nvPr/>
+        </p:nvPicPr>
+        <p:blipFill>
+          <a:blip r:embed="rId2">
+            <a:extLst>
+              <a:ext uri="{28A0092B-C50C-407E-A947-70E740481C1C}">
+                <a14:useLocalDpi xmlns:a14="http://schemas.microsoft.com/office/drawing/2010/main" val="0"/>
+              </a:ext>
+            </a:extLst>
+          </a:blip>
+          <a:srcRect/>
+          <a:stretch>
+            <a:fillRect/>
+          </a:stretch>
+        </p:blipFill>
+        <p:spPr bwMode="auto">
+          <a:xfrm>
+            <a:off x="838200" y="4225925"/>
+            <a:ext cx="5191125" cy="2495550"/>
+          </a:xfrm>
+          <a:prstGeom prst="rect">
+            <a:avLst/>
+          </a:prstGeom>
+          <a:noFill/>
+          <a:extLst>
+            <a:ext uri="{909E8E84-426E-40DD-AFC4-6F175D3DCCD1}">
+              <a14:hiddenFill xmlns:a14="http://schemas.microsoft.com/office/drawing/2010/main">
+                <a:solidFill>
+                  <a:srgbClr val="FFFFFF"/>
+                </a:solidFill>
+              </a14:hiddenFill>
+            </a:ext>
+          </a:extLst>
+        </p:spPr>
+      </p:pic>
+      <p:pic>
+        <p:nvPicPr>
+          <p:cNvPr id="7" name="그림 6">
+            <a:extLst>
+              <a:ext uri="{FF2B5EF4-FFF2-40B4-BE49-F238E27FC236}">
+                <a16:creationId xmlns:a16="http://schemas.microsoft.com/office/drawing/2014/main" id="{72AC1AD2-1BC1-31FE-1CB4-3295AFE66DA2}"/>
+              </a:ext>
+            </a:extLst>
+          </p:cNvPr>
+          <p:cNvPicPr>
+            <a:picLocks noChangeAspect="1"/>
+          </p:cNvPicPr>
+          <p:nvPr/>
+        </p:nvPicPr>
+        <p:blipFill>
+          <a:blip r:embed="rId3"/>
+          <a:stretch>
+            <a:fillRect/>
+          </a:stretch>
+        </p:blipFill>
+        <p:spPr>
+          <a:xfrm>
+            <a:off x="6673382" y="4707470"/>
+            <a:ext cx="4036360" cy="1455736"/>
+          </a:xfrm>
+          <a:prstGeom prst="rect">
+            <a:avLst/>
+          </a:prstGeom>
+        </p:spPr>
+      </p:pic>
+    </p:spTree>
+  </p:cSld>
+  <p:clrMapOvr>
+    <a:masterClrMapping/>
+  </p:clrMapOvr>
+</p:sld>
+</file>
+
+<file path=ppt/slides/slide7.xml><?xml version="1.0" encoding="utf-8"?>
+<p:sld xmlns:a="http://schemas.openxmlformats.org/drawingml/2006/main" xmlns:r="http://schemas.openxmlformats.org/officeDocument/2006/relationships" xmlns:p="http://schemas.openxmlformats.org/presentationml/2006/main">
+  <p:cSld>
+    <p:spTree>
+      <p:nvGrpSpPr>
+        <p:cNvPr id="1" name=""/>
+        <p:cNvGrpSpPr/>
+        <p:nvPr/>
+      </p:nvGrpSpPr>
+      <p:grpSpPr>
+        <a:xfrm>
+          <a:off x="0" y="0"/>
+          <a:ext cx="0" cy="0"/>
+          <a:chOff x="0" y="0"/>
+          <a:chExt cx="0" cy="0"/>
+        </a:xfrm>
+      </p:grpSpPr>
+      <p:sp>
+        <p:nvSpPr>
+          <p:cNvPr id="2" name="Title 1"/>
+          <p:cNvSpPr>
+            <a:spLocks noGrp="1"/>
+          </p:cNvSpPr>
+          <p:nvPr>
+            <p:ph type="ctrTitle"/>
+          </p:nvPr>
+        </p:nvSpPr>
+        <p:spPr/>
+        <p:txBody>
+          <a:bodyPr/>
+          <a:lstStyle/>
+          <a:p>
+            <a:r>
+              <a:rPr dirty="0"/>
+              <a:t>Introduction to Hash-Based Signatures</a:t>
+            </a:r>
+          </a:p>
+        </p:txBody>
+      </p:sp>
+      <p:sp>
+        <p:nvSpPr>
+          <p:cNvPr id="4" name="슬라이드 번호 개체 틀"/>
+          <p:cNvSpPr>
+            <a:spLocks noGrp="1"/>
+          </p:cNvSpPr>
+          <p:nvPr>
+            <p:ph type="sldNum" sz="quarter" idx="12"/>
+          </p:nvPr>
+        </p:nvSpPr>
+        <p:spPr/>
+        <p:txBody>
+          <a:bodyPr/>
+          <a:lstStyle/>
+          <a:p>
+            <a:fld id="{4438A2D4-3867-488E-A04E-7BFFCAED45A6}" type="slidenum">
+              <a:rPr lang="ko-KR" altLang="en-US" smtClean="0"/>
+              <a:t>7</a:t>
+            </a:fld>
+            <a:endParaRPr lang="ko-KR" altLang="en-US" dirty="0"/>
+          </a:p>
+        </p:txBody>
+      </p:sp>
+    </p:spTree>
+  </p:cSld>
+  <p:clrMapOvr>
+    <a:masterClrMapping/>
+  </p:clrMapOvr>
+</p:sld>
+</file>
+
+<file path=ppt/slides/slide8.xml><?xml version="1.0" encoding="utf-8"?>
+<p:sld xmlns:a="http://schemas.openxmlformats.org/drawingml/2006/main" xmlns:r="http://schemas.openxmlformats.org/officeDocument/2006/relationships" xmlns:p="http://schemas.openxmlformats.org/presentationml/2006/main">
+  <p:cSld>
+    <p:spTree>
+      <p:nvGrpSpPr>
+        <p:cNvPr id="1" name=""/>
+        <p:cNvGrpSpPr/>
+        <p:nvPr/>
+      </p:nvGrpSpPr>
+      <p:grpSpPr>
+        <a:xfrm>
+          <a:off x="0" y="0"/>
+          <a:ext cx="0" cy="0"/>
+          <a:chOff x="0" y="0"/>
+          <a:chExt cx="0" cy="0"/>
+        </a:xfrm>
+      </p:grpSpPr>
+      <p:sp>
+        <p:nvSpPr>
+          <p:cNvPr id="2" name="Title 1"/>
+          <p:cNvSpPr>
+            <a:spLocks noGrp="1"/>
+          </p:cNvSpPr>
+          <p:nvPr>
+            <p:ph type="title"/>
+          </p:nvPr>
+        </p:nvSpPr>
+        <p:spPr/>
+        <p:txBody>
+          <a:bodyPr/>
+          <a:lstStyle/>
+          <a:p>
+            <a:r>
+              <a:rPr dirty="0"/>
+              <a:t>서명의 목적: 인증</a:t>
+            </a:r>
+          </a:p>
+        </p:txBody>
+      </p:sp>
+      <p:sp>
+        <p:nvSpPr>
+          <p:cNvPr id="3" name="Content Placeholder 2"/>
+          <p:cNvSpPr>
+            <a:spLocks noGrp="1"/>
+          </p:cNvSpPr>
+          <p:nvPr>
+            <p:ph idx="1"/>
+          </p:nvPr>
+        </p:nvSpPr>
+        <p:spPr/>
+        <p:txBody>
+          <a:bodyPr/>
+          <a:lstStyle/>
+          <a:p>
+            <a:r>
+              <a:rPr sz="1800" dirty="0"/>
+              <a:t>서명 스킴은 인증(authentication)을 위해 쓰인다</a:t>
+            </a:r>
+          </a:p>
+          <a:p>
+            <a:r>
+              <a:rPr sz="1800" dirty="0"/>
+              <a:t>데이터 무결성: 허가되지 않은 메시지 변조를 탐지한다</a:t>
+            </a:r>
+          </a:p>
+          <a:p>
+            <a:r>
+              <a:rPr sz="1800" dirty="0"/>
+              <a:t>데이터 출처 인증: 메시지를 보낸 주체의 신원을 검증한다</a:t>
+            </a:r>
+          </a:p>
+        </p:txBody>
+      </p:sp>
+      <p:sp>
+        <p:nvSpPr>
+          <p:cNvPr id="4" name="슬라이드 번호 개체 틀"/>
+          <p:cNvSpPr>
+            <a:spLocks noGrp="1"/>
+          </p:cNvSpPr>
+          <p:nvPr>
+            <p:ph type="sldNum" sz="quarter" idx="12"/>
+          </p:nvPr>
+        </p:nvSpPr>
+        <p:spPr/>
+        <p:txBody>
+          <a:bodyPr/>
+          <a:lstStyle/>
+          <a:p>
+            <a:fld id="{4438A2D4-3867-488E-A04E-7BFFCAED45A6}" type="slidenum">
+              <a:rPr lang="ko-KR" altLang="en-US" smtClean="0"/>
+              <a:t>8</a:t>
+            </a:fld>
+            <a:endParaRPr lang="ko-KR" altLang="en-US" dirty="0"/>
+          </a:p>
+        </p:txBody>
+      </p:sp>
+    </p:spTree>
+  </p:cSld>
+  <p:clrMapOvr>
+    <a:masterClrMapping/>
+  </p:clrMapOvr>
+</p:sld>
+</file>
+
+<file path=ppt/slides/slide9.xml><?xml version="1.0" encoding="utf-8"?>
+<p:sld xmlns:a="http://schemas.openxmlformats.org/drawingml/2006/main" xmlns:r="http://schemas.openxmlformats.org/officeDocument/2006/relationships" xmlns:p="http://schemas.openxmlformats.org/presentationml/2006/main">
+  <p:cSld>
+    <p:spTree>
+      <p:nvGrpSpPr>
+        <p:cNvPr id="1" name=""/>
+        <p:cNvGrpSpPr/>
+        <p:nvPr/>
+      </p:nvGrpSpPr>
+      <p:grpSpPr>
+        <a:xfrm>
+          <a:off x="0" y="0"/>
+          <a:ext cx="0" cy="0"/>
+          <a:chOff x="0" y="0"/>
+          <a:chExt cx="0" cy="0"/>
+        </a:xfrm>
+      </p:grpSpPr>
+      <p:sp>
+        <p:nvSpPr>
+          <p:cNvPr id="2" name="Title 1"/>
+          <p:cNvSpPr>
+            <a:spLocks noGrp="1"/>
+          </p:cNvSpPr>
+          <p:nvPr>
+            <p:ph type="title"/>
+          </p:nvPr>
+        </p:nvSpPr>
+        <p:spPr/>
+        <p:txBody>
+          <a:bodyPr/>
+          <a:lstStyle/>
+          <a:p>
+            <a:r>
+              <a:rPr dirty="0"/>
+              <a:t>서명 스킴의 세 알고리즘</a:t>
+            </a:r>
+          </a:p>
+        </p:txBody>
+      </p:sp>
+      <p:sp>
+        <p:nvSpPr>
+          <p:cNvPr id="3" name="Content Placeholder 2"/>
+          <p:cNvSpPr>
+            <a:spLocks noGrp="1"/>
+          </p:cNvSpPr>
+          <p:nvPr>
+            <p:ph idx="1"/>
+          </p:nvPr>
+        </p:nvSpPr>
+        <p:spPr/>
+        <p:txBody>
+          <a:bodyPr/>
+          <a:lstStyle/>
+          <a:p>
+            <a:r>
+              <a:rPr sz="1800" dirty="0"/>
+              <a:t>서명 스킴은 세 개의 알고리즘으로 구성된다</a:t>
+            </a:r>
+          </a:p>
+          <a:p>
+            <a:r>
+              <a:rPr sz="1800" dirty="0"/>
+              <a:t>검증은 검증자가 Alice의 진짜 공개키를 가진다고 전제한다 (공개키 진위는 PKI의 몫)</a:t>
+            </a:r>
+          </a:p>
+        </p:txBody>
+      </p:sp>
+      <p:sp>
+        <p:nvSpPr>
+          <p:cNvPr id="4" name="슬라이드 번호 개체 틀"/>
+          <p:cNvSpPr>
+            <a:spLocks noGrp="1"/>
+          </p:cNvSpPr>
+          <p:nvPr>
+            <p:ph type="sldNum" sz="quarter" idx="12"/>
+          </p:nvPr>
+        </p:nvSpPr>
+        <p:spPr/>
+        <p:txBody>
+          <a:bodyPr/>
+          <a:lstStyle/>
+          <a:p>
+            <a:fld id="{4438A2D4-3867-488E-A04E-7BFFCAED45A6}" type="slidenum">
+              <a:rPr lang="ko-KR" altLang="en-US" smtClean="0"/>
+              <a:t>9</a:t>
+            </a:fld>
+            <a:endParaRPr lang="ko-KR" altLang="en-US" dirty="0"/>
+          </a:p>
+        </p:txBody>
+      </p:sp>
+      <p:graphicFrame>
+        <p:nvGraphicFramePr>
+          <p:cNvPr id="5" name="Table 4"/>
+          <p:cNvGraphicFramePr>
+            <a:graphicFrameLocks noGrp="1"/>
+          </p:cNvGraphicFramePr>
+          <p:nvPr>
+            <p:extLst>
+              <p:ext uri="{D42A27DB-BD31-4B8C-83A1-F6EECF244321}">
+                <p14:modId xmlns:p14="http://schemas.microsoft.com/office/powerpoint/2010/main" val="2348586584"/>
+              </p:ext>
+            </p:extLst>
+          </p:nvPr>
+        </p:nvGraphicFramePr>
+        <p:xfrm>
+          <a:off x="838200" y="2685746"/>
+          <a:ext cx="10515600" cy="1920240"/>
+        </p:xfrm>
+        <a:graphic>
+          <a:graphicData uri="http://schemas.openxmlformats.org/drawingml/2006/table">
+            <a:tbl>
+              <a:tblPr firstRow="1" bandRow="1">
+                <a:tableStyleId>{5C22544A-7EE6-4342-B048-85BDC9FD1C3A}</a:tableStyleId>
+              </a:tblPr>
+              <a:tblGrid>
+                <a:gridCol w="2377440">
+                  <a:extLst>
+                    <a:ext uri="{9D8B030D-6E8A-4147-A177-3AD203B41FA5}">
+                      <a16:colId xmlns:a16="http://schemas.microsoft.com/office/drawing/2014/main" val="20000"/>
+                    </a:ext>
+                  </a:extLst>
+                </a:gridCol>
+                <a:gridCol w="3108960">
+                  <a:extLst>
+                    <a:ext uri="{9D8B030D-6E8A-4147-A177-3AD203B41FA5}">
+                      <a16:colId xmlns:a16="http://schemas.microsoft.com/office/drawing/2014/main" val="20001"/>
+                    </a:ext>
+                  </a:extLst>
+                </a:gridCol>
+                <a:gridCol w="5029200">
+                  <a:extLst>
+                    <a:ext uri="{9D8B030D-6E8A-4147-A177-3AD203B41FA5}">
+                      <a16:colId xmlns:a16="http://schemas.microsoft.com/office/drawing/2014/main" val="20002"/>
+                    </a:ext>
+                  </a:extLst>
+                </a:gridCol>
+              </a:tblGrid>
+              <a:tr h="480060">
+                <a:tc>
+                  <a:txBody>
+                    <a:bodyPr/>
+                    <a:lstStyle/>
+                    <a:p>
+                      <a:pPr algn="ctr"/>
+                      <a:r>
+                        <a:rPr sz="1800" b="1" dirty="0">
+                          <a:solidFill>
+                            <a:schemeClr val="bg1"/>
+                          </a:solidFill>
+                        </a:rPr>
+                        <a:t>알고리즘</a:t>
+                      </a:r>
+                    </a:p>
+                  </a:txBody>
+                  <a:tcPr anchor="ctr">
+                    <a:lnL w="12700" cap="flat" cmpd="sng" algn="ctr">
+                      <a:solidFill>
+                        <a:schemeClr val="tx1"/>
+                      </a:solidFill>
+                      <a:prstDash val="solid"/>
+                      <a:round/>
+                      <a:headEnd type="none" w="med" len="med"/>
+                      <a:tailEnd type="none" w="med" len="med"/>
+                    </a:lnL>
+                    <a:lnR w="12700" cap="flat" cmpd="sng" algn="ctr">
+                      <a:solidFill>
+                        <a:schemeClr val="tx1"/>
+                      </a:solidFill>
+                      <a:prstDash val="solid"/>
+                      <a:round/>
+                      <a:headEnd type="none" w="med" len="med"/>
+                      <a:tailEnd type="none" w="med" len="med"/>
+                    </a:lnR>
+                    <a:lnT w="12700" cap="flat" cmpd="sng" algn="ctr">
+                      <a:solidFill>
+                        <a:schemeClr val="tx1"/>
+                      </a:solidFill>
+                      <a:prstDash val="solid"/>
+                      <a:round/>
+                      <a:headEnd type="none" w="med" len="med"/>
+                      <a:tailEnd type="none" w="med" len="med"/>
+                    </a:lnT>
+                    <a:lnB w="12700" cap="flat" cmpd="sng" algn="ctr">
+                      <a:solidFill>
+                        <a:schemeClr val="tx1"/>
+                      </a:solidFill>
+                      <a:prstDash val="solid"/>
+                      <a:round/>
+                      <a:headEnd type="none" w="med" len="med"/>
+                      <a:tailEnd type="none" w="med" len="med"/>
+                    </a:lnB>
+                    <a:solidFill>
+                      <a:schemeClr val="accent2"/>
+                    </a:solidFill>
+                  </a:tcPr>
+                </a:tc>
+                <a:tc>
+                  <a:txBody>
+                    <a:bodyPr/>
+                    <a:lstStyle/>
+                    <a:p>
+                      <a:pPr algn="ctr"/>
+                      <a:r>
+                        <a:rPr sz="1800" b="1" dirty="0">
+                          <a:solidFill>
+                            <a:schemeClr val="bg1"/>
+                          </a:solidFill>
+                        </a:rPr>
+                        <a:t>사용하는 키</a:t>
+                      </a:r>
+                    </a:p>
+                  </a:txBody>
+                  <a:tcPr anchor="ctr">
+                    <a:lnL w="12700" cap="flat" cmpd="sng" algn="ctr">
+                      <a:solidFill>
+                        <a:schemeClr val="tx1"/>
+                      </a:solidFill>
+                      <a:prstDash val="solid"/>
+                      <a:round/>
+                      <a:headEnd type="none" w="med" len="med"/>
+                      <a:tailEnd type="none" w="med" len="med"/>
+                    </a:lnL>
+                    <a:lnR w="12700" cap="flat" cmpd="sng" algn="ctr">
+                      <a:solidFill>
+                        <a:schemeClr val="tx1"/>
+                      </a:solidFill>
+                      <a:prstDash val="solid"/>
+                      <a:round/>
+                      <a:headEnd type="none" w="med" len="med"/>
+                      <a:tailEnd type="none" w="med" len="med"/>
+                    </a:lnR>
+                    <a:lnT w="12700" cap="flat" cmpd="sng" algn="ctr">
+                      <a:solidFill>
+                        <a:schemeClr val="tx1"/>
+                      </a:solidFill>
+                      <a:prstDash val="solid"/>
+                      <a:round/>
+                      <a:headEnd type="none" w="med" len="med"/>
+                      <a:tailEnd type="none" w="med" len="med"/>
+                    </a:lnT>
+                    <a:lnB w="12700" cap="flat" cmpd="sng" algn="ctr">
+                      <a:solidFill>
+                        <a:schemeClr val="tx1"/>
+                      </a:solidFill>
+                      <a:prstDash val="solid"/>
+                      <a:round/>
+                      <a:headEnd type="none" w="med" len="med"/>
+                      <a:tailEnd type="none" w="med" len="med"/>
+                    </a:lnB>
+                    <a:solidFill>
+                      <a:schemeClr val="accent2"/>
+                    </a:solidFill>
+                  </a:tcPr>
+                </a:tc>
+                <a:tc>
+                  <a:txBody>
+                    <a:bodyPr/>
+                    <a:lstStyle/>
+                    <a:p>
+                      <a:pPr algn="ctr"/>
+                      <a:r>
+                        <a:rPr sz="1800" b="1" dirty="0">
+                          <a:solidFill>
+                            <a:schemeClr val="bg1"/>
+                          </a:solidFill>
+                        </a:rPr>
+                        <a:t>하는 일</a:t>
+                      </a:r>
+                    </a:p>
+                  </a:txBody>
+                  <a:tcPr anchor="ctr">
+                    <a:lnL w="12700" cap="flat" cmpd="sng" algn="ctr">
+                      <a:solidFill>
+                        <a:schemeClr val="tx1"/>
+                      </a:solidFill>
+                      <a:prstDash val="solid"/>
+                      <a:round/>
+                      <a:headEnd type="none" w="med" len="med"/>
+                      <a:tailEnd type="none" w="med" len="med"/>
+                    </a:lnL>
+                    <a:lnR w="12700" cap="flat" cmpd="sng" algn="ctr">
+                      <a:solidFill>
+                        <a:schemeClr val="tx1"/>
+                      </a:solidFill>
+                      <a:prstDash val="solid"/>
+                      <a:round/>
+                      <a:headEnd type="none" w="med" len="med"/>
+                      <a:tailEnd type="none" w="med" len="med"/>
+                    </a:lnR>
+                    <a:lnT w="12700" cap="flat" cmpd="sng" algn="ctr">
+                      <a:solidFill>
+                        <a:schemeClr val="tx1"/>
+                      </a:solidFill>
+                      <a:prstDash val="solid"/>
+                      <a:round/>
+                      <a:headEnd type="none" w="med" len="med"/>
+                      <a:tailEnd type="none" w="med" len="med"/>
+                    </a:lnT>
+                    <a:lnB w="12700" cap="flat" cmpd="sng" algn="ctr">
+                      <a:solidFill>
+                        <a:schemeClr val="tx1"/>
+                      </a:solidFill>
+                      <a:prstDash val="solid"/>
+                      <a:round/>
+                      <a:headEnd type="none" w="med" len="med"/>
+                      <a:tailEnd type="none" w="med" len="med"/>
+                    </a:lnB>
+                    <a:solidFill>
+                      <a:schemeClr val="accent2"/>
+                    </a:solidFill>
+                  </a:tcPr>
+                </a:tc>
+                <a:extLst>
+                  <a:ext uri="{0D108BD9-81ED-4DB2-BD59-A6C34878D82A}">
+                    <a16:rowId xmlns:a16="http://schemas.microsoft.com/office/drawing/2014/main" val="10000"/>
+                  </a:ext>
+                </a:extLst>
+              </a:tr>
+              <a:tr h="480060">
+                <a:tc>
+                  <a:txBody>
+                    <a:bodyPr/>
+                    <a:lstStyle/>
+                    <a:p>
+                      <a:pPr algn="ctr"/>
+                      <a:r>
+                        <a:rPr sz="1800" dirty="0"/>
+                        <a:t>키 생성</a:t>
+                      </a:r>
+                    </a:p>
+                  </a:txBody>
+                  <a:tcPr anchor="ctr">
+                    <a:lnL w="12700" cap="flat" cmpd="sng" algn="ctr">
+                      <a:solidFill>
+                        <a:schemeClr val="tx1"/>
+                      </a:solidFill>
+                      <a:prstDash val="solid"/>
+                      <a:round/>
+                      <a:headEnd type="none" w="med" len="med"/>
+                      <a:tailEnd type="none" w="med" len="med"/>
+                    </a:lnL>
+                    <a:lnR w="12700" cap="flat" cmpd="sng" algn="ctr">
+                      <a:solidFill>
+                        <a:schemeClr val="tx1"/>
+                      </a:solidFill>
+                      <a:prstDash val="solid"/>
+                      <a:round/>
+                      <a:headEnd type="none" w="med" len="med"/>
+                      <a:tailEnd type="none" w="med" len="med"/>
+                    </a:lnR>
+                    <a:lnT w="12700" cap="flat" cmpd="sng" algn="ctr">
+                      <a:solidFill>
+                        <a:schemeClr val="tx1"/>
+                      </a:solidFill>
+                      <a:prstDash val="solid"/>
+                      <a:round/>
+                      <a:headEnd type="none" w="med" len="med"/>
+                      <a:tailEnd type="none" w="med" len="med"/>
+                    </a:lnT>
+                    <a:lnB w="12700" cap="flat" cmpd="sng" algn="ctr">
+                      <a:solidFill>
+                        <a:schemeClr val="tx1"/>
+                      </a:solidFill>
+                      <a:prstDash val="solid"/>
+                      <a:round/>
+                      <a:headEnd type="none" w="med" len="med"/>
+                      <a:tailEnd type="none" w="med" len="med"/>
+                    </a:lnB>
+                    <a:noFill/>
+                  </a:tcPr>
+                </a:tc>
+                <a:tc>
+                  <a:txBody>
+                    <a:bodyPr/>
+                    <a:lstStyle/>
+                    <a:p>
+                      <a:pPr algn="ctr"/>
+                      <a:r>
+                        <a:rPr sz="1800" dirty="0"/>
+                        <a:t>—</a:t>
+                      </a:r>
+                    </a:p>
+                  </a:txBody>
+                  <a:tcPr anchor="ctr">
+                    <a:lnL w="12700" cap="flat" cmpd="sng" algn="ctr">
+                      <a:solidFill>
+                        <a:schemeClr val="tx1"/>
+                      </a:solidFill>
+                      <a:prstDash val="solid"/>
+                      <a:round/>
+                      <a:headEnd type="none" w="med" len="med"/>
+                      <a:tailEnd type="none" w="med" len="med"/>
+                    </a:lnL>
+                    <a:lnR w="12700" cap="flat" cmpd="sng" algn="ctr">
+                      <a:solidFill>
+                        <a:schemeClr val="tx1"/>
+                      </a:solidFill>
+                      <a:prstDash val="solid"/>
+                      <a:round/>
+                      <a:headEnd type="none" w="med" len="med"/>
+                      <a:tailEnd type="none" w="med" len="med"/>
+                    </a:lnR>
+                    <a:lnT w="12700" cap="flat" cmpd="sng" algn="ctr">
+                      <a:solidFill>
+                        <a:schemeClr val="tx1"/>
+                      </a:solidFill>
+                      <a:prstDash val="solid"/>
+                      <a:round/>
+                      <a:headEnd type="none" w="med" len="med"/>
+                      <a:tailEnd type="none" w="med" len="med"/>
+                    </a:lnT>
+                    <a:lnB w="12700" cap="flat" cmpd="sng" algn="ctr">
+                      <a:solidFill>
+                        <a:schemeClr val="tx1"/>
+                      </a:solidFill>
+                      <a:prstDash val="solid"/>
+                      <a:round/>
+                      <a:headEnd type="none" w="med" len="med"/>
+                      <a:tailEnd type="none" w="med" len="med"/>
+                    </a:lnB>
+                    <a:noFill/>
+                  </a:tcPr>
+                </a:tc>
+                <a:tc>
+                  <a:txBody>
+                    <a:bodyPr/>
+                    <a:lstStyle/>
+                    <a:p>
+                      <a:pPr algn="ctr"/>
+                      <a:r>
+                        <a:rPr sz="1800" dirty="0"/>
+                        <a:t>공개키·개인키 쌍을 만든다</a:t>
+                      </a:r>
+                    </a:p>
+                  </a:txBody>
+                  <a:tcPr anchor="ctr">
+                    <a:lnL w="12700" cap="flat" cmpd="sng" algn="ctr">
+                      <a:solidFill>
+                        <a:schemeClr val="tx1"/>
+                      </a:solidFill>
+                      <a:prstDash val="solid"/>
+                      <a:round/>
+                      <a:headEnd type="none" w="med" len="med"/>
+                      <a:tailEnd type="none" w="med" len="med"/>
+                    </a:lnL>
+                    <a:lnR w="12700" cap="flat" cmpd="sng" algn="ctr">
+                      <a:solidFill>
+                        <a:schemeClr val="tx1"/>
+                      </a:solidFill>
+                      <a:prstDash val="solid"/>
+                      <a:round/>
+                      <a:headEnd type="none" w="med" len="med"/>
+                      <a:tailEnd type="none" w="med" len="med"/>
+                    </a:lnR>
+                    <a:lnT w="12700" cap="flat" cmpd="sng" algn="ctr">
+                      <a:solidFill>
+                        <a:schemeClr val="tx1"/>
+                      </a:solidFill>
+                      <a:prstDash val="solid"/>
+                      <a:round/>
+                      <a:headEnd type="none" w="med" len="med"/>
+                      <a:tailEnd type="none" w="med" len="med"/>
+                    </a:lnT>
+                    <a:lnB w="12700" cap="flat" cmpd="sng" algn="ctr">
+                      <a:solidFill>
+                        <a:schemeClr val="tx1"/>
+                      </a:solidFill>
+                      <a:prstDash val="solid"/>
+                      <a:round/>
+                      <a:headEnd type="none" w="med" len="med"/>
+                      <a:tailEnd type="none" w="med" len="med"/>
+                    </a:lnB>
+                    <a:noFill/>
+                  </a:tcPr>
+                </a:tc>
+                <a:extLst>
+                  <a:ext uri="{0D108BD9-81ED-4DB2-BD59-A6C34878D82A}">
+                    <a16:rowId xmlns:a16="http://schemas.microsoft.com/office/drawing/2014/main" val="10001"/>
+                  </a:ext>
+                </a:extLst>
+              </a:tr>
+              <a:tr h="480060">
+                <a:tc>
+                  <a:txBody>
+                    <a:bodyPr/>
+                    <a:lstStyle/>
+                    <a:p>
+                      <a:pPr algn="ctr"/>
+                      <a:r>
+                        <a:rPr sz="1800" dirty="0"/>
+                        <a:t>서명 생성</a:t>
+                      </a:r>
+                    </a:p>
+                  </a:txBody>
+                  <a:tcPr anchor="ctr">
+                    <a:lnL w="12700" cap="flat" cmpd="sng" algn="ctr">
+                      <a:solidFill>
+                        <a:schemeClr val="tx1"/>
+                      </a:solidFill>
+                      <a:prstDash val="solid"/>
+                      <a:round/>
+                      <a:headEnd type="none" w="med" len="med"/>
+                      <a:tailEnd type="none" w="med" len="med"/>
+                    </a:lnL>
+                    <a:lnR w="12700" cap="flat" cmpd="sng" algn="ctr">
+                      <a:solidFill>
+                        <a:schemeClr val="tx1"/>
+                      </a:solidFill>
+                      <a:prstDash val="solid"/>
+                      <a:round/>
+                      <a:headEnd type="none" w="med" len="med"/>
+                      <a:tailEnd type="none" w="med" len="med"/>
+                    </a:lnR>
+                    <a:lnT w="12700" cap="flat" cmpd="sng" algn="ctr">
+                      <a:solidFill>
+                        <a:schemeClr val="tx1"/>
+                      </a:solidFill>
+                      <a:prstDash val="solid"/>
+                      <a:round/>
+                      <a:headEnd type="none" w="med" len="med"/>
+                      <a:tailEnd type="none" w="med" len="med"/>
+                    </a:lnT>
+                    <a:lnB w="12700" cap="flat" cmpd="sng" algn="ctr">
+                      <a:solidFill>
+                        <a:schemeClr val="tx1"/>
+                      </a:solidFill>
+                      <a:prstDash val="solid"/>
+                      <a:round/>
+                      <a:headEnd type="none" w="med" len="med"/>
+                      <a:tailEnd type="none" w="med" len="med"/>
+                    </a:lnB>
+                    <a:noFill/>
+                  </a:tcPr>
+                </a:tc>
+                <a:tc>
+                  <a:txBody>
+                    <a:bodyPr/>
+                    <a:lstStyle/>
+                    <a:p>
+                      <a:pPr algn="ctr"/>
+                      <a:r>
+                        <a:rPr sz="1800" dirty="0"/>
+                        <a:t>개인키 (서명 키)</a:t>
+                      </a:r>
+                    </a:p>
+                  </a:txBody>
+                  <a:tcPr anchor="ctr">
+                    <a:lnL w="12700" cap="flat" cmpd="sng" algn="ctr">
+                      <a:solidFill>
+                        <a:schemeClr val="tx1"/>
+                      </a:solidFill>
+                      <a:prstDash val="solid"/>
+                      <a:round/>
+                      <a:headEnd type="none" w="med" len="med"/>
+                      <a:tailEnd type="none" w="med" len="med"/>
+                    </a:lnL>
+                    <a:lnR w="12700" cap="flat" cmpd="sng" algn="ctr">
+                      <a:solidFill>
+                        <a:schemeClr val="tx1"/>
+                      </a:solidFill>
+                      <a:prstDash val="solid"/>
+                      <a:round/>
+                      <a:headEnd type="none" w="med" len="med"/>
+                      <a:tailEnd type="none" w="med" len="med"/>
+                    </a:lnR>
+                    <a:lnT w="12700" cap="flat" cmpd="sng" algn="ctr">
+                      <a:solidFill>
+                        <a:schemeClr val="tx1"/>
+                      </a:solidFill>
+                      <a:prstDash val="solid"/>
+                      <a:round/>
+                      <a:headEnd type="none" w="med" len="med"/>
+                      <a:tailEnd type="none" w="med" len="med"/>
+                    </a:lnT>
+                    <a:lnB w="12700" cap="flat" cmpd="sng" algn="ctr">
+                      <a:solidFill>
+                        <a:schemeClr val="tx1"/>
+                      </a:solidFill>
+                      <a:prstDash val="solid"/>
+                      <a:round/>
+                      <a:headEnd type="none" w="med" len="med"/>
+                      <a:tailEnd type="none" w="med" len="med"/>
+                    </a:lnB>
+                    <a:noFill/>
+                  </a:tcPr>
+                </a:tc>
+                <a:tc>
+                  <a:txBody>
+                    <a:bodyPr/>
+                    <a:lstStyle/>
+                    <a:p>
+                      <a:pPr algn="ctr"/>
+                      <a:r>
+                        <a:rPr sz="1800" dirty="0"/>
+                        <a:t>메시지에 대한 서명을 만든다</a:t>
+                      </a:r>
+                    </a:p>
+                  </a:txBody>
+                  <a:tcPr anchor="ctr">
+                    <a:lnL w="12700" cap="flat" cmpd="sng" algn="ctr">
+                      <a:solidFill>
+                        <a:schemeClr val="tx1"/>
+                      </a:solidFill>
+                      <a:prstDash val="solid"/>
+                      <a:round/>
+                      <a:headEnd type="none" w="med" len="med"/>
+                      <a:tailEnd type="none" w="med" len="med"/>
+                    </a:lnL>
+                    <a:lnR w="12700" cap="flat" cmpd="sng" algn="ctr">
+                      <a:solidFill>
+                        <a:schemeClr val="tx1"/>
+                      </a:solidFill>
+                      <a:prstDash val="solid"/>
+                      <a:round/>
+                      <a:headEnd type="none" w="med" len="med"/>
+                      <a:tailEnd type="none" w="med" len="med"/>
+                    </a:lnR>
+                    <a:lnT w="12700" cap="flat" cmpd="sng" algn="ctr">
+                      <a:solidFill>
+                        <a:schemeClr val="tx1"/>
+                      </a:solidFill>
+                      <a:prstDash val="solid"/>
+                      <a:round/>
+                      <a:headEnd type="none" w="med" len="med"/>
+                      <a:tailEnd type="none" w="med" len="med"/>
+                    </a:lnT>
+                    <a:lnB w="12700" cap="flat" cmpd="sng" algn="ctr">
+                      <a:solidFill>
+                        <a:schemeClr val="tx1"/>
+                      </a:solidFill>
+                      <a:prstDash val="solid"/>
+                      <a:round/>
+                      <a:headEnd type="none" w="med" len="med"/>
+                      <a:tailEnd type="none" w="med" len="med"/>
+                    </a:lnB>
+                    <a:noFill/>
+                  </a:tcPr>
+                </a:tc>
+                <a:extLst>
+                  <a:ext uri="{0D108BD9-81ED-4DB2-BD59-A6C34878D82A}">
+                    <a16:rowId xmlns:a16="http://schemas.microsoft.com/office/drawing/2014/main" val="10002"/>
+                  </a:ext>
+                </a:extLst>
+              </a:tr>
+              <a:tr h="480060">
+                <a:tc>
+                  <a:txBody>
+                    <a:bodyPr/>
+                    <a:lstStyle/>
+                    <a:p>
+                      <a:pPr algn="ctr"/>
+                      <a:r>
+                        <a:rPr sz="1800" dirty="0"/>
+                        <a:t>서명 검증</a:t>
+                      </a:r>
+                    </a:p>
+                  </a:txBody>
+                  <a:tcPr anchor="ctr">
+                    <a:lnL w="12700" cap="flat" cmpd="sng" algn="ctr">
+                      <a:solidFill>
+                        <a:schemeClr val="tx1"/>
+                      </a:solidFill>
+                      <a:prstDash val="solid"/>
+                      <a:round/>
+                      <a:headEnd type="none" w="med" len="med"/>
+                      <a:tailEnd type="none" w="med" len="med"/>
+                    </a:lnL>
+                    <a:lnR w="12700" cap="flat" cmpd="sng" algn="ctr">
+                      <a:solidFill>
+                        <a:schemeClr val="tx1"/>
+                      </a:solidFill>
+                      <a:prstDash val="solid"/>
+                      <a:round/>
+                      <a:headEnd type="none" w="med" len="med"/>
+                      <a:tailEnd type="none" w="med" len="med"/>
+                    </a:lnR>
+                    <a:lnT w="12700" cap="flat" cmpd="sng" algn="ctr">
+                      <a:solidFill>
+                        <a:schemeClr val="tx1"/>
+                      </a:solidFill>
+                      <a:prstDash val="solid"/>
+                      <a:round/>
+                      <a:headEnd type="none" w="med" len="med"/>
+                      <a:tailEnd type="none" w="med" len="med"/>
+                    </a:lnT>
+                    <a:lnB w="12700" cap="flat" cmpd="sng" algn="ctr">
+                      <a:solidFill>
+                        <a:schemeClr val="tx1"/>
+                      </a:solidFill>
+                      <a:prstDash val="solid"/>
+                      <a:round/>
+                      <a:headEnd type="none" w="med" len="med"/>
+                      <a:tailEnd type="none" w="med" len="med"/>
+                    </a:lnB>
+                    <a:noFill/>
+                  </a:tcPr>
+                </a:tc>
+                <a:tc>
+                  <a:txBody>
+                    <a:bodyPr/>
+                    <a:lstStyle/>
+                    <a:p>
+                      <a:pPr algn="ctr"/>
+                      <a:r>
+                        <a:rPr sz="1800" dirty="0"/>
+                        <a:t>공개키 (검증 키)</a:t>
+                      </a:r>
+                    </a:p>
+                  </a:txBody>
+                  <a:tcPr anchor="ctr">
+                    <a:lnL w="12700" cap="flat" cmpd="sng" algn="ctr">
+                      <a:solidFill>
+                        <a:schemeClr val="tx1"/>
+                      </a:solidFill>
+                      <a:prstDash val="solid"/>
+                      <a:round/>
+                      <a:headEnd type="none" w="med" len="med"/>
+                      <a:tailEnd type="none" w="med" len="med"/>
+                    </a:lnL>
+                    <a:lnR w="12700" cap="flat" cmpd="sng" algn="ctr">
+                      <a:solidFill>
+                        <a:schemeClr val="tx1"/>
+                      </a:solidFill>
+                      <a:prstDash val="solid"/>
+                      <a:round/>
+                      <a:headEnd type="none" w="med" len="med"/>
+                      <a:tailEnd type="none" w="med" len="med"/>
+                    </a:lnR>
+                    <a:lnT w="12700" cap="flat" cmpd="sng" algn="ctr">
+                      <a:solidFill>
+                        <a:schemeClr val="tx1"/>
+                      </a:solidFill>
+                      <a:prstDash val="solid"/>
+                      <a:round/>
+                      <a:headEnd type="none" w="med" len="med"/>
+                      <a:tailEnd type="none" w="med" len="med"/>
+                    </a:lnT>
+                    <a:lnB w="12700" cap="flat" cmpd="sng" algn="ctr">
+                      <a:solidFill>
+                        <a:schemeClr val="tx1"/>
+                      </a:solidFill>
+                      <a:prstDash val="solid"/>
+                      <a:round/>
+                      <a:headEnd type="none" w="med" len="med"/>
+                      <a:tailEnd type="none" w="med" len="med"/>
+                    </a:lnB>
+                    <a:noFill/>
+                  </a:tcPr>
+                </a:tc>
+                <a:tc>
+                  <a:txBody>
+                    <a:bodyPr/>
+                    <a:lstStyle/>
+                    <a:p>
+                      <a:pPr algn="ctr"/>
+                      <a:r>
+                        <a:rPr sz="1800" dirty="0"/>
+                        <a:t>서명된 메시지가 진짜인지 판정한다</a:t>
+                      </a:r>
+                    </a:p>
+                  </a:txBody>
+                  <a:tcPr anchor="ctr">
+                    <a:lnL w="12700" cap="flat" cmpd="sng" algn="ctr">
+                      <a:solidFill>
+                        <a:schemeClr val="tx1"/>
+                      </a:solidFill>
+                      <a:prstDash val="solid"/>
+                      <a:round/>
+                      <a:headEnd type="none" w="med" len="med"/>
+                      <a:tailEnd type="none" w="med" len="med"/>
+                    </a:lnL>
+                    <a:lnR w="12700" cap="flat" cmpd="sng" algn="ctr">
+                      <a:solidFill>
+                        <a:schemeClr val="tx1"/>
+                      </a:solidFill>
+                      <a:prstDash val="solid"/>
+                      <a:round/>
+                      <a:headEnd type="none" w="med" len="med"/>
+                      <a:tailEnd type="none" w="med" len="med"/>
+                    </a:lnR>
+                    <a:lnT w="12700" cap="flat" cmpd="sng" algn="ctr">
+                      <a:solidFill>
+                        <a:schemeClr val="tx1"/>
+                      </a:solidFill>
+                      <a:prstDash val="solid"/>
+                      <a:round/>
+                      <a:headEnd type="none" w="med" len="med"/>
+                      <a:tailEnd type="none" w="med" len="med"/>
+                    </a:lnT>
+                    <a:lnB w="12700" cap="flat" cmpd="sng" algn="ctr">
+                      <a:solidFill>
+                        <a:schemeClr val="tx1"/>
+                      </a:solidFill>
+                      <a:prstDash val="solid"/>
+                      <a:round/>
+                      <a:headEnd type="none" w="med" len="med"/>
+                      <a:tailEnd type="none" w="med" len="med"/>
+                    </a:lnB>
+                    <a:noFill/>
+                  </a:tcPr>
+                </a:tc>
+                <a:extLst>
+                  <a:ext uri="{0D108BD9-81ED-4DB2-BD59-A6C34878D82A}">
+                    <a16:rowId xmlns:a16="http://schemas.microsoft.com/office/drawing/2014/main" val="10003"/>
                   </a:ext>
                 </a:extLst>
               </a:tr>

--- a/presentation/0903_14_Introduction-to-Hash-Based-Signatures.pptx
+++ b/presentation/0903_14_Introduction-to-Hash-Based-Signatures.pptx
@@ -228,7 +228,7 @@
           <a:p>
             <a:fld id="{B52B40C2-3351-40A2-B46D-4B4F877A79B2}" type="datetimeFigureOut">
               <a:rPr lang="ko-KR" altLang="en-US" smtClean="0"/>
-              <a:t>2026-08-31</a:t>
+              <a:t>2026-09-02</a:t>
             </a:fld>
             <a:endParaRPr lang="ko-KR" altLang="en-US" dirty="0"/>
           </a:p>
@@ -495,6 +495,102 @@
 </p:notesMaster>
 </file>
 
+<file path=ppt/notesSlides/notesSlide1.xml><?xml version="1.0" encoding="utf-8"?>
+<p:notes xmlns:a="http://schemas.openxmlformats.org/drawingml/2006/main" xmlns:r="http://schemas.openxmlformats.org/officeDocument/2006/relationships" xmlns:p="http://schemas.openxmlformats.org/presentationml/2006/main">
+  <p:cSld>
+    <p:spTree>
+      <p:nvGrpSpPr>
+        <p:cNvPr id="1" name=""/>
+        <p:cNvGrpSpPr/>
+        <p:nvPr/>
+      </p:nvGrpSpPr>
+      <p:grpSpPr>
+        <a:xfrm>
+          <a:off x="0" y="0"/>
+          <a:ext cx="0" cy="0"/>
+          <a:chOff x="0" y="0"/>
+          <a:chExt cx="0" cy="0"/>
+        </a:xfrm>
+      </p:grpSpPr>
+      <p:sp>
+        <p:nvSpPr>
+          <p:cNvPr id="2" name="슬라이드 이미지 개체 틀 1"/>
+          <p:cNvSpPr>
+            <a:spLocks noGrp="1" noRot="1" noChangeAspect="1"/>
+          </p:cNvSpPr>
+          <p:nvPr>
+            <p:ph type="sldImg"/>
+          </p:nvPr>
+        </p:nvSpPr>
+        <p:spPr/>
+      </p:sp>
+      <p:sp>
+        <p:nvSpPr>
+          <p:cNvPr id="3" name="슬라이드 노트 개체 틀 2"/>
+          <p:cNvSpPr>
+            <a:spLocks noGrp="1"/>
+          </p:cNvSpPr>
+          <p:nvPr>
+            <p:ph type="body" idx="1"/>
+          </p:nvPr>
+        </p:nvSpPr>
+        <p:spPr/>
+        <p:txBody>
+          <a:bodyPr/>
+          <a:lstStyle/>
+          <a:p>
+            <a:r>
+              <a:rPr lang="en-US" altLang="ko-KR" dirty="0"/>
+              <a:t>NTT</a:t>
+            </a:r>
+            <a:r>
+              <a:rPr lang="ko-KR" altLang="en-US" dirty="0"/>
+              <a:t>가 무엇을 다루는 장치인지만</a:t>
+            </a:r>
+            <a:r>
+              <a:rPr lang="en-US" altLang="ko-KR" dirty="0"/>
+              <a:t>..</a:t>
+            </a:r>
+            <a:endParaRPr lang="ko-KR" altLang="en-US" dirty="0"/>
+          </a:p>
+        </p:txBody>
+      </p:sp>
+      <p:sp>
+        <p:nvSpPr>
+          <p:cNvPr id="4" name="슬라이드 번호 개체 틀 3"/>
+          <p:cNvSpPr>
+            <a:spLocks noGrp="1"/>
+          </p:cNvSpPr>
+          <p:nvPr>
+            <p:ph type="sldNum" sz="quarter" idx="5"/>
+          </p:nvPr>
+        </p:nvSpPr>
+        <p:spPr/>
+        <p:txBody>
+          <a:bodyPr/>
+          <a:lstStyle/>
+          <a:p>
+            <a:fld id="{513BC5EA-D886-4875-B891-B25A6CC49088}" type="slidenum">
+              <a:rPr lang="ko-KR" altLang="en-US" smtClean="0"/>
+              <a:t>3</a:t>
+            </a:fld>
+            <a:endParaRPr lang="ko-KR" altLang="en-US" dirty="0"/>
+          </a:p>
+        </p:txBody>
+      </p:sp>
+    </p:spTree>
+    <p:extLst>
+      <p:ext uri="{BB962C8B-B14F-4D97-AF65-F5344CB8AC3E}">
+        <p14:creationId xmlns:p14="http://schemas.microsoft.com/office/powerpoint/2010/main" val="2236746307"/>
+      </p:ext>
+    </p:extLst>
+  </p:cSld>
+  <p:clrMapOvr>
+    <a:masterClrMapping/>
+  </p:clrMapOvr>
+</p:notes>
+</file>
+
 <file path=ppt/slideLayouts/slideLayout1.xml><?xml version="1.0" encoding="utf-8"?>
 <p:sldLayout xmlns:a="http://schemas.openxmlformats.org/drawingml/2006/main" xmlns:r="http://schemas.openxmlformats.org/officeDocument/2006/relationships" xmlns:p="http://schemas.openxmlformats.org/presentationml/2006/main" showMasterSp="0" type="title" preserve="1">
   <p:cSld name="제목 슬라이드">
@@ -3264,7 +3360,7 @@
             <a:fld id="{2ADF637E-82D6-4563-BCF0-C9101F2B5148}" type="datetime1">
               <a:rPr lang="ko-KR" altLang="en-US" smtClean="0"/>
               <a:pPr/>
-              <a:t>2026-08-31</a:t>
+              <a:t>2026-09-02</a:t>
             </a:fld>
             <a:endParaRPr lang="ko-KR" altLang="en-US" dirty="0"/>
           </a:p>
@@ -3479,7 +3575,7 @@
           <a:p>
             <a:fld id="{C9178607-39E6-4CB2-B3CB-AB428B3B6195}" type="datetime1">
               <a:rPr lang="ko-KR" altLang="en-US" smtClean="0"/>
-              <a:t>2026-08-31</a:t>
+              <a:t>2026-09-02</a:t>
             </a:fld>
             <a:endParaRPr lang="ko-KR" altLang="en-US" dirty="0"/>
           </a:p>
@@ -3687,7 +3783,7 @@
           <a:p>
             <a:fld id="{F578A2F2-325F-46A6-8956-F2A49A35BAF8}" type="datetime1">
               <a:rPr lang="ko-KR" altLang="en-US" smtClean="0"/>
-              <a:t>2026-08-31</a:t>
+              <a:t>2026-09-02</a:t>
             </a:fld>
             <a:endParaRPr lang="ko-KR" altLang="en-US" dirty="0"/>
           </a:p>
@@ -3939,7 +4035,7 @@
             <a:fld id="{D58CD677-7AD2-4A27-94BD-C65458D22428}" type="datetime1">
               <a:rPr lang="ko-KR" altLang="en-US" smtClean="0"/>
               <a:pPr/>
-              <a:t>2026-08-31</a:t>
+              <a:t>2026-09-02</a:t>
             </a:fld>
             <a:endParaRPr lang="ko-KR" altLang="en-US" dirty="0"/>
           </a:p>
@@ -6533,7 +6629,7 @@
           <a:p>
             <a:fld id="{2BEF52EC-B397-4D0A-AE91-E0D6840C85A1}" type="datetime1">
               <a:rPr lang="ko-KR" altLang="en-US" smtClean="0"/>
-              <a:t>2026-08-31</a:t>
+              <a:t>2026-09-02</a:t>
             </a:fld>
             <a:endParaRPr lang="ko-KR" altLang="en-US" dirty="0"/>
           </a:p>
@@ -6814,7 +6910,7 @@
           <a:p>
             <a:fld id="{32DD6007-6A42-4C9B-B218-6A32B3A38C67}" type="datetime1">
               <a:rPr lang="ko-KR" altLang="en-US" smtClean="0"/>
-              <a:t>2026-08-31</a:t>
+              <a:t>2026-09-02</a:t>
             </a:fld>
             <a:endParaRPr lang="ko-KR" altLang="en-US" dirty="0"/>
           </a:p>
@@ -7226,7 +7322,7 @@
           <a:p>
             <a:fld id="{F66658DF-8B5F-4351-A42C-BF3495DE7ABE}" type="datetime1">
               <a:rPr lang="ko-KR" altLang="en-US" smtClean="0"/>
-              <a:t>2026-08-31</a:t>
+              <a:t>2026-09-02</a:t>
             </a:fld>
             <a:endParaRPr lang="ko-KR" altLang="en-US" dirty="0"/>
           </a:p>
@@ -7367,7 +7463,7 @@
           <a:p>
             <a:fld id="{74359C48-8150-4FAB-8BEF-6AD61CFC9BBE}" type="datetime1">
               <a:rPr lang="ko-KR" altLang="en-US" smtClean="0"/>
-              <a:t>2026-08-31</a:t>
+              <a:t>2026-09-02</a:t>
             </a:fld>
             <a:endParaRPr lang="ko-KR" altLang="en-US" dirty="0"/>
           </a:p>
@@ -7480,7 +7576,7 @@
           <a:p>
             <a:fld id="{2D41DBCF-1091-470D-AC72-5CF3D00280AC}" type="datetime1">
               <a:rPr lang="ko-KR" altLang="en-US" smtClean="0"/>
-              <a:t>2026-08-31</a:t>
+              <a:t>2026-09-02</a:t>
             </a:fld>
             <a:endParaRPr lang="ko-KR" altLang="en-US" dirty="0"/>
           </a:p>
@@ -7791,7 +7887,7 @@
           <a:p>
             <a:fld id="{4024AE7C-57FB-4DBB-B90C-59145D637BF6}" type="datetime1">
               <a:rPr lang="ko-KR" altLang="en-US" smtClean="0"/>
-              <a:t>2026-08-31</a:t>
+              <a:t>2026-09-02</a:t>
             </a:fld>
             <a:endParaRPr lang="ko-KR" altLang="en-US" dirty="0"/>
           </a:p>
@@ -8079,7 +8175,7 @@
           <a:p>
             <a:fld id="{17D92253-43A0-46E3-918E-3929407A8C01}" type="datetime1">
               <a:rPr lang="ko-KR" altLang="en-US" smtClean="0"/>
-              <a:t>2026-08-31</a:t>
+              <a:t>2026-09-02</a:t>
             </a:fld>
             <a:endParaRPr lang="ko-KR" altLang="en-US" dirty="0"/>
           </a:p>
@@ -9140,7 +9236,7 @@
           <a:p>
             <a:fld id="{75D61A29-800E-482A-B0FD-5A04401ECD92}" type="datetime1">
               <a:rPr lang="ko-KR" altLang="en-US" smtClean="0"/>
-              <a:t>2026-08-31</a:t>
+              <a:t>2026-09-02</a:t>
             </a:fld>
             <a:endParaRPr lang="ko-KR" altLang="en-US" dirty="0"/>
           </a:p>

--- a/presentation/0903_14_Introduction-to-Hash-Based-Signatures.pptx
+++ b/presentation/0903_14_Introduction-to-Hash-Based-Signatures.pptx
@@ -5,7 +5,7 @@
     <p:sldMasterId id="2147483648" r:id="rId1"/>
   </p:sldMasterIdLst>
   <p:notesMasterIdLst>
-    <p:notesMasterId r:id="rId19"/>
+    <p:notesMasterId r:id="rId21"/>
   </p:notesMasterIdLst>
   <p:sldIdLst>
     <p:sldId id="256" r:id="rId2"/>
@@ -13,18 +13,20 @@
     <p:sldId id="275" r:id="rId4"/>
     <p:sldId id="276" r:id="rId5"/>
     <p:sldId id="277" r:id="rId6"/>
-    <p:sldId id="278" r:id="rId7"/>
-    <p:sldId id="279" r:id="rId8"/>
-    <p:sldId id="259" r:id="rId9"/>
-    <p:sldId id="260" r:id="rId10"/>
-    <p:sldId id="262" r:id="rId11"/>
-    <p:sldId id="264" r:id="rId12"/>
-    <p:sldId id="265" r:id="rId13"/>
-    <p:sldId id="267" r:id="rId14"/>
-    <p:sldId id="268" r:id="rId15"/>
-    <p:sldId id="270" r:id="rId16"/>
-    <p:sldId id="271" r:id="rId17"/>
-    <p:sldId id="274" r:id="rId18"/>
+    <p:sldId id="280" r:id="rId7"/>
+    <p:sldId id="281" r:id="rId8"/>
+    <p:sldId id="278" r:id="rId9"/>
+    <p:sldId id="279" r:id="rId10"/>
+    <p:sldId id="259" r:id="rId11"/>
+    <p:sldId id="260" r:id="rId12"/>
+    <p:sldId id="262" r:id="rId13"/>
+    <p:sldId id="264" r:id="rId14"/>
+    <p:sldId id="265" r:id="rId15"/>
+    <p:sldId id="267" r:id="rId16"/>
+    <p:sldId id="268" r:id="rId17"/>
+    <p:sldId id="270" r:id="rId18"/>
+    <p:sldId id="271" r:id="rId19"/>
+    <p:sldId id="274" r:id="rId20"/>
   </p:sldIdLst>
   <p:sldSz cx="12192000" cy="6858000"/>
   <p:notesSz cx="6858000" cy="9144000"/>
@@ -9792,7 +9794,7 @@
           <a:p>
             <a:r>
               <a:rPr dirty="0"/>
-              <a:t>존재적 위조 불가능성 (EUF-CMA)</a:t>
+              <a:t>서명의 목적: 인증</a:t>
             </a:r>
           </a:p>
         </p:txBody>
@@ -9814,25 +9816,19 @@
           <a:p>
             <a:r>
               <a:rPr sz="1800" dirty="0"/>
-              <a:t>정의: 계산량이 제한된 공격자가 선택 메시지 공격을 하더라도 존재적으로 위조가 불가능하면 안전하다</a:t>
+              <a:t>서명 스킴은 인증(authentication)을 위해 쓰인다</a:t>
             </a:r>
           </a:p>
           <a:p>
             <a:r>
               <a:rPr sz="1800" dirty="0"/>
-              <a:t>선택 메시지 공격: 공격자가 서명 오라클에 원하는 메시지의 서명을 자유롭게 얻는다</a:t>
+              <a:t>데이터 무결성: 허가되지 않은 메시지 변조를 탐지한다</a:t>
             </a:r>
           </a:p>
           <a:p>
             <a:r>
               <a:rPr sz="1800" dirty="0"/>
-              <a:t>존재적 위조: 오라클에 요청한 적 없는 메시지 하나에 대해 유효한 (m, σ) 쌍을 만든다</a:t>
-            </a:r>
-          </a:p>
-          <a:p>
-            <a:r>
-              <a:rPr sz="1800" dirty="0"/>
-              <a:t>많은 서명을 관찰해도 새로운 유효 서명을 만들 수 없다는 강한 보장이다</a:t>
+              <a:t>데이터 출처 인증: 메시지를 보낸 주체의 신원을 검증한다</a:t>
             </a:r>
           </a:p>
         </p:txBody>
@@ -9902,7 +9898,7 @@
           <a:p>
             <a:r>
               <a:rPr dirty="0"/>
-              <a:t>세 계열과 양자 컴퓨터</a:t>
+              <a:t>서명 스킴의 세 알고리즘</a:t>
             </a:r>
           </a:p>
         </p:txBody>
@@ -9924,7 +9920,13 @@
           <a:p>
             <a:r>
               <a:rPr sz="1800" dirty="0"/>
-              <a:t>오늘 가장 널리 쓰이는 서명 계열은 셋이다</a:t>
+              <a:t>서명 스킴은 세 개의 알고리즘으로 구성된다</a:t>
+            </a:r>
+          </a:p>
+          <a:p>
+            <a:r>
+              <a:rPr sz="1800" dirty="0"/>
+              <a:t>검증은 검증자가 Alice의 진짜 공개키를 가진다고 전제한다 (공개키 진위는 PKI의 몫)</a:t>
             </a:r>
           </a:p>
         </p:txBody>
@@ -9947,6 +9949,929 @@
             <a:fld id="{4438A2D4-3867-488E-A04E-7BFFCAED45A6}" type="slidenum">
               <a:rPr lang="ko-KR" altLang="en-US" smtClean="0"/>
               <a:t>11</a:t>
+            </a:fld>
+            <a:endParaRPr lang="ko-KR" altLang="en-US" dirty="0"/>
+          </a:p>
+        </p:txBody>
+      </p:sp>
+      <p:graphicFrame>
+        <p:nvGraphicFramePr>
+          <p:cNvPr id="5" name="Table 4"/>
+          <p:cNvGraphicFramePr>
+            <a:graphicFrameLocks noGrp="1"/>
+          </p:cNvGraphicFramePr>
+          <p:nvPr>
+            <p:extLst>
+              <p:ext uri="{D42A27DB-BD31-4B8C-83A1-F6EECF244321}">
+                <p14:modId xmlns:p14="http://schemas.microsoft.com/office/powerpoint/2010/main" val="2348586584"/>
+              </p:ext>
+            </p:extLst>
+          </p:nvPr>
+        </p:nvGraphicFramePr>
+        <p:xfrm>
+          <a:off x="838200" y="2685746"/>
+          <a:ext cx="10515600" cy="1920240"/>
+        </p:xfrm>
+        <a:graphic>
+          <a:graphicData uri="http://schemas.openxmlformats.org/drawingml/2006/table">
+            <a:tbl>
+              <a:tblPr firstRow="1" bandRow="1">
+                <a:tableStyleId>{5C22544A-7EE6-4342-B048-85BDC9FD1C3A}</a:tableStyleId>
+              </a:tblPr>
+              <a:tblGrid>
+                <a:gridCol w="2377440">
+                  <a:extLst>
+                    <a:ext uri="{9D8B030D-6E8A-4147-A177-3AD203B41FA5}">
+                      <a16:colId xmlns:a16="http://schemas.microsoft.com/office/drawing/2014/main" val="20000"/>
+                    </a:ext>
+                  </a:extLst>
+                </a:gridCol>
+                <a:gridCol w="3108960">
+                  <a:extLst>
+                    <a:ext uri="{9D8B030D-6E8A-4147-A177-3AD203B41FA5}">
+                      <a16:colId xmlns:a16="http://schemas.microsoft.com/office/drawing/2014/main" val="20001"/>
+                    </a:ext>
+                  </a:extLst>
+                </a:gridCol>
+                <a:gridCol w="5029200">
+                  <a:extLst>
+                    <a:ext uri="{9D8B030D-6E8A-4147-A177-3AD203B41FA5}">
+                      <a16:colId xmlns:a16="http://schemas.microsoft.com/office/drawing/2014/main" val="20002"/>
+                    </a:ext>
+                  </a:extLst>
+                </a:gridCol>
+              </a:tblGrid>
+              <a:tr h="480060">
+                <a:tc>
+                  <a:txBody>
+                    <a:bodyPr/>
+                    <a:lstStyle/>
+                    <a:p>
+                      <a:pPr algn="ctr"/>
+                      <a:r>
+                        <a:rPr sz="1800" b="1" dirty="0">
+                          <a:solidFill>
+                            <a:schemeClr val="bg1"/>
+                          </a:solidFill>
+                        </a:rPr>
+                        <a:t>알고리즘</a:t>
+                      </a:r>
+                    </a:p>
+                  </a:txBody>
+                  <a:tcPr anchor="ctr">
+                    <a:lnL w="12700" cap="flat" cmpd="sng" algn="ctr">
+                      <a:solidFill>
+                        <a:schemeClr val="tx1"/>
+                      </a:solidFill>
+                      <a:prstDash val="solid"/>
+                      <a:round/>
+                      <a:headEnd type="none" w="med" len="med"/>
+                      <a:tailEnd type="none" w="med" len="med"/>
+                    </a:lnL>
+                    <a:lnR w="12700" cap="flat" cmpd="sng" algn="ctr">
+                      <a:solidFill>
+                        <a:schemeClr val="tx1"/>
+                      </a:solidFill>
+                      <a:prstDash val="solid"/>
+                      <a:round/>
+                      <a:headEnd type="none" w="med" len="med"/>
+                      <a:tailEnd type="none" w="med" len="med"/>
+                    </a:lnR>
+                    <a:lnT w="12700" cap="flat" cmpd="sng" algn="ctr">
+                      <a:solidFill>
+                        <a:schemeClr val="tx1"/>
+                      </a:solidFill>
+                      <a:prstDash val="solid"/>
+                      <a:round/>
+                      <a:headEnd type="none" w="med" len="med"/>
+                      <a:tailEnd type="none" w="med" len="med"/>
+                    </a:lnT>
+                    <a:lnB w="12700" cap="flat" cmpd="sng" algn="ctr">
+                      <a:solidFill>
+                        <a:schemeClr val="tx1"/>
+                      </a:solidFill>
+                      <a:prstDash val="solid"/>
+                      <a:round/>
+                      <a:headEnd type="none" w="med" len="med"/>
+                      <a:tailEnd type="none" w="med" len="med"/>
+                    </a:lnB>
+                    <a:solidFill>
+                      <a:schemeClr val="accent2"/>
+                    </a:solidFill>
+                  </a:tcPr>
+                </a:tc>
+                <a:tc>
+                  <a:txBody>
+                    <a:bodyPr/>
+                    <a:lstStyle/>
+                    <a:p>
+                      <a:pPr algn="ctr"/>
+                      <a:r>
+                        <a:rPr sz="1800" b="1" dirty="0">
+                          <a:solidFill>
+                            <a:schemeClr val="bg1"/>
+                          </a:solidFill>
+                        </a:rPr>
+                        <a:t>사용하는 키</a:t>
+                      </a:r>
+                    </a:p>
+                  </a:txBody>
+                  <a:tcPr anchor="ctr">
+                    <a:lnL w="12700" cap="flat" cmpd="sng" algn="ctr">
+                      <a:solidFill>
+                        <a:schemeClr val="tx1"/>
+                      </a:solidFill>
+                      <a:prstDash val="solid"/>
+                      <a:round/>
+                      <a:headEnd type="none" w="med" len="med"/>
+                      <a:tailEnd type="none" w="med" len="med"/>
+                    </a:lnL>
+                    <a:lnR w="12700" cap="flat" cmpd="sng" algn="ctr">
+                      <a:solidFill>
+                        <a:schemeClr val="tx1"/>
+                      </a:solidFill>
+                      <a:prstDash val="solid"/>
+                      <a:round/>
+                      <a:headEnd type="none" w="med" len="med"/>
+                      <a:tailEnd type="none" w="med" len="med"/>
+                    </a:lnR>
+                    <a:lnT w="12700" cap="flat" cmpd="sng" algn="ctr">
+                      <a:solidFill>
+                        <a:schemeClr val="tx1"/>
+                      </a:solidFill>
+                      <a:prstDash val="solid"/>
+                      <a:round/>
+                      <a:headEnd type="none" w="med" len="med"/>
+                      <a:tailEnd type="none" w="med" len="med"/>
+                    </a:lnT>
+                    <a:lnB w="12700" cap="flat" cmpd="sng" algn="ctr">
+                      <a:solidFill>
+                        <a:schemeClr val="tx1"/>
+                      </a:solidFill>
+                      <a:prstDash val="solid"/>
+                      <a:round/>
+                      <a:headEnd type="none" w="med" len="med"/>
+                      <a:tailEnd type="none" w="med" len="med"/>
+                    </a:lnB>
+                    <a:solidFill>
+                      <a:schemeClr val="accent2"/>
+                    </a:solidFill>
+                  </a:tcPr>
+                </a:tc>
+                <a:tc>
+                  <a:txBody>
+                    <a:bodyPr/>
+                    <a:lstStyle/>
+                    <a:p>
+                      <a:pPr algn="ctr"/>
+                      <a:r>
+                        <a:rPr sz="1800" b="1" dirty="0">
+                          <a:solidFill>
+                            <a:schemeClr val="bg1"/>
+                          </a:solidFill>
+                        </a:rPr>
+                        <a:t>하는 일</a:t>
+                      </a:r>
+                    </a:p>
+                  </a:txBody>
+                  <a:tcPr anchor="ctr">
+                    <a:lnL w="12700" cap="flat" cmpd="sng" algn="ctr">
+                      <a:solidFill>
+                        <a:schemeClr val="tx1"/>
+                      </a:solidFill>
+                      <a:prstDash val="solid"/>
+                      <a:round/>
+                      <a:headEnd type="none" w="med" len="med"/>
+                      <a:tailEnd type="none" w="med" len="med"/>
+                    </a:lnL>
+                    <a:lnR w="12700" cap="flat" cmpd="sng" algn="ctr">
+                      <a:solidFill>
+                        <a:schemeClr val="tx1"/>
+                      </a:solidFill>
+                      <a:prstDash val="solid"/>
+                      <a:round/>
+                      <a:headEnd type="none" w="med" len="med"/>
+                      <a:tailEnd type="none" w="med" len="med"/>
+                    </a:lnR>
+                    <a:lnT w="12700" cap="flat" cmpd="sng" algn="ctr">
+                      <a:solidFill>
+                        <a:schemeClr val="tx1"/>
+                      </a:solidFill>
+                      <a:prstDash val="solid"/>
+                      <a:round/>
+                      <a:headEnd type="none" w="med" len="med"/>
+                      <a:tailEnd type="none" w="med" len="med"/>
+                    </a:lnT>
+                    <a:lnB w="12700" cap="flat" cmpd="sng" algn="ctr">
+                      <a:solidFill>
+                        <a:schemeClr val="tx1"/>
+                      </a:solidFill>
+                      <a:prstDash val="solid"/>
+                      <a:round/>
+                      <a:headEnd type="none" w="med" len="med"/>
+                      <a:tailEnd type="none" w="med" len="med"/>
+                    </a:lnB>
+                    <a:solidFill>
+                      <a:schemeClr val="accent2"/>
+                    </a:solidFill>
+                  </a:tcPr>
+                </a:tc>
+                <a:extLst>
+                  <a:ext uri="{0D108BD9-81ED-4DB2-BD59-A6C34878D82A}">
+                    <a16:rowId xmlns:a16="http://schemas.microsoft.com/office/drawing/2014/main" val="10000"/>
+                  </a:ext>
+                </a:extLst>
+              </a:tr>
+              <a:tr h="480060">
+                <a:tc>
+                  <a:txBody>
+                    <a:bodyPr/>
+                    <a:lstStyle/>
+                    <a:p>
+                      <a:pPr algn="ctr"/>
+                      <a:r>
+                        <a:rPr sz="1800" dirty="0"/>
+                        <a:t>키 생성</a:t>
+                      </a:r>
+                    </a:p>
+                  </a:txBody>
+                  <a:tcPr anchor="ctr">
+                    <a:lnL w="12700" cap="flat" cmpd="sng" algn="ctr">
+                      <a:solidFill>
+                        <a:schemeClr val="tx1"/>
+                      </a:solidFill>
+                      <a:prstDash val="solid"/>
+                      <a:round/>
+                      <a:headEnd type="none" w="med" len="med"/>
+                      <a:tailEnd type="none" w="med" len="med"/>
+                    </a:lnL>
+                    <a:lnR w="12700" cap="flat" cmpd="sng" algn="ctr">
+                      <a:solidFill>
+                        <a:schemeClr val="tx1"/>
+                      </a:solidFill>
+                      <a:prstDash val="solid"/>
+                      <a:round/>
+                      <a:headEnd type="none" w="med" len="med"/>
+                      <a:tailEnd type="none" w="med" len="med"/>
+                    </a:lnR>
+                    <a:lnT w="12700" cap="flat" cmpd="sng" algn="ctr">
+                      <a:solidFill>
+                        <a:schemeClr val="tx1"/>
+                      </a:solidFill>
+                      <a:prstDash val="solid"/>
+                      <a:round/>
+                      <a:headEnd type="none" w="med" len="med"/>
+                      <a:tailEnd type="none" w="med" len="med"/>
+                    </a:lnT>
+                    <a:lnB w="12700" cap="flat" cmpd="sng" algn="ctr">
+                      <a:solidFill>
+                        <a:schemeClr val="tx1"/>
+                      </a:solidFill>
+                      <a:prstDash val="solid"/>
+                      <a:round/>
+                      <a:headEnd type="none" w="med" len="med"/>
+                      <a:tailEnd type="none" w="med" len="med"/>
+                    </a:lnB>
+                    <a:noFill/>
+                  </a:tcPr>
+                </a:tc>
+                <a:tc>
+                  <a:txBody>
+                    <a:bodyPr/>
+                    <a:lstStyle/>
+                    <a:p>
+                      <a:pPr algn="ctr"/>
+                      <a:r>
+                        <a:rPr sz="1800" dirty="0"/>
+                        <a:t>—</a:t>
+                      </a:r>
+                    </a:p>
+                  </a:txBody>
+                  <a:tcPr anchor="ctr">
+                    <a:lnL w="12700" cap="flat" cmpd="sng" algn="ctr">
+                      <a:solidFill>
+                        <a:schemeClr val="tx1"/>
+                      </a:solidFill>
+                      <a:prstDash val="solid"/>
+                      <a:round/>
+                      <a:headEnd type="none" w="med" len="med"/>
+                      <a:tailEnd type="none" w="med" len="med"/>
+                    </a:lnL>
+                    <a:lnR w="12700" cap="flat" cmpd="sng" algn="ctr">
+                      <a:solidFill>
+                        <a:schemeClr val="tx1"/>
+                      </a:solidFill>
+                      <a:prstDash val="solid"/>
+                      <a:round/>
+                      <a:headEnd type="none" w="med" len="med"/>
+                      <a:tailEnd type="none" w="med" len="med"/>
+                    </a:lnR>
+                    <a:lnT w="12700" cap="flat" cmpd="sng" algn="ctr">
+                      <a:solidFill>
+                        <a:schemeClr val="tx1"/>
+                      </a:solidFill>
+                      <a:prstDash val="solid"/>
+                      <a:round/>
+                      <a:headEnd type="none" w="med" len="med"/>
+                      <a:tailEnd type="none" w="med" len="med"/>
+                    </a:lnT>
+                    <a:lnB w="12700" cap="flat" cmpd="sng" algn="ctr">
+                      <a:solidFill>
+                        <a:schemeClr val="tx1"/>
+                      </a:solidFill>
+                      <a:prstDash val="solid"/>
+                      <a:round/>
+                      <a:headEnd type="none" w="med" len="med"/>
+                      <a:tailEnd type="none" w="med" len="med"/>
+                    </a:lnB>
+                    <a:noFill/>
+                  </a:tcPr>
+                </a:tc>
+                <a:tc>
+                  <a:txBody>
+                    <a:bodyPr/>
+                    <a:lstStyle/>
+                    <a:p>
+                      <a:pPr algn="ctr"/>
+                      <a:r>
+                        <a:rPr sz="1800" dirty="0"/>
+                        <a:t>공개키·개인키 쌍을 만든다</a:t>
+                      </a:r>
+                    </a:p>
+                  </a:txBody>
+                  <a:tcPr anchor="ctr">
+                    <a:lnL w="12700" cap="flat" cmpd="sng" algn="ctr">
+                      <a:solidFill>
+                        <a:schemeClr val="tx1"/>
+                      </a:solidFill>
+                      <a:prstDash val="solid"/>
+                      <a:round/>
+                      <a:headEnd type="none" w="med" len="med"/>
+                      <a:tailEnd type="none" w="med" len="med"/>
+                    </a:lnL>
+                    <a:lnR w="12700" cap="flat" cmpd="sng" algn="ctr">
+                      <a:solidFill>
+                        <a:schemeClr val="tx1"/>
+                      </a:solidFill>
+                      <a:prstDash val="solid"/>
+                      <a:round/>
+                      <a:headEnd type="none" w="med" len="med"/>
+                      <a:tailEnd type="none" w="med" len="med"/>
+                    </a:lnR>
+                    <a:lnT w="12700" cap="flat" cmpd="sng" algn="ctr">
+                      <a:solidFill>
+                        <a:schemeClr val="tx1"/>
+                      </a:solidFill>
+                      <a:prstDash val="solid"/>
+                      <a:round/>
+                      <a:headEnd type="none" w="med" len="med"/>
+                      <a:tailEnd type="none" w="med" len="med"/>
+                    </a:lnT>
+                    <a:lnB w="12700" cap="flat" cmpd="sng" algn="ctr">
+                      <a:solidFill>
+                        <a:schemeClr val="tx1"/>
+                      </a:solidFill>
+                      <a:prstDash val="solid"/>
+                      <a:round/>
+                      <a:headEnd type="none" w="med" len="med"/>
+                      <a:tailEnd type="none" w="med" len="med"/>
+                    </a:lnB>
+                    <a:noFill/>
+                  </a:tcPr>
+                </a:tc>
+                <a:extLst>
+                  <a:ext uri="{0D108BD9-81ED-4DB2-BD59-A6C34878D82A}">
+                    <a16:rowId xmlns:a16="http://schemas.microsoft.com/office/drawing/2014/main" val="10001"/>
+                  </a:ext>
+                </a:extLst>
+              </a:tr>
+              <a:tr h="480060">
+                <a:tc>
+                  <a:txBody>
+                    <a:bodyPr/>
+                    <a:lstStyle/>
+                    <a:p>
+                      <a:pPr algn="ctr"/>
+                      <a:r>
+                        <a:rPr sz="1800" dirty="0"/>
+                        <a:t>서명 생성</a:t>
+                      </a:r>
+                    </a:p>
+                  </a:txBody>
+                  <a:tcPr anchor="ctr">
+                    <a:lnL w="12700" cap="flat" cmpd="sng" algn="ctr">
+                      <a:solidFill>
+                        <a:schemeClr val="tx1"/>
+                      </a:solidFill>
+                      <a:prstDash val="solid"/>
+                      <a:round/>
+                      <a:headEnd type="none" w="med" len="med"/>
+                      <a:tailEnd type="none" w="med" len="med"/>
+                    </a:lnL>
+                    <a:lnR w="12700" cap="flat" cmpd="sng" algn="ctr">
+                      <a:solidFill>
+                        <a:schemeClr val="tx1"/>
+                      </a:solidFill>
+                      <a:prstDash val="solid"/>
+                      <a:round/>
+                      <a:headEnd type="none" w="med" len="med"/>
+                      <a:tailEnd type="none" w="med" len="med"/>
+                    </a:lnR>
+                    <a:lnT w="12700" cap="flat" cmpd="sng" algn="ctr">
+                      <a:solidFill>
+                        <a:schemeClr val="tx1"/>
+                      </a:solidFill>
+                      <a:prstDash val="solid"/>
+                      <a:round/>
+                      <a:headEnd type="none" w="med" len="med"/>
+                      <a:tailEnd type="none" w="med" len="med"/>
+                    </a:lnT>
+                    <a:lnB w="12700" cap="flat" cmpd="sng" algn="ctr">
+                      <a:solidFill>
+                        <a:schemeClr val="tx1"/>
+                      </a:solidFill>
+                      <a:prstDash val="solid"/>
+                      <a:round/>
+                      <a:headEnd type="none" w="med" len="med"/>
+                      <a:tailEnd type="none" w="med" len="med"/>
+                    </a:lnB>
+                    <a:noFill/>
+                  </a:tcPr>
+                </a:tc>
+                <a:tc>
+                  <a:txBody>
+                    <a:bodyPr/>
+                    <a:lstStyle/>
+                    <a:p>
+                      <a:pPr algn="ctr"/>
+                      <a:r>
+                        <a:rPr sz="1800" dirty="0"/>
+                        <a:t>개인키 (서명 키)</a:t>
+                      </a:r>
+                    </a:p>
+                  </a:txBody>
+                  <a:tcPr anchor="ctr">
+                    <a:lnL w="12700" cap="flat" cmpd="sng" algn="ctr">
+                      <a:solidFill>
+                        <a:schemeClr val="tx1"/>
+                      </a:solidFill>
+                      <a:prstDash val="solid"/>
+                      <a:round/>
+                      <a:headEnd type="none" w="med" len="med"/>
+                      <a:tailEnd type="none" w="med" len="med"/>
+                    </a:lnL>
+                    <a:lnR w="12700" cap="flat" cmpd="sng" algn="ctr">
+                      <a:solidFill>
+                        <a:schemeClr val="tx1"/>
+                      </a:solidFill>
+                      <a:prstDash val="solid"/>
+                      <a:round/>
+                      <a:headEnd type="none" w="med" len="med"/>
+                      <a:tailEnd type="none" w="med" len="med"/>
+                    </a:lnR>
+                    <a:lnT w="12700" cap="flat" cmpd="sng" algn="ctr">
+                      <a:solidFill>
+                        <a:schemeClr val="tx1"/>
+                      </a:solidFill>
+                      <a:prstDash val="solid"/>
+                      <a:round/>
+                      <a:headEnd type="none" w="med" len="med"/>
+                      <a:tailEnd type="none" w="med" len="med"/>
+                    </a:lnT>
+                    <a:lnB w="12700" cap="flat" cmpd="sng" algn="ctr">
+                      <a:solidFill>
+                        <a:schemeClr val="tx1"/>
+                      </a:solidFill>
+                      <a:prstDash val="solid"/>
+                      <a:round/>
+                      <a:headEnd type="none" w="med" len="med"/>
+                      <a:tailEnd type="none" w="med" len="med"/>
+                    </a:lnB>
+                    <a:noFill/>
+                  </a:tcPr>
+                </a:tc>
+                <a:tc>
+                  <a:txBody>
+                    <a:bodyPr/>
+                    <a:lstStyle/>
+                    <a:p>
+                      <a:pPr algn="ctr"/>
+                      <a:r>
+                        <a:rPr sz="1800" dirty="0"/>
+                        <a:t>메시지에 대한 서명을 만든다</a:t>
+                      </a:r>
+                    </a:p>
+                  </a:txBody>
+                  <a:tcPr anchor="ctr">
+                    <a:lnL w="12700" cap="flat" cmpd="sng" algn="ctr">
+                      <a:solidFill>
+                        <a:schemeClr val="tx1"/>
+                      </a:solidFill>
+                      <a:prstDash val="solid"/>
+                      <a:round/>
+                      <a:headEnd type="none" w="med" len="med"/>
+                      <a:tailEnd type="none" w="med" len="med"/>
+                    </a:lnL>
+                    <a:lnR w="12700" cap="flat" cmpd="sng" algn="ctr">
+                      <a:solidFill>
+                        <a:schemeClr val="tx1"/>
+                      </a:solidFill>
+                      <a:prstDash val="solid"/>
+                      <a:round/>
+                      <a:headEnd type="none" w="med" len="med"/>
+                      <a:tailEnd type="none" w="med" len="med"/>
+                    </a:lnR>
+                    <a:lnT w="12700" cap="flat" cmpd="sng" algn="ctr">
+                      <a:solidFill>
+                        <a:schemeClr val="tx1"/>
+                      </a:solidFill>
+                      <a:prstDash val="solid"/>
+                      <a:round/>
+                      <a:headEnd type="none" w="med" len="med"/>
+                      <a:tailEnd type="none" w="med" len="med"/>
+                    </a:lnT>
+                    <a:lnB w="12700" cap="flat" cmpd="sng" algn="ctr">
+                      <a:solidFill>
+                        <a:schemeClr val="tx1"/>
+                      </a:solidFill>
+                      <a:prstDash val="solid"/>
+                      <a:round/>
+                      <a:headEnd type="none" w="med" len="med"/>
+                      <a:tailEnd type="none" w="med" len="med"/>
+                    </a:lnB>
+                    <a:noFill/>
+                  </a:tcPr>
+                </a:tc>
+                <a:extLst>
+                  <a:ext uri="{0D108BD9-81ED-4DB2-BD59-A6C34878D82A}">
+                    <a16:rowId xmlns:a16="http://schemas.microsoft.com/office/drawing/2014/main" val="10002"/>
+                  </a:ext>
+                </a:extLst>
+              </a:tr>
+              <a:tr h="480060">
+                <a:tc>
+                  <a:txBody>
+                    <a:bodyPr/>
+                    <a:lstStyle/>
+                    <a:p>
+                      <a:pPr algn="ctr"/>
+                      <a:r>
+                        <a:rPr sz="1800" dirty="0"/>
+                        <a:t>서명 검증</a:t>
+                      </a:r>
+                    </a:p>
+                  </a:txBody>
+                  <a:tcPr anchor="ctr">
+                    <a:lnL w="12700" cap="flat" cmpd="sng" algn="ctr">
+                      <a:solidFill>
+                        <a:schemeClr val="tx1"/>
+                      </a:solidFill>
+                      <a:prstDash val="solid"/>
+                      <a:round/>
+                      <a:headEnd type="none" w="med" len="med"/>
+                      <a:tailEnd type="none" w="med" len="med"/>
+                    </a:lnL>
+                    <a:lnR w="12700" cap="flat" cmpd="sng" algn="ctr">
+                      <a:solidFill>
+                        <a:schemeClr val="tx1"/>
+                      </a:solidFill>
+                      <a:prstDash val="solid"/>
+                      <a:round/>
+                      <a:headEnd type="none" w="med" len="med"/>
+                      <a:tailEnd type="none" w="med" len="med"/>
+                    </a:lnR>
+                    <a:lnT w="12700" cap="flat" cmpd="sng" algn="ctr">
+                      <a:solidFill>
+                        <a:schemeClr val="tx1"/>
+                      </a:solidFill>
+                      <a:prstDash val="solid"/>
+                      <a:round/>
+                      <a:headEnd type="none" w="med" len="med"/>
+                      <a:tailEnd type="none" w="med" len="med"/>
+                    </a:lnT>
+                    <a:lnB w="12700" cap="flat" cmpd="sng" algn="ctr">
+                      <a:solidFill>
+                        <a:schemeClr val="tx1"/>
+                      </a:solidFill>
+                      <a:prstDash val="solid"/>
+                      <a:round/>
+                      <a:headEnd type="none" w="med" len="med"/>
+                      <a:tailEnd type="none" w="med" len="med"/>
+                    </a:lnB>
+                    <a:noFill/>
+                  </a:tcPr>
+                </a:tc>
+                <a:tc>
+                  <a:txBody>
+                    <a:bodyPr/>
+                    <a:lstStyle/>
+                    <a:p>
+                      <a:pPr algn="ctr"/>
+                      <a:r>
+                        <a:rPr sz="1800" dirty="0"/>
+                        <a:t>공개키 (검증 키)</a:t>
+                      </a:r>
+                    </a:p>
+                  </a:txBody>
+                  <a:tcPr anchor="ctr">
+                    <a:lnL w="12700" cap="flat" cmpd="sng" algn="ctr">
+                      <a:solidFill>
+                        <a:schemeClr val="tx1"/>
+                      </a:solidFill>
+                      <a:prstDash val="solid"/>
+                      <a:round/>
+                      <a:headEnd type="none" w="med" len="med"/>
+                      <a:tailEnd type="none" w="med" len="med"/>
+                    </a:lnL>
+                    <a:lnR w="12700" cap="flat" cmpd="sng" algn="ctr">
+                      <a:solidFill>
+                        <a:schemeClr val="tx1"/>
+                      </a:solidFill>
+                      <a:prstDash val="solid"/>
+                      <a:round/>
+                      <a:headEnd type="none" w="med" len="med"/>
+                      <a:tailEnd type="none" w="med" len="med"/>
+                    </a:lnR>
+                    <a:lnT w="12700" cap="flat" cmpd="sng" algn="ctr">
+                      <a:solidFill>
+                        <a:schemeClr val="tx1"/>
+                      </a:solidFill>
+                      <a:prstDash val="solid"/>
+                      <a:round/>
+                      <a:headEnd type="none" w="med" len="med"/>
+                      <a:tailEnd type="none" w="med" len="med"/>
+                    </a:lnT>
+                    <a:lnB w="12700" cap="flat" cmpd="sng" algn="ctr">
+                      <a:solidFill>
+                        <a:schemeClr val="tx1"/>
+                      </a:solidFill>
+                      <a:prstDash val="solid"/>
+                      <a:round/>
+                      <a:headEnd type="none" w="med" len="med"/>
+                      <a:tailEnd type="none" w="med" len="med"/>
+                    </a:lnB>
+                    <a:noFill/>
+                  </a:tcPr>
+                </a:tc>
+                <a:tc>
+                  <a:txBody>
+                    <a:bodyPr/>
+                    <a:lstStyle/>
+                    <a:p>
+                      <a:pPr algn="ctr"/>
+                      <a:r>
+                        <a:rPr sz="1800" dirty="0"/>
+                        <a:t>서명된 메시지가 진짜인지 판정한다</a:t>
+                      </a:r>
+                    </a:p>
+                  </a:txBody>
+                  <a:tcPr anchor="ctr">
+                    <a:lnL w="12700" cap="flat" cmpd="sng" algn="ctr">
+                      <a:solidFill>
+                        <a:schemeClr val="tx1"/>
+                      </a:solidFill>
+                      <a:prstDash val="solid"/>
+                      <a:round/>
+                      <a:headEnd type="none" w="med" len="med"/>
+                      <a:tailEnd type="none" w="med" len="med"/>
+                    </a:lnL>
+                    <a:lnR w="12700" cap="flat" cmpd="sng" algn="ctr">
+                      <a:solidFill>
+                        <a:schemeClr val="tx1"/>
+                      </a:solidFill>
+                      <a:prstDash val="solid"/>
+                      <a:round/>
+                      <a:headEnd type="none" w="med" len="med"/>
+                      <a:tailEnd type="none" w="med" len="med"/>
+                    </a:lnR>
+                    <a:lnT w="12700" cap="flat" cmpd="sng" algn="ctr">
+                      <a:solidFill>
+                        <a:schemeClr val="tx1"/>
+                      </a:solidFill>
+                      <a:prstDash val="solid"/>
+                      <a:round/>
+                      <a:headEnd type="none" w="med" len="med"/>
+                      <a:tailEnd type="none" w="med" len="med"/>
+                    </a:lnT>
+                    <a:lnB w="12700" cap="flat" cmpd="sng" algn="ctr">
+                      <a:solidFill>
+                        <a:schemeClr val="tx1"/>
+                      </a:solidFill>
+                      <a:prstDash val="solid"/>
+                      <a:round/>
+                      <a:headEnd type="none" w="med" len="med"/>
+                      <a:tailEnd type="none" w="med" len="med"/>
+                    </a:lnB>
+                    <a:noFill/>
+                  </a:tcPr>
+                </a:tc>
+                <a:extLst>
+                  <a:ext uri="{0D108BD9-81ED-4DB2-BD59-A6C34878D82A}">
+                    <a16:rowId xmlns:a16="http://schemas.microsoft.com/office/drawing/2014/main" val="10003"/>
+                  </a:ext>
+                </a:extLst>
+              </a:tr>
+            </a:tbl>
+          </a:graphicData>
+        </a:graphic>
+      </p:graphicFrame>
+    </p:spTree>
+  </p:cSld>
+  <p:clrMapOvr>
+    <a:masterClrMapping/>
+  </p:clrMapOvr>
+</p:sld>
+</file>
+
+<file path=ppt/slides/slide12.xml><?xml version="1.0" encoding="utf-8"?>
+<p:sld xmlns:a="http://schemas.openxmlformats.org/drawingml/2006/main" xmlns:r="http://schemas.openxmlformats.org/officeDocument/2006/relationships" xmlns:p="http://schemas.openxmlformats.org/presentationml/2006/main">
+  <p:cSld>
+    <p:spTree>
+      <p:nvGrpSpPr>
+        <p:cNvPr id="1" name=""/>
+        <p:cNvGrpSpPr/>
+        <p:nvPr/>
+      </p:nvGrpSpPr>
+      <p:grpSpPr>
+        <a:xfrm>
+          <a:off x="0" y="0"/>
+          <a:ext cx="0" cy="0"/>
+          <a:chOff x="0" y="0"/>
+          <a:chExt cx="0" cy="0"/>
+        </a:xfrm>
+      </p:grpSpPr>
+      <p:sp>
+        <p:nvSpPr>
+          <p:cNvPr id="2" name="Title 1"/>
+          <p:cNvSpPr>
+            <a:spLocks noGrp="1"/>
+          </p:cNvSpPr>
+          <p:nvPr>
+            <p:ph type="title"/>
+          </p:nvPr>
+        </p:nvSpPr>
+        <p:spPr/>
+        <p:txBody>
+          <a:bodyPr/>
+          <a:lstStyle/>
+          <a:p>
+            <a:r>
+              <a:rPr dirty="0"/>
+              <a:t>존재적 위조 불가능성 (EUF-CMA)</a:t>
+            </a:r>
+          </a:p>
+        </p:txBody>
+      </p:sp>
+      <p:sp>
+        <p:nvSpPr>
+          <p:cNvPr id="3" name="Content Placeholder 2"/>
+          <p:cNvSpPr>
+            <a:spLocks noGrp="1"/>
+          </p:cNvSpPr>
+          <p:nvPr>
+            <p:ph idx="1"/>
+          </p:nvPr>
+        </p:nvSpPr>
+        <p:spPr/>
+        <p:txBody>
+          <a:bodyPr/>
+          <a:lstStyle/>
+          <a:p>
+            <a:r>
+              <a:rPr sz="1800" dirty="0"/>
+              <a:t>정의: 계산량이 제한된 공격자가 선택 메시지 공격을 하더라도 존재적으로 위조가 불가능하면 안전하다</a:t>
+            </a:r>
+          </a:p>
+          <a:p>
+            <a:r>
+              <a:rPr sz="1800" dirty="0"/>
+              <a:t>선택 메시지 공격: 공격자가 서명 오라클에 원하는 메시지의 서명을 자유롭게 얻는다</a:t>
+            </a:r>
+          </a:p>
+          <a:p>
+            <a:r>
+              <a:rPr sz="1800" dirty="0"/>
+              <a:t>존재적 위조: 오라클에 요청한 적 없는 메시지 하나에 대해 유효한 (m, σ) 쌍을 만든다</a:t>
+            </a:r>
+          </a:p>
+          <a:p>
+            <a:r>
+              <a:rPr sz="1800" dirty="0"/>
+              <a:t>많은 서명을 관찰해도 새로운 유효 서명을 만들 수 없다는 강한 보장이다</a:t>
+            </a:r>
+          </a:p>
+        </p:txBody>
+      </p:sp>
+      <p:sp>
+        <p:nvSpPr>
+          <p:cNvPr id="4" name="슬라이드 번호 개체 틀"/>
+          <p:cNvSpPr>
+            <a:spLocks noGrp="1"/>
+          </p:cNvSpPr>
+          <p:nvPr>
+            <p:ph type="sldNum" sz="quarter" idx="12"/>
+          </p:nvPr>
+        </p:nvSpPr>
+        <p:spPr/>
+        <p:txBody>
+          <a:bodyPr/>
+          <a:lstStyle/>
+          <a:p>
+            <a:fld id="{4438A2D4-3867-488E-A04E-7BFFCAED45A6}" type="slidenum">
+              <a:rPr lang="ko-KR" altLang="en-US" smtClean="0"/>
+              <a:t>12</a:t>
+            </a:fld>
+            <a:endParaRPr lang="ko-KR" altLang="en-US" dirty="0"/>
+          </a:p>
+        </p:txBody>
+      </p:sp>
+    </p:spTree>
+  </p:cSld>
+  <p:clrMapOvr>
+    <a:masterClrMapping/>
+  </p:clrMapOvr>
+</p:sld>
+</file>
+
+<file path=ppt/slides/slide13.xml><?xml version="1.0" encoding="utf-8"?>
+<p:sld xmlns:a="http://schemas.openxmlformats.org/drawingml/2006/main" xmlns:r="http://schemas.openxmlformats.org/officeDocument/2006/relationships" xmlns:p="http://schemas.openxmlformats.org/presentationml/2006/main">
+  <p:cSld>
+    <p:spTree>
+      <p:nvGrpSpPr>
+        <p:cNvPr id="1" name=""/>
+        <p:cNvGrpSpPr/>
+        <p:nvPr/>
+      </p:nvGrpSpPr>
+      <p:grpSpPr>
+        <a:xfrm>
+          <a:off x="0" y="0"/>
+          <a:ext cx="0" cy="0"/>
+          <a:chOff x="0" y="0"/>
+          <a:chExt cx="0" cy="0"/>
+        </a:xfrm>
+      </p:grpSpPr>
+      <p:sp>
+        <p:nvSpPr>
+          <p:cNvPr id="2" name="Title 1"/>
+          <p:cNvSpPr>
+            <a:spLocks noGrp="1"/>
+          </p:cNvSpPr>
+          <p:nvPr>
+            <p:ph type="title"/>
+          </p:nvPr>
+        </p:nvSpPr>
+        <p:spPr/>
+        <p:txBody>
+          <a:bodyPr/>
+          <a:lstStyle/>
+          <a:p>
+            <a:r>
+              <a:rPr dirty="0"/>
+              <a:t>세 계열과 양자 컴퓨터</a:t>
+            </a:r>
+          </a:p>
+        </p:txBody>
+      </p:sp>
+      <p:sp>
+        <p:nvSpPr>
+          <p:cNvPr id="3" name="Content Placeholder 2"/>
+          <p:cNvSpPr>
+            <a:spLocks noGrp="1"/>
+          </p:cNvSpPr>
+          <p:nvPr>
+            <p:ph idx="1"/>
+          </p:nvPr>
+        </p:nvSpPr>
+        <p:spPr/>
+        <p:txBody>
+          <a:bodyPr/>
+          <a:lstStyle/>
+          <a:p>
+            <a:r>
+              <a:rPr sz="1800" dirty="0"/>
+              <a:t>오늘 가장 널리 쓰이는 서명 계열은 셋이다</a:t>
+            </a:r>
+          </a:p>
+        </p:txBody>
+      </p:sp>
+      <p:sp>
+        <p:nvSpPr>
+          <p:cNvPr id="4" name="슬라이드 번호 개체 틀"/>
+          <p:cNvSpPr>
+            <a:spLocks noGrp="1"/>
+          </p:cNvSpPr>
+          <p:nvPr>
+            <p:ph type="sldNum" sz="quarter" idx="12"/>
+          </p:nvPr>
+        </p:nvSpPr>
+        <p:spPr/>
+        <p:txBody>
+          <a:bodyPr/>
+          <a:lstStyle/>
+          <a:p>
+            <a:fld id="{4438A2D4-3867-488E-A04E-7BFFCAED45A6}" type="slidenum">
+              <a:rPr lang="ko-KR" altLang="en-US" smtClean="0"/>
+              <a:t>13</a:t>
             </a:fld>
             <a:endParaRPr lang="ko-KR" altLang="en-US" dirty="0"/>
           </a:p>
@@ -10902,220 +11827,6 @@
 </p:sld>
 </file>
 
-<file path=ppt/slides/slide12.xml><?xml version="1.0" encoding="utf-8"?>
-<p:sld xmlns:a="http://schemas.openxmlformats.org/drawingml/2006/main" xmlns:r="http://schemas.openxmlformats.org/officeDocument/2006/relationships" xmlns:p="http://schemas.openxmlformats.org/presentationml/2006/main">
-  <p:cSld>
-    <p:spTree>
-      <p:nvGrpSpPr>
-        <p:cNvPr id="1" name=""/>
-        <p:cNvGrpSpPr/>
-        <p:nvPr/>
-      </p:nvGrpSpPr>
-      <p:grpSpPr>
-        <a:xfrm>
-          <a:off x="0" y="0"/>
-          <a:ext cx="0" cy="0"/>
-          <a:chOff x="0" y="0"/>
-          <a:chExt cx="0" cy="0"/>
-        </a:xfrm>
-      </p:grpSpPr>
-      <p:sp>
-        <p:nvSpPr>
-          <p:cNvPr id="2" name="Title 1"/>
-          <p:cNvSpPr>
-            <a:spLocks noGrp="1"/>
-          </p:cNvSpPr>
-          <p:nvPr>
-            <p:ph type="title"/>
-          </p:nvPr>
-        </p:nvSpPr>
-        <p:spPr/>
-        <p:txBody>
-          <a:bodyPr/>
-          <a:lstStyle/>
-          <a:p>
-            <a:r>
-              <a:rPr dirty="0"/>
-              <a:t>세 계열의 공통 의존성</a:t>
-            </a:r>
-          </a:p>
-        </p:txBody>
-      </p:sp>
-      <p:sp>
-        <p:nvSpPr>
-          <p:cNvPr id="3" name="Content Placeholder 2"/>
-          <p:cNvSpPr>
-            <a:spLocks noGrp="1"/>
-          </p:cNvSpPr>
-          <p:nvPr>
-            <p:ph idx="1"/>
-          </p:nvPr>
-        </p:nvSpPr>
-        <p:spPr/>
-        <p:txBody>
-          <a:bodyPr/>
-          <a:lstStyle/>
-          <a:p>
-            <a:r>
-              <a:rPr sz="1800" dirty="0"/>
-              <a:t>RSA·타원곡선·격자 기반은 각각 수론 또는 격자 난제에 기반한다</a:t>
-            </a:r>
-          </a:p>
-          <a:p>
-            <a:r>
-              <a:rPr sz="1800" dirty="0"/>
-              <a:t>그런데 세 계열 모두 암호학적 해시 함수의 보안 속성에도 함께 의존한다</a:t>
-            </a:r>
-          </a:p>
-          <a:p>
-            <a:r>
-              <a:rPr sz="1800" dirty="0"/>
-              <a:t>해시 함수는 이미 신뢰의 기반이므로, 해시만으로 서명을 세우는 접근이 자연스럽다</a:t>
-            </a:r>
-          </a:p>
-        </p:txBody>
-      </p:sp>
-      <p:sp>
-        <p:nvSpPr>
-          <p:cNvPr id="4" name="슬라이드 번호 개체 틀"/>
-          <p:cNvSpPr>
-            <a:spLocks noGrp="1"/>
-          </p:cNvSpPr>
-          <p:nvPr>
-            <p:ph type="sldNum" sz="quarter" idx="12"/>
-          </p:nvPr>
-        </p:nvSpPr>
-        <p:spPr/>
-        <p:txBody>
-          <a:bodyPr/>
-          <a:lstStyle/>
-          <a:p>
-            <a:fld id="{4438A2D4-3867-488E-A04E-7BFFCAED45A6}" type="slidenum">
-              <a:rPr lang="ko-KR" altLang="en-US" smtClean="0"/>
-              <a:t>12</a:t>
-            </a:fld>
-            <a:endParaRPr lang="ko-KR" altLang="en-US" dirty="0"/>
-          </a:p>
-        </p:txBody>
-      </p:sp>
-    </p:spTree>
-  </p:cSld>
-  <p:clrMapOvr>
-    <a:masterClrMapping/>
-  </p:clrMapOvr>
-</p:sld>
-</file>
-
-<file path=ppt/slides/slide13.xml><?xml version="1.0" encoding="utf-8"?>
-<p:sld xmlns:a="http://schemas.openxmlformats.org/drawingml/2006/main" xmlns:r="http://schemas.openxmlformats.org/officeDocument/2006/relationships" xmlns:p="http://schemas.openxmlformats.org/presentationml/2006/main">
-  <p:cSld>
-    <p:spTree>
-      <p:nvGrpSpPr>
-        <p:cNvPr id="1" name=""/>
-        <p:cNvGrpSpPr/>
-        <p:nvPr/>
-      </p:nvGrpSpPr>
-      <p:grpSpPr>
-        <a:xfrm>
-          <a:off x="0" y="0"/>
-          <a:ext cx="0" cy="0"/>
-          <a:chOff x="0" y="0"/>
-          <a:chExt cx="0" cy="0"/>
-        </a:xfrm>
-      </p:grpSpPr>
-      <p:sp>
-        <p:nvSpPr>
-          <p:cNvPr id="2" name="Title 1"/>
-          <p:cNvSpPr>
-            <a:spLocks noGrp="1"/>
-          </p:cNvSpPr>
-          <p:nvPr>
-            <p:ph type="title"/>
-          </p:nvPr>
-        </p:nvSpPr>
-        <p:spPr/>
-        <p:txBody>
-          <a:bodyPr/>
-          <a:lstStyle/>
-          <a:p>
-            <a:r>
-              <a:rPr dirty="0"/>
-              <a:t>기원과 유일한 primitive</a:t>
-            </a:r>
-          </a:p>
-        </p:txBody>
-      </p:sp>
-      <p:sp>
-        <p:nvSpPr>
-          <p:cNvPr id="3" name="Content Placeholder 2"/>
-          <p:cNvSpPr>
-            <a:spLocks noGrp="1"/>
-          </p:cNvSpPr>
-          <p:nvPr>
-            <p:ph idx="1"/>
-          </p:nvPr>
-        </p:nvSpPr>
-        <p:spPr/>
-        <p:txBody>
-          <a:bodyPr/>
-          <a:lstStyle/>
-          <a:p>
-            <a:r>
-              <a:rPr sz="1800" dirty="0"/>
-              <a:t>Leslie Lamport가 1976년에 처음 제안했다</a:t>
-            </a:r>
-          </a:p>
-          <a:p>
-            <a:r>
-              <a:rPr sz="1800" dirty="0"/>
-              <a:t>Robert Winternitz와 Ralph Merkle가 1979년에 핵심 개선을 더했다</a:t>
-            </a:r>
-          </a:p>
-          <a:p>
-            <a:r>
-              <a:rPr sz="1800" dirty="0"/>
-              <a:t>핵심 개념은 1970년대 것이지만 양자 저항성 덕분에 지금도 유효하다</a:t>
-            </a:r>
-          </a:p>
-          <a:p>
-            <a:r>
-              <a:rPr sz="1800" dirty="0"/>
-              <a:t>쓰이는 암호 primitive는 해시 함수 하나뿐이다</a:t>
-            </a:r>
-          </a:p>
-        </p:txBody>
-      </p:sp>
-      <p:sp>
-        <p:nvSpPr>
-          <p:cNvPr id="4" name="슬라이드 번호 개체 틀"/>
-          <p:cNvSpPr>
-            <a:spLocks noGrp="1"/>
-          </p:cNvSpPr>
-          <p:nvPr>
-            <p:ph type="sldNum" sz="quarter" idx="12"/>
-          </p:nvPr>
-        </p:nvSpPr>
-        <p:spPr/>
-        <p:txBody>
-          <a:bodyPr/>
-          <a:lstStyle/>
-          <a:p>
-            <a:fld id="{4438A2D4-3867-488E-A04E-7BFFCAED45A6}" type="slidenum">
-              <a:rPr lang="ko-KR" altLang="en-US" smtClean="0"/>
-              <a:t>13</a:t>
-            </a:fld>
-            <a:endParaRPr lang="ko-KR" altLang="en-US" dirty="0"/>
-          </a:p>
-        </p:txBody>
-      </p:sp>
-    </p:spTree>
-  </p:cSld>
-  <p:clrMapOvr>
-    <a:masterClrMapping/>
-  </p:clrMapOvr>
-</p:sld>
-</file>
-
 <file path=ppt/slides/slide14.xml><?xml version="1.0" encoding="utf-8"?>
 <p:sld xmlns:a="http://schemas.openxmlformats.org/drawingml/2006/main" xmlns:r="http://schemas.openxmlformats.org/officeDocument/2006/relationships" xmlns:p="http://schemas.openxmlformats.org/presentationml/2006/main">
   <p:cSld>
@@ -11150,7 +11861,7 @@
           <a:p>
             <a:r>
               <a:rPr dirty="0"/>
-              <a:t>장점과 단점</a:t>
+              <a:t>세 계열의 공통 의존성</a:t>
             </a:r>
           </a:p>
         </p:txBody>
@@ -11172,13 +11883,19 @@
           <a:p>
             <a:r>
               <a:rPr sz="1800" dirty="0"/>
-              <a:t>격자 기반은 근거 문제가 비교적 최신이라 장기 저항성에 추가 검증이 필요하다</a:t>
+              <a:t>RSA·타원곡선·격자 기반은 각각 수론 또는 격자 난제에 기반한다</a:t>
             </a:r>
           </a:p>
           <a:p>
             <a:r>
               <a:rPr sz="1800" dirty="0"/>
-              <a:t>해시 기반은 수십 년간 연구된 표준 해시 속성에만 기댄다</a:t>
+              <a:t>그런데 세 계열 모두 암호학적 해시 함수의 보안 속성에도 함께 의존한다</a:t>
+            </a:r>
+          </a:p>
+          <a:p>
+            <a:r>
+              <a:rPr sz="1800" dirty="0"/>
+              <a:t>해시 함수는 이미 신뢰의 기반이므로, 해시만으로 서명을 세우는 접근이 자연스럽다</a:t>
             </a:r>
           </a:p>
         </p:txBody>
@@ -11201,6 +11918,214 @@
             <a:fld id="{4438A2D4-3867-488E-A04E-7BFFCAED45A6}" type="slidenum">
               <a:rPr lang="ko-KR" altLang="en-US" smtClean="0"/>
               <a:t>14</a:t>
+            </a:fld>
+            <a:endParaRPr lang="ko-KR" altLang="en-US" dirty="0"/>
+          </a:p>
+        </p:txBody>
+      </p:sp>
+    </p:spTree>
+  </p:cSld>
+  <p:clrMapOvr>
+    <a:masterClrMapping/>
+  </p:clrMapOvr>
+</p:sld>
+</file>
+
+<file path=ppt/slides/slide15.xml><?xml version="1.0" encoding="utf-8"?>
+<p:sld xmlns:a="http://schemas.openxmlformats.org/drawingml/2006/main" xmlns:r="http://schemas.openxmlformats.org/officeDocument/2006/relationships" xmlns:p="http://schemas.openxmlformats.org/presentationml/2006/main">
+  <p:cSld>
+    <p:spTree>
+      <p:nvGrpSpPr>
+        <p:cNvPr id="1" name=""/>
+        <p:cNvGrpSpPr/>
+        <p:nvPr/>
+      </p:nvGrpSpPr>
+      <p:grpSpPr>
+        <a:xfrm>
+          <a:off x="0" y="0"/>
+          <a:ext cx="0" cy="0"/>
+          <a:chOff x="0" y="0"/>
+          <a:chExt cx="0" cy="0"/>
+        </a:xfrm>
+      </p:grpSpPr>
+      <p:sp>
+        <p:nvSpPr>
+          <p:cNvPr id="2" name="Title 1"/>
+          <p:cNvSpPr>
+            <a:spLocks noGrp="1"/>
+          </p:cNvSpPr>
+          <p:nvPr>
+            <p:ph type="title"/>
+          </p:nvPr>
+        </p:nvSpPr>
+        <p:spPr/>
+        <p:txBody>
+          <a:bodyPr/>
+          <a:lstStyle/>
+          <a:p>
+            <a:r>
+              <a:rPr dirty="0"/>
+              <a:t>기원과 유일한 primitive</a:t>
+            </a:r>
+          </a:p>
+        </p:txBody>
+      </p:sp>
+      <p:sp>
+        <p:nvSpPr>
+          <p:cNvPr id="3" name="Content Placeholder 2"/>
+          <p:cNvSpPr>
+            <a:spLocks noGrp="1"/>
+          </p:cNvSpPr>
+          <p:nvPr>
+            <p:ph idx="1"/>
+          </p:nvPr>
+        </p:nvSpPr>
+        <p:spPr/>
+        <p:txBody>
+          <a:bodyPr/>
+          <a:lstStyle/>
+          <a:p>
+            <a:r>
+              <a:rPr sz="1800" dirty="0"/>
+              <a:t>Leslie Lamport가 1976년에 처음 제안했다</a:t>
+            </a:r>
+          </a:p>
+          <a:p>
+            <a:r>
+              <a:rPr sz="1800" dirty="0"/>
+              <a:t>Robert Winternitz와 Ralph Merkle가 1979년에 핵심 개선을 더했다</a:t>
+            </a:r>
+          </a:p>
+          <a:p>
+            <a:r>
+              <a:rPr sz="1800" dirty="0"/>
+              <a:t>핵심 개념은 1970년대 것이지만 양자 저항성 덕분에 지금도 유효하다</a:t>
+            </a:r>
+          </a:p>
+          <a:p>
+            <a:r>
+              <a:rPr sz="1800" dirty="0"/>
+              <a:t>쓰이는 암호 primitive는 해시 함수 하나뿐이다</a:t>
+            </a:r>
+          </a:p>
+        </p:txBody>
+      </p:sp>
+      <p:sp>
+        <p:nvSpPr>
+          <p:cNvPr id="4" name="슬라이드 번호 개체 틀"/>
+          <p:cNvSpPr>
+            <a:spLocks noGrp="1"/>
+          </p:cNvSpPr>
+          <p:nvPr>
+            <p:ph type="sldNum" sz="quarter" idx="12"/>
+          </p:nvPr>
+        </p:nvSpPr>
+        <p:spPr/>
+        <p:txBody>
+          <a:bodyPr/>
+          <a:lstStyle/>
+          <a:p>
+            <a:fld id="{4438A2D4-3867-488E-A04E-7BFFCAED45A6}" type="slidenum">
+              <a:rPr lang="ko-KR" altLang="en-US" smtClean="0"/>
+              <a:t>15</a:t>
+            </a:fld>
+            <a:endParaRPr lang="ko-KR" altLang="en-US" dirty="0"/>
+          </a:p>
+        </p:txBody>
+      </p:sp>
+    </p:spTree>
+  </p:cSld>
+  <p:clrMapOvr>
+    <a:masterClrMapping/>
+  </p:clrMapOvr>
+</p:sld>
+</file>
+
+<file path=ppt/slides/slide16.xml><?xml version="1.0" encoding="utf-8"?>
+<p:sld xmlns:a="http://schemas.openxmlformats.org/drawingml/2006/main" xmlns:r="http://schemas.openxmlformats.org/officeDocument/2006/relationships" xmlns:p="http://schemas.openxmlformats.org/presentationml/2006/main">
+  <p:cSld>
+    <p:spTree>
+      <p:nvGrpSpPr>
+        <p:cNvPr id="1" name=""/>
+        <p:cNvGrpSpPr/>
+        <p:nvPr/>
+      </p:nvGrpSpPr>
+      <p:grpSpPr>
+        <a:xfrm>
+          <a:off x="0" y="0"/>
+          <a:ext cx="0" cy="0"/>
+          <a:chOff x="0" y="0"/>
+          <a:chExt cx="0" cy="0"/>
+        </a:xfrm>
+      </p:grpSpPr>
+      <p:sp>
+        <p:nvSpPr>
+          <p:cNvPr id="2" name="Title 1"/>
+          <p:cNvSpPr>
+            <a:spLocks noGrp="1"/>
+          </p:cNvSpPr>
+          <p:nvPr>
+            <p:ph type="title"/>
+          </p:nvPr>
+        </p:nvSpPr>
+        <p:spPr/>
+        <p:txBody>
+          <a:bodyPr/>
+          <a:lstStyle/>
+          <a:p>
+            <a:r>
+              <a:rPr dirty="0"/>
+              <a:t>장점과 단점</a:t>
+            </a:r>
+          </a:p>
+        </p:txBody>
+      </p:sp>
+      <p:sp>
+        <p:nvSpPr>
+          <p:cNvPr id="3" name="Content Placeholder 2"/>
+          <p:cNvSpPr>
+            <a:spLocks noGrp="1"/>
+          </p:cNvSpPr>
+          <p:nvPr>
+            <p:ph idx="1"/>
+          </p:nvPr>
+        </p:nvSpPr>
+        <p:spPr/>
+        <p:txBody>
+          <a:bodyPr/>
+          <a:lstStyle/>
+          <a:p>
+            <a:r>
+              <a:rPr sz="1800" dirty="0"/>
+              <a:t>격자 기반은 근거 문제가 비교적 최신이라 장기 저항성에 추가 검증이 필요하다</a:t>
+            </a:r>
+          </a:p>
+          <a:p>
+            <a:r>
+              <a:rPr sz="1800" dirty="0"/>
+              <a:t>해시 기반은 수십 년간 연구된 표준 해시 속성에만 기댄다</a:t>
+            </a:r>
+          </a:p>
+        </p:txBody>
+      </p:sp>
+      <p:sp>
+        <p:nvSpPr>
+          <p:cNvPr id="4" name="슬라이드 번호 개체 틀"/>
+          <p:cNvSpPr>
+            <a:spLocks noGrp="1"/>
+          </p:cNvSpPr>
+          <p:nvPr>
+            <p:ph type="sldNum" sz="quarter" idx="12"/>
+          </p:nvPr>
+        </p:nvSpPr>
+        <p:spPr/>
+        <p:txBody>
+          <a:bodyPr/>
+          <a:lstStyle/>
+          <a:p>
+            <a:fld id="{4438A2D4-3867-488E-A04E-7BFFCAED45A6}" type="slidenum">
+              <a:rPr lang="ko-KR" altLang="en-US" smtClean="0"/>
+              <a:t>16</a:t>
             </a:fld>
             <a:endParaRPr lang="ko-KR" altLang="en-US" dirty="0"/>
           </a:p>
@@ -11603,7 +12528,7 @@
 </p:sld>
 </file>
 
-<file path=ppt/slides/slide15.xml><?xml version="1.0" encoding="utf-8"?>
+<file path=ppt/slides/slide17.xml><?xml version="1.0" encoding="utf-8"?>
 <p:sld xmlns:a="http://schemas.openxmlformats.org/drawingml/2006/main" xmlns:r="http://schemas.openxmlformats.org/officeDocument/2006/relationships" xmlns:p="http://schemas.openxmlformats.org/presentationml/2006/main">
   <p:cSld>
     <p:spTree>
@@ -11693,7 +12618,7 @@
           <a:p>
             <a:fld id="{4438A2D4-3867-488E-A04E-7BFFCAED45A6}" type="slidenum">
               <a:rPr lang="ko-KR" altLang="en-US" smtClean="0"/>
-              <a:t>15</a:t>
+              <a:t>17</a:t>
             </a:fld>
             <a:endParaRPr lang="ko-KR" altLang="en-US" dirty="0"/>
           </a:p>
@@ -12428,7 +13353,7 @@
 </p:sld>
 </file>
 
-<file path=ppt/slides/slide16.xml><?xml version="1.0" encoding="utf-8"?>
+<file path=ppt/slides/slide18.xml><?xml version="1.0" encoding="utf-8"?>
 <p:sld xmlns:a="http://schemas.openxmlformats.org/drawingml/2006/main" xmlns:r="http://schemas.openxmlformats.org/officeDocument/2006/relationships" xmlns:p="http://schemas.openxmlformats.org/presentationml/2006/main">
   <p:cSld>
     <p:spTree>
@@ -12506,7 +13431,7 @@
           <a:p>
             <a:fld id="{4438A2D4-3867-488E-A04E-7BFFCAED45A6}" type="slidenum">
               <a:rPr lang="ko-KR" altLang="en-US" smtClean="0"/>
-              <a:t>16</a:t>
+              <a:t>18</a:t>
             </a:fld>
             <a:endParaRPr lang="ko-KR" altLang="en-US" dirty="0"/>
           </a:p>
@@ -13078,7 +14003,7 @@
 </p:sld>
 </file>
 
-<file path=ppt/slides/slide17.xml><?xml version="1.0" encoding="utf-8"?>
+<file path=ppt/slides/slide19.xml><?xml version="1.0" encoding="utf-8"?>
 <p:sld xmlns:a="http://schemas.openxmlformats.org/drawingml/2006/main" xmlns:r="http://schemas.openxmlformats.org/officeDocument/2006/relationships" xmlns:p="http://schemas.openxmlformats.org/presentationml/2006/main">
   <p:cSld>
     <p:spTree>
@@ -13180,7 +14105,7 @@
           <a:p>
             <a:fld id="{4438A2D4-3867-488E-A04E-7BFFCAED45A6}" type="slidenum">
               <a:rPr lang="ko-KR" altLang="en-US" smtClean="0"/>
-              <a:t>17</a:t>
+              <a:t>19</a:t>
             </a:fld>
             <a:endParaRPr lang="ko-KR" altLang="en-US" dirty="0"/>
           </a:p>
@@ -13504,31 +14429,19 @@
           <a:p>
             <a:r>
               <a:rPr sz="1800" dirty="0"/>
-              <a:t>Kyber·Dilithium의 연산은 모두 다항식 링 위에서 이뤄진다</a:t>
+              <a:t>Kyber·Dilithium의 무거운 연산은 전부 "행렬 × 벡터", 그 기본 단위는 다항식 곱 하나</a:t>
             </a:r>
           </a:p>
           <a:p>
             <a:r>
               <a:rPr sz="1800" dirty="0"/>
-              <a:t>무거운 부분은 전부 "행렬 × 벡터", 그 기본 단위는 다항식 곱 하나</a:t>
+              <a:t>덧셈은 계수별이라 싸지만, 곱셈은 모든 항끼리 곱해야 해서 비용이 항 개수의 제곱에 비례</a:t>
             </a:r>
           </a:p>
           <a:p>
             <a:r>
               <a:rPr sz="1800" dirty="0"/>
-              <a:t>다항식 덧셈은 계수별 덧셈이라 싸다</a:t>
-            </a:r>
-          </a:p>
-          <a:p>
-            <a:r>
-              <a:rPr sz="1800" dirty="0"/>
-              <a:t>곱셈은 모든 항끼리 곱해야 해서 비용이 항 개수의 제곱에 비례한다</a:t>
-            </a:r>
-          </a:p>
-          <a:p>
-            <a:r>
-              <a:rPr sz="1800" dirty="0"/>
-              <a:t>항 256개 → 곱셈 한 번에 약 6만 5천 번의 수 곱셈, 스킴 전체 속도를 지배</a:t>
+              <a:t>항 256개 → 곱 한 번에 약 6만 5천 번의 수 곱셈, 스킴 전체 속도를 지배</a:t>
             </a:r>
           </a:p>
         </p:txBody>
@@ -13578,7 +14491,7 @@
         </p:blipFill>
         <p:spPr>
           <a:xfrm>
-            <a:off x="1295400" y="4152753"/>
+            <a:off x="2007268" y="3429000"/>
             <a:ext cx="8177463" cy="2542372"/>
           </a:xfrm>
           <a:prstGeom prst="rect">
@@ -13628,13 +14541,8 @@
           <a:p>
             <a:r>
               <a:rPr dirty="0"/>
-              <a:t>핵심 아이디어: </a:t>
+              <a:t>핵심 아이디어: 표현을 바꾸면 곱셈이 점별 곱</a:t>
             </a:r>
-            <a:r>
-              <a:rPr lang="ko-KR" altLang="en-US" dirty="0"/>
-              <a:t>표현을 바꾸면 곱셈이 쉬워진다</a:t>
-            </a:r>
-            <a:endParaRPr dirty="0"/>
           </a:p>
         </p:txBody>
       </p:sp>
@@ -13655,31 +14563,26 @@
           <a:p>
             <a:r>
               <a:rPr sz="1800" dirty="0"/>
-              <a:t>다항식을 "계수 목록" 대신 "여러 점에서의 함숫값 목록"으로 본다</a:t>
+              <a:t>다항식을 "계수 목록" 대신 "여러 점에서의 함숫값 목록"으로 본다 — 두 표현은 서로 오갈 수 있다</a:t>
             </a:r>
-          </a:p>
-          <a:p>
+            <a:br>
+              <a:rPr lang="en-US" sz="1800" dirty="0"/>
+            </a:br>
             <a:r>
               <a:rPr sz="1800" dirty="0"/>
-              <a:t>함숫값 표현에서는 곱셈이 같은 위치끼리의 곱(점별 곱)이 된다</a:t>
+              <a:t>(평가 ↔ 보간)</a:t>
             </a:r>
           </a:p>
           <a:p>
             <a:r>
               <a:rPr sz="1800" dirty="0"/>
-              <a:t>절차: NTT로 옮긴다 → 점별로 곱한다 → 역NTT(역변환)로 되돌린다</a:t>
+              <a:t>함숫값 표현에서 곱셈은 같은 위치끼리의 곱(점별 곱) → 제곱이 아니라 항 개수에 비례</a:t>
             </a:r>
           </a:p>
           <a:p>
             <a:r>
               <a:rPr sz="1800" dirty="0"/>
               <a:t>복소수 FFT를 "소수로 나눈 나머지" 위에서 한 것 → 이름이 "수론적 변환"</a:t>
-            </a:r>
-          </a:p>
-          <a:p>
-            <a:r>
-              <a:rPr sz="1800" dirty="0"/>
-              <a:t>변환 자체도 분할정복으로 빠르게 계산된다</a:t>
             </a:r>
           </a:p>
         </p:txBody>
@@ -13707,36 +14610,564 @@
           </a:p>
         </p:txBody>
       </p:sp>
-      <p:pic>
-        <p:nvPicPr>
-          <p:cNvPr id="7" name="그림 6">
-            <a:extLst>
-              <a:ext uri="{FF2B5EF4-FFF2-40B4-BE49-F238E27FC236}">
-                <a16:creationId xmlns:a16="http://schemas.microsoft.com/office/drawing/2014/main" id="{17B7D7DA-35E2-AAA7-5A38-8BE14BC27A0E}"/>
-              </a:ext>
-            </a:extLst>
-          </p:cNvPr>
-          <p:cNvPicPr>
-            <a:picLocks noChangeAspect="1"/>
-          </p:cNvPicPr>
-          <p:nvPr/>
-        </p:nvPicPr>
-        <p:blipFill>
-          <a:blip r:embed="rId2"/>
-          <a:stretch>
-            <a:fillRect/>
-          </a:stretch>
-        </p:blipFill>
-        <p:spPr>
-          <a:xfrm>
-            <a:off x="1295400" y="4340112"/>
-            <a:ext cx="8334864" cy="1989888"/>
-          </a:xfrm>
-          <a:prstGeom prst="rect">
-            <a:avLst/>
-          </a:prstGeom>
-        </p:spPr>
-      </p:pic>
+      <p:graphicFrame>
+        <p:nvGraphicFramePr>
+          <p:cNvPr id="5" name="Table 4"/>
+          <p:cNvGraphicFramePr>
+            <a:graphicFrameLocks noGrp="1"/>
+          </p:cNvGraphicFramePr>
+          <p:nvPr>
+            <p:extLst>
+              <p:ext uri="{D42A27DB-BD31-4B8C-83A1-F6EECF244321}">
+                <p14:modId xmlns:p14="http://schemas.microsoft.com/office/powerpoint/2010/main" val="1629459383"/>
+              </p:ext>
+            </p:extLst>
+          </p:nvPr>
+        </p:nvGraphicFramePr>
+        <p:xfrm>
+          <a:off x="841248" y="3645866"/>
+          <a:ext cx="10512552" cy="1463040"/>
+        </p:xfrm>
+        <a:graphic>
+          <a:graphicData uri="http://schemas.openxmlformats.org/drawingml/2006/table">
+            <a:tbl>
+              <a:tblPr firstRow="1" bandRow="1">
+                <a:tableStyleId>{5C22544A-7EE6-4342-B048-85BDC9FD1C3A}</a:tableStyleId>
+              </a:tblPr>
+              <a:tblGrid>
+                <a:gridCol w="3504184">
+                  <a:extLst>
+                    <a:ext uri="{9D8B030D-6E8A-4147-A177-3AD203B41FA5}">
+                      <a16:colId xmlns:a16="http://schemas.microsoft.com/office/drawing/2014/main" val="20000"/>
+                    </a:ext>
+                  </a:extLst>
+                </a:gridCol>
+                <a:gridCol w="3504184">
+                  <a:extLst>
+                    <a:ext uri="{9D8B030D-6E8A-4147-A177-3AD203B41FA5}">
+                      <a16:colId xmlns:a16="http://schemas.microsoft.com/office/drawing/2014/main" val="20001"/>
+                    </a:ext>
+                  </a:extLst>
+                </a:gridCol>
+                <a:gridCol w="3504184">
+                  <a:extLst>
+                    <a:ext uri="{9D8B030D-6E8A-4147-A177-3AD203B41FA5}">
+                      <a16:colId xmlns:a16="http://schemas.microsoft.com/office/drawing/2014/main" val="20002"/>
+                    </a:ext>
+                  </a:extLst>
+                </a:gridCol>
+              </a:tblGrid>
+              <a:tr h="487680">
+                <a:tc>
+                  <a:txBody>
+                    <a:bodyPr/>
+                    <a:lstStyle/>
+                    <a:p>
+                      <a:pPr algn="ctr"/>
+                      <a:r>
+                        <a:rPr sz="1800" b="1" dirty="0">
+                          <a:solidFill>
+                            <a:schemeClr val="bg1"/>
+                          </a:solidFill>
+                        </a:rPr>
+                        <a:t>표현</a:t>
+                      </a:r>
+                    </a:p>
+                  </a:txBody>
+                  <a:tcPr anchor="ctr">
+                    <a:lnL w="12700" cap="flat" cmpd="sng" algn="ctr">
+                      <a:solidFill>
+                        <a:schemeClr val="tx1"/>
+                      </a:solidFill>
+                      <a:prstDash val="solid"/>
+                      <a:round/>
+                      <a:headEnd type="none" w="med" len="med"/>
+                      <a:tailEnd type="none" w="med" len="med"/>
+                    </a:lnL>
+                    <a:lnR w="12700" cap="flat" cmpd="sng" algn="ctr">
+                      <a:solidFill>
+                        <a:schemeClr val="tx1"/>
+                      </a:solidFill>
+                      <a:prstDash val="solid"/>
+                      <a:round/>
+                      <a:headEnd type="none" w="med" len="med"/>
+                      <a:tailEnd type="none" w="med" len="med"/>
+                    </a:lnR>
+                    <a:lnT w="12700" cap="flat" cmpd="sng" algn="ctr">
+                      <a:solidFill>
+                        <a:schemeClr val="tx1"/>
+                      </a:solidFill>
+                      <a:prstDash val="solid"/>
+                      <a:round/>
+                      <a:headEnd type="none" w="med" len="med"/>
+                      <a:tailEnd type="none" w="med" len="med"/>
+                    </a:lnT>
+                    <a:lnB w="12700" cap="flat" cmpd="sng" algn="ctr">
+                      <a:solidFill>
+                        <a:schemeClr val="tx1"/>
+                      </a:solidFill>
+                      <a:prstDash val="solid"/>
+                      <a:round/>
+                      <a:headEnd type="none" w="med" len="med"/>
+                      <a:tailEnd type="none" w="med" len="med"/>
+                    </a:lnB>
+                    <a:solidFill>
+                      <a:schemeClr val="accent2"/>
+                    </a:solidFill>
+                  </a:tcPr>
+                </a:tc>
+                <a:tc>
+                  <a:txBody>
+                    <a:bodyPr/>
+                    <a:lstStyle/>
+                    <a:p>
+                      <a:pPr algn="ctr"/>
+                      <a:r>
+                        <a:rPr sz="1800" b="1" dirty="0">
+                          <a:solidFill>
+                            <a:schemeClr val="bg1"/>
+                          </a:solidFill>
+                        </a:rPr>
+                        <a:t>담고 있는 것</a:t>
+                      </a:r>
+                    </a:p>
+                  </a:txBody>
+                  <a:tcPr anchor="ctr">
+                    <a:lnL w="12700" cap="flat" cmpd="sng" algn="ctr">
+                      <a:solidFill>
+                        <a:schemeClr val="tx1"/>
+                      </a:solidFill>
+                      <a:prstDash val="solid"/>
+                      <a:round/>
+                      <a:headEnd type="none" w="med" len="med"/>
+                      <a:tailEnd type="none" w="med" len="med"/>
+                    </a:lnL>
+                    <a:lnR w="12700" cap="flat" cmpd="sng" algn="ctr">
+                      <a:solidFill>
+                        <a:schemeClr val="tx1"/>
+                      </a:solidFill>
+                      <a:prstDash val="solid"/>
+                      <a:round/>
+                      <a:headEnd type="none" w="med" len="med"/>
+                      <a:tailEnd type="none" w="med" len="med"/>
+                    </a:lnR>
+                    <a:lnT w="12700" cap="flat" cmpd="sng" algn="ctr">
+                      <a:solidFill>
+                        <a:schemeClr val="tx1"/>
+                      </a:solidFill>
+                      <a:prstDash val="solid"/>
+                      <a:round/>
+                      <a:headEnd type="none" w="med" len="med"/>
+                      <a:tailEnd type="none" w="med" len="med"/>
+                    </a:lnT>
+                    <a:lnB w="12700" cap="flat" cmpd="sng" algn="ctr">
+                      <a:solidFill>
+                        <a:schemeClr val="tx1"/>
+                      </a:solidFill>
+                      <a:prstDash val="solid"/>
+                      <a:round/>
+                      <a:headEnd type="none" w="med" len="med"/>
+                      <a:tailEnd type="none" w="med" len="med"/>
+                    </a:lnB>
+                    <a:solidFill>
+                      <a:schemeClr val="accent2"/>
+                    </a:solidFill>
+                  </a:tcPr>
+                </a:tc>
+                <a:tc>
+                  <a:txBody>
+                    <a:bodyPr/>
+                    <a:lstStyle/>
+                    <a:p>
+                      <a:pPr algn="ctr"/>
+                      <a:r>
+                        <a:rPr sz="1800" b="1" dirty="0">
+                          <a:solidFill>
+                            <a:schemeClr val="bg1"/>
+                          </a:solidFill>
+                        </a:rPr>
+                        <a:t>곱셈 비용</a:t>
+                      </a:r>
+                    </a:p>
+                  </a:txBody>
+                  <a:tcPr anchor="ctr">
+                    <a:lnL w="12700" cap="flat" cmpd="sng" algn="ctr">
+                      <a:solidFill>
+                        <a:schemeClr val="tx1"/>
+                      </a:solidFill>
+                      <a:prstDash val="solid"/>
+                      <a:round/>
+                      <a:headEnd type="none" w="med" len="med"/>
+                      <a:tailEnd type="none" w="med" len="med"/>
+                    </a:lnL>
+                    <a:lnR w="12700" cap="flat" cmpd="sng" algn="ctr">
+                      <a:solidFill>
+                        <a:schemeClr val="tx1"/>
+                      </a:solidFill>
+                      <a:prstDash val="solid"/>
+                      <a:round/>
+                      <a:headEnd type="none" w="med" len="med"/>
+                      <a:tailEnd type="none" w="med" len="med"/>
+                    </a:lnR>
+                    <a:lnT w="12700" cap="flat" cmpd="sng" algn="ctr">
+                      <a:solidFill>
+                        <a:schemeClr val="tx1"/>
+                      </a:solidFill>
+                      <a:prstDash val="solid"/>
+                      <a:round/>
+                      <a:headEnd type="none" w="med" len="med"/>
+                      <a:tailEnd type="none" w="med" len="med"/>
+                    </a:lnT>
+                    <a:lnB w="12700" cap="flat" cmpd="sng" algn="ctr">
+                      <a:solidFill>
+                        <a:schemeClr val="tx1"/>
+                      </a:solidFill>
+                      <a:prstDash val="solid"/>
+                      <a:round/>
+                      <a:headEnd type="none" w="med" len="med"/>
+                      <a:tailEnd type="none" w="med" len="med"/>
+                    </a:lnB>
+                    <a:solidFill>
+                      <a:schemeClr val="accent2"/>
+                    </a:solidFill>
+                  </a:tcPr>
+                </a:tc>
+                <a:extLst>
+                  <a:ext uri="{0D108BD9-81ED-4DB2-BD59-A6C34878D82A}">
+                    <a16:rowId xmlns:a16="http://schemas.microsoft.com/office/drawing/2014/main" val="10000"/>
+                  </a:ext>
+                </a:extLst>
+              </a:tr>
+              <a:tr h="487680">
+                <a:tc>
+                  <a:txBody>
+                    <a:bodyPr/>
+                    <a:lstStyle/>
+                    <a:p>
+                      <a:pPr algn="ctr"/>
+                      <a:r>
+                        <a:rPr sz="1800" dirty="0"/>
+                        <a:t>계수 표현</a:t>
+                      </a:r>
+                    </a:p>
+                  </a:txBody>
+                  <a:tcPr anchor="ctr">
+                    <a:lnL w="12700" cap="flat" cmpd="sng" algn="ctr">
+                      <a:solidFill>
+                        <a:schemeClr val="tx1"/>
+                      </a:solidFill>
+                      <a:prstDash val="solid"/>
+                      <a:round/>
+                      <a:headEnd type="none" w="med" len="med"/>
+                      <a:tailEnd type="none" w="med" len="med"/>
+                    </a:lnL>
+                    <a:lnR w="12700" cap="flat" cmpd="sng" algn="ctr">
+                      <a:solidFill>
+                        <a:schemeClr val="tx1"/>
+                      </a:solidFill>
+                      <a:prstDash val="solid"/>
+                      <a:round/>
+                      <a:headEnd type="none" w="med" len="med"/>
+                      <a:tailEnd type="none" w="med" len="med"/>
+                    </a:lnR>
+                    <a:lnT w="12700" cap="flat" cmpd="sng" algn="ctr">
+                      <a:solidFill>
+                        <a:schemeClr val="tx1"/>
+                      </a:solidFill>
+                      <a:prstDash val="solid"/>
+                      <a:round/>
+                      <a:headEnd type="none" w="med" len="med"/>
+                      <a:tailEnd type="none" w="med" len="med"/>
+                    </a:lnT>
+                    <a:lnB w="12700" cap="flat" cmpd="sng" algn="ctr">
+                      <a:solidFill>
+                        <a:schemeClr val="tx1"/>
+                      </a:solidFill>
+                      <a:prstDash val="solid"/>
+                      <a:round/>
+                      <a:headEnd type="none" w="med" len="med"/>
+                      <a:tailEnd type="none" w="med" len="med"/>
+                    </a:lnB>
+                    <a:noFill/>
+                  </a:tcPr>
+                </a:tc>
+                <a:tc>
+                  <a:txBody>
+                    <a:bodyPr/>
+                    <a:lstStyle/>
+                    <a:p>
+                      <a:pPr algn="ctr"/>
+                      <a:r>
+                        <a:rPr sz="1800" dirty="0"/>
+                        <a:t>계수 n개</a:t>
+                      </a:r>
+                    </a:p>
+                  </a:txBody>
+                  <a:tcPr anchor="ctr">
+                    <a:lnL w="12700" cap="flat" cmpd="sng" algn="ctr">
+                      <a:solidFill>
+                        <a:schemeClr val="tx1"/>
+                      </a:solidFill>
+                      <a:prstDash val="solid"/>
+                      <a:round/>
+                      <a:headEnd type="none" w="med" len="med"/>
+                      <a:tailEnd type="none" w="med" len="med"/>
+                    </a:lnL>
+                    <a:lnR w="12700" cap="flat" cmpd="sng" algn="ctr">
+                      <a:solidFill>
+                        <a:schemeClr val="tx1"/>
+                      </a:solidFill>
+                      <a:prstDash val="solid"/>
+                      <a:round/>
+                      <a:headEnd type="none" w="med" len="med"/>
+                      <a:tailEnd type="none" w="med" len="med"/>
+                    </a:lnR>
+                    <a:lnT w="12700" cap="flat" cmpd="sng" algn="ctr">
+                      <a:solidFill>
+                        <a:schemeClr val="tx1"/>
+                      </a:solidFill>
+                      <a:prstDash val="solid"/>
+                      <a:round/>
+                      <a:headEnd type="none" w="med" len="med"/>
+                      <a:tailEnd type="none" w="med" len="med"/>
+                    </a:lnT>
+                    <a:lnB w="12700" cap="flat" cmpd="sng" algn="ctr">
+                      <a:solidFill>
+                        <a:schemeClr val="tx1"/>
+                      </a:solidFill>
+                      <a:prstDash val="solid"/>
+                      <a:round/>
+                      <a:headEnd type="none" w="med" len="med"/>
+                      <a:tailEnd type="none" w="med" len="med"/>
+                    </a:lnB>
+                    <a:noFill/>
+                  </a:tcPr>
+                </a:tc>
+                <a:tc>
+                  <a:txBody>
+                    <a:bodyPr/>
+                    <a:lstStyle/>
+                    <a:p>
+                      <a:pPr algn="ctr"/>
+                      <a:r>
+                        <a:rPr sz="1800" dirty="0"/>
+                        <a:t>항 개수의 제곱</a:t>
+                      </a:r>
+                    </a:p>
+                  </a:txBody>
+                  <a:tcPr anchor="ctr">
+                    <a:lnL w="12700" cap="flat" cmpd="sng" algn="ctr">
+                      <a:solidFill>
+                        <a:schemeClr val="tx1"/>
+                      </a:solidFill>
+                      <a:prstDash val="solid"/>
+                      <a:round/>
+                      <a:headEnd type="none" w="med" len="med"/>
+                      <a:tailEnd type="none" w="med" len="med"/>
+                    </a:lnL>
+                    <a:lnR w="12700" cap="flat" cmpd="sng" algn="ctr">
+                      <a:solidFill>
+                        <a:schemeClr val="tx1"/>
+                      </a:solidFill>
+                      <a:prstDash val="solid"/>
+                      <a:round/>
+                      <a:headEnd type="none" w="med" len="med"/>
+                      <a:tailEnd type="none" w="med" len="med"/>
+                    </a:lnR>
+                    <a:lnT w="12700" cap="flat" cmpd="sng" algn="ctr">
+                      <a:solidFill>
+                        <a:schemeClr val="tx1"/>
+                      </a:solidFill>
+                      <a:prstDash val="solid"/>
+                      <a:round/>
+                      <a:headEnd type="none" w="med" len="med"/>
+                      <a:tailEnd type="none" w="med" len="med"/>
+                    </a:lnT>
+                    <a:lnB w="12700" cap="flat" cmpd="sng" algn="ctr">
+                      <a:solidFill>
+                        <a:schemeClr val="tx1"/>
+                      </a:solidFill>
+                      <a:prstDash val="solid"/>
+                      <a:round/>
+                      <a:headEnd type="none" w="med" len="med"/>
+                      <a:tailEnd type="none" w="med" len="med"/>
+                    </a:lnB>
+                    <a:noFill/>
+                  </a:tcPr>
+                </a:tc>
+                <a:extLst>
+                  <a:ext uri="{0D108BD9-81ED-4DB2-BD59-A6C34878D82A}">
+                    <a16:rowId xmlns:a16="http://schemas.microsoft.com/office/drawing/2014/main" val="10001"/>
+                  </a:ext>
+                </a:extLst>
+              </a:tr>
+              <a:tr h="487680">
+                <a:tc>
+                  <a:txBody>
+                    <a:bodyPr/>
+                    <a:lstStyle/>
+                    <a:p>
+                      <a:pPr algn="ctr"/>
+                      <a:r>
+                        <a:rPr sz="1800" dirty="0"/>
+                        <a:t>함숫값 표현</a:t>
+                      </a:r>
+                    </a:p>
+                  </a:txBody>
+                  <a:tcPr anchor="ctr">
+                    <a:lnL w="12700" cap="flat" cmpd="sng" algn="ctr">
+                      <a:solidFill>
+                        <a:schemeClr val="tx1"/>
+                      </a:solidFill>
+                      <a:prstDash val="solid"/>
+                      <a:round/>
+                      <a:headEnd type="none" w="med" len="med"/>
+                      <a:tailEnd type="none" w="med" len="med"/>
+                    </a:lnL>
+                    <a:lnR w="12700" cap="flat" cmpd="sng" algn="ctr">
+                      <a:solidFill>
+                        <a:schemeClr val="tx1"/>
+                      </a:solidFill>
+                      <a:prstDash val="solid"/>
+                      <a:round/>
+                      <a:headEnd type="none" w="med" len="med"/>
+                      <a:tailEnd type="none" w="med" len="med"/>
+                    </a:lnR>
+                    <a:lnT w="12700" cap="flat" cmpd="sng" algn="ctr">
+                      <a:solidFill>
+                        <a:schemeClr val="tx1"/>
+                      </a:solidFill>
+                      <a:prstDash val="solid"/>
+                      <a:round/>
+                      <a:headEnd type="none" w="med" len="med"/>
+                      <a:tailEnd type="none" w="med" len="med"/>
+                    </a:lnT>
+                    <a:lnB w="12700" cap="flat" cmpd="sng" algn="ctr">
+                      <a:solidFill>
+                        <a:schemeClr val="tx1"/>
+                      </a:solidFill>
+                      <a:prstDash val="solid"/>
+                      <a:round/>
+                      <a:headEnd type="none" w="med" len="med"/>
+                      <a:tailEnd type="none" w="med" len="med"/>
+                    </a:lnB>
+                    <a:noFill/>
+                  </a:tcPr>
+                </a:tc>
+                <a:tc>
+                  <a:txBody>
+                    <a:bodyPr/>
+                    <a:lstStyle/>
+                    <a:p>
+                      <a:pPr algn="ctr"/>
+                      <a:r>
+                        <a:rPr sz="1800" dirty="0"/>
+                        <a:t>여러 점에서의 함숫값 n개</a:t>
+                      </a:r>
+                    </a:p>
+                  </a:txBody>
+                  <a:tcPr anchor="ctr">
+                    <a:lnL w="12700" cap="flat" cmpd="sng" algn="ctr">
+                      <a:solidFill>
+                        <a:schemeClr val="tx1"/>
+                      </a:solidFill>
+                      <a:prstDash val="solid"/>
+                      <a:round/>
+                      <a:headEnd type="none" w="med" len="med"/>
+                      <a:tailEnd type="none" w="med" len="med"/>
+                    </a:lnL>
+                    <a:lnR w="12700" cap="flat" cmpd="sng" algn="ctr">
+                      <a:solidFill>
+                        <a:schemeClr val="tx1"/>
+                      </a:solidFill>
+                      <a:prstDash val="solid"/>
+                      <a:round/>
+                      <a:headEnd type="none" w="med" len="med"/>
+                      <a:tailEnd type="none" w="med" len="med"/>
+                    </a:lnR>
+                    <a:lnT w="12700" cap="flat" cmpd="sng" algn="ctr">
+                      <a:solidFill>
+                        <a:schemeClr val="tx1"/>
+                      </a:solidFill>
+                      <a:prstDash val="solid"/>
+                      <a:round/>
+                      <a:headEnd type="none" w="med" len="med"/>
+                      <a:tailEnd type="none" w="med" len="med"/>
+                    </a:lnT>
+                    <a:lnB w="12700" cap="flat" cmpd="sng" algn="ctr">
+                      <a:solidFill>
+                        <a:schemeClr val="tx1"/>
+                      </a:solidFill>
+                      <a:prstDash val="solid"/>
+                      <a:round/>
+                      <a:headEnd type="none" w="med" len="med"/>
+                      <a:tailEnd type="none" w="med" len="med"/>
+                    </a:lnB>
+                    <a:noFill/>
+                  </a:tcPr>
+                </a:tc>
+                <a:tc>
+                  <a:txBody>
+                    <a:bodyPr/>
+                    <a:lstStyle/>
+                    <a:p>
+                      <a:pPr algn="ctr"/>
+                      <a:r>
+                        <a:rPr sz="1800" dirty="0"/>
+                        <a:t>항 개수에 비례 (점별 곱)</a:t>
+                      </a:r>
+                    </a:p>
+                  </a:txBody>
+                  <a:tcPr anchor="ctr">
+                    <a:lnL w="12700" cap="flat" cmpd="sng" algn="ctr">
+                      <a:solidFill>
+                        <a:schemeClr val="tx1"/>
+                      </a:solidFill>
+                      <a:prstDash val="solid"/>
+                      <a:round/>
+                      <a:headEnd type="none" w="med" len="med"/>
+                      <a:tailEnd type="none" w="med" len="med"/>
+                    </a:lnL>
+                    <a:lnR w="12700" cap="flat" cmpd="sng" algn="ctr">
+                      <a:solidFill>
+                        <a:schemeClr val="tx1"/>
+                      </a:solidFill>
+                      <a:prstDash val="solid"/>
+                      <a:round/>
+                      <a:headEnd type="none" w="med" len="med"/>
+                      <a:tailEnd type="none" w="med" len="med"/>
+                    </a:lnR>
+                    <a:lnT w="12700" cap="flat" cmpd="sng" algn="ctr">
+                      <a:solidFill>
+                        <a:schemeClr val="tx1"/>
+                      </a:solidFill>
+                      <a:prstDash val="solid"/>
+                      <a:round/>
+                      <a:headEnd type="none" w="med" len="med"/>
+                      <a:tailEnd type="none" w="med" len="med"/>
+                    </a:lnT>
+                    <a:lnB w="12700" cap="flat" cmpd="sng" algn="ctr">
+                      <a:solidFill>
+                        <a:schemeClr val="tx1"/>
+                      </a:solidFill>
+                      <a:prstDash val="solid"/>
+                      <a:round/>
+                      <a:headEnd type="none" w="med" len="med"/>
+                      <a:tailEnd type="none" w="med" len="med"/>
+                    </a:lnB>
+                    <a:noFill/>
+                  </a:tcPr>
+                </a:tc>
+                <a:extLst>
+                  <a:ext uri="{0D108BD9-81ED-4DB2-BD59-A6C34878D82A}">
+                    <a16:rowId xmlns:a16="http://schemas.microsoft.com/office/drawing/2014/main" val="10002"/>
+                  </a:ext>
+                </a:extLst>
+              </a:tr>
+            </a:tbl>
+          </a:graphicData>
+        </a:graphic>
+      </p:graphicFrame>
     </p:spTree>
   </p:cSld>
   <p:clrMapOvr>
@@ -13779,25 +15210,8 @@
           <a:p>
             <a:r>
               <a:rPr dirty="0"/>
-              <a:t>결과</a:t>
+              <a:t>NTT를 빠르게: 반씩 쪼개기</a:t>
             </a:r>
-            <a:r>
-              <a:rPr lang="en-US" altLang="ko-KR" dirty="0"/>
-              <a:t>:</a:t>
-            </a:r>
-            <a:r>
-              <a:rPr lang="ko-KR" altLang="en-US" dirty="0"/>
-              <a:t> 얼마나 빨라지고</a:t>
-            </a:r>
-            <a:r>
-              <a:rPr lang="en-US" altLang="ko-KR" dirty="0"/>
-              <a:t>,</a:t>
-            </a:r>
-            <a:r>
-              <a:rPr lang="ko-KR" altLang="en-US" dirty="0"/>
-              <a:t> 무엇이 그대로인가</a:t>
-            </a:r>
-            <a:endParaRPr dirty="0"/>
           </a:p>
         </p:txBody>
       </p:sp>
@@ -13818,31 +15232,27 @@
           <a:p>
             <a:r>
               <a:rPr sz="1800" dirty="0"/>
-              <a:t>곱셈 비용이 "항 개수의 제곱"에서 "항 개수 × 로그" 수준으로 내려간다</a:t>
+              <a:t>NTT 계산은 x</a:t>
             </a:r>
-          </a:p>
-          <a:p>
+            <a:r>
+              <a:rPr sz="1800" baseline="30000" dirty="0"/>
+              <a:t>n</a:t>
+            </a:r>
             <a:r>
               <a:rPr sz="1800" dirty="0"/>
-              <a:t>항 256개에서 실측 약 100배 이상 (Dilithium 서명 기준 약 120배)</a:t>
+              <a:t>+1을 반씩 인수분해하며 다항식을 점점 작은 나머지로 쪼개는 분할정복</a:t>
             </a:r>
           </a:p>
           <a:p>
             <a:r>
               <a:rPr sz="1800" dirty="0"/>
-              <a:t>추가 메모리도 거의 없다(제자리 계산) → 하드웨어·임베디드에 유리</a:t>
+              <a:t>각 층은 "상수 곱 한 번 + 덧셈·뺄셈"(butterfly), 층 수가 log n이라 전체 O(n log n)</a:t>
             </a:r>
           </a:p>
           <a:p>
             <a:r>
               <a:rPr sz="1800" dirty="0"/>
-              <a:t>NTT는 순수한 구현 최적화 — 계산 값도 안전성 논리도 그대로, 더 빠를 뿐</a:t>
-            </a:r>
-          </a:p>
-          <a:p>
-            <a:r>
-              <a:rPr sz="1800" dirty="0"/>
-              <a:t>Kyber·Dilithium 구현에서 NTT는 필수 (Kyber는 변형 NTT² 사용, 아이디어는 동일)</a:t>
+              <a:t>역NTT는 같은 트리를 리프에서 뿌리로 거꾸로 올라가며 계산 (역시 O(n log n))</a:t>
             </a:r>
           </a:p>
         </p:txBody>
@@ -13875,7 +15285,7 @@
           <p:cNvPr id="6" name="Picture 4">
             <a:extLst>
               <a:ext uri="{FF2B5EF4-FFF2-40B4-BE49-F238E27FC236}">
-                <a16:creationId xmlns:a16="http://schemas.microsoft.com/office/drawing/2014/main" id="{720AB3D1-0773-4ABB-35A9-F453584520C3}"/>
+                <a16:creationId xmlns:a16="http://schemas.microsoft.com/office/drawing/2014/main" id="{3EA05779-8BE5-F226-0A63-F4F38B421E31}"/>
               </a:ext>
             </a:extLst>
           </p:cNvPr>
@@ -13899,8 +15309,8 @@
         </p:blipFill>
         <p:spPr bwMode="auto">
           <a:xfrm>
-            <a:off x="838200" y="4225925"/>
-            <a:ext cx="5191125" cy="2495550"/>
+            <a:off x="3220088" y="3231314"/>
+            <a:ext cx="5751824" cy="2765097"/>
           </a:xfrm>
           <a:prstGeom prst="rect">
             <a:avLst/>
@@ -13915,36 +15325,6 @@
               </a14:hiddenFill>
             </a:ext>
           </a:extLst>
-        </p:spPr>
-      </p:pic>
-      <p:pic>
-        <p:nvPicPr>
-          <p:cNvPr id="7" name="그림 6">
-            <a:extLst>
-              <a:ext uri="{FF2B5EF4-FFF2-40B4-BE49-F238E27FC236}">
-                <a16:creationId xmlns:a16="http://schemas.microsoft.com/office/drawing/2014/main" id="{72AC1AD2-1BC1-31FE-1CB4-3295AFE66DA2}"/>
-              </a:ext>
-            </a:extLst>
-          </p:cNvPr>
-          <p:cNvPicPr>
-            <a:picLocks noChangeAspect="1"/>
-          </p:cNvPicPr>
-          <p:nvPr/>
-        </p:nvPicPr>
-        <p:blipFill>
-          <a:blip r:embed="rId3"/>
-          <a:stretch>
-            <a:fillRect/>
-          </a:stretch>
-        </p:blipFill>
-        <p:spPr>
-          <a:xfrm>
-            <a:off x="6673382" y="4707470"/>
-            <a:ext cx="4036360" cy="1455736"/>
-          </a:xfrm>
-          <a:prstGeom prst="rect">
-            <a:avLst/>
-          </a:prstGeom>
         </p:spPr>
       </p:pic>
     </p:spTree>
@@ -13979,7 +15359,7 @@
             <a:spLocks noGrp="1"/>
           </p:cNvSpPr>
           <p:nvPr>
-            <p:ph type="ctrTitle"/>
+            <p:ph type="title"/>
           </p:nvPr>
         </p:nvSpPr>
         <p:spPr/>
@@ -13989,7 +15369,41 @@
           <a:p>
             <a:r>
               <a:rPr dirty="0"/>
-              <a:t>Introduction to Hash-Based Signatures</a:t>
+              <a:t>리프 순서와 비트 반전</a:t>
+            </a:r>
+          </a:p>
+        </p:txBody>
+      </p:sp>
+      <p:sp>
+        <p:nvSpPr>
+          <p:cNvPr id="3" name="Content Placeholder 2"/>
+          <p:cNvSpPr>
+            <a:spLocks noGrp="1"/>
+          </p:cNvSpPr>
+          <p:nvPr>
+            <p:ph idx="1"/>
+          </p:nvPr>
+        </p:nvSpPr>
+        <p:spPr/>
+        <p:txBody>
+          <a:bodyPr/>
+          <a:lstStyle/>
+          <a:p>
+            <a:r>
+              <a:rPr sz="1800" dirty="0"/>
+              <a:t>쪼개기가 자연히 내놓는 리프 순서는 정의가 원하는 "정렬된 홀수 거듭제곱" 순서와 다르다</a:t>
+            </a:r>
+          </a:p>
+          <a:p>
+            <a:r>
+              <a:rPr sz="1800" dirty="0"/>
+              <a:t>두 순서는 인덱스의 이진 표현을 뒤집은 관계 — 비트 반전(bit reversal)</a:t>
+            </a:r>
+          </a:p>
+          <a:p>
+            <a:r>
+              <a:rPr sz="1800" dirty="0"/>
+              <a:t>표준(FIPS 203/204)은 재배열 비용을 없애려 이 뒤집힌 순서를 그대로 정의로 삼는다</a:t>
             </a:r>
           </a:p>
         </p:txBody>
@@ -14017,6 +15431,2053 @@
           </a:p>
         </p:txBody>
       </p:sp>
+      <p:graphicFrame>
+        <p:nvGraphicFramePr>
+          <p:cNvPr id="5" name="Table 4"/>
+          <p:cNvGraphicFramePr>
+            <a:graphicFrameLocks noGrp="1"/>
+          </p:cNvGraphicFramePr>
+          <p:nvPr>
+            <p:extLst>
+              <p:ext uri="{D42A27DB-BD31-4B8C-83A1-F6EECF244321}">
+                <p14:modId xmlns:p14="http://schemas.microsoft.com/office/powerpoint/2010/main" val="2719816287"/>
+              </p:ext>
+            </p:extLst>
+          </p:nvPr>
+        </p:nvGraphicFramePr>
+        <p:xfrm>
+          <a:off x="838200" y="3429000"/>
+          <a:ext cx="10518651" cy="1828800"/>
+        </p:xfrm>
+        <a:graphic>
+          <a:graphicData uri="http://schemas.openxmlformats.org/drawingml/2006/table">
+            <a:tbl>
+              <a:tblPr firstRow="1" bandRow="1">
+                <a:tableStyleId>{5C22544A-7EE6-4342-B048-85BDC9FD1C3A}</a:tableStyleId>
+              </a:tblPr>
+              <a:tblGrid>
+                <a:gridCol w="1168739">
+                  <a:extLst>
+                    <a:ext uri="{9D8B030D-6E8A-4147-A177-3AD203B41FA5}">
+                      <a16:colId xmlns:a16="http://schemas.microsoft.com/office/drawing/2014/main" val="20000"/>
+                    </a:ext>
+                  </a:extLst>
+                </a:gridCol>
+                <a:gridCol w="1168739">
+                  <a:extLst>
+                    <a:ext uri="{9D8B030D-6E8A-4147-A177-3AD203B41FA5}">
+                      <a16:colId xmlns:a16="http://schemas.microsoft.com/office/drawing/2014/main" val="20001"/>
+                    </a:ext>
+                  </a:extLst>
+                </a:gridCol>
+                <a:gridCol w="1168739">
+                  <a:extLst>
+                    <a:ext uri="{9D8B030D-6E8A-4147-A177-3AD203B41FA5}">
+                      <a16:colId xmlns:a16="http://schemas.microsoft.com/office/drawing/2014/main" val="20002"/>
+                    </a:ext>
+                  </a:extLst>
+                </a:gridCol>
+                <a:gridCol w="1168739">
+                  <a:extLst>
+                    <a:ext uri="{9D8B030D-6E8A-4147-A177-3AD203B41FA5}">
+                      <a16:colId xmlns:a16="http://schemas.microsoft.com/office/drawing/2014/main" val="20003"/>
+                    </a:ext>
+                  </a:extLst>
+                </a:gridCol>
+                <a:gridCol w="1168739">
+                  <a:extLst>
+                    <a:ext uri="{9D8B030D-6E8A-4147-A177-3AD203B41FA5}">
+                      <a16:colId xmlns:a16="http://schemas.microsoft.com/office/drawing/2014/main" val="20004"/>
+                    </a:ext>
+                  </a:extLst>
+                </a:gridCol>
+                <a:gridCol w="1168739">
+                  <a:extLst>
+                    <a:ext uri="{9D8B030D-6E8A-4147-A177-3AD203B41FA5}">
+                      <a16:colId xmlns:a16="http://schemas.microsoft.com/office/drawing/2014/main" val="20005"/>
+                    </a:ext>
+                  </a:extLst>
+                </a:gridCol>
+                <a:gridCol w="1168739">
+                  <a:extLst>
+                    <a:ext uri="{9D8B030D-6E8A-4147-A177-3AD203B41FA5}">
+                      <a16:colId xmlns:a16="http://schemas.microsoft.com/office/drawing/2014/main" val="20006"/>
+                    </a:ext>
+                  </a:extLst>
+                </a:gridCol>
+                <a:gridCol w="1168739">
+                  <a:extLst>
+                    <a:ext uri="{9D8B030D-6E8A-4147-A177-3AD203B41FA5}">
+                      <a16:colId xmlns:a16="http://schemas.microsoft.com/office/drawing/2014/main" val="20007"/>
+                    </a:ext>
+                  </a:extLst>
+                </a:gridCol>
+                <a:gridCol w="1168739">
+                  <a:extLst>
+                    <a:ext uri="{9D8B030D-6E8A-4147-A177-3AD203B41FA5}">
+                      <a16:colId xmlns:a16="http://schemas.microsoft.com/office/drawing/2014/main" val="20008"/>
+                    </a:ext>
+                  </a:extLst>
+                </a:gridCol>
+              </a:tblGrid>
+              <a:tr h="457200">
+                <a:tc>
+                  <a:txBody>
+                    <a:bodyPr/>
+                    <a:lstStyle/>
+                    <a:p>
+                      <a:pPr algn="ctr"/>
+                      <a:r>
+                        <a:rPr sz="1800" b="1" dirty="0">
+                          <a:solidFill>
+                            <a:schemeClr val="bg1"/>
+                          </a:solidFill>
+                        </a:rPr>
+                        <a:t>위치</a:t>
+                      </a:r>
+                    </a:p>
+                  </a:txBody>
+                  <a:tcPr anchor="ctr">
+                    <a:lnL w="12700" cap="flat" cmpd="sng" algn="ctr">
+                      <a:solidFill>
+                        <a:schemeClr val="tx1"/>
+                      </a:solidFill>
+                      <a:prstDash val="solid"/>
+                      <a:round/>
+                      <a:headEnd type="none" w="med" len="med"/>
+                      <a:tailEnd type="none" w="med" len="med"/>
+                    </a:lnL>
+                    <a:lnR w="12700" cap="flat" cmpd="sng" algn="ctr">
+                      <a:solidFill>
+                        <a:schemeClr val="tx1"/>
+                      </a:solidFill>
+                      <a:prstDash val="solid"/>
+                      <a:round/>
+                      <a:headEnd type="none" w="med" len="med"/>
+                      <a:tailEnd type="none" w="med" len="med"/>
+                    </a:lnR>
+                    <a:lnT w="12700" cap="flat" cmpd="sng" algn="ctr">
+                      <a:solidFill>
+                        <a:schemeClr val="tx1"/>
+                      </a:solidFill>
+                      <a:prstDash val="solid"/>
+                      <a:round/>
+                      <a:headEnd type="none" w="med" len="med"/>
+                      <a:tailEnd type="none" w="med" len="med"/>
+                    </a:lnT>
+                    <a:lnB w="12700" cap="flat" cmpd="sng" algn="ctr">
+                      <a:solidFill>
+                        <a:schemeClr val="tx1"/>
+                      </a:solidFill>
+                      <a:prstDash val="solid"/>
+                      <a:round/>
+                      <a:headEnd type="none" w="med" len="med"/>
+                      <a:tailEnd type="none" w="med" len="med"/>
+                    </a:lnB>
+                    <a:solidFill>
+                      <a:schemeClr val="accent2"/>
+                    </a:solidFill>
+                  </a:tcPr>
+                </a:tc>
+                <a:tc>
+                  <a:txBody>
+                    <a:bodyPr/>
+                    <a:lstStyle/>
+                    <a:p>
+                      <a:pPr algn="ctr"/>
+                      <a:r>
+                        <a:rPr sz="1800" b="1" dirty="0">
+                          <a:solidFill>
+                            <a:schemeClr val="bg1"/>
+                          </a:solidFill>
+                        </a:rPr>
+                        <a:t>0</a:t>
+                      </a:r>
+                    </a:p>
+                  </a:txBody>
+                  <a:tcPr anchor="ctr">
+                    <a:lnL w="12700" cap="flat" cmpd="sng" algn="ctr">
+                      <a:solidFill>
+                        <a:schemeClr val="tx1"/>
+                      </a:solidFill>
+                      <a:prstDash val="solid"/>
+                      <a:round/>
+                      <a:headEnd type="none" w="med" len="med"/>
+                      <a:tailEnd type="none" w="med" len="med"/>
+                    </a:lnL>
+                    <a:lnR w="12700" cap="flat" cmpd="sng" algn="ctr">
+                      <a:solidFill>
+                        <a:schemeClr val="tx1"/>
+                      </a:solidFill>
+                      <a:prstDash val="solid"/>
+                      <a:round/>
+                      <a:headEnd type="none" w="med" len="med"/>
+                      <a:tailEnd type="none" w="med" len="med"/>
+                    </a:lnR>
+                    <a:lnT w="12700" cap="flat" cmpd="sng" algn="ctr">
+                      <a:solidFill>
+                        <a:schemeClr val="tx1"/>
+                      </a:solidFill>
+                      <a:prstDash val="solid"/>
+                      <a:round/>
+                      <a:headEnd type="none" w="med" len="med"/>
+                      <a:tailEnd type="none" w="med" len="med"/>
+                    </a:lnT>
+                    <a:lnB w="12700" cap="flat" cmpd="sng" algn="ctr">
+                      <a:solidFill>
+                        <a:schemeClr val="tx1"/>
+                      </a:solidFill>
+                      <a:prstDash val="solid"/>
+                      <a:round/>
+                      <a:headEnd type="none" w="med" len="med"/>
+                      <a:tailEnd type="none" w="med" len="med"/>
+                    </a:lnB>
+                    <a:solidFill>
+                      <a:schemeClr val="accent2"/>
+                    </a:solidFill>
+                  </a:tcPr>
+                </a:tc>
+                <a:tc>
+                  <a:txBody>
+                    <a:bodyPr/>
+                    <a:lstStyle/>
+                    <a:p>
+                      <a:pPr algn="ctr"/>
+                      <a:r>
+                        <a:rPr sz="1800" b="1" dirty="0">
+                          <a:solidFill>
+                            <a:schemeClr val="bg1"/>
+                          </a:solidFill>
+                        </a:rPr>
+                        <a:t>1</a:t>
+                      </a:r>
+                    </a:p>
+                  </a:txBody>
+                  <a:tcPr anchor="ctr">
+                    <a:lnL w="12700" cap="flat" cmpd="sng" algn="ctr">
+                      <a:solidFill>
+                        <a:schemeClr val="tx1"/>
+                      </a:solidFill>
+                      <a:prstDash val="solid"/>
+                      <a:round/>
+                      <a:headEnd type="none" w="med" len="med"/>
+                      <a:tailEnd type="none" w="med" len="med"/>
+                    </a:lnL>
+                    <a:lnR w="12700" cap="flat" cmpd="sng" algn="ctr">
+                      <a:solidFill>
+                        <a:schemeClr val="tx1"/>
+                      </a:solidFill>
+                      <a:prstDash val="solid"/>
+                      <a:round/>
+                      <a:headEnd type="none" w="med" len="med"/>
+                      <a:tailEnd type="none" w="med" len="med"/>
+                    </a:lnR>
+                    <a:lnT w="12700" cap="flat" cmpd="sng" algn="ctr">
+                      <a:solidFill>
+                        <a:schemeClr val="tx1"/>
+                      </a:solidFill>
+                      <a:prstDash val="solid"/>
+                      <a:round/>
+                      <a:headEnd type="none" w="med" len="med"/>
+                      <a:tailEnd type="none" w="med" len="med"/>
+                    </a:lnT>
+                    <a:lnB w="12700" cap="flat" cmpd="sng" algn="ctr">
+                      <a:solidFill>
+                        <a:schemeClr val="tx1"/>
+                      </a:solidFill>
+                      <a:prstDash val="solid"/>
+                      <a:round/>
+                      <a:headEnd type="none" w="med" len="med"/>
+                      <a:tailEnd type="none" w="med" len="med"/>
+                    </a:lnB>
+                    <a:solidFill>
+                      <a:schemeClr val="accent2"/>
+                    </a:solidFill>
+                  </a:tcPr>
+                </a:tc>
+                <a:tc>
+                  <a:txBody>
+                    <a:bodyPr/>
+                    <a:lstStyle/>
+                    <a:p>
+                      <a:pPr algn="ctr"/>
+                      <a:r>
+                        <a:rPr sz="1800" b="1" dirty="0">
+                          <a:solidFill>
+                            <a:schemeClr val="bg1"/>
+                          </a:solidFill>
+                        </a:rPr>
+                        <a:t>2</a:t>
+                      </a:r>
+                    </a:p>
+                  </a:txBody>
+                  <a:tcPr anchor="ctr">
+                    <a:lnL w="12700" cap="flat" cmpd="sng" algn="ctr">
+                      <a:solidFill>
+                        <a:schemeClr val="tx1"/>
+                      </a:solidFill>
+                      <a:prstDash val="solid"/>
+                      <a:round/>
+                      <a:headEnd type="none" w="med" len="med"/>
+                      <a:tailEnd type="none" w="med" len="med"/>
+                    </a:lnL>
+                    <a:lnR w="12700" cap="flat" cmpd="sng" algn="ctr">
+                      <a:solidFill>
+                        <a:schemeClr val="tx1"/>
+                      </a:solidFill>
+                      <a:prstDash val="solid"/>
+                      <a:round/>
+                      <a:headEnd type="none" w="med" len="med"/>
+                      <a:tailEnd type="none" w="med" len="med"/>
+                    </a:lnR>
+                    <a:lnT w="12700" cap="flat" cmpd="sng" algn="ctr">
+                      <a:solidFill>
+                        <a:schemeClr val="tx1"/>
+                      </a:solidFill>
+                      <a:prstDash val="solid"/>
+                      <a:round/>
+                      <a:headEnd type="none" w="med" len="med"/>
+                      <a:tailEnd type="none" w="med" len="med"/>
+                    </a:lnT>
+                    <a:lnB w="12700" cap="flat" cmpd="sng" algn="ctr">
+                      <a:solidFill>
+                        <a:schemeClr val="tx1"/>
+                      </a:solidFill>
+                      <a:prstDash val="solid"/>
+                      <a:round/>
+                      <a:headEnd type="none" w="med" len="med"/>
+                      <a:tailEnd type="none" w="med" len="med"/>
+                    </a:lnB>
+                    <a:solidFill>
+                      <a:schemeClr val="accent2"/>
+                    </a:solidFill>
+                  </a:tcPr>
+                </a:tc>
+                <a:tc>
+                  <a:txBody>
+                    <a:bodyPr/>
+                    <a:lstStyle/>
+                    <a:p>
+                      <a:pPr algn="ctr"/>
+                      <a:r>
+                        <a:rPr sz="1800" b="1" dirty="0">
+                          <a:solidFill>
+                            <a:schemeClr val="bg1"/>
+                          </a:solidFill>
+                        </a:rPr>
+                        <a:t>3</a:t>
+                      </a:r>
+                    </a:p>
+                  </a:txBody>
+                  <a:tcPr anchor="ctr">
+                    <a:lnL w="12700" cap="flat" cmpd="sng" algn="ctr">
+                      <a:solidFill>
+                        <a:schemeClr val="tx1"/>
+                      </a:solidFill>
+                      <a:prstDash val="solid"/>
+                      <a:round/>
+                      <a:headEnd type="none" w="med" len="med"/>
+                      <a:tailEnd type="none" w="med" len="med"/>
+                    </a:lnL>
+                    <a:lnR w="12700" cap="flat" cmpd="sng" algn="ctr">
+                      <a:solidFill>
+                        <a:schemeClr val="tx1"/>
+                      </a:solidFill>
+                      <a:prstDash val="solid"/>
+                      <a:round/>
+                      <a:headEnd type="none" w="med" len="med"/>
+                      <a:tailEnd type="none" w="med" len="med"/>
+                    </a:lnR>
+                    <a:lnT w="12700" cap="flat" cmpd="sng" algn="ctr">
+                      <a:solidFill>
+                        <a:schemeClr val="tx1"/>
+                      </a:solidFill>
+                      <a:prstDash val="solid"/>
+                      <a:round/>
+                      <a:headEnd type="none" w="med" len="med"/>
+                      <a:tailEnd type="none" w="med" len="med"/>
+                    </a:lnT>
+                    <a:lnB w="12700" cap="flat" cmpd="sng" algn="ctr">
+                      <a:solidFill>
+                        <a:schemeClr val="tx1"/>
+                      </a:solidFill>
+                      <a:prstDash val="solid"/>
+                      <a:round/>
+                      <a:headEnd type="none" w="med" len="med"/>
+                      <a:tailEnd type="none" w="med" len="med"/>
+                    </a:lnB>
+                    <a:solidFill>
+                      <a:schemeClr val="accent2"/>
+                    </a:solidFill>
+                  </a:tcPr>
+                </a:tc>
+                <a:tc>
+                  <a:txBody>
+                    <a:bodyPr/>
+                    <a:lstStyle/>
+                    <a:p>
+                      <a:pPr algn="ctr"/>
+                      <a:r>
+                        <a:rPr sz="1800" b="1" dirty="0">
+                          <a:solidFill>
+                            <a:schemeClr val="bg1"/>
+                          </a:solidFill>
+                        </a:rPr>
+                        <a:t>4</a:t>
+                      </a:r>
+                    </a:p>
+                  </a:txBody>
+                  <a:tcPr anchor="ctr">
+                    <a:lnL w="12700" cap="flat" cmpd="sng" algn="ctr">
+                      <a:solidFill>
+                        <a:schemeClr val="tx1"/>
+                      </a:solidFill>
+                      <a:prstDash val="solid"/>
+                      <a:round/>
+                      <a:headEnd type="none" w="med" len="med"/>
+                      <a:tailEnd type="none" w="med" len="med"/>
+                    </a:lnL>
+                    <a:lnR w="12700" cap="flat" cmpd="sng" algn="ctr">
+                      <a:solidFill>
+                        <a:schemeClr val="tx1"/>
+                      </a:solidFill>
+                      <a:prstDash val="solid"/>
+                      <a:round/>
+                      <a:headEnd type="none" w="med" len="med"/>
+                      <a:tailEnd type="none" w="med" len="med"/>
+                    </a:lnR>
+                    <a:lnT w="12700" cap="flat" cmpd="sng" algn="ctr">
+                      <a:solidFill>
+                        <a:schemeClr val="tx1"/>
+                      </a:solidFill>
+                      <a:prstDash val="solid"/>
+                      <a:round/>
+                      <a:headEnd type="none" w="med" len="med"/>
+                      <a:tailEnd type="none" w="med" len="med"/>
+                    </a:lnT>
+                    <a:lnB w="12700" cap="flat" cmpd="sng" algn="ctr">
+                      <a:solidFill>
+                        <a:schemeClr val="tx1"/>
+                      </a:solidFill>
+                      <a:prstDash val="solid"/>
+                      <a:round/>
+                      <a:headEnd type="none" w="med" len="med"/>
+                      <a:tailEnd type="none" w="med" len="med"/>
+                    </a:lnB>
+                    <a:solidFill>
+                      <a:schemeClr val="accent2"/>
+                    </a:solidFill>
+                  </a:tcPr>
+                </a:tc>
+                <a:tc>
+                  <a:txBody>
+                    <a:bodyPr/>
+                    <a:lstStyle/>
+                    <a:p>
+                      <a:pPr algn="ctr"/>
+                      <a:r>
+                        <a:rPr sz="1800" b="1" dirty="0">
+                          <a:solidFill>
+                            <a:schemeClr val="bg1"/>
+                          </a:solidFill>
+                        </a:rPr>
+                        <a:t>5</a:t>
+                      </a:r>
+                    </a:p>
+                  </a:txBody>
+                  <a:tcPr anchor="ctr">
+                    <a:lnL w="12700" cap="flat" cmpd="sng" algn="ctr">
+                      <a:solidFill>
+                        <a:schemeClr val="tx1"/>
+                      </a:solidFill>
+                      <a:prstDash val="solid"/>
+                      <a:round/>
+                      <a:headEnd type="none" w="med" len="med"/>
+                      <a:tailEnd type="none" w="med" len="med"/>
+                    </a:lnL>
+                    <a:lnR w="12700" cap="flat" cmpd="sng" algn="ctr">
+                      <a:solidFill>
+                        <a:schemeClr val="tx1"/>
+                      </a:solidFill>
+                      <a:prstDash val="solid"/>
+                      <a:round/>
+                      <a:headEnd type="none" w="med" len="med"/>
+                      <a:tailEnd type="none" w="med" len="med"/>
+                    </a:lnR>
+                    <a:lnT w="12700" cap="flat" cmpd="sng" algn="ctr">
+                      <a:solidFill>
+                        <a:schemeClr val="tx1"/>
+                      </a:solidFill>
+                      <a:prstDash val="solid"/>
+                      <a:round/>
+                      <a:headEnd type="none" w="med" len="med"/>
+                      <a:tailEnd type="none" w="med" len="med"/>
+                    </a:lnT>
+                    <a:lnB w="12700" cap="flat" cmpd="sng" algn="ctr">
+                      <a:solidFill>
+                        <a:schemeClr val="tx1"/>
+                      </a:solidFill>
+                      <a:prstDash val="solid"/>
+                      <a:round/>
+                      <a:headEnd type="none" w="med" len="med"/>
+                      <a:tailEnd type="none" w="med" len="med"/>
+                    </a:lnB>
+                    <a:solidFill>
+                      <a:schemeClr val="accent2"/>
+                    </a:solidFill>
+                  </a:tcPr>
+                </a:tc>
+                <a:tc>
+                  <a:txBody>
+                    <a:bodyPr/>
+                    <a:lstStyle/>
+                    <a:p>
+                      <a:pPr algn="ctr"/>
+                      <a:r>
+                        <a:rPr sz="1800" b="1" dirty="0">
+                          <a:solidFill>
+                            <a:schemeClr val="bg1"/>
+                          </a:solidFill>
+                        </a:rPr>
+                        <a:t>6</a:t>
+                      </a:r>
+                    </a:p>
+                  </a:txBody>
+                  <a:tcPr anchor="ctr">
+                    <a:lnL w="12700" cap="flat" cmpd="sng" algn="ctr">
+                      <a:solidFill>
+                        <a:schemeClr val="tx1"/>
+                      </a:solidFill>
+                      <a:prstDash val="solid"/>
+                      <a:round/>
+                      <a:headEnd type="none" w="med" len="med"/>
+                      <a:tailEnd type="none" w="med" len="med"/>
+                    </a:lnL>
+                    <a:lnR w="12700" cap="flat" cmpd="sng" algn="ctr">
+                      <a:solidFill>
+                        <a:schemeClr val="tx1"/>
+                      </a:solidFill>
+                      <a:prstDash val="solid"/>
+                      <a:round/>
+                      <a:headEnd type="none" w="med" len="med"/>
+                      <a:tailEnd type="none" w="med" len="med"/>
+                    </a:lnR>
+                    <a:lnT w="12700" cap="flat" cmpd="sng" algn="ctr">
+                      <a:solidFill>
+                        <a:schemeClr val="tx1"/>
+                      </a:solidFill>
+                      <a:prstDash val="solid"/>
+                      <a:round/>
+                      <a:headEnd type="none" w="med" len="med"/>
+                      <a:tailEnd type="none" w="med" len="med"/>
+                    </a:lnT>
+                    <a:lnB w="12700" cap="flat" cmpd="sng" algn="ctr">
+                      <a:solidFill>
+                        <a:schemeClr val="tx1"/>
+                      </a:solidFill>
+                      <a:prstDash val="solid"/>
+                      <a:round/>
+                      <a:headEnd type="none" w="med" len="med"/>
+                      <a:tailEnd type="none" w="med" len="med"/>
+                    </a:lnB>
+                    <a:solidFill>
+                      <a:schemeClr val="accent2"/>
+                    </a:solidFill>
+                  </a:tcPr>
+                </a:tc>
+                <a:tc>
+                  <a:txBody>
+                    <a:bodyPr/>
+                    <a:lstStyle/>
+                    <a:p>
+                      <a:pPr algn="ctr"/>
+                      <a:r>
+                        <a:rPr sz="1800" b="1" dirty="0">
+                          <a:solidFill>
+                            <a:schemeClr val="bg1"/>
+                          </a:solidFill>
+                        </a:rPr>
+                        <a:t>7</a:t>
+                      </a:r>
+                    </a:p>
+                  </a:txBody>
+                  <a:tcPr anchor="ctr">
+                    <a:lnL w="12700" cap="flat" cmpd="sng" algn="ctr">
+                      <a:solidFill>
+                        <a:schemeClr val="tx1"/>
+                      </a:solidFill>
+                      <a:prstDash val="solid"/>
+                      <a:round/>
+                      <a:headEnd type="none" w="med" len="med"/>
+                      <a:tailEnd type="none" w="med" len="med"/>
+                    </a:lnL>
+                    <a:lnR w="12700" cap="flat" cmpd="sng" algn="ctr">
+                      <a:solidFill>
+                        <a:schemeClr val="tx1"/>
+                      </a:solidFill>
+                      <a:prstDash val="solid"/>
+                      <a:round/>
+                      <a:headEnd type="none" w="med" len="med"/>
+                      <a:tailEnd type="none" w="med" len="med"/>
+                    </a:lnR>
+                    <a:lnT w="12700" cap="flat" cmpd="sng" algn="ctr">
+                      <a:solidFill>
+                        <a:schemeClr val="tx1"/>
+                      </a:solidFill>
+                      <a:prstDash val="solid"/>
+                      <a:round/>
+                      <a:headEnd type="none" w="med" len="med"/>
+                      <a:tailEnd type="none" w="med" len="med"/>
+                    </a:lnT>
+                    <a:lnB w="12700" cap="flat" cmpd="sng" algn="ctr">
+                      <a:solidFill>
+                        <a:schemeClr val="tx1"/>
+                      </a:solidFill>
+                      <a:prstDash val="solid"/>
+                      <a:round/>
+                      <a:headEnd type="none" w="med" len="med"/>
+                      <a:tailEnd type="none" w="med" len="med"/>
+                    </a:lnB>
+                    <a:solidFill>
+                      <a:schemeClr val="accent2"/>
+                    </a:solidFill>
+                  </a:tcPr>
+                </a:tc>
+                <a:extLst>
+                  <a:ext uri="{0D108BD9-81ED-4DB2-BD59-A6C34878D82A}">
+                    <a16:rowId xmlns:a16="http://schemas.microsoft.com/office/drawing/2014/main" val="10000"/>
+                  </a:ext>
+                </a:extLst>
+              </a:tr>
+              <a:tr h="457200">
+                <a:tc>
+                  <a:txBody>
+                    <a:bodyPr/>
+                    <a:lstStyle/>
+                    <a:p>
+                      <a:pPr algn="ctr"/>
+                      <a:r>
+                        <a:rPr sz="1800" dirty="0"/>
+                        <a:t>brv(위치)</a:t>
+                      </a:r>
+                    </a:p>
+                  </a:txBody>
+                  <a:tcPr anchor="ctr">
+                    <a:lnL w="12700" cap="flat" cmpd="sng" algn="ctr">
+                      <a:solidFill>
+                        <a:schemeClr val="tx1"/>
+                      </a:solidFill>
+                      <a:prstDash val="solid"/>
+                      <a:round/>
+                      <a:headEnd type="none" w="med" len="med"/>
+                      <a:tailEnd type="none" w="med" len="med"/>
+                    </a:lnL>
+                    <a:lnR w="12700" cap="flat" cmpd="sng" algn="ctr">
+                      <a:solidFill>
+                        <a:schemeClr val="tx1"/>
+                      </a:solidFill>
+                      <a:prstDash val="solid"/>
+                      <a:round/>
+                      <a:headEnd type="none" w="med" len="med"/>
+                      <a:tailEnd type="none" w="med" len="med"/>
+                    </a:lnR>
+                    <a:lnT w="12700" cap="flat" cmpd="sng" algn="ctr">
+                      <a:solidFill>
+                        <a:schemeClr val="tx1"/>
+                      </a:solidFill>
+                      <a:prstDash val="solid"/>
+                      <a:round/>
+                      <a:headEnd type="none" w="med" len="med"/>
+                      <a:tailEnd type="none" w="med" len="med"/>
+                    </a:lnT>
+                    <a:lnB w="12700" cap="flat" cmpd="sng" algn="ctr">
+                      <a:solidFill>
+                        <a:schemeClr val="tx1"/>
+                      </a:solidFill>
+                      <a:prstDash val="solid"/>
+                      <a:round/>
+                      <a:headEnd type="none" w="med" len="med"/>
+                      <a:tailEnd type="none" w="med" len="med"/>
+                    </a:lnB>
+                    <a:noFill/>
+                  </a:tcPr>
+                </a:tc>
+                <a:tc>
+                  <a:txBody>
+                    <a:bodyPr/>
+                    <a:lstStyle/>
+                    <a:p>
+                      <a:pPr algn="ctr"/>
+                      <a:r>
+                        <a:rPr sz="1800" dirty="0"/>
+                        <a:t>0</a:t>
+                      </a:r>
+                    </a:p>
+                  </a:txBody>
+                  <a:tcPr anchor="ctr">
+                    <a:lnL w="12700" cap="flat" cmpd="sng" algn="ctr">
+                      <a:solidFill>
+                        <a:schemeClr val="tx1"/>
+                      </a:solidFill>
+                      <a:prstDash val="solid"/>
+                      <a:round/>
+                      <a:headEnd type="none" w="med" len="med"/>
+                      <a:tailEnd type="none" w="med" len="med"/>
+                    </a:lnL>
+                    <a:lnR w="12700" cap="flat" cmpd="sng" algn="ctr">
+                      <a:solidFill>
+                        <a:schemeClr val="tx1"/>
+                      </a:solidFill>
+                      <a:prstDash val="solid"/>
+                      <a:round/>
+                      <a:headEnd type="none" w="med" len="med"/>
+                      <a:tailEnd type="none" w="med" len="med"/>
+                    </a:lnR>
+                    <a:lnT w="12700" cap="flat" cmpd="sng" algn="ctr">
+                      <a:solidFill>
+                        <a:schemeClr val="tx1"/>
+                      </a:solidFill>
+                      <a:prstDash val="solid"/>
+                      <a:round/>
+                      <a:headEnd type="none" w="med" len="med"/>
+                      <a:tailEnd type="none" w="med" len="med"/>
+                    </a:lnT>
+                    <a:lnB w="12700" cap="flat" cmpd="sng" algn="ctr">
+                      <a:solidFill>
+                        <a:schemeClr val="tx1"/>
+                      </a:solidFill>
+                      <a:prstDash val="solid"/>
+                      <a:round/>
+                      <a:headEnd type="none" w="med" len="med"/>
+                      <a:tailEnd type="none" w="med" len="med"/>
+                    </a:lnB>
+                    <a:noFill/>
+                  </a:tcPr>
+                </a:tc>
+                <a:tc>
+                  <a:txBody>
+                    <a:bodyPr/>
+                    <a:lstStyle/>
+                    <a:p>
+                      <a:pPr algn="ctr"/>
+                      <a:r>
+                        <a:rPr sz="1800" dirty="0"/>
+                        <a:t>4</a:t>
+                      </a:r>
+                    </a:p>
+                  </a:txBody>
+                  <a:tcPr anchor="ctr">
+                    <a:lnL w="12700" cap="flat" cmpd="sng" algn="ctr">
+                      <a:solidFill>
+                        <a:schemeClr val="tx1"/>
+                      </a:solidFill>
+                      <a:prstDash val="solid"/>
+                      <a:round/>
+                      <a:headEnd type="none" w="med" len="med"/>
+                      <a:tailEnd type="none" w="med" len="med"/>
+                    </a:lnL>
+                    <a:lnR w="12700" cap="flat" cmpd="sng" algn="ctr">
+                      <a:solidFill>
+                        <a:schemeClr val="tx1"/>
+                      </a:solidFill>
+                      <a:prstDash val="solid"/>
+                      <a:round/>
+                      <a:headEnd type="none" w="med" len="med"/>
+                      <a:tailEnd type="none" w="med" len="med"/>
+                    </a:lnR>
+                    <a:lnT w="12700" cap="flat" cmpd="sng" algn="ctr">
+                      <a:solidFill>
+                        <a:schemeClr val="tx1"/>
+                      </a:solidFill>
+                      <a:prstDash val="solid"/>
+                      <a:round/>
+                      <a:headEnd type="none" w="med" len="med"/>
+                      <a:tailEnd type="none" w="med" len="med"/>
+                    </a:lnT>
+                    <a:lnB w="12700" cap="flat" cmpd="sng" algn="ctr">
+                      <a:solidFill>
+                        <a:schemeClr val="tx1"/>
+                      </a:solidFill>
+                      <a:prstDash val="solid"/>
+                      <a:round/>
+                      <a:headEnd type="none" w="med" len="med"/>
+                      <a:tailEnd type="none" w="med" len="med"/>
+                    </a:lnB>
+                    <a:noFill/>
+                  </a:tcPr>
+                </a:tc>
+                <a:tc>
+                  <a:txBody>
+                    <a:bodyPr/>
+                    <a:lstStyle/>
+                    <a:p>
+                      <a:pPr algn="ctr"/>
+                      <a:r>
+                        <a:rPr sz="1800" dirty="0"/>
+                        <a:t>2</a:t>
+                      </a:r>
+                    </a:p>
+                  </a:txBody>
+                  <a:tcPr anchor="ctr">
+                    <a:lnL w="12700" cap="flat" cmpd="sng" algn="ctr">
+                      <a:solidFill>
+                        <a:schemeClr val="tx1"/>
+                      </a:solidFill>
+                      <a:prstDash val="solid"/>
+                      <a:round/>
+                      <a:headEnd type="none" w="med" len="med"/>
+                      <a:tailEnd type="none" w="med" len="med"/>
+                    </a:lnL>
+                    <a:lnR w="12700" cap="flat" cmpd="sng" algn="ctr">
+                      <a:solidFill>
+                        <a:schemeClr val="tx1"/>
+                      </a:solidFill>
+                      <a:prstDash val="solid"/>
+                      <a:round/>
+                      <a:headEnd type="none" w="med" len="med"/>
+                      <a:tailEnd type="none" w="med" len="med"/>
+                    </a:lnR>
+                    <a:lnT w="12700" cap="flat" cmpd="sng" algn="ctr">
+                      <a:solidFill>
+                        <a:schemeClr val="tx1"/>
+                      </a:solidFill>
+                      <a:prstDash val="solid"/>
+                      <a:round/>
+                      <a:headEnd type="none" w="med" len="med"/>
+                      <a:tailEnd type="none" w="med" len="med"/>
+                    </a:lnT>
+                    <a:lnB w="12700" cap="flat" cmpd="sng" algn="ctr">
+                      <a:solidFill>
+                        <a:schemeClr val="tx1"/>
+                      </a:solidFill>
+                      <a:prstDash val="solid"/>
+                      <a:round/>
+                      <a:headEnd type="none" w="med" len="med"/>
+                      <a:tailEnd type="none" w="med" len="med"/>
+                    </a:lnB>
+                    <a:noFill/>
+                  </a:tcPr>
+                </a:tc>
+                <a:tc>
+                  <a:txBody>
+                    <a:bodyPr/>
+                    <a:lstStyle/>
+                    <a:p>
+                      <a:pPr algn="ctr"/>
+                      <a:r>
+                        <a:rPr sz="1800" dirty="0"/>
+                        <a:t>6</a:t>
+                      </a:r>
+                    </a:p>
+                  </a:txBody>
+                  <a:tcPr anchor="ctr">
+                    <a:lnL w="12700" cap="flat" cmpd="sng" algn="ctr">
+                      <a:solidFill>
+                        <a:schemeClr val="tx1"/>
+                      </a:solidFill>
+                      <a:prstDash val="solid"/>
+                      <a:round/>
+                      <a:headEnd type="none" w="med" len="med"/>
+                      <a:tailEnd type="none" w="med" len="med"/>
+                    </a:lnL>
+                    <a:lnR w="12700" cap="flat" cmpd="sng" algn="ctr">
+                      <a:solidFill>
+                        <a:schemeClr val="tx1"/>
+                      </a:solidFill>
+                      <a:prstDash val="solid"/>
+                      <a:round/>
+                      <a:headEnd type="none" w="med" len="med"/>
+                      <a:tailEnd type="none" w="med" len="med"/>
+                    </a:lnR>
+                    <a:lnT w="12700" cap="flat" cmpd="sng" algn="ctr">
+                      <a:solidFill>
+                        <a:schemeClr val="tx1"/>
+                      </a:solidFill>
+                      <a:prstDash val="solid"/>
+                      <a:round/>
+                      <a:headEnd type="none" w="med" len="med"/>
+                      <a:tailEnd type="none" w="med" len="med"/>
+                    </a:lnT>
+                    <a:lnB w="12700" cap="flat" cmpd="sng" algn="ctr">
+                      <a:solidFill>
+                        <a:schemeClr val="tx1"/>
+                      </a:solidFill>
+                      <a:prstDash val="solid"/>
+                      <a:round/>
+                      <a:headEnd type="none" w="med" len="med"/>
+                      <a:tailEnd type="none" w="med" len="med"/>
+                    </a:lnB>
+                    <a:noFill/>
+                  </a:tcPr>
+                </a:tc>
+                <a:tc>
+                  <a:txBody>
+                    <a:bodyPr/>
+                    <a:lstStyle/>
+                    <a:p>
+                      <a:pPr algn="ctr"/>
+                      <a:r>
+                        <a:rPr sz="1800" dirty="0"/>
+                        <a:t>1</a:t>
+                      </a:r>
+                    </a:p>
+                  </a:txBody>
+                  <a:tcPr anchor="ctr">
+                    <a:lnL w="12700" cap="flat" cmpd="sng" algn="ctr">
+                      <a:solidFill>
+                        <a:schemeClr val="tx1"/>
+                      </a:solidFill>
+                      <a:prstDash val="solid"/>
+                      <a:round/>
+                      <a:headEnd type="none" w="med" len="med"/>
+                      <a:tailEnd type="none" w="med" len="med"/>
+                    </a:lnL>
+                    <a:lnR w="12700" cap="flat" cmpd="sng" algn="ctr">
+                      <a:solidFill>
+                        <a:schemeClr val="tx1"/>
+                      </a:solidFill>
+                      <a:prstDash val="solid"/>
+                      <a:round/>
+                      <a:headEnd type="none" w="med" len="med"/>
+                      <a:tailEnd type="none" w="med" len="med"/>
+                    </a:lnR>
+                    <a:lnT w="12700" cap="flat" cmpd="sng" algn="ctr">
+                      <a:solidFill>
+                        <a:schemeClr val="tx1"/>
+                      </a:solidFill>
+                      <a:prstDash val="solid"/>
+                      <a:round/>
+                      <a:headEnd type="none" w="med" len="med"/>
+                      <a:tailEnd type="none" w="med" len="med"/>
+                    </a:lnT>
+                    <a:lnB w="12700" cap="flat" cmpd="sng" algn="ctr">
+                      <a:solidFill>
+                        <a:schemeClr val="tx1"/>
+                      </a:solidFill>
+                      <a:prstDash val="solid"/>
+                      <a:round/>
+                      <a:headEnd type="none" w="med" len="med"/>
+                      <a:tailEnd type="none" w="med" len="med"/>
+                    </a:lnB>
+                    <a:noFill/>
+                  </a:tcPr>
+                </a:tc>
+                <a:tc>
+                  <a:txBody>
+                    <a:bodyPr/>
+                    <a:lstStyle/>
+                    <a:p>
+                      <a:pPr algn="ctr"/>
+                      <a:r>
+                        <a:rPr sz="1800" dirty="0"/>
+                        <a:t>5</a:t>
+                      </a:r>
+                    </a:p>
+                  </a:txBody>
+                  <a:tcPr anchor="ctr">
+                    <a:lnL w="12700" cap="flat" cmpd="sng" algn="ctr">
+                      <a:solidFill>
+                        <a:schemeClr val="tx1"/>
+                      </a:solidFill>
+                      <a:prstDash val="solid"/>
+                      <a:round/>
+                      <a:headEnd type="none" w="med" len="med"/>
+                      <a:tailEnd type="none" w="med" len="med"/>
+                    </a:lnL>
+                    <a:lnR w="12700" cap="flat" cmpd="sng" algn="ctr">
+                      <a:solidFill>
+                        <a:schemeClr val="tx1"/>
+                      </a:solidFill>
+                      <a:prstDash val="solid"/>
+                      <a:round/>
+                      <a:headEnd type="none" w="med" len="med"/>
+                      <a:tailEnd type="none" w="med" len="med"/>
+                    </a:lnR>
+                    <a:lnT w="12700" cap="flat" cmpd="sng" algn="ctr">
+                      <a:solidFill>
+                        <a:schemeClr val="tx1"/>
+                      </a:solidFill>
+                      <a:prstDash val="solid"/>
+                      <a:round/>
+                      <a:headEnd type="none" w="med" len="med"/>
+                      <a:tailEnd type="none" w="med" len="med"/>
+                    </a:lnT>
+                    <a:lnB w="12700" cap="flat" cmpd="sng" algn="ctr">
+                      <a:solidFill>
+                        <a:schemeClr val="tx1"/>
+                      </a:solidFill>
+                      <a:prstDash val="solid"/>
+                      <a:round/>
+                      <a:headEnd type="none" w="med" len="med"/>
+                      <a:tailEnd type="none" w="med" len="med"/>
+                    </a:lnB>
+                    <a:noFill/>
+                  </a:tcPr>
+                </a:tc>
+                <a:tc>
+                  <a:txBody>
+                    <a:bodyPr/>
+                    <a:lstStyle/>
+                    <a:p>
+                      <a:pPr algn="ctr"/>
+                      <a:r>
+                        <a:rPr sz="1800" dirty="0"/>
+                        <a:t>3</a:t>
+                      </a:r>
+                    </a:p>
+                  </a:txBody>
+                  <a:tcPr anchor="ctr">
+                    <a:lnL w="12700" cap="flat" cmpd="sng" algn="ctr">
+                      <a:solidFill>
+                        <a:schemeClr val="tx1"/>
+                      </a:solidFill>
+                      <a:prstDash val="solid"/>
+                      <a:round/>
+                      <a:headEnd type="none" w="med" len="med"/>
+                      <a:tailEnd type="none" w="med" len="med"/>
+                    </a:lnL>
+                    <a:lnR w="12700" cap="flat" cmpd="sng" algn="ctr">
+                      <a:solidFill>
+                        <a:schemeClr val="tx1"/>
+                      </a:solidFill>
+                      <a:prstDash val="solid"/>
+                      <a:round/>
+                      <a:headEnd type="none" w="med" len="med"/>
+                      <a:tailEnd type="none" w="med" len="med"/>
+                    </a:lnR>
+                    <a:lnT w="12700" cap="flat" cmpd="sng" algn="ctr">
+                      <a:solidFill>
+                        <a:schemeClr val="tx1"/>
+                      </a:solidFill>
+                      <a:prstDash val="solid"/>
+                      <a:round/>
+                      <a:headEnd type="none" w="med" len="med"/>
+                      <a:tailEnd type="none" w="med" len="med"/>
+                    </a:lnT>
+                    <a:lnB w="12700" cap="flat" cmpd="sng" algn="ctr">
+                      <a:solidFill>
+                        <a:schemeClr val="tx1"/>
+                      </a:solidFill>
+                      <a:prstDash val="solid"/>
+                      <a:round/>
+                      <a:headEnd type="none" w="med" len="med"/>
+                      <a:tailEnd type="none" w="med" len="med"/>
+                    </a:lnB>
+                    <a:noFill/>
+                  </a:tcPr>
+                </a:tc>
+                <a:tc>
+                  <a:txBody>
+                    <a:bodyPr/>
+                    <a:lstStyle/>
+                    <a:p>
+                      <a:pPr algn="ctr"/>
+                      <a:r>
+                        <a:rPr sz="1800" dirty="0"/>
+                        <a:t>7</a:t>
+                      </a:r>
+                    </a:p>
+                  </a:txBody>
+                  <a:tcPr anchor="ctr">
+                    <a:lnL w="12700" cap="flat" cmpd="sng" algn="ctr">
+                      <a:solidFill>
+                        <a:schemeClr val="tx1"/>
+                      </a:solidFill>
+                      <a:prstDash val="solid"/>
+                      <a:round/>
+                      <a:headEnd type="none" w="med" len="med"/>
+                      <a:tailEnd type="none" w="med" len="med"/>
+                    </a:lnL>
+                    <a:lnR w="12700" cap="flat" cmpd="sng" algn="ctr">
+                      <a:solidFill>
+                        <a:schemeClr val="tx1"/>
+                      </a:solidFill>
+                      <a:prstDash val="solid"/>
+                      <a:round/>
+                      <a:headEnd type="none" w="med" len="med"/>
+                      <a:tailEnd type="none" w="med" len="med"/>
+                    </a:lnR>
+                    <a:lnT w="12700" cap="flat" cmpd="sng" algn="ctr">
+                      <a:solidFill>
+                        <a:schemeClr val="tx1"/>
+                      </a:solidFill>
+                      <a:prstDash val="solid"/>
+                      <a:round/>
+                      <a:headEnd type="none" w="med" len="med"/>
+                      <a:tailEnd type="none" w="med" len="med"/>
+                    </a:lnT>
+                    <a:lnB w="12700" cap="flat" cmpd="sng" algn="ctr">
+                      <a:solidFill>
+                        <a:schemeClr val="tx1"/>
+                      </a:solidFill>
+                      <a:prstDash val="solid"/>
+                      <a:round/>
+                      <a:headEnd type="none" w="med" len="med"/>
+                      <a:tailEnd type="none" w="med" len="med"/>
+                    </a:lnB>
+                    <a:noFill/>
+                  </a:tcPr>
+                </a:tc>
+                <a:extLst>
+                  <a:ext uri="{0D108BD9-81ED-4DB2-BD59-A6C34878D82A}">
+                    <a16:rowId xmlns:a16="http://schemas.microsoft.com/office/drawing/2014/main" val="10001"/>
+                  </a:ext>
+                </a:extLst>
+              </a:tr>
+              <a:tr h="457200">
+                <a:tc>
+                  <a:txBody>
+                    <a:bodyPr/>
+                    <a:lstStyle/>
+                    <a:p>
+                      <a:pPr algn="ctr"/>
+                      <a:r>
+                        <a:rPr sz="1800" dirty="0"/>
+                        <a:t>트리 순서</a:t>
+                      </a:r>
+                    </a:p>
+                  </a:txBody>
+                  <a:tcPr anchor="ctr">
+                    <a:lnL w="12700" cap="flat" cmpd="sng" algn="ctr">
+                      <a:solidFill>
+                        <a:schemeClr val="tx1"/>
+                      </a:solidFill>
+                      <a:prstDash val="solid"/>
+                      <a:round/>
+                      <a:headEnd type="none" w="med" len="med"/>
+                      <a:tailEnd type="none" w="med" len="med"/>
+                    </a:lnL>
+                    <a:lnR w="12700" cap="flat" cmpd="sng" algn="ctr">
+                      <a:solidFill>
+                        <a:schemeClr val="tx1"/>
+                      </a:solidFill>
+                      <a:prstDash val="solid"/>
+                      <a:round/>
+                      <a:headEnd type="none" w="med" len="med"/>
+                      <a:tailEnd type="none" w="med" len="med"/>
+                    </a:lnR>
+                    <a:lnT w="12700" cap="flat" cmpd="sng" algn="ctr">
+                      <a:solidFill>
+                        <a:schemeClr val="tx1"/>
+                      </a:solidFill>
+                      <a:prstDash val="solid"/>
+                      <a:round/>
+                      <a:headEnd type="none" w="med" len="med"/>
+                      <a:tailEnd type="none" w="med" len="med"/>
+                    </a:lnT>
+                    <a:lnB w="12700" cap="flat" cmpd="sng" algn="ctr">
+                      <a:solidFill>
+                        <a:schemeClr val="tx1"/>
+                      </a:solidFill>
+                      <a:prstDash val="solid"/>
+                      <a:round/>
+                      <a:headEnd type="none" w="med" len="med"/>
+                      <a:tailEnd type="none" w="med" len="med"/>
+                    </a:lnB>
+                    <a:noFill/>
+                  </a:tcPr>
+                </a:tc>
+                <a:tc>
+                  <a:txBody>
+                    <a:bodyPr/>
+                    <a:lstStyle/>
+                    <a:p>
+                      <a:pPr algn="ctr"/>
+                      <a:r>
+                        <a:rPr sz="1800" dirty="0"/>
+                        <a:t>1</a:t>
+                      </a:r>
+                    </a:p>
+                  </a:txBody>
+                  <a:tcPr anchor="ctr">
+                    <a:lnL w="12700" cap="flat" cmpd="sng" algn="ctr">
+                      <a:solidFill>
+                        <a:schemeClr val="tx1"/>
+                      </a:solidFill>
+                      <a:prstDash val="solid"/>
+                      <a:round/>
+                      <a:headEnd type="none" w="med" len="med"/>
+                      <a:tailEnd type="none" w="med" len="med"/>
+                    </a:lnL>
+                    <a:lnR w="12700" cap="flat" cmpd="sng" algn="ctr">
+                      <a:solidFill>
+                        <a:schemeClr val="tx1"/>
+                      </a:solidFill>
+                      <a:prstDash val="solid"/>
+                      <a:round/>
+                      <a:headEnd type="none" w="med" len="med"/>
+                      <a:tailEnd type="none" w="med" len="med"/>
+                    </a:lnR>
+                    <a:lnT w="12700" cap="flat" cmpd="sng" algn="ctr">
+                      <a:solidFill>
+                        <a:schemeClr val="tx1"/>
+                      </a:solidFill>
+                      <a:prstDash val="solid"/>
+                      <a:round/>
+                      <a:headEnd type="none" w="med" len="med"/>
+                      <a:tailEnd type="none" w="med" len="med"/>
+                    </a:lnT>
+                    <a:lnB w="12700" cap="flat" cmpd="sng" algn="ctr">
+                      <a:solidFill>
+                        <a:schemeClr val="tx1"/>
+                      </a:solidFill>
+                      <a:prstDash val="solid"/>
+                      <a:round/>
+                      <a:headEnd type="none" w="med" len="med"/>
+                      <a:tailEnd type="none" w="med" len="med"/>
+                    </a:lnB>
+                    <a:noFill/>
+                  </a:tcPr>
+                </a:tc>
+                <a:tc>
+                  <a:txBody>
+                    <a:bodyPr/>
+                    <a:lstStyle/>
+                    <a:p>
+                      <a:pPr algn="ctr"/>
+                      <a:r>
+                        <a:rPr sz="1800" dirty="0"/>
+                        <a:t>9</a:t>
+                      </a:r>
+                    </a:p>
+                  </a:txBody>
+                  <a:tcPr anchor="ctr">
+                    <a:lnL w="12700" cap="flat" cmpd="sng" algn="ctr">
+                      <a:solidFill>
+                        <a:schemeClr val="tx1"/>
+                      </a:solidFill>
+                      <a:prstDash val="solid"/>
+                      <a:round/>
+                      <a:headEnd type="none" w="med" len="med"/>
+                      <a:tailEnd type="none" w="med" len="med"/>
+                    </a:lnL>
+                    <a:lnR w="12700" cap="flat" cmpd="sng" algn="ctr">
+                      <a:solidFill>
+                        <a:schemeClr val="tx1"/>
+                      </a:solidFill>
+                      <a:prstDash val="solid"/>
+                      <a:round/>
+                      <a:headEnd type="none" w="med" len="med"/>
+                      <a:tailEnd type="none" w="med" len="med"/>
+                    </a:lnR>
+                    <a:lnT w="12700" cap="flat" cmpd="sng" algn="ctr">
+                      <a:solidFill>
+                        <a:schemeClr val="tx1"/>
+                      </a:solidFill>
+                      <a:prstDash val="solid"/>
+                      <a:round/>
+                      <a:headEnd type="none" w="med" len="med"/>
+                      <a:tailEnd type="none" w="med" len="med"/>
+                    </a:lnT>
+                    <a:lnB w="12700" cap="flat" cmpd="sng" algn="ctr">
+                      <a:solidFill>
+                        <a:schemeClr val="tx1"/>
+                      </a:solidFill>
+                      <a:prstDash val="solid"/>
+                      <a:round/>
+                      <a:headEnd type="none" w="med" len="med"/>
+                      <a:tailEnd type="none" w="med" len="med"/>
+                    </a:lnB>
+                    <a:noFill/>
+                  </a:tcPr>
+                </a:tc>
+                <a:tc>
+                  <a:txBody>
+                    <a:bodyPr/>
+                    <a:lstStyle/>
+                    <a:p>
+                      <a:pPr algn="ctr"/>
+                      <a:r>
+                        <a:rPr sz="1800" dirty="0"/>
+                        <a:t>5</a:t>
+                      </a:r>
+                    </a:p>
+                  </a:txBody>
+                  <a:tcPr anchor="ctr">
+                    <a:lnL w="12700" cap="flat" cmpd="sng" algn="ctr">
+                      <a:solidFill>
+                        <a:schemeClr val="tx1"/>
+                      </a:solidFill>
+                      <a:prstDash val="solid"/>
+                      <a:round/>
+                      <a:headEnd type="none" w="med" len="med"/>
+                      <a:tailEnd type="none" w="med" len="med"/>
+                    </a:lnL>
+                    <a:lnR w="12700" cap="flat" cmpd="sng" algn="ctr">
+                      <a:solidFill>
+                        <a:schemeClr val="tx1"/>
+                      </a:solidFill>
+                      <a:prstDash val="solid"/>
+                      <a:round/>
+                      <a:headEnd type="none" w="med" len="med"/>
+                      <a:tailEnd type="none" w="med" len="med"/>
+                    </a:lnR>
+                    <a:lnT w="12700" cap="flat" cmpd="sng" algn="ctr">
+                      <a:solidFill>
+                        <a:schemeClr val="tx1"/>
+                      </a:solidFill>
+                      <a:prstDash val="solid"/>
+                      <a:round/>
+                      <a:headEnd type="none" w="med" len="med"/>
+                      <a:tailEnd type="none" w="med" len="med"/>
+                    </a:lnT>
+                    <a:lnB w="12700" cap="flat" cmpd="sng" algn="ctr">
+                      <a:solidFill>
+                        <a:schemeClr val="tx1"/>
+                      </a:solidFill>
+                      <a:prstDash val="solid"/>
+                      <a:round/>
+                      <a:headEnd type="none" w="med" len="med"/>
+                      <a:tailEnd type="none" w="med" len="med"/>
+                    </a:lnB>
+                    <a:noFill/>
+                  </a:tcPr>
+                </a:tc>
+                <a:tc>
+                  <a:txBody>
+                    <a:bodyPr/>
+                    <a:lstStyle/>
+                    <a:p>
+                      <a:pPr algn="ctr"/>
+                      <a:r>
+                        <a:rPr sz="1800" dirty="0"/>
+                        <a:t>13</a:t>
+                      </a:r>
+                    </a:p>
+                  </a:txBody>
+                  <a:tcPr anchor="ctr">
+                    <a:lnL w="12700" cap="flat" cmpd="sng" algn="ctr">
+                      <a:solidFill>
+                        <a:schemeClr val="tx1"/>
+                      </a:solidFill>
+                      <a:prstDash val="solid"/>
+                      <a:round/>
+                      <a:headEnd type="none" w="med" len="med"/>
+                      <a:tailEnd type="none" w="med" len="med"/>
+                    </a:lnL>
+                    <a:lnR w="12700" cap="flat" cmpd="sng" algn="ctr">
+                      <a:solidFill>
+                        <a:schemeClr val="tx1"/>
+                      </a:solidFill>
+                      <a:prstDash val="solid"/>
+                      <a:round/>
+                      <a:headEnd type="none" w="med" len="med"/>
+                      <a:tailEnd type="none" w="med" len="med"/>
+                    </a:lnR>
+                    <a:lnT w="12700" cap="flat" cmpd="sng" algn="ctr">
+                      <a:solidFill>
+                        <a:schemeClr val="tx1"/>
+                      </a:solidFill>
+                      <a:prstDash val="solid"/>
+                      <a:round/>
+                      <a:headEnd type="none" w="med" len="med"/>
+                      <a:tailEnd type="none" w="med" len="med"/>
+                    </a:lnT>
+                    <a:lnB w="12700" cap="flat" cmpd="sng" algn="ctr">
+                      <a:solidFill>
+                        <a:schemeClr val="tx1"/>
+                      </a:solidFill>
+                      <a:prstDash val="solid"/>
+                      <a:round/>
+                      <a:headEnd type="none" w="med" len="med"/>
+                      <a:tailEnd type="none" w="med" len="med"/>
+                    </a:lnB>
+                    <a:noFill/>
+                  </a:tcPr>
+                </a:tc>
+                <a:tc>
+                  <a:txBody>
+                    <a:bodyPr/>
+                    <a:lstStyle/>
+                    <a:p>
+                      <a:pPr algn="ctr"/>
+                      <a:r>
+                        <a:rPr sz="1800" dirty="0"/>
+                        <a:t>3</a:t>
+                      </a:r>
+                    </a:p>
+                  </a:txBody>
+                  <a:tcPr anchor="ctr">
+                    <a:lnL w="12700" cap="flat" cmpd="sng" algn="ctr">
+                      <a:solidFill>
+                        <a:schemeClr val="tx1"/>
+                      </a:solidFill>
+                      <a:prstDash val="solid"/>
+                      <a:round/>
+                      <a:headEnd type="none" w="med" len="med"/>
+                      <a:tailEnd type="none" w="med" len="med"/>
+                    </a:lnL>
+                    <a:lnR w="12700" cap="flat" cmpd="sng" algn="ctr">
+                      <a:solidFill>
+                        <a:schemeClr val="tx1"/>
+                      </a:solidFill>
+                      <a:prstDash val="solid"/>
+                      <a:round/>
+                      <a:headEnd type="none" w="med" len="med"/>
+                      <a:tailEnd type="none" w="med" len="med"/>
+                    </a:lnR>
+                    <a:lnT w="12700" cap="flat" cmpd="sng" algn="ctr">
+                      <a:solidFill>
+                        <a:schemeClr val="tx1"/>
+                      </a:solidFill>
+                      <a:prstDash val="solid"/>
+                      <a:round/>
+                      <a:headEnd type="none" w="med" len="med"/>
+                      <a:tailEnd type="none" w="med" len="med"/>
+                    </a:lnT>
+                    <a:lnB w="12700" cap="flat" cmpd="sng" algn="ctr">
+                      <a:solidFill>
+                        <a:schemeClr val="tx1"/>
+                      </a:solidFill>
+                      <a:prstDash val="solid"/>
+                      <a:round/>
+                      <a:headEnd type="none" w="med" len="med"/>
+                      <a:tailEnd type="none" w="med" len="med"/>
+                    </a:lnB>
+                    <a:noFill/>
+                  </a:tcPr>
+                </a:tc>
+                <a:tc>
+                  <a:txBody>
+                    <a:bodyPr/>
+                    <a:lstStyle/>
+                    <a:p>
+                      <a:pPr algn="ctr"/>
+                      <a:r>
+                        <a:rPr sz="1800" dirty="0"/>
+                        <a:t>11</a:t>
+                      </a:r>
+                    </a:p>
+                  </a:txBody>
+                  <a:tcPr anchor="ctr">
+                    <a:lnL w="12700" cap="flat" cmpd="sng" algn="ctr">
+                      <a:solidFill>
+                        <a:schemeClr val="tx1"/>
+                      </a:solidFill>
+                      <a:prstDash val="solid"/>
+                      <a:round/>
+                      <a:headEnd type="none" w="med" len="med"/>
+                      <a:tailEnd type="none" w="med" len="med"/>
+                    </a:lnL>
+                    <a:lnR w="12700" cap="flat" cmpd="sng" algn="ctr">
+                      <a:solidFill>
+                        <a:schemeClr val="tx1"/>
+                      </a:solidFill>
+                      <a:prstDash val="solid"/>
+                      <a:round/>
+                      <a:headEnd type="none" w="med" len="med"/>
+                      <a:tailEnd type="none" w="med" len="med"/>
+                    </a:lnR>
+                    <a:lnT w="12700" cap="flat" cmpd="sng" algn="ctr">
+                      <a:solidFill>
+                        <a:schemeClr val="tx1"/>
+                      </a:solidFill>
+                      <a:prstDash val="solid"/>
+                      <a:round/>
+                      <a:headEnd type="none" w="med" len="med"/>
+                      <a:tailEnd type="none" w="med" len="med"/>
+                    </a:lnT>
+                    <a:lnB w="12700" cap="flat" cmpd="sng" algn="ctr">
+                      <a:solidFill>
+                        <a:schemeClr val="tx1"/>
+                      </a:solidFill>
+                      <a:prstDash val="solid"/>
+                      <a:round/>
+                      <a:headEnd type="none" w="med" len="med"/>
+                      <a:tailEnd type="none" w="med" len="med"/>
+                    </a:lnB>
+                    <a:noFill/>
+                  </a:tcPr>
+                </a:tc>
+                <a:tc>
+                  <a:txBody>
+                    <a:bodyPr/>
+                    <a:lstStyle/>
+                    <a:p>
+                      <a:pPr algn="ctr"/>
+                      <a:r>
+                        <a:rPr sz="1800" dirty="0"/>
+                        <a:t>7</a:t>
+                      </a:r>
+                    </a:p>
+                  </a:txBody>
+                  <a:tcPr anchor="ctr">
+                    <a:lnL w="12700" cap="flat" cmpd="sng" algn="ctr">
+                      <a:solidFill>
+                        <a:schemeClr val="tx1"/>
+                      </a:solidFill>
+                      <a:prstDash val="solid"/>
+                      <a:round/>
+                      <a:headEnd type="none" w="med" len="med"/>
+                      <a:tailEnd type="none" w="med" len="med"/>
+                    </a:lnL>
+                    <a:lnR w="12700" cap="flat" cmpd="sng" algn="ctr">
+                      <a:solidFill>
+                        <a:schemeClr val="tx1"/>
+                      </a:solidFill>
+                      <a:prstDash val="solid"/>
+                      <a:round/>
+                      <a:headEnd type="none" w="med" len="med"/>
+                      <a:tailEnd type="none" w="med" len="med"/>
+                    </a:lnR>
+                    <a:lnT w="12700" cap="flat" cmpd="sng" algn="ctr">
+                      <a:solidFill>
+                        <a:schemeClr val="tx1"/>
+                      </a:solidFill>
+                      <a:prstDash val="solid"/>
+                      <a:round/>
+                      <a:headEnd type="none" w="med" len="med"/>
+                      <a:tailEnd type="none" w="med" len="med"/>
+                    </a:lnT>
+                    <a:lnB w="12700" cap="flat" cmpd="sng" algn="ctr">
+                      <a:solidFill>
+                        <a:schemeClr val="tx1"/>
+                      </a:solidFill>
+                      <a:prstDash val="solid"/>
+                      <a:round/>
+                      <a:headEnd type="none" w="med" len="med"/>
+                      <a:tailEnd type="none" w="med" len="med"/>
+                    </a:lnB>
+                    <a:noFill/>
+                  </a:tcPr>
+                </a:tc>
+                <a:tc>
+                  <a:txBody>
+                    <a:bodyPr/>
+                    <a:lstStyle/>
+                    <a:p>
+                      <a:pPr algn="ctr"/>
+                      <a:r>
+                        <a:rPr sz="1800" dirty="0"/>
+                        <a:t>15</a:t>
+                      </a:r>
+                    </a:p>
+                  </a:txBody>
+                  <a:tcPr anchor="ctr">
+                    <a:lnL w="12700" cap="flat" cmpd="sng" algn="ctr">
+                      <a:solidFill>
+                        <a:schemeClr val="tx1"/>
+                      </a:solidFill>
+                      <a:prstDash val="solid"/>
+                      <a:round/>
+                      <a:headEnd type="none" w="med" len="med"/>
+                      <a:tailEnd type="none" w="med" len="med"/>
+                    </a:lnL>
+                    <a:lnR w="12700" cap="flat" cmpd="sng" algn="ctr">
+                      <a:solidFill>
+                        <a:schemeClr val="tx1"/>
+                      </a:solidFill>
+                      <a:prstDash val="solid"/>
+                      <a:round/>
+                      <a:headEnd type="none" w="med" len="med"/>
+                      <a:tailEnd type="none" w="med" len="med"/>
+                    </a:lnR>
+                    <a:lnT w="12700" cap="flat" cmpd="sng" algn="ctr">
+                      <a:solidFill>
+                        <a:schemeClr val="tx1"/>
+                      </a:solidFill>
+                      <a:prstDash val="solid"/>
+                      <a:round/>
+                      <a:headEnd type="none" w="med" len="med"/>
+                      <a:tailEnd type="none" w="med" len="med"/>
+                    </a:lnT>
+                    <a:lnB w="12700" cap="flat" cmpd="sng" algn="ctr">
+                      <a:solidFill>
+                        <a:schemeClr val="tx1"/>
+                      </a:solidFill>
+                      <a:prstDash val="solid"/>
+                      <a:round/>
+                      <a:headEnd type="none" w="med" len="med"/>
+                      <a:tailEnd type="none" w="med" len="med"/>
+                    </a:lnB>
+                    <a:noFill/>
+                  </a:tcPr>
+                </a:tc>
+                <a:extLst>
+                  <a:ext uri="{0D108BD9-81ED-4DB2-BD59-A6C34878D82A}">
+                    <a16:rowId xmlns:a16="http://schemas.microsoft.com/office/drawing/2014/main" val="10002"/>
+                  </a:ext>
+                </a:extLst>
+              </a:tr>
+              <a:tr h="457200">
+                <a:tc>
+                  <a:txBody>
+                    <a:bodyPr/>
+                    <a:lstStyle/>
+                    <a:p>
+                      <a:pPr algn="ctr"/>
+                      <a:r>
+                        <a:rPr sz="1800" dirty="0"/>
+                        <a:t>정렬 순서</a:t>
+                      </a:r>
+                    </a:p>
+                  </a:txBody>
+                  <a:tcPr anchor="ctr">
+                    <a:lnL w="12700" cap="flat" cmpd="sng" algn="ctr">
+                      <a:solidFill>
+                        <a:schemeClr val="tx1"/>
+                      </a:solidFill>
+                      <a:prstDash val="solid"/>
+                      <a:round/>
+                      <a:headEnd type="none" w="med" len="med"/>
+                      <a:tailEnd type="none" w="med" len="med"/>
+                    </a:lnL>
+                    <a:lnR w="12700" cap="flat" cmpd="sng" algn="ctr">
+                      <a:solidFill>
+                        <a:schemeClr val="tx1"/>
+                      </a:solidFill>
+                      <a:prstDash val="solid"/>
+                      <a:round/>
+                      <a:headEnd type="none" w="med" len="med"/>
+                      <a:tailEnd type="none" w="med" len="med"/>
+                    </a:lnR>
+                    <a:lnT w="12700" cap="flat" cmpd="sng" algn="ctr">
+                      <a:solidFill>
+                        <a:schemeClr val="tx1"/>
+                      </a:solidFill>
+                      <a:prstDash val="solid"/>
+                      <a:round/>
+                      <a:headEnd type="none" w="med" len="med"/>
+                      <a:tailEnd type="none" w="med" len="med"/>
+                    </a:lnT>
+                    <a:lnB w="12700" cap="flat" cmpd="sng" algn="ctr">
+                      <a:solidFill>
+                        <a:schemeClr val="tx1"/>
+                      </a:solidFill>
+                      <a:prstDash val="solid"/>
+                      <a:round/>
+                      <a:headEnd type="none" w="med" len="med"/>
+                      <a:tailEnd type="none" w="med" len="med"/>
+                    </a:lnB>
+                    <a:noFill/>
+                  </a:tcPr>
+                </a:tc>
+                <a:tc>
+                  <a:txBody>
+                    <a:bodyPr/>
+                    <a:lstStyle/>
+                    <a:p>
+                      <a:pPr algn="ctr"/>
+                      <a:r>
+                        <a:rPr sz="1800" dirty="0"/>
+                        <a:t>1</a:t>
+                      </a:r>
+                    </a:p>
+                  </a:txBody>
+                  <a:tcPr anchor="ctr">
+                    <a:lnL w="12700" cap="flat" cmpd="sng" algn="ctr">
+                      <a:solidFill>
+                        <a:schemeClr val="tx1"/>
+                      </a:solidFill>
+                      <a:prstDash val="solid"/>
+                      <a:round/>
+                      <a:headEnd type="none" w="med" len="med"/>
+                      <a:tailEnd type="none" w="med" len="med"/>
+                    </a:lnL>
+                    <a:lnR w="12700" cap="flat" cmpd="sng" algn="ctr">
+                      <a:solidFill>
+                        <a:schemeClr val="tx1"/>
+                      </a:solidFill>
+                      <a:prstDash val="solid"/>
+                      <a:round/>
+                      <a:headEnd type="none" w="med" len="med"/>
+                      <a:tailEnd type="none" w="med" len="med"/>
+                    </a:lnR>
+                    <a:lnT w="12700" cap="flat" cmpd="sng" algn="ctr">
+                      <a:solidFill>
+                        <a:schemeClr val="tx1"/>
+                      </a:solidFill>
+                      <a:prstDash val="solid"/>
+                      <a:round/>
+                      <a:headEnd type="none" w="med" len="med"/>
+                      <a:tailEnd type="none" w="med" len="med"/>
+                    </a:lnT>
+                    <a:lnB w="12700" cap="flat" cmpd="sng" algn="ctr">
+                      <a:solidFill>
+                        <a:schemeClr val="tx1"/>
+                      </a:solidFill>
+                      <a:prstDash val="solid"/>
+                      <a:round/>
+                      <a:headEnd type="none" w="med" len="med"/>
+                      <a:tailEnd type="none" w="med" len="med"/>
+                    </a:lnB>
+                    <a:noFill/>
+                  </a:tcPr>
+                </a:tc>
+                <a:tc>
+                  <a:txBody>
+                    <a:bodyPr/>
+                    <a:lstStyle/>
+                    <a:p>
+                      <a:pPr algn="ctr"/>
+                      <a:r>
+                        <a:rPr sz="1800" dirty="0"/>
+                        <a:t>3</a:t>
+                      </a:r>
+                    </a:p>
+                  </a:txBody>
+                  <a:tcPr anchor="ctr">
+                    <a:lnL w="12700" cap="flat" cmpd="sng" algn="ctr">
+                      <a:solidFill>
+                        <a:schemeClr val="tx1"/>
+                      </a:solidFill>
+                      <a:prstDash val="solid"/>
+                      <a:round/>
+                      <a:headEnd type="none" w="med" len="med"/>
+                      <a:tailEnd type="none" w="med" len="med"/>
+                    </a:lnL>
+                    <a:lnR w="12700" cap="flat" cmpd="sng" algn="ctr">
+                      <a:solidFill>
+                        <a:schemeClr val="tx1"/>
+                      </a:solidFill>
+                      <a:prstDash val="solid"/>
+                      <a:round/>
+                      <a:headEnd type="none" w="med" len="med"/>
+                      <a:tailEnd type="none" w="med" len="med"/>
+                    </a:lnR>
+                    <a:lnT w="12700" cap="flat" cmpd="sng" algn="ctr">
+                      <a:solidFill>
+                        <a:schemeClr val="tx1"/>
+                      </a:solidFill>
+                      <a:prstDash val="solid"/>
+                      <a:round/>
+                      <a:headEnd type="none" w="med" len="med"/>
+                      <a:tailEnd type="none" w="med" len="med"/>
+                    </a:lnT>
+                    <a:lnB w="12700" cap="flat" cmpd="sng" algn="ctr">
+                      <a:solidFill>
+                        <a:schemeClr val="tx1"/>
+                      </a:solidFill>
+                      <a:prstDash val="solid"/>
+                      <a:round/>
+                      <a:headEnd type="none" w="med" len="med"/>
+                      <a:tailEnd type="none" w="med" len="med"/>
+                    </a:lnB>
+                    <a:noFill/>
+                  </a:tcPr>
+                </a:tc>
+                <a:tc>
+                  <a:txBody>
+                    <a:bodyPr/>
+                    <a:lstStyle/>
+                    <a:p>
+                      <a:pPr algn="ctr"/>
+                      <a:r>
+                        <a:rPr sz="1800" dirty="0"/>
+                        <a:t>5</a:t>
+                      </a:r>
+                    </a:p>
+                  </a:txBody>
+                  <a:tcPr anchor="ctr">
+                    <a:lnL w="12700" cap="flat" cmpd="sng" algn="ctr">
+                      <a:solidFill>
+                        <a:schemeClr val="tx1"/>
+                      </a:solidFill>
+                      <a:prstDash val="solid"/>
+                      <a:round/>
+                      <a:headEnd type="none" w="med" len="med"/>
+                      <a:tailEnd type="none" w="med" len="med"/>
+                    </a:lnL>
+                    <a:lnR w="12700" cap="flat" cmpd="sng" algn="ctr">
+                      <a:solidFill>
+                        <a:schemeClr val="tx1"/>
+                      </a:solidFill>
+                      <a:prstDash val="solid"/>
+                      <a:round/>
+                      <a:headEnd type="none" w="med" len="med"/>
+                      <a:tailEnd type="none" w="med" len="med"/>
+                    </a:lnR>
+                    <a:lnT w="12700" cap="flat" cmpd="sng" algn="ctr">
+                      <a:solidFill>
+                        <a:schemeClr val="tx1"/>
+                      </a:solidFill>
+                      <a:prstDash val="solid"/>
+                      <a:round/>
+                      <a:headEnd type="none" w="med" len="med"/>
+                      <a:tailEnd type="none" w="med" len="med"/>
+                    </a:lnT>
+                    <a:lnB w="12700" cap="flat" cmpd="sng" algn="ctr">
+                      <a:solidFill>
+                        <a:schemeClr val="tx1"/>
+                      </a:solidFill>
+                      <a:prstDash val="solid"/>
+                      <a:round/>
+                      <a:headEnd type="none" w="med" len="med"/>
+                      <a:tailEnd type="none" w="med" len="med"/>
+                    </a:lnB>
+                    <a:noFill/>
+                  </a:tcPr>
+                </a:tc>
+                <a:tc>
+                  <a:txBody>
+                    <a:bodyPr/>
+                    <a:lstStyle/>
+                    <a:p>
+                      <a:pPr algn="ctr"/>
+                      <a:r>
+                        <a:rPr sz="1800" dirty="0"/>
+                        <a:t>7</a:t>
+                      </a:r>
+                    </a:p>
+                  </a:txBody>
+                  <a:tcPr anchor="ctr">
+                    <a:lnL w="12700" cap="flat" cmpd="sng" algn="ctr">
+                      <a:solidFill>
+                        <a:schemeClr val="tx1"/>
+                      </a:solidFill>
+                      <a:prstDash val="solid"/>
+                      <a:round/>
+                      <a:headEnd type="none" w="med" len="med"/>
+                      <a:tailEnd type="none" w="med" len="med"/>
+                    </a:lnL>
+                    <a:lnR w="12700" cap="flat" cmpd="sng" algn="ctr">
+                      <a:solidFill>
+                        <a:schemeClr val="tx1"/>
+                      </a:solidFill>
+                      <a:prstDash val="solid"/>
+                      <a:round/>
+                      <a:headEnd type="none" w="med" len="med"/>
+                      <a:tailEnd type="none" w="med" len="med"/>
+                    </a:lnR>
+                    <a:lnT w="12700" cap="flat" cmpd="sng" algn="ctr">
+                      <a:solidFill>
+                        <a:schemeClr val="tx1"/>
+                      </a:solidFill>
+                      <a:prstDash val="solid"/>
+                      <a:round/>
+                      <a:headEnd type="none" w="med" len="med"/>
+                      <a:tailEnd type="none" w="med" len="med"/>
+                    </a:lnT>
+                    <a:lnB w="12700" cap="flat" cmpd="sng" algn="ctr">
+                      <a:solidFill>
+                        <a:schemeClr val="tx1"/>
+                      </a:solidFill>
+                      <a:prstDash val="solid"/>
+                      <a:round/>
+                      <a:headEnd type="none" w="med" len="med"/>
+                      <a:tailEnd type="none" w="med" len="med"/>
+                    </a:lnB>
+                    <a:noFill/>
+                  </a:tcPr>
+                </a:tc>
+                <a:tc>
+                  <a:txBody>
+                    <a:bodyPr/>
+                    <a:lstStyle/>
+                    <a:p>
+                      <a:pPr algn="ctr"/>
+                      <a:r>
+                        <a:rPr sz="1800" dirty="0"/>
+                        <a:t>9</a:t>
+                      </a:r>
+                    </a:p>
+                  </a:txBody>
+                  <a:tcPr anchor="ctr">
+                    <a:lnL w="12700" cap="flat" cmpd="sng" algn="ctr">
+                      <a:solidFill>
+                        <a:schemeClr val="tx1"/>
+                      </a:solidFill>
+                      <a:prstDash val="solid"/>
+                      <a:round/>
+                      <a:headEnd type="none" w="med" len="med"/>
+                      <a:tailEnd type="none" w="med" len="med"/>
+                    </a:lnL>
+                    <a:lnR w="12700" cap="flat" cmpd="sng" algn="ctr">
+                      <a:solidFill>
+                        <a:schemeClr val="tx1"/>
+                      </a:solidFill>
+                      <a:prstDash val="solid"/>
+                      <a:round/>
+                      <a:headEnd type="none" w="med" len="med"/>
+                      <a:tailEnd type="none" w="med" len="med"/>
+                    </a:lnR>
+                    <a:lnT w="12700" cap="flat" cmpd="sng" algn="ctr">
+                      <a:solidFill>
+                        <a:schemeClr val="tx1"/>
+                      </a:solidFill>
+                      <a:prstDash val="solid"/>
+                      <a:round/>
+                      <a:headEnd type="none" w="med" len="med"/>
+                      <a:tailEnd type="none" w="med" len="med"/>
+                    </a:lnT>
+                    <a:lnB w="12700" cap="flat" cmpd="sng" algn="ctr">
+                      <a:solidFill>
+                        <a:schemeClr val="tx1"/>
+                      </a:solidFill>
+                      <a:prstDash val="solid"/>
+                      <a:round/>
+                      <a:headEnd type="none" w="med" len="med"/>
+                      <a:tailEnd type="none" w="med" len="med"/>
+                    </a:lnB>
+                    <a:noFill/>
+                  </a:tcPr>
+                </a:tc>
+                <a:tc>
+                  <a:txBody>
+                    <a:bodyPr/>
+                    <a:lstStyle/>
+                    <a:p>
+                      <a:pPr algn="ctr"/>
+                      <a:r>
+                        <a:rPr sz="1800" dirty="0"/>
+                        <a:t>11</a:t>
+                      </a:r>
+                    </a:p>
+                  </a:txBody>
+                  <a:tcPr anchor="ctr">
+                    <a:lnL w="12700" cap="flat" cmpd="sng" algn="ctr">
+                      <a:solidFill>
+                        <a:schemeClr val="tx1"/>
+                      </a:solidFill>
+                      <a:prstDash val="solid"/>
+                      <a:round/>
+                      <a:headEnd type="none" w="med" len="med"/>
+                      <a:tailEnd type="none" w="med" len="med"/>
+                    </a:lnL>
+                    <a:lnR w="12700" cap="flat" cmpd="sng" algn="ctr">
+                      <a:solidFill>
+                        <a:schemeClr val="tx1"/>
+                      </a:solidFill>
+                      <a:prstDash val="solid"/>
+                      <a:round/>
+                      <a:headEnd type="none" w="med" len="med"/>
+                      <a:tailEnd type="none" w="med" len="med"/>
+                    </a:lnR>
+                    <a:lnT w="12700" cap="flat" cmpd="sng" algn="ctr">
+                      <a:solidFill>
+                        <a:schemeClr val="tx1"/>
+                      </a:solidFill>
+                      <a:prstDash val="solid"/>
+                      <a:round/>
+                      <a:headEnd type="none" w="med" len="med"/>
+                      <a:tailEnd type="none" w="med" len="med"/>
+                    </a:lnT>
+                    <a:lnB w="12700" cap="flat" cmpd="sng" algn="ctr">
+                      <a:solidFill>
+                        <a:schemeClr val="tx1"/>
+                      </a:solidFill>
+                      <a:prstDash val="solid"/>
+                      <a:round/>
+                      <a:headEnd type="none" w="med" len="med"/>
+                      <a:tailEnd type="none" w="med" len="med"/>
+                    </a:lnB>
+                    <a:noFill/>
+                  </a:tcPr>
+                </a:tc>
+                <a:tc>
+                  <a:txBody>
+                    <a:bodyPr/>
+                    <a:lstStyle/>
+                    <a:p>
+                      <a:pPr algn="ctr"/>
+                      <a:r>
+                        <a:rPr sz="1800" dirty="0"/>
+                        <a:t>13</a:t>
+                      </a:r>
+                    </a:p>
+                  </a:txBody>
+                  <a:tcPr anchor="ctr">
+                    <a:lnL w="12700" cap="flat" cmpd="sng" algn="ctr">
+                      <a:solidFill>
+                        <a:schemeClr val="tx1"/>
+                      </a:solidFill>
+                      <a:prstDash val="solid"/>
+                      <a:round/>
+                      <a:headEnd type="none" w="med" len="med"/>
+                      <a:tailEnd type="none" w="med" len="med"/>
+                    </a:lnL>
+                    <a:lnR w="12700" cap="flat" cmpd="sng" algn="ctr">
+                      <a:solidFill>
+                        <a:schemeClr val="tx1"/>
+                      </a:solidFill>
+                      <a:prstDash val="solid"/>
+                      <a:round/>
+                      <a:headEnd type="none" w="med" len="med"/>
+                      <a:tailEnd type="none" w="med" len="med"/>
+                    </a:lnR>
+                    <a:lnT w="12700" cap="flat" cmpd="sng" algn="ctr">
+                      <a:solidFill>
+                        <a:schemeClr val="tx1"/>
+                      </a:solidFill>
+                      <a:prstDash val="solid"/>
+                      <a:round/>
+                      <a:headEnd type="none" w="med" len="med"/>
+                      <a:tailEnd type="none" w="med" len="med"/>
+                    </a:lnT>
+                    <a:lnB w="12700" cap="flat" cmpd="sng" algn="ctr">
+                      <a:solidFill>
+                        <a:schemeClr val="tx1"/>
+                      </a:solidFill>
+                      <a:prstDash val="solid"/>
+                      <a:round/>
+                      <a:headEnd type="none" w="med" len="med"/>
+                      <a:tailEnd type="none" w="med" len="med"/>
+                    </a:lnB>
+                    <a:noFill/>
+                  </a:tcPr>
+                </a:tc>
+                <a:tc>
+                  <a:txBody>
+                    <a:bodyPr/>
+                    <a:lstStyle/>
+                    <a:p>
+                      <a:pPr algn="ctr"/>
+                      <a:r>
+                        <a:rPr sz="1800" dirty="0"/>
+                        <a:t>15</a:t>
+                      </a:r>
+                    </a:p>
+                  </a:txBody>
+                  <a:tcPr anchor="ctr">
+                    <a:lnL w="12700" cap="flat" cmpd="sng" algn="ctr">
+                      <a:solidFill>
+                        <a:schemeClr val="tx1"/>
+                      </a:solidFill>
+                      <a:prstDash val="solid"/>
+                      <a:round/>
+                      <a:headEnd type="none" w="med" len="med"/>
+                      <a:tailEnd type="none" w="med" len="med"/>
+                    </a:lnL>
+                    <a:lnR w="12700" cap="flat" cmpd="sng" algn="ctr">
+                      <a:solidFill>
+                        <a:schemeClr val="tx1"/>
+                      </a:solidFill>
+                      <a:prstDash val="solid"/>
+                      <a:round/>
+                      <a:headEnd type="none" w="med" len="med"/>
+                      <a:tailEnd type="none" w="med" len="med"/>
+                    </a:lnR>
+                    <a:lnT w="12700" cap="flat" cmpd="sng" algn="ctr">
+                      <a:solidFill>
+                        <a:schemeClr val="tx1"/>
+                      </a:solidFill>
+                      <a:prstDash val="solid"/>
+                      <a:round/>
+                      <a:headEnd type="none" w="med" len="med"/>
+                      <a:tailEnd type="none" w="med" len="med"/>
+                    </a:lnT>
+                    <a:lnB w="12700" cap="flat" cmpd="sng" algn="ctr">
+                      <a:solidFill>
+                        <a:schemeClr val="tx1"/>
+                      </a:solidFill>
+                      <a:prstDash val="solid"/>
+                      <a:round/>
+                      <a:headEnd type="none" w="med" len="med"/>
+                      <a:tailEnd type="none" w="med" len="med"/>
+                    </a:lnB>
+                    <a:noFill/>
+                  </a:tcPr>
+                </a:tc>
+                <a:extLst>
+                  <a:ext uri="{0D108BD9-81ED-4DB2-BD59-A6C34878D82A}">
+                    <a16:rowId xmlns:a16="http://schemas.microsoft.com/office/drawing/2014/main" val="10003"/>
+                  </a:ext>
+                </a:extLst>
+              </a:tr>
+            </a:tbl>
+          </a:graphicData>
+        </a:graphic>
+      </p:graphicFrame>
     </p:spTree>
   </p:cSld>
   <p:clrMapOvr>
@@ -14059,8 +17520,25 @@
           <a:p>
             <a:r>
               <a:rPr dirty="0"/>
-              <a:t>서명의 목적: 인증</a:t>
+              <a:t>결과</a:t>
             </a:r>
+            <a:r>
+              <a:rPr lang="en-US" altLang="ko-KR" dirty="0"/>
+              <a:t>:</a:t>
+            </a:r>
+            <a:r>
+              <a:rPr lang="ko-KR" altLang="en-US" dirty="0"/>
+              <a:t> 얼마나 빨라지고</a:t>
+            </a:r>
+            <a:r>
+              <a:rPr lang="en-US" altLang="ko-KR" dirty="0"/>
+              <a:t>,</a:t>
+            </a:r>
+            <a:r>
+              <a:rPr lang="ko-KR" altLang="en-US" dirty="0"/>
+              <a:t> 무엇이 그대로인가</a:t>
+            </a:r>
+            <a:endParaRPr dirty="0"/>
           </a:p>
         </p:txBody>
       </p:sp>
@@ -14081,19 +17559,36 @@
           <a:p>
             <a:r>
               <a:rPr sz="1800" dirty="0"/>
-              <a:t>서명 스킴은 인증(authentication)을 위해 쓰인다</a:t>
+              <a:t>곱셈 비용이 "항 개수의 제곱"에서 "항 개수 × 로그" 수준으로 내려간다</a:t>
             </a:r>
           </a:p>
           <a:p>
             <a:r>
               <a:rPr sz="1800" dirty="0"/>
-              <a:t>데이터 무결성: 허가되지 않은 메시지 변조를 탐지한다</a:t>
+              <a:t>항 256개에서 실측 약 100배 이상 (Dilithium 서명 기준 약 120배), 추가 메모리도 거의 없음</a:t>
             </a:r>
-          </a:p>
-          <a:p>
+            <a:r>
+              <a:rPr lang="en-US" sz="1800" dirty="0"/>
+              <a:t> </a:t>
+            </a:r>
+            <a:br>
+              <a:rPr lang="en-US" sz="1800" dirty="0"/>
+            </a:br>
             <a:r>
               <a:rPr sz="1800" dirty="0"/>
-              <a:t>데이터 출처 인증: 메시지를 보낸 주체의 신원을 검증한다</a:t>
+              <a:t>(제자리 계산)</a:t>
+            </a:r>
+          </a:p>
+          <a:p>
+            <a:r>
+              <a:rPr sz="1800" dirty="0"/>
+              <a:t>NTT는 순수한 구현 최적화 — 계산 값도 안전성 논리도 그대로, 더 빠를 뿐</a:t>
+            </a:r>
+          </a:p>
+          <a:p>
+            <a:r>
+              <a:rPr sz="1800" dirty="0"/>
+              <a:t>Kyber는 소수 조건이 한 끗 부족해 2차식에서 멈추는 변형(NTT²)을 쓰지만 아이디어는 동일</a:t>
             </a:r>
           </a:p>
         </p:txBody>
@@ -14121,6 +17616,36 @@
           </a:p>
         </p:txBody>
       </p:sp>
+      <p:pic>
+        <p:nvPicPr>
+          <p:cNvPr id="7" name="그림 6">
+            <a:extLst>
+              <a:ext uri="{FF2B5EF4-FFF2-40B4-BE49-F238E27FC236}">
+                <a16:creationId xmlns:a16="http://schemas.microsoft.com/office/drawing/2014/main" id="{72AC1AD2-1BC1-31FE-1CB4-3295AFE66DA2}"/>
+              </a:ext>
+            </a:extLst>
+          </p:cNvPr>
+          <p:cNvPicPr>
+            <a:picLocks noChangeAspect="1"/>
+          </p:cNvPicPr>
+          <p:nvPr/>
+        </p:nvPicPr>
+        <p:blipFill>
+          <a:blip r:embed="rId2"/>
+          <a:stretch>
+            <a:fillRect/>
+          </a:stretch>
+        </p:blipFill>
+        <p:spPr>
+          <a:xfrm>
+            <a:off x="3436611" y="4155038"/>
+            <a:ext cx="5318777" cy="1918247"/>
+          </a:xfrm>
+          <a:prstGeom prst="rect">
+            <a:avLst/>
+          </a:prstGeom>
+        </p:spPr>
+      </p:pic>
     </p:spTree>
   </p:cSld>
   <p:clrMapOvr>
@@ -14153,7 +17678,7 @@
             <a:spLocks noGrp="1"/>
           </p:cNvSpPr>
           <p:nvPr>
-            <p:ph type="title"/>
+            <p:ph type="ctrTitle"/>
           </p:nvPr>
         </p:nvSpPr>
         <p:spPr/>
@@ -14163,35 +17688,7 @@
           <a:p>
             <a:r>
               <a:rPr dirty="0"/>
-              <a:t>서명 스킴의 세 알고리즘</a:t>
-            </a:r>
-          </a:p>
-        </p:txBody>
-      </p:sp>
-      <p:sp>
-        <p:nvSpPr>
-          <p:cNvPr id="3" name="Content Placeholder 2"/>
-          <p:cNvSpPr>
-            <a:spLocks noGrp="1"/>
-          </p:cNvSpPr>
-          <p:nvPr>
-            <p:ph idx="1"/>
-          </p:nvPr>
-        </p:nvSpPr>
-        <p:spPr/>
-        <p:txBody>
-          <a:bodyPr/>
-          <a:lstStyle/>
-          <a:p>
-            <a:r>
-              <a:rPr sz="1800" dirty="0"/>
-              <a:t>서명 스킴은 세 개의 알고리즘으로 구성된다</a:t>
-            </a:r>
-          </a:p>
-          <a:p>
-            <a:r>
-              <a:rPr sz="1800" dirty="0"/>
-              <a:t>검증은 검증자가 Alice의 진짜 공개키를 가진다고 전제한다 (공개키 진위는 PKI의 몫)</a:t>
+              <a:t>Introduction to Hash-Based Signatures</a:t>
             </a:r>
           </a:p>
         </p:txBody>
@@ -14219,727 +17716,6 @@
           </a:p>
         </p:txBody>
       </p:sp>
-      <p:graphicFrame>
-        <p:nvGraphicFramePr>
-          <p:cNvPr id="5" name="Table 4"/>
-          <p:cNvGraphicFramePr>
-            <a:graphicFrameLocks noGrp="1"/>
-          </p:cNvGraphicFramePr>
-          <p:nvPr>
-            <p:extLst>
-              <p:ext uri="{D42A27DB-BD31-4B8C-83A1-F6EECF244321}">
-                <p14:modId xmlns:p14="http://schemas.microsoft.com/office/powerpoint/2010/main" val="2348586584"/>
-              </p:ext>
-            </p:extLst>
-          </p:nvPr>
-        </p:nvGraphicFramePr>
-        <p:xfrm>
-          <a:off x="838200" y="2685746"/>
-          <a:ext cx="10515600" cy="1920240"/>
-        </p:xfrm>
-        <a:graphic>
-          <a:graphicData uri="http://schemas.openxmlformats.org/drawingml/2006/table">
-            <a:tbl>
-              <a:tblPr firstRow="1" bandRow="1">
-                <a:tableStyleId>{5C22544A-7EE6-4342-B048-85BDC9FD1C3A}</a:tableStyleId>
-              </a:tblPr>
-              <a:tblGrid>
-                <a:gridCol w="2377440">
-                  <a:extLst>
-                    <a:ext uri="{9D8B030D-6E8A-4147-A177-3AD203B41FA5}">
-                      <a16:colId xmlns:a16="http://schemas.microsoft.com/office/drawing/2014/main" val="20000"/>
-                    </a:ext>
-                  </a:extLst>
-                </a:gridCol>
-                <a:gridCol w="3108960">
-                  <a:extLst>
-                    <a:ext uri="{9D8B030D-6E8A-4147-A177-3AD203B41FA5}">
-                      <a16:colId xmlns:a16="http://schemas.microsoft.com/office/drawing/2014/main" val="20001"/>
-                    </a:ext>
-                  </a:extLst>
-                </a:gridCol>
-                <a:gridCol w="5029200">
-                  <a:extLst>
-                    <a:ext uri="{9D8B030D-6E8A-4147-A177-3AD203B41FA5}">
-                      <a16:colId xmlns:a16="http://schemas.microsoft.com/office/drawing/2014/main" val="20002"/>
-                    </a:ext>
-                  </a:extLst>
-                </a:gridCol>
-              </a:tblGrid>
-              <a:tr h="480060">
-                <a:tc>
-                  <a:txBody>
-                    <a:bodyPr/>
-                    <a:lstStyle/>
-                    <a:p>
-                      <a:pPr algn="ctr"/>
-                      <a:r>
-                        <a:rPr sz="1800" b="1" dirty="0">
-                          <a:solidFill>
-                            <a:schemeClr val="bg1"/>
-                          </a:solidFill>
-                        </a:rPr>
-                        <a:t>알고리즘</a:t>
-                      </a:r>
-                    </a:p>
-                  </a:txBody>
-                  <a:tcPr anchor="ctr">
-                    <a:lnL w="12700" cap="flat" cmpd="sng" algn="ctr">
-                      <a:solidFill>
-                        <a:schemeClr val="tx1"/>
-                      </a:solidFill>
-                      <a:prstDash val="solid"/>
-                      <a:round/>
-                      <a:headEnd type="none" w="med" len="med"/>
-                      <a:tailEnd type="none" w="med" len="med"/>
-                    </a:lnL>
-                    <a:lnR w="12700" cap="flat" cmpd="sng" algn="ctr">
-                      <a:solidFill>
-                        <a:schemeClr val="tx1"/>
-                      </a:solidFill>
-                      <a:prstDash val="solid"/>
-                      <a:round/>
-                      <a:headEnd type="none" w="med" len="med"/>
-                      <a:tailEnd type="none" w="med" len="med"/>
-                    </a:lnR>
-                    <a:lnT w="12700" cap="flat" cmpd="sng" algn="ctr">
-                      <a:solidFill>
-                        <a:schemeClr val="tx1"/>
-                      </a:solidFill>
-                      <a:prstDash val="solid"/>
-                      <a:round/>
-                      <a:headEnd type="none" w="med" len="med"/>
-                      <a:tailEnd type="none" w="med" len="med"/>
-                    </a:lnT>
-                    <a:lnB w="12700" cap="flat" cmpd="sng" algn="ctr">
-                      <a:solidFill>
-                        <a:schemeClr val="tx1"/>
-                      </a:solidFill>
-                      <a:prstDash val="solid"/>
-                      <a:round/>
-                      <a:headEnd type="none" w="med" len="med"/>
-                      <a:tailEnd type="none" w="med" len="med"/>
-                    </a:lnB>
-                    <a:solidFill>
-                      <a:schemeClr val="accent2"/>
-                    </a:solidFill>
-                  </a:tcPr>
-                </a:tc>
-                <a:tc>
-                  <a:txBody>
-                    <a:bodyPr/>
-                    <a:lstStyle/>
-                    <a:p>
-                      <a:pPr algn="ctr"/>
-                      <a:r>
-                        <a:rPr sz="1800" b="1" dirty="0">
-                          <a:solidFill>
-                            <a:schemeClr val="bg1"/>
-                          </a:solidFill>
-                        </a:rPr>
-                        <a:t>사용하는 키</a:t>
-                      </a:r>
-                    </a:p>
-                  </a:txBody>
-                  <a:tcPr anchor="ctr">
-                    <a:lnL w="12700" cap="flat" cmpd="sng" algn="ctr">
-                      <a:solidFill>
-                        <a:schemeClr val="tx1"/>
-                      </a:solidFill>
-                      <a:prstDash val="solid"/>
-                      <a:round/>
-                      <a:headEnd type="none" w="med" len="med"/>
-                      <a:tailEnd type="none" w="med" len="med"/>
-                    </a:lnL>
-                    <a:lnR w="12700" cap="flat" cmpd="sng" algn="ctr">
-                      <a:solidFill>
-                        <a:schemeClr val="tx1"/>
-                      </a:solidFill>
-                      <a:prstDash val="solid"/>
-                      <a:round/>
-                      <a:headEnd type="none" w="med" len="med"/>
-                      <a:tailEnd type="none" w="med" len="med"/>
-                    </a:lnR>
-                    <a:lnT w="12700" cap="flat" cmpd="sng" algn="ctr">
-                      <a:solidFill>
-                        <a:schemeClr val="tx1"/>
-                      </a:solidFill>
-                      <a:prstDash val="solid"/>
-                      <a:round/>
-                      <a:headEnd type="none" w="med" len="med"/>
-                      <a:tailEnd type="none" w="med" len="med"/>
-                    </a:lnT>
-                    <a:lnB w="12700" cap="flat" cmpd="sng" algn="ctr">
-                      <a:solidFill>
-                        <a:schemeClr val="tx1"/>
-                      </a:solidFill>
-                      <a:prstDash val="solid"/>
-                      <a:round/>
-                      <a:headEnd type="none" w="med" len="med"/>
-                      <a:tailEnd type="none" w="med" len="med"/>
-                    </a:lnB>
-                    <a:solidFill>
-                      <a:schemeClr val="accent2"/>
-                    </a:solidFill>
-                  </a:tcPr>
-                </a:tc>
-                <a:tc>
-                  <a:txBody>
-                    <a:bodyPr/>
-                    <a:lstStyle/>
-                    <a:p>
-                      <a:pPr algn="ctr"/>
-                      <a:r>
-                        <a:rPr sz="1800" b="1" dirty="0">
-                          <a:solidFill>
-                            <a:schemeClr val="bg1"/>
-                          </a:solidFill>
-                        </a:rPr>
-                        <a:t>하는 일</a:t>
-                      </a:r>
-                    </a:p>
-                  </a:txBody>
-                  <a:tcPr anchor="ctr">
-                    <a:lnL w="12700" cap="flat" cmpd="sng" algn="ctr">
-                      <a:solidFill>
-                        <a:schemeClr val="tx1"/>
-                      </a:solidFill>
-                      <a:prstDash val="solid"/>
-                      <a:round/>
-                      <a:headEnd type="none" w="med" len="med"/>
-                      <a:tailEnd type="none" w="med" len="med"/>
-                    </a:lnL>
-                    <a:lnR w="12700" cap="flat" cmpd="sng" algn="ctr">
-                      <a:solidFill>
-                        <a:schemeClr val="tx1"/>
-                      </a:solidFill>
-                      <a:prstDash val="solid"/>
-                      <a:round/>
-                      <a:headEnd type="none" w="med" len="med"/>
-                      <a:tailEnd type="none" w="med" len="med"/>
-                    </a:lnR>
-                    <a:lnT w="12700" cap="flat" cmpd="sng" algn="ctr">
-                      <a:solidFill>
-                        <a:schemeClr val="tx1"/>
-                      </a:solidFill>
-                      <a:prstDash val="solid"/>
-                      <a:round/>
-                      <a:headEnd type="none" w="med" len="med"/>
-                      <a:tailEnd type="none" w="med" len="med"/>
-                    </a:lnT>
-                    <a:lnB w="12700" cap="flat" cmpd="sng" algn="ctr">
-                      <a:solidFill>
-                        <a:schemeClr val="tx1"/>
-                      </a:solidFill>
-                      <a:prstDash val="solid"/>
-                      <a:round/>
-                      <a:headEnd type="none" w="med" len="med"/>
-                      <a:tailEnd type="none" w="med" len="med"/>
-                    </a:lnB>
-                    <a:solidFill>
-                      <a:schemeClr val="accent2"/>
-                    </a:solidFill>
-                  </a:tcPr>
-                </a:tc>
-                <a:extLst>
-                  <a:ext uri="{0D108BD9-81ED-4DB2-BD59-A6C34878D82A}">
-                    <a16:rowId xmlns:a16="http://schemas.microsoft.com/office/drawing/2014/main" val="10000"/>
-                  </a:ext>
-                </a:extLst>
-              </a:tr>
-              <a:tr h="480060">
-                <a:tc>
-                  <a:txBody>
-                    <a:bodyPr/>
-                    <a:lstStyle/>
-                    <a:p>
-                      <a:pPr algn="ctr"/>
-                      <a:r>
-                        <a:rPr sz="1800" dirty="0"/>
-                        <a:t>키 생성</a:t>
-                      </a:r>
-                    </a:p>
-                  </a:txBody>
-                  <a:tcPr anchor="ctr">
-                    <a:lnL w="12700" cap="flat" cmpd="sng" algn="ctr">
-                      <a:solidFill>
-                        <a:schemeClr val="tx1"/>
-                      </a:solidFill>
-                      <a:prstDash val="solid"/>
-                      <a:round/>
-                      <a:headEnd type="none" w="med" len="med"/>
-                      <a:tailEnd type="none" w="med" len="med"/>
-                    </a:lnL>
-                    <a:lnR w="12700" cap="flat" cmpd="sng" algn="ctr">
-                      <a:solidFill>
-                        <a:schemeClr val="tx1"/>
-                      </a:solidFill>
-                      <a:prstDash val="solid"/>
-                      <a:round/>
-                      <a:headEnd type="none" w="med" len="med"/>
-                      <a:tailEnd type="none" w="med" len="med"/>
-                    </a:lnR>
-                    <a:lnT w="12700" cap="flat" cmpd="sng" algn="ctr">
-                      <a:solidFill>
-                        <a:schemeClr val="tx1"/>
-                      </a:solidFill>
-                      <a:prstDash val="solid"/>
-                      <a:round/>
-                      <a:headEnd type="none" w="med" len="med"/>
-                      <a:tailEnd type="none" w="med" len="med"/>
-                    </a:lnT>
-                    <a:lnB w="12700" cap="flat" cmpd="sng" algn="ctr">
-                      <a:solidFill>
-                        <a:schemeClr val="tx1"/>
-                      </a:solidFill>
-                      <a:prstDash val="solid"/>
-                      <a:round/>
-                      <a:headEnd type="none" w="med" len="med"/>
-                      <a:tailEnd type="none" w="med" len="med"/>
-                    </a:lnB>
-                    <a:noFill/>
-                  </a:tcPr>
-                </a:tc>
-                <a:tc>
-                  <a:txBody>
-                    <a:bodyPr/>
-                    <a:lstStyle/>
-                    <a:p>
-                      <a:pPr algn="ctr"/>
-                      <a:r>
-                        <a:rPr sz="1800" dirty="0"/>
-                        <a:t>—</a:t>
-                      </a:r>
-                    </a:p>
-                  </a:txBody>
-                  <a:tcPr anchor="ctr">
-                    <a:lnL w="12700" cap="flat" cmpd="sng" algn="ctr">
-                      <a:solidFill>
-                        <a:schemeClr val="tx1"/>
-                      </a:solidFill>
-                      <a:prstDash val="solid"/>
-                      <a:round/>
-                      <a:headEnd type="none" w="med" len="med"/>
-                      <a:tailEnd type="none" w="med" len="med"/>
-                    </a:lnL>
-                    <a:lnR w="12700" cap="flat" cmpd="sng" algn="ctr">
-                      <a:solidFill>
-                        <a:schemeClr val="tx1"/>
-                      </a:solidFill>
-                      <a:prstDash val="solid"/>
-                      <a:round/>
-                      <a:headEnd type="none" w="med" len="med"/>
-                      <a:tailEnd type="none" w="med" len="med"/>
-                    </a:lnR>
-                    <a:lnT w="12700" cap="flat" cmpd="sng" algn="ctr">
-                      <a:solidFill>
-                        <a:schemeClr val="tx1"/>
-                      </a:solidFill>
-                      <a:prstDash val="solid"/>
-                      <a:round/>
-                      <a:headEnd type="none" w="med" len="med"/>
-                      <a:tailEnd type="none" w="med" len="med"/>
-                    </a:lnT>
-                    <a:lnB w="12700" cap="flat" cmpd="sng" algn="ctr">
-                      <a:solidFill>
-                        <a:schemeClr val="tx1"/>
-                      </a:solidFill>
-                      <a:prstDash val="solid"/>
-                      <a:round/>
-                      <a:headEnd type="none" w="med" len="med"/>
-                      <a:tailEnd type="none" w="med" len="med"/>
-                    </a:lnB>
-                    <a:noFill/>
-                  </a:tcPr>
-                </a:tc>
-                <a:tc>
-                  <a:txBody>
-                    <a:bodyPr/>
-                    <a:lstStyle/>
-                    <a:p>
-                      <a:pPr algn="ctr"/>
-                      <a:r>
-                        <a:rPr sz="1800" dirty="0"/>
-                        <a:t>공개키·개인키 쌍을 만든다</a:t>
-                      </a:r>
-                    </a:p>
-                  </a:txBody>
-                  <a:tcPr anchor="ctr">
-                    <a:lnL w="12700" cap="flat" cmpd="sng" algn="ctr">
-                      <a:solidFill>
-                        <a:schemeClr val="tx1"/>
-                      </a:solidFill>
-                      <a:prstDash val="solid"/>
-                      <a:round/>
-                      <a:headEnd type="none" w="med" len="med"/>
-                      <a:tailEnd type="none" w="med" len="med"/>
-                    </a:lnL>
-                    <a:lnR w="12700" cap="flat" cmpd="sng" algn="ctr">
-                      <a:solidFill>
-                        <a:schemeClr val="tx1"/>
-                      </a:solidFill>
-                      <a:prstDash val="solid"/>
-                      <a:round/>
-                      <a:headEnd type="none" w="med" len="med"/>
-                      <a:tailEnd type="none" w="med" len="med"/>
-                    </a:lnR>
-                    <a:lnT w="12700" cap="flat" cmpd="sng" algn="ctr">
-                      <a:solidFill>
-                        <a:schemeClr val="tx1"/>
-                      </a:solidFill>
-                      <a:prstDash val="solid"/>
-                      <a:round/>
-                      <a:headEnd type="none" w="med" len="med"/>
-                      <a:tailEnd type="none" w="med" len="med"/>
-                    </a:lnT>
-                    <a:lnB w="12700" cap="flat" cmpd="sng" algn="ctr">
-                      <a:solidFill>
-                        <a:schemeClr val="tx1"/>
-                      </a:solidFill>
-                      <a:prstDash val="solid"/>
-                      <a:round/>
-                      <a:headEnd type="none" w="med" len="med"/>
-                      <a:tailEnd type="none" w="med" len="med"/>
-                    </a:lnB>
-                    <a:noFill/>
-                  </a:tcPr>
-                </a:tc>
-                <a:extLst>
-                  <a:ext uri="{0D108BD9-81ED-4DB2-BD59-A6C34878D82A}">
-                    <a16:rowId xmlns:a16="http://schemas.microsoft.com/office/drawing/2014/main" val="10001"/>
-                  </a:ext>
-                </a:extLst>
-              </a:tr>
-              <a:tr h="480060">
-                <a:tc>
-                  <a:txBody>
-                    <a:bodyPr/>
-                    <a:lstStyle/>
-                    <a:p>
-                      <a:pPr algn="ctr"/>
-                      <a:r>
-                        <a:rPr sz="1800" dirty="0"/>
-                        <a:t>서명 생성</a:t>
-                      </a:r>
-                    </a:p>
-                  </a:txBody>
-                  <a:tcPr anchor="ctr">
-                    <a:lnL w="12700" cap="flat" cmpd="sng" algn="ctr">
-                      <a:solidFill>
-                        <a:schemeClr val="tx1"/>
-                      </a:solidFill>
-                      <a:prstDash val="solid"/>
-                      <a:round/>
-                      <a:headEnd type="none" w="med" len="med"/>
-                      <a:tailEnd type="none" w="med" len="med"/>
-                    </a:lnL>
-                    <a:lnR w="12700" cap="flat" cmpd="sng" algn="ctr">
-                      <a:solidFill>
-                        <a:schemeClr val="tx1"/>
-                      </a:solidFill>
-                      <a:prstDash val="solid"/>
-                      <a:round/>
-                      <a:headEnd type="none" w="med" len="med"/>
-                      <a:tailEnd type="none" w="med" len="med"/>
-                    </a:lnR>
-                    <a:lnT w="12700" cap="flat" cmpd="sng" algn="ctr">
-                      <a:solidFill>
-                        <a:schemeClr val="tx1"/>
-                      </a:solidFill>
-                      <a:prstDash val="solid"/>
-                      <a:round/>
-                      <a:headEnd type="none" w="med" len="med"/>
-                      <a:tailEnd type="none" w="med" len="med"/>
-                    </a:lnT>
-                    <a:lnB w="12700" cap="flat" cmpd="sng" algn="ctr">
-                      <a:solidFill>
-                        <a:schemeClr val="tx1"/>
-                      </a:solidFill>
-                      <a:prstDash val="solid"/>
-                      <a:round/>
-                      <a:headEnd type="none" w="med" len="med"/>
-                      <a:tailEnd type="none" w="med" len="med"/>
-                    </a:lnB>
-                    <a:noFill/>
-                  </a:tcPr>
-                </a:tc>
-                <a:tc>
-                  <a:txBody>
-                    <a:bodyPr/>
-                    <a:lstStyle/>
-                    <a:p>
-                      <a:pPr algn="ctr"/>
-                      <a:r>
-                        <a:rPr sz="1800" dirty="0"/>
-                        <a:t>개인키 (서명 키)</a:t>
-                      </a:r>
-                    </a:p>
-                  </a:txBody>
-                  <a:tcPr anchor="ctr">
-                    <a:lnL w="12700" cap="flat" cmpd="sng" algn="ctr">
-                      <a:solidFill>
-                        <a:schemeClr val="tx1"/>
-                      </a:solidFill>
-                      <a:prstDash val="solid"/>
-                      <a:round/>
-                      <a:headEnd type="none" w="med" len="med"/>
-                      <a:tailEnd type="none" w="med" len="med"/>
-                    </a:lnL>
-                    <a:lnR w="12700" cap="flat" cmpd="sng" algn="ctr">
-                      <a:solidFill>
-                        <a:schemeClr val="tx1"/>
-                      </a:solidFill>
-                      <a:prstDash val="solid"/>
-                      <a:round/>
-                      <a:headEnd type="none" w="med" len="med"/>
-                      <a:tailEnd type="none" w="med" len="med"/>
-                    </a:lnR>
-                    <a:lnT w="12700" cap="flat" cmpd="sng" algn="ctr">
-                      <a:solidFill>
-                        <a:schemeClr val="tx1"/>
-                      </a:solidFill>
-                      <a:prstDash val="solid"/>
-                      <a:round/>
-                      <a:headEnd type="none" w="med" len="med"/>
-                      <a:tailEnd type="none" w="med" len="med"/>
-                    </a:lnT>
-                    <a:lnB w="12700" cap="flat" cmpd="sng" algn="ctr">
-                      <a:solidFill>
-                        <a:schemeClr val="tx1"/>
-                      </a:solidFill>
-                      <a:prstDash val="solid"/>
-                      <a:round/>
-                      <a:headEnd type="none" w="med" len="med"/>
-                      <a:tailEnd type="none" w="med" len="med"/>
-                    </a:lnB>
-                    <a:noFill/>
-                  </a:tcPr>
-                </a:tc>
-                <a:tc>
-                  <a:txBody>
-                    <a:bodyPr/>
-                    <a:lstStyle/>
-                    <a:p>
-                      <a:pPr algn="ctr"/>
-                      <a:r>
-                        <a:rPr sz="1800" dirty="0"/>
-                        <a:t>메시지에 대한 서명을 만든다</a:t>
-                      </a:r>
-                    </a:p>
-                  </a:txBody>
-                  <a:tcPr anchor="ctr">
-                    <a:lnL w="12700" cap="flat" cmpd="sng" algn="ctr">
-                      <a:solidFill>
-                        <a:schemeClr val="tx1"/>
-                      </a:solidFill>
-                      <a:prstDash val="solid"/>
-                      <a:round/>
-                      <a:headEnd type="none" w="med" len="med"/>
-                      <a:tailEnd type="none" w="med" len="med"/>
-                    </a:lnL>
-                    <a:lnR w="12700" cap="flat" cmpd="sng" algn="ctr">
-                      <a:solidFill>
-                        <a:schemeClr val="tx1"/>
-                      </a:solidFill>
-                      <a:prstDash val="solid"/>
-                      <a:round/>
-                      <a:headEnd type="none" w="med" len="med"/>
-                      <a:tailEnd type="none" w="med" len="med"/>
-                    </a:lnR>
-                    <a:lnT w="12700" cap="flat" cmpd="sng" algn="ctr">
-                      <a:solidFill>
-                        <a:schemeClr val="tx1"/>
-                      </a:solidFill>
-                      <a:prstDash val="solid"/>
-                      <a:round/>
-                      <a:headEnd type="none" w="med" len="med"/>
-                      <a:tailEnd type="none" w="med" len="med"/>
-                    </a:lnT>
-                    <a:lnB w="12700" cap="flat" cmpd="sng" algn="ctr">
-                      <a:solidFill>
-                        <a:schemeClr val="tx1"/>
-                      </a:solidFill>
-                      <a:prstDash val="solid"/>
-                      <a:round/>
-                      <a:headEnd type="none" w="med" len="med"/>
-                      <a:tailEnd type="none" w="med" len="med"/>
-                    </a:lnB>
-                    <a:noFill/>
-                  </a:tcPr>
-                </a:tc>
-                <a:extLst>
-                  <a:ext uri="{0D108BD9-81ED-4DB2-BD59-A6C34878D82A}">
-                    <a16:rowId xmlns:a16="http://schemas.microsoft.com/office/drawing/2014/main" val="10002"/>
-                  </a:ext>
-                </a:extLst>
-              </a:tr>
-              <a:tr h="480060">
-                <a:tc>
-                  <a:txBody>
-                    <a:bodyPr/>
-                    <a:lstStyle/>
-                    <a:p>
-                      <a:pPr algn="ctr"/>
-                      <a:r>
-                        <a:rPr sz="1800" dirty="0"/>
-                        <a:t>서명 검증</a:t>
-                      </a:r>
-                    </a:p>
-                  </a:txBody>
-                  <a:tcPr anchor="ctr">
-                    <a:lnL w="12700" cap="flat" cmpd="sng" algn="ctr">
-                      <a:solidFill>
-                        <a:schemeClr val="tx1"/>
-                      </a:solidFill>
-                      <a:prstDash val="solid"/>
-                      <a:round/>
-                      <a:headEnd type="none" w="med" len="med"/>
-                      <a:tailEnd type="none" w="med" len="med"/>
-                    </a:lnL>
-                    <a:lnR w="12700" cap="flat" cmpd="sng" algn="ctr">
-                      <a:solidFill>
-                        <a:schemeClr val="tx1"/>
-                      </a:solidFill>
-                      <a:prstDash val="solid"/>
-                      <a:round/>
-                      <a:headEnd type="none" w="med" len="med"/>
-                      <a:tailEnd type="none" w="med" len="med"/>
-                    </a:lnR>
-                    <a:lnT w="12700" cap="flat" cmpd="sng" algn="ctr">
-                      <a:solidFill>
-                        <a:schemeClr val="tx1"/>
-                      </a:solidFill>
-                      <a:prstDash val="solid"/>
-                      <a:round/>
-                      <a:headEnd type="none" w="med" len="med"/>
-                      <a:tailEnd type="none" w="med" len="med"/>
-                    </a:lnT>
-                    <a:lnB w="12700" cap="flat" cmpd="sng" algn="ctr">
-                      <a:solidFill>
-                        <a:schemeClr val="tx1"/>
-                      </a:solidFill>
-                      <a:prstDash val="solid"/>
-                      <a:round/>
-                      <a:headEnd type="none" w="med" len="med"/>
-                      <a:tailEnd type="none" w="med" len="med"/>
-                    </a:lnB>
-                    <a:noFill/>
-                  </a:tcPr>
-                </a:tc>
-                <a:tc>
-                  <a:txBody>
-                    <a:bodyPr/>
-                    <a:lstStyle/>
-                    <a:p>
-                      <a:pPr algn="ctr"/>
-                      <a:r>
-                        <a:rPr sz="1800" dirty="0"/>
-                        <a:t>공개키 (검증 키)</a:t>
-                      </a:r>
-                    </a:p>
-                  </a:txBody>
-                  <a:tcPr anchor="ctr">
-                    <a:lnL w="12700" cap="flat" cmpd="sng" algn="ctr">
-                      <a:solidFill>
-                        <a:schemeClr val="tx1"/>
-                      </a:solidFill>
-                      <a:prstDash val="solid"/>
-                      <a:round/>
-                      <a:headEnd type="none" w="med" len="med"/>
-                      <a:tailEnd type="none" w="med" len="med"/>
-                    </a:lnL>
-                    <a:lnR w="12700" cap="flat" cmpd="sng" algn="ctr">
-                      <a:solidFill>
-                        <a:schemeClr val="tx1"/>
-                      </a:solidFill>
-                      <a:prstDash val="solid"/>
-                      <a:round/>
-                      <a:headEnd type="none" w="med" len="med"/>
-                      <a:tailEnd type="none" w="med" len="med"/>
-                    </a:lnR>
-                    <a:lnT w="12700" cap="flat" cmpd="sng" algn="ctr">
-                      <a:solidFill>
-                        <a:schemeClr val="tx1"/>
-                      </a:solidFill>
-                      <a:prstDash val="solid"/>
-                      <a:round/>
-                      <a:headEnd type="none" w="med" len="med"/>
-                      <a:tailEnd type="none" w="med" len="med"/>
-                    </a:lnT>
-                    <a:lnB w="12700" cap="flat" cmpd="sng" algn="ctr">
-                      <a:solidFill>
-                        <a:schemeClr val="tx1"/>
-                      </a:solidFill>
-                      <a:prstDash val="solid"/>
-                      <a:round/>
-                      <a:headEnd type="none" w="med" len="med"/>
-                      <a:tailEnd type="none" w="med" len="med"/>
-                    </a:lnB>
-                    <a:noFill/>
-                  </a:tcPr>
-                </a:tc>
-                <a:tc>
-                  <a:txBody>
-                    <a:bodyPr/>
-                    <a:lstStyle/>
-                    <a:p>
-                      <a:pPr algn="ctr"/>
-                      <a:r>
-                        <a:rPr sz="1800" dirty="0"/>
-                        <a:t>서명된 메시지가 진짜인지 판정한다</a:t>
-                      </a:r>
-                    </a:p>
-                  </a:txBody>
-                  <a:tcPr anchor="ctr">
-                    <a:lnL w="12700" cap="flat" cmpd="sng" algn="ctr">
-                      <a:solidFill>
-                        <a:schemeClr val="tx1"/>
-                      </a:solidFill>
-                      <a:prstDash val="solid"/>
-                      <a:round/>
-                      <a:headEnd type="none" w="med" len="med"/>
-                      <a:tailEnd type="none" w="med" len="med"/>
-                    </a:lnL>
-                    <a:lnR w="12700" cap="flat" cmpd="sng" algn="ctr">
-                      <a:solidFill>
-                        <a:schemeClr val="tx1"/>
-                      </a:solidFill>
-                      <a:prstDash val="solid"/>
-                      <a:round/>
-                      <a:headEnd type="none" w="med" len="med"/>
-                      <a:tailEnd type="none" w="med" len="med"/>
-                    </a:lnR>
-                    <a:lnT w="12700" cap="flat" cmpd="sng" algn="ctr">
-                      <a:solidFill>
-                        <a:schemeClr val="tx1"/>
-                      </a:solidFill>
-                      <a:prstDash val="solid"/>
-                      <a:round/>
-                      <a:headEnd type="none" w="med" len="med"/>
-                      <a:tailEnd type="none" w="med" len="med"/>
-                    </a:lnT>
-                    <a:lnB w="12700" cap="flat" cmpd="sng" algn="ctr">
-                      <a:solidFill>
-                        <a:schemeClr val="tx1"/>
-                      </a:solidFill>
-                      <a:prstDash val="solid"/>
-                      <a:round/>
-                      <a:headEnd type="none" w="med" len="med"/>
-                      <a:tailEnd type="none" w="med" len="med"/>
-                    </a:lnB>
-                    <a:noFill/>
-                  </a:tcPr>
-                </a:tc>
-                <a:extLst>
-                  <a:ext uri="{0D108BD9-81ED-4DB2-BD59-A6C34878D82A}">
-                    <a16:rowId xmlns:a16="http://schemas.microsoft.com/office/drawing/2014/main" val="10003"/>
-                  </a:ext>
-                </a:extLst>
-              </a:tr>
-            </a:tbl>
-          </a:graphicData>
-        </a:graphic>
-      </p:graphicFrame>
     </p:spTree>
   </p:cSld>
   <p:clrMapOvr>

--- a/presentation/0903_14_Introduction-to-Hash-Based-Signatures.pptx
+++ b/presentation/0903_14_Introduction-to-Hash-Based-Signatures.pptx
@@ -14563,26 +14563,75 @@
           <a:p>
             <a:r>
               <a:rPr sz="1800" dirty="0"/>
-              <a:t>다항식을 "계수 목록" 대신 "여러 점에서의 함숫값 목록"으로 본다 — 두 표현은 서로 오갈 수 있다</a:t>
+              <a:t>차수 ≤ 3 다항식 a(x) = a</a:t>
             </a:r>
-            <a:br>
-              <a:rPr lang="en-US" sz="1800" dirty="0"/>
-            </a:br>
+            <a:r>
+              <a:rPr sz="1800" baseline="-25000" dirty="0"/>
+              <a:t>0</a:t>
+            </a:r>
             <a:r>
               <a:rPr sz="1800" dirty="0"/>
-              <a:t>(평가 ↔ 보간)</a:t>
+              <a:t> + a</a:t>
             </a:r>
-          </a:p>
-          <a:p>
+            <a:r>
+              <a:rPr sz="1800" baseline="-25000" dirty="0"/>
+              <a:t>1</a:t>
+            </a:r>
             <a:r>
               <a:rPr sz="1800" dirty="0"/>
-              <a:t>함숫값 표현에서 곱셈은 같은 위치끼리의 곱(점별 곱) → 제곱이 아니라 항 개수에 비례</a:t>
+              <a:t> x + a</a:t>
             </a:r>
-          </a:p>
-          <a:p>
+            <a:r>
+              <a:rPr sz="1800" baseline="-25000" dirty="0"/>
+              <a:t>2</a:t>
+            </a:r>
             <a:r>
               <a:rPr sz="1800" dirty="0"/>
-              <a:t>복소수 FFT를 "소수로 나눈 나머지" 위에서 한 것 → 이름이 "수론적 변환"</a:t>
+              <a:t> x</a:t>
+            </a:r>
+            <a:r>
+              <a:rPr sz="1800" baseline="30000" dirty="0"/>
+              <a:t>2</a:t>
+            </a:r>
+            <a:r>
+              <a:rPr sz="1800" dirty="0"/>
+              <a:t> + a</a:t>
+            </a:r>
+            <a:r>
+              <a:rPr sz="1800" baseline="-25000" dirty="0"/>
+              <a:t>3</a:t>
+            </a:r>
+            <a:r>
+              <a:rPr sz="1800" dirty="0"/>
+              <a:t> x</a:t>
+            </a:r>
+            <a:r>
+              <a:rPr sz="1800" baseline="30000" dirty="0"/>
+              <a:t>3</a:t>
+            </a:r>
+            <a:r>
+              <a:rPr sz="1800" dirty="0"/>
+              <a:t> 을 보는 두 방식 — "계수 목록" 또는 "서로 다른 4개 점에서의 함숫값 목록"</a:t>
+            </a:r>
+          </a:p>
+          <a:p>
+            <a:r>
+              <a:rPr sz="1800" dirty="0"/>
+              <a:t>차수 ≤ 3 다항식은 서로 다른 4개 점의 값이면 유일하게 복원된다 → 두 표현은 정보량이 같고, 평가 ↔ 보간으로 자유롭게 오간다</a:t>
+            </a:r>
+          </a:p>
+          <a:p>
+            <a:r>
+              <a:rPr sz="1800" dirty="0"/>
+              <a:t>값 표현에서는 곱셈이 같은 위치의 값끼리의 곱(점별 곱) → O(n</a:t>
+            </a:r>
+            <a:r>
+              <a:rPr sz="1800" baseline="30000" dirty="0"/>
+              <a:t>2</a:t>
+            </a:r>
+            <a:r>
+              <a:rPr sz="1800" dirty="0"/>
+              <a:t>)이 아니라 O(n)</a:t>
             </a:r>
           </a:p>
         </p:txBody>
@@ -14619,14 +14668,14 @@
           <p:nvPr>
             <p:extLst>
               <p:ext uri="{D42A27DB-BD31-4B8C-83A1-F6EECF244321}">
-                <p14:modId xmlns:p14="http://schemas.microsoft.com/office/powerpoint/2010/main" val="1629459383"/>
+                <p14:modId xmlns:p14="http://schemas.microsoft.com/office/powerpoint/2010/main" val="2710925536"/>
               </p:ext>
             </p:extLst>
           </p:nvPr>
         </p:nvGraphicFramePr>
         <p:xfrm>
-          <a:off x="841248" y="3645866"/>
-          <a:ext cx="10512552" cy="1463040"/>
+          <a:off x="838200" y="3947238"/>
+          <a:ext cx="10512552" cy="1615440"/>
         </p:xfrm>
         <a:graphic>
           <a:graphicData uri="http://schemas.openxmlformats.org/drawingml/2006/table">
@@ -14728,7 +14777,7 @@
                             <a:schemeClr val="bg1"/>
                           </a:solidFill>
                         </a:rPr>
-                        <a:t>담고 있는 것</a:t>
+                        <a:t>데이터</a:t>
                       </a:r>
                     </a:p>
                   </a:txBody>
@@ -14899,7 +14948,39 @@
                       <a:pPr algn="ctr"/>
                       <a:r>
                         <a:rPr sz="1800" dirty="0"/>
-                        <a:t>계수 n개</a:t>
+                        <a:t>(a</a:t>
+                      </a:r>
+                      <a:r>
+                        <a:rPr sz="1800" baseline="-25000" dirty="0"/>
+                        <a:t>0</a:t>
+                      </a:r>
+                      <a:r>
+                        <a:rPr sz="1800" dirty="0"/>
+                        <a:t>, a</a:t>
+                      </a:r>
+                      <a:r>
+                        <a:rPr sz="1800" baseline="-25000" dirty="0"/>
+                        <a:t>1</a:t>
+                      </a:r>
+                      <a:r>
+                        <a:rPr sz="1800" dirty="0"/>
+                        <a:t>, a</a:t>
+                      </a:r>
+                      <a:r>
+                        <a:rPr sz="1800" baseline="-25000" dirty="0"/>
+                        <a:t>2</a:t>
+                      </a:r>
+                      <a:r>
+                        <a:rPr sz="1800" dirty="0"/>
+                        <a:t>, a</a:t>
+                      </a:r>
+                      <a:r>
+                        <a:rPr sz="1800" baseline="-25000" dirty="0"/>
+                        <a:t>3</a:t>
+                      </a:r>
+                      <a:r>
+                        <a:rPr sz="1800" dirty="0"/>
+                        <a:t>)</a:t>
                       </a:r>
                     </a:p>
                   </a:txBody>
@@ -14951,7 +15032,15 @@
                       <a:pPr algn="ctr"/>
                       <a:r>
                         <a:rPr sz="1800" dirty="0"/>
-                        <a:t>항 개수의 제곱</a:t>
+                        <a:t>비쌈 — 모든 항 × 모든 항, O(n</a:t>
+                      </a:r>
+                      <a:r>
+                        <a:rPr sz="1800" baseline="30000" dirty="0"/>
+                        <a:t>2</a:t>
+                      </a:r>
+                      <a:r>
+                        <a:rPr sz="1800" dirty="0"/>
+                        <a:t>)</a:t>
                       </a:r>
                     </a:p>
                   </a:txBody>
@@ -15010,7 +15099,7 @@
                       <a:pPr algn="ctr"/>
                       <a:r>
                         <a:rPr sz="1800" dirty="0"/>
-                        <a:t>함숫값 표현</a:t>
+                        <a:t>값 표현</a:t>
                       </a:r>
                     </a:p>
                   </a:txBody>
@@ -15062,7 +15151,39 @@
                       <a:pPr algn="ctr"/>
                       <a:r>
                         <a:rPr sz="1800" dirty="0"/>
-                        <a:t>여러 점에서의 함숫값 n개</a:t>
+                        <a:t>4개 점에서의 함숫값 (a(p</a:t>
+                      </a:r>
+                      <a:r>
+                        <a:rPr sz="1800" baseline="-25000" dirty="0"/>
+                        <a:t>1</a:t>
+                      </a:r>
+                      <a:r>
+                        <a:rPr sz="1800" dirty="0"/>
+                        <a:t>), a(p</a:t>
+                      </a:r>
+                      <a:r>
+                        <a:rPr sz="1800" baseline="-25000" dirty="0"/>
+                        <a:t>2</a:t>
+                      </a:r>
+                      <a:r>
+                        <a:rPr sz="1800" dirty="0"/>
+                        <a:t>), a(p</a:t>
+                      </a:r>
+                      <a:r>
+                        <a:rPr sz="1800" baseline="-25000" dirty="0"/>
+                        <a:t>3</a:t>
+                      </a:r>
+                      <a:r>
+                        <a:rPr sz="1800" dirty="0"/>
+                        <a:t>), a(p</a:t>
+                      </a:r>
+                      <a:r>
+                        <a:rPr sz="1800" baseline="-25000" dirty="0"/>
+                        <a:t>4</a:t>
+                      </a:r>
+                      <a:r>
+                        <a:rPr sz="1800" dirty="0"/>
+                        <a:t>))</a:t>
                       </a:r>
                     </a:p>
                   </a:txBody>
@@ -15114,7 +15235,7 @@
                       <a:pPr algn="ctr"/>
                       <a:r>
                         <a:rPr sz="1800" dirty="0"/>
-                        <a:t>항 개수에 비례 (점별 곱)</a:t>
+                        <a:t>쌈 — 같은 위치끼리 곱, O(n)</a:t>
                       </a:r>
                     </a:p>
                   </a:txBody>

--- a/presentation/0903_14_Introduction-to-Hash-Based-Signatures.pptx
+++ b/presentation/0903_14_Introduction-to-Hash-Based-Signatures.pptx
@@ -14668,7 +14668,7 @@
           <p:nvPr>
             <p:extLst>
               <p:ext uri="{D42A27DB-BD31-4B8C-83A1-F6EECF244321}">
-                <p14:modId xmlns:p14="http://schemas.microsoft.com/office/powerpoint/2010/main" val="2710925536"/>
+                <p14:modId xmlns:p14="http://schemas.microsoft.com/office/powerpoint/2010/main" val="4101062300"/>
               </p:ext>
             </p:extLst>
           </p:nvPr>
@@ -15151,7 +15151,14 @@
                       <a:pPr algn="ctr"/>
                       <a:r>
                         <a:rPr sz="1800" dirty="0"/>
-                        <a:t>4개 점에서의 함숫값 (a(p</a:t>
+                        <a:t>4개 점에서의 함숫값</a:t>
+                      </a:r>
+                      <a:br>
+                        <a:rPr lang="en-US" sz="1800" dirty="0"/>
+                      </a:br>
+                      <a:r>
+                        <a:rPr sz="1800" dirty="0"/>
+                        <a:t>(a(p</a:t>
                       </a:r>
                       <a:r>
                         <a:rPr sz="1800" baseline="-25000" dirty="0"/>
